--- a/slides/CSC336-Lecture-10-Responsive-Design-and-Frameworks.pptx
+++ b/slides/CSC336-Lecture-10-Responsive-Design-and-Frameworks.pptx
@@ -4898,13 +4898,14 @@
         </p:nvPicPr>
         <p:blipFill>
           <a:blip r:embed="rId1"/>
-          <a:srcRect l="0" r="0" t="0" b="0"/>
-          <a:stretch/>
+          <a:stretch>
+            <a:fillRect/>
+          </a:stretch>
         </p:blipFill>
         <p:spPr>
           <a:xfrm>
-            <a:off x="640080" y="2423160"/>
-            <a:ext cx="5272888" cy="3611880"/>
+            <a:off x="640080" y="2725129"/>
+            <a:ext cx="5272888" cy="3007943"/>
           </a:xfrm>
           <a:prstGeom prst="rect">
             <a:avLst/>
@@ -4994,13 +4995,14 @@
         </p:nvPicPr>
         <p:blipFill>
           <a:blip r:embed="rId2"/>
-          <a:srcRect l="0" r="0" t="0" b="0"/>
-          <a:stretch/>
+          <a:stretch>
+            <a:fillRect/>
+          </a:stretch>
         </p:blipFill>
         <p:spPr>
           <a:xfrm>
-            <a:off x="6278728" y="2423160"/>
-            <a:ext cx="5272888" cy="3611880"/>
+            <a:off x="6278728" y="2942428"/>
+            <a:ext cx="5272888" cy="2573345"/>
           </a:xfrm>
           <a:prstGeom prst="rect">
             <a:avLst/>
@@ -6120,13 +6122,14 @@
         </p:nvPicPr>
         <p:blipFill>
           <a:blip r:embed="rId1"/>
-          <a:srcRect l="0" r="0" t="0" b="0"/>
-          <a:stretch/>
+          <a:stretch>
+            <a:fillRect/>
+          </a:stretch>
         </p:blipFill>
         <p:spPr>
           <a:xfrm>
-            <a:off x="640080" y="2423160"/>
-            <a:ext cx="5272888" cy="3611880"/>
+            <a:off x="640080" y="3945093"/>
+            <a:ext cx="5272888" cy="568014"/>
           </a:xfrm>
           <a:prstGeom prst="rect">
             <a:avLst/>
@@ -6216,13 +6219,14 @@
         </p:nvPicPr>
         <p:blipFill>
           <a:blip r:embed="rId2"/>
-          <a:srcRect l="0" r="0" t="0" b="0"/>
-          <a:stretch/>
+          <a:stretch>
+            <a:fillRect/>
+          </a:stretch>
         </p:blipFill>
         <p:spPr>
           <a:xfrm>
-            <a:off x="6278728" y="2423160"/>
-            <a:ext cx="5272888" cy="3611880"/>
+            <a:off x="6278728" y="3550603"/>
+            <a:ext cx="5272888" cy="1356993"/>
           </a:xfrm>
           <a:prstGeom prst="rect">
             <a:avLst/>
@@ -6500,13 +6504,14 @@
         </p:nvPicPr>
         <p:blipFill>
           <a:blip r:embed="rId1"/>
-          <a:srcRect l="0" r="0" t="0" b="0"/>
-          <a:stretch/>
+          <a:stretch>
+            <a:fillRect/>
+          </a:stretch>
         </p:blipFill>
         <p:spPr>
           <a:xfrm>
-            <a:off x="640080" y="2331720"/>
-            <a:ext cx="10911535" cy="3840480"/>
+            <a:off x="3173218" y="2331720"/>
+            <a:ext cx="5845259" cy="3840480"/>
           </a:xfrm>
           <a:prstGeom prst="rect">
             <a:avLst/>
@@ -6784,13 +6789,14 @@
         </p:nvPicPr>
         <p:blipFill>
           <a:blip r:embed="rId1"/>
-          <a:srcRect l="0" r="0" t="0" b="0"/>
-          <a:stretch/>
+          <a:stretch>
+            <a:fillRect/>
+          </a:stretch>
         </p:blipFill>
         <p:spPr>
           <a:xfrm>
-            <a:off x="640080" y="2331720"/>
-            <a:ext cx="10911535" cy="3840480"/>
+            <a:off x="640080" y="3467226"/>
+            <a:ext cx="10911535" cy="1569467"/>
           </a:xfrm>
           <a:prstGeom prst="rect">
             <a:avLst/>
@@ -7341,13 +7347,14 @@
         </p:nvPicPr>
         <p:blipFill>
           <a:blip r:embed="rId1"/>
-          <a:srcRect l="0" r="0" t="0" b="0"/>
-          <a:stretch/>
+          <a:stretch>
+            <a:fillRect/>
+          </a:stretch>
         </p:blipFill>
         <p:spPr>
           <a:xfrm>
-            <a:off x="640080" y="2057400"/>
-            <a:ext cx="10911535" cy="4114800"/>
+            <a:off x="3626968" y="3048000"/>
+            <a:ext cx="4937760" cy="2133600"/>
           </a:xfrm>
           <a:prstGeom prst="rect">
             <a:avLst/>
@@ -8693,13 +8700,14 @@
         </p:nvPicPr>
         <p:blipFill>
           <a:blip r:embed="rId1"/>
-          <a:srcRect l="0" r="0" t="0" b="0"/>
-          <a:stretch/>
+          <a:stretch>
+            <a:fillRect/>
+          </a:stretch>
         </p:blipFill>
         <p:spPr>
           <a:xfrm>
-            <a:off x="640080" y="2423160"/>
-            <a:ext cx="5272888" cy="3611880"/>
+            <a:off x="640080" y="4021435"/>
+            <a:ext cx="5272888" cy="415330"/>
           </a:xfrm>
           <a:prstGeom prst="rect">
             <a:avLst/>
@@ -8789,13 +8797,14 @@
         </p:nvPicPr>
         <p:blipFill>
           <a:blip r:embed="rId2"/>
-          <a:srcRect l="0" r="0" t="0" b="0"/>
-          <a:stretch/>
+          <a:stretch>
+            <a:fillRect/>
+          </a:stretch>
         </p:blipFill>
         <p:spPr>
           <a:xfrm>
-            <a:off x="6278728" y="2423160"/>
-            <a:ext cx="5272888" cy="3611880"/>
+            <a:off x="6278728" y="2930851"/>
+            <a:ext cx="5272888" cy="2596498"/>
           </a:xfrm>
           <a:prstGeom prst="rect">
             <a:avLst/>
@@ -9073,13 +9082,14 @@
         </p:nvPicPr>
         <p:blipFill>
           <a:blip r:embed="rId1"/>
-          <a:srcRect l="0" r="0" t="0" b="0"/>
-          <a:stretch/>
+          <a:stretch>
+            <a:fillRect/>
+          </a:stretch>
         </p:blipFill>
         <p:spPr>
           <a:xfrm>
-            <a:off x="640080" y="2423160"/>
-            <a:ext cx="5272888" cy="3611880"/>
+            <a:off x="640080" y="3925272"/>
+            <a:ext cx="5272888" cy="607656"/>
           </a:xfrm>
           <a:prstGeom prst="rect">
             <a:avLst/>
@@ -9169,13 +9179,14 @@
         </p:nvPicPr>
         <p:blipFill>
           <a:blip r:embed="rId2"/>
-          <a:srcRect l="0" r="0" t="0" b="0"/>
-          <a:stretch/>
+          <a:stretch>
+            <a:fillRect/>
+          </a:stretch>
         </p:blipFill>
         <p:spPr>
           <a:xfrm>
-            <a:off x="6278728" y="2423160"/>
-            <a:ext cx="5272888" cy="3611880"/>
+            <a:off x="6278728" y="3675225"/>
+            <a:ext cx="5272888" cy="1107749"/>
           </a:xfrm>
           <a:prstGeom prst="rect">
             <a:avLst/>
@@ -9695,13 +9706,14 @@
         </p:nvPicPr>
         <p:blipFill>
           <a:blip r:embed="rId1"/>
-          <a:srcRect l="0" r="0" t="0" b="0"/>
-          <a:stretch/>
+          <a:stretch>
+            <a:fillRect/>
+          </a:stretch>
         </p:blipFill>
         <p:spPr>
           <a:xfrm>
-            <a:off x="640080" y="2057400"/>
-            <a:ext cx="10911535" cy="4114800"/>
+            <a:off x="3726028" y="3169920"/>
+            <a:ext cx="4739640" cy="1889760"/>
           </a:xfrm>
           <a:prstGeom prst="rect">
             <a:avLst/>
@@ -10221,13 +10233,14 @@
         </p:nvPicPr>
         <p:blipFill>
           <a:blip r:embed="rId1"/>
-          <a:srcRect l="0" r="0" t="0" b="0"/>
-          <a:stretch/>
+          <a:stretch>
+            <a:fillRect/>
+          </a:stretch>
         </p:blipFill>
         <p:spPr>
           <a:xfrm>
-            <a:off x="640080" y="2057400"/>
-            <a:ext cx="10911535" cy="4114800"/>
+            <a:off x="4830928" y="3322320"/>
+            <a:ext cx="2529840" cy="1584960"/>
           </a:xfrm>
           <a:prstGeom prst="rect">
             <a:avLst/>
@@ -13255,13 +13268,14 @@
         </p:nvPicPr>
         <p:blipFill>
           <a:blip r:embed="rId1"/>
-          <a:srcRect l="0" r="0" t="0" b="0"/>
-          <a:stretch/>
+          <a:stretch>
+            <a:fillRect/>
+          </a:stretch>
         </p:blipFill>
         <p:spPr>
           <a:xfrm>
-            <a:off x="640080" y="2423160"/>
-            <a:ext cx="5272888" cy="3611880"/>
+            <a:off x="640080" y="3178579"/>
+            <a:ext cx="5272888" cy="2101043"/>
           </a:xfrm>
           <a:prstGeom prst="rect">
             <a:avLst/>
@@ -13351,13 +13365,14 @@
         </p:nvPicPr>
         <p:blipFill>
           <a:blip r:embed="rId2"/>
-          <a:srcRect l="0" r="0" t="0" b="0"/>
-          <a:stretch/>
+          <a:stretch>
+            <a:fillRect/>
+          </a:stretch>
         </p:blipFill>
         <p:spPr>
           <a:xfrm>
-            <a:off x="6278728" y="2423160"/>
-            <a:ext cx="5272888" cy="3611880"/>
+            <a:off x="6962804" y="2423160"/>
+            <a:ext cx="3904735" cy="3611880"/>
           </a:xfrm>
           <a:prstGeom prst="rect">
             <a:avLst/>
@@ -13956,13 +13971,14 @@
         </p:nvPicPr>
         <p:blipFill>
           <a:blip r:embed="rId1"/>
-          <a:srcRect l="0" r="0" t="0" b="0"/>
-          <a:stretch/>
+          <a:stretch>
+            <a:fillRect/>
+          </a:stretch>
         </p:blipFill>
         <p:spPr>
           <a:xfrm>
-            <a:off x="640080" y="2423160"/>
-            <a:ext cx="5272888" cy="3611880"/>
+            <a:off x="640080" y="4021687"/>
+            <a:ext cx="5272888" cy="414825"/>
           </a:xfrm>
           <a:prstGeom prst="rect">
             <a:avLst/>
@@ -14052,13 +14068,14 @@
         </p:nvPicPr>
         <p:blipFill>
           <a:blip r:embed="rId2"/>
-          <a:srcRect l="0" r="0" t="0" b="0"/>
-          <a:stretch/>
+          <a:stretch>
+            <a:fillRect/>
+          </a:stretch>
         </p:blipFill>
         <p:spPr>
           <a:xfrm>
-            <a:off x="6278728" y="2423160"/>
-            <a:ext cx="5272888" cy="3611880"/>
+            <a:off x="6278728" y="2910878"/>
+            <a:ext cx="5272888" cy="2636444"/>
           </a:xfrm>
           <a:prstGeom prst="rect">
             <a:avLst/>

--- a/slides/CSC336-Lecture-10-Responsive-Design-and-Frameworks.pptx
+++ b/slides/CSC336-Lecture-10-Responsive-Design-and-Frameworks.pptx
@@ -32,9 +32,11 @@
     <p:sldId id="280" r:id="rId26"/>
     <p:sldId id="281" r:id="rId27"/>
     <p:sldId id="282" r:id="rId28"/>
+    <p:sldId id="283" r:id="rId29"/>
+    <p:sldId id="284" r:id="rId30"/>
   </p:sldIdLst>
   <p:notesMasterIdLst>
-    <p:notesMasterId r:id="rId29"/>
+    <p:notesMasterId r:id="rId31"/>
   </p:notesMasterIdLst>
   <p:sldSz cx="12192000" cy="6858000"/>
   <p:notesSz cx="6858000" cy="12192000"/>
@@ -2224,6 +2226,182 @@
             <a:fld id="{F7021451-1387-4CA6-816F-3879F97B5CBC}" type="slidenum">
               <a:rPr lang="en-US"/>
               <a:t>27</a:t>
+            </a:fld>
+            <a:endParaRPr lang="en-US"/>
+          </a:p>
+        </p:txBody>
+      </p:sp>
+    </p:spTree>
+    <p:extLst>
+      <p:ext uri="{BB962C8B-B14F-4D97-AF65-F5344CB8AC3E}">
+        <p14:creationId xmlns:p14="http://schemas.microsoft.com/office/powerpoint/2010/main" val="1024086991"/>
+      </p:ext>
+    </p:extLst>
+  </p:cSld>
+  <p:clrMapOvr>
+    <a:masterClrMapping/>
+  </p:clrMapOvr>
+</p:notes>
+</file>
+
+<file path=ppt/notesSlides/notesSlide28.xml><?xml version="1.0" encoding="utf-8"?>
+<p:notes xmlns:a="http://schemas.openxmlformats.org/drawingml/2006/main" xmlns:r="http://schemas.openxmlformats.org/officeDocument/2006/relationships" xmlns:p="http://schemas.openxmlformats.org/presentationml/2006/main">
+  <p:cSld>
+    <p:spTree>
+      <p:nvGrpSpPr>
+        <p:cNvPr id="1" name=""/>
+        <p:cNvGrpSpPr/>
+        <p:nvPr/>
+      </p:nvGrpSpPr>
+      <p:grpSpPr>
+        <a:xfrm>
+          <a:off x="0" y="0"/>
+          <a:ext cx="0" cy="0"/>
+          <a:chOff x="0" y="0"/>
+          <a:chExt cx="0" cy="0"/>
+        </a:xfrm>
+      </p:grpSpPr>
+      <p:sp>
+        <p:nvSpPr>
+          <p:cNvPr id="2" name="Slide Image Placeholder 1"/>
+          <p:cNvSpPr>
+            <a:spLocks noGrp="1" noRot="1" noChangeAspect="1"/>
+          </p:cNvSpPr>
+          <p:nvPr>
+            <p:ph type="sldImg"/>
+          </p:nvPr>
+        </p:nvSpPr>
+        <p:spPr/>
+      </p:sp>
+      <p:sp>
+        <p:nvSpPr>
+          <p:cNvPr id="3" name="Notes Placeholder 2"/>
+          <p:cNvSpPr>
+            <a:spLocks noGrp="1"/>
+          </p:cNvSpPr>
+          <p:nvPr>
+            <p:ph type="body" idx="1"/>
+          </p:nvPr>
+        </p:nvSpPr>
+        <p:spPr/>
+        <p:txBody>
+          <a:bodyPr/>
+          <a:lstStyle/>
+          <a:p>
+            <a:r>
+              <a:rPr lang="en-US" dirty="0"/>
+              <a:t/>
+            </a:r>
+            <a:endParaRPr lang="en-US" dirty="0"/>
+          </a:p>
+        </p:txBody>
+      </p:sp>
+      <p:sp>
+        <p:nvSpPr>
+          <p:cNvPr id="4" name="Slide Number Placeholder 3"/>
+          <p:cNvSpPr>
+            <a:spLocks noGrp="1"/>
+          </p:cNvSpPr>
+          <p:nvPr>
+            <p:ph type="sldNum" sz="quarter" idx="10"/>
+          </p:nvPr>
+        </p:nvSpPr>
+        <p:spPr/>
+        <p:txBody>
+          <a:bodyPr/>
+          <a:lstStyle/>
+          <a:p>
+            <a:fld id="{F7021451-1387-4CA6-816F-3879F97B5CBC}" type="slidenum">
+              <a:rPr lang="en-US"/>
+              <a:t>28</a:t>
+            </a:fld>
+            <a:endParaRPr lang="en-US"/>
+          </a:p>
+        </p:txBody>
+      </p:sp>
+    </p:spTree>
+    <p:extLst>
+      <p:ext uri="{BB962C8B-B14F-4D97-AF65-F5344CB8AC3E}">
+        <p14:creationId xmlns:p14="http://schemas.microsoft.com/office/powerpoint/2010/main" val="1024086991"/>
+      </p:ext>
+    </p:extLst>
+  </p:cSld>
+  <p:clrMapOvr>
+    <a:masterClrMapping/>
+  </p:clrMapOvr>
+</p:notes>
+</file>
+
+<file path=ppt/notesSlides/notesSlide29.xml><?xml version="1.0" encoding="utf-8"?>
+<p:notes xmlns:a="http://schemas.openxmlformats.org/drawingml/2006/main" xmlns:r="http://schemas.openxmlformats.org/officeDocument/2006/relationships" xmlns:p="http://schemas.openxmlformats.org/presentationml/2006/main">
+  <p:cSld>
+    <p:spTree>
+      <p:nvGrpSpPr>
+        <p:cNvPr id="1" name=""/>
+        <p:cNvGrpSpPr/>
+        <p:nvPr/>
+      </p:nvGrpSpPr>
+      <p:grpSpPr>
+        <a:xfrm>
+          <a:off x="0" y="0"/>
+          <a:ext cx="0" cy="0"/>
+          <a:chOff x="0" y="0"/>
+          <a:chExt cx="0" cy="0"/>
+        </a:xfrm>
+      </p:grpSpPr>
+      <p:sp>
+        <p:nvSpPr>
+          <p:cNvPr id="2" name="Slide Image Placeholder 1"/>
+          <p:cNvSpPr>
+            <a:spLocks noGrp="1" noRot="1" noChangeAspect="1"/>
+          </p:cNvSpPr>
+          <p:nvPr>
+            <p:ph type="sldImg"/>
+          </p:nvPr>
+        </p:nvSpPr>
+        <p:spPr/>
+      </p:sp>
+      <p:sp>
+        <p:nvSpPr>
+          <p:cNvPr id="3" name="Notes Placeholder 2"/>
+          <p:cNvSpPr>
+            <a:spLocks noGrp="1"/>
+          </p:cNvSpPr>
+          <p:nvPr>
+            <p:ph type="body" idx="1"/>
+          </p:nvPr>
+        </p:nvSpPr>
+        <p:spPr/>
+        <p:txBody>
+          <a:bodyPr/>
+          <a:lstStyle/>
+          <a:p>
+            <a:r>
+              <a:rPr lang="en-US" dirty="0"/>
+              <a:t/>
+            </a:r>
+            <a:endParaRPr lang="en-US" dirty="0"/>
+          </a:p>
+        </p:txBody>
+      </p:sp>
+      <p:sp>
+        <p:nvSpPr>
+          <p:cNvPr id="4" name="Slide Number Placeholder 3"/>
+          <p:cNvSpPr>
+            <a:spLocks noGrp="1"/>
+          </p:cNvSpPr>
+          <p:nvPr>
+            <p:ph type="sldNum" sz="quarter" idx="10"/>
+          </p:nvPr>
+        </p:nvSpPr>
+        <p:spPr/>
+        <p:txBody>
+          <a:bodyPr/>
+          <a:lstStyle/>
+          <a:p>
+            <a:fld id="{F7021451-1387-4CA6-816F-3879F97B5CBC}" type="slidenum">
+              <a:rPr lang="en-US"/>
+              <a:t>29</a:t>
             </a:fld>
             <a:endParaRPr lang="en-US"/>
           </a:p>
@@ -3511,7 +3689,7 @@
                 <a:ea typeface="Calibri" pitchFamily="34" charset="-122"/>
                 <a:cs typeface="Calibri" pitchFamily="34" charset="-120"/>
               </a:rPr>
-              <a:t>MEDIA QUERY SYNTAX</a:t>
+              <a:t>MEDIA QUERIES</a:t>
             </a:r>
             <a:endParaRPr lang="en-US" sz="1300" dirty="0"/>
           </a:p>
@@ -3550,6 +3728,388 @@
                 <a:ea typeface="Cambria" pitchFamily="34" charset="-122"/>
                 <a:cs typeface="Cambria" pitchFamily="34" charset="-120"/>
               </a:rPr>
+              <a:t>Three Cards, Two Widths</a:t>
+            </a:r>
+            <a:endParaRPr lang="en-US" sz="3400" dirty="0"/>
+          </a:p>
+        </p:txBody>
+      </p:sp>
+      <p:sp>
+        <p:nvSpPr>
+          <p:cNvPr id="4" name="Text 2"/>
+          <p:cNvSpPr txBox="1"/>
+          <p:nvPr/>
+        </p:nvSpPr>
+        <p:spPr>
+          <a:xfrm>
+            <a:off x="640080" y="1965960"/>
+            <a:ext cx="5272888" cy="365760"/>
+          </a:xfrm>
+          <a:prstGeom prst="rect">
+            <a:avLst/>
+          </a:prstGeom>
+          <a:noFill/>
+          <a:ln/>
+        </p:spPr>
+        <p:txBody>
+          <a:bodyPr wrap="square" lIns="0" tIns="0" rIns="0" bIns="0" rtlCol="0" anchor="ctr"/>
+          <a:lstStyle/>
+          <a:p>
+            <a:pPr algn="ctr" indent="0" marL="0">
+              <a:buNone/>
+            </a:pPr>
+            <a:r>
+              <a:rPr lang="en-US" sz="1100" b="1" spc="150" kern="0" dirty="0">
+                <a:solidFill>
+                  <a:srgbClr val="E67528"/>
+                </a:solidFill>
+                <a:latin typeface="Calibri" pitchFamily="34" charset="0"/>
+                <a:ea typeface="Calibri" pitchFamily="34" charset="-122"/>
+                <a:cs typeface="Calibri" pitchFamily="34" charset="-120"/>
+              </a:rPr>
+              <a:t>WIDE (ROW)</a:t>
+            </a:r>
+            <a:endParaRPr lang="en-US" sz="1100" dirty="0"/>
+          </a:p>
+        </p:txBody>
+      </p:sp>
+      <p:sp>
+        <p:nvSpPr>
+          <p:cNvPr id="5" name="Shape 3"/>
+          <p:cNvSpPr/>
+          <p:nvPr/>
+        </p:nvSpPr>
+        <p:spPr>
+          <a:xfrm>
+            <a:off x="530352" y="2313432"/>
+            <a:ext cx="5492344" cy="3831336"/>
+          </a:xfrm>
+          <a:prstGeom prst="roundRect">
+            <a:avLst>
+              <a:gd name="adj" fmla="val 1432"/>
+            </a:avLst>
+          </a:prstGeom>
+          <a:solidFill>
+            <a:srgbClr val="FFFFFF"/>
+          </a:solidFill>
+          <a:ln w="12700">
+            <a:solidFill>
+              <a:srgbClr val="E2E2EE"/>
+            </a:solidFill>
+            <a:prstDash val="solid"/>
+          </a:ln>
+          <a:effectLst>
+            <a:outerShdw sx="100000" sy="100000" kx="0" ky="0" algn="bl" rotWithShape="0" blurRad="101600" dist="38100" dir="5400000">
+              <a:srgbClr val="000000">
+                <a:alpha val="12000"/>
+              </a:srgbClr>
+            </a:outerShdw>
+          </a:effectLst>
+        </p:spPr>
+      </p:sp>
+      <p:pic>
+        <p:nvPicPr>
+          <p:cNvPr id="6" name="Image 0" descr="D:/GitHub/mern-web-book/docs/assets/img/lecture-10/media-query-wide.png">    </p:cNvPr>
+          <p:cNvPicPr>
+            <a:picLocks noChangeAspect="1"/>
+          </p:cNvPicPr>
+          <p:nvPr/>
+        </p:nvPicPr>
+        <p:blipFill>
+          <a:blip r:embed="rId1"/>
+          <a:stretch>
+            <a:fillRect/>
+          </a:stretch>
+        </p:blipFill>
+        <p:spPr>
+          <a:xfrm>
+            <a:off x="640080" y="4021687"/>
+            <a:ext cx="5272888" cy="414825"/>
+          </a:xfrm>
+          <a:prstGeom prst="rect">
+            <a:avLst/>
+          </a:prstGeom>
+        </p:spPr>
+      </p:pic>
+      <p:sp>
+        <p:nvSpPr>
+          <p:cNvPr id="7" name="Text 4"/>
+          <p:cNvSpPr txBox="1"/>
+          <p:nvPr/>
+        </p:nvSpPr>
+        <p:spPr>
+          <a:xfrm>
+            <a:off x="6278728" y="1965960"/>
+            <a:ext cx="5272888" cy="365760"/>
+          </a:xfrm>
+          <a:prstGeom prst="rect">
+            <a:avLst/>
+          </a:prstGeom>
+          <a:noFill/>
+          <a:ln/>
+        </p:spPr>
+        <p:txBody>
+          <a:bodyPr wrap="square" lIns="0" tIns="0" rIns="0" bIns="0" rtlCol="0" anchor="ctr"/>
+          <a:lstStyle/>
+          <a:p>
+            <a:pPr algn="ctr" indent="0" marL="0">
+              <a:buNone/>
+            </a:pPr>
+            <a:r>
+              <a:rPr lang="en-US" sz="1100" b="1" spc="150" kern="0" dirty="0">
+                <a:solidFill>
+                  <a:srgbClr val="E67528"/>
+                </a:solidFill>
+                <a:latin typeface="Calibri" pitchFamily="34" charset="0"/>
+                <a:ea typeface="Calibri" pitchFamily="34" charset="-122"/>
+                <a:cs typeface="Calibri" pitchFamily="34" charset="-120"/>
+              </a:rPr>
+              <a:t>NARROW (COLUMN)</a:t>
+            </a:r>
+            <a:endParaRPr lang="en-US" sz="1100" dirty="0"/>
+          </a:p>
+        </p:txBody>
+      </p:sp>
+      <p:sp>
+        <p:nvSpPr>
+          <p:cNvPr id="8" name="Shape 5"/>
+          <p:cNvSpPr/>
+          <p:nvPr/>
+        </p:nvSpPr>
+        <p:spPr>
+          <a:xfrm>
+            <a:off x="6169000" y="2313432"/>
+            <a:ext cx="5492344" cy="3831336"/>
+          </a:xfrm>
+          <a:prstGeom prst="roundRect">
+            <a:avLst>
+              <a:gd name="adj" fmla="val 1432"/>
+            </a:avLst>
+          </a:prstGeom>
+          <a:solidFill>
+            <a:srgbClr val="FFFFFF"/>
+          </a:solidFill>
+          <a:ln w="12700">
+            <a:solidFill>
+              <a:srgbClr val="E2E2EE"/>
+            </a:solidFill>
+            <a:prstDash val="solid"/>
+          </a:ln>
+          <a:effectLst>
+            <a:outerShdw sx="100000" sy="100000" kx="0" ky="0" algn="bl" rotWithShape="0" blurRad="101600" dist="38100" dir="5400000">
+              <a:srgbClr val="000000">
+                <a:alpha val="12000"/>
+              </a:srgbClr>
+            </a:outerShdw>
+          </a:effectLst>
+        </p:spPr>
+      </p:sp>
+      <p:pic>
+        <p:nvPicPr>
+          <p:cNvPr id="9" name="Image 1" descr="D:/GitHub/mern-web-book/docs/assets/img/lecture-10/media-query-narrow.png">    </p:cNvPr>
+          <p:cNvPicPr>
+            <a:picLocks noChangeAspect="1"/>
+          </p:cNvPicPr>
+          <p:nvPr/>
+        </p:nvPicPr>
+        <p:blipFill>
+          <a:blip r:embed="rId2"/>
+          <a:stretch>
+            <a:fillRect/>
+          </a:stretch>
+        </p:blipFill>
+        <p:spPr>
+          <a:xfrm>
+            <a:off x="6278728" y="2910878"/>
+            <a:ext cx="5272888" cy="2636444"/>
+          </a:xfrm>
+          <a:prstGeom prst="rect">
+            <a:avLst/>
+          </a:prstGeom>
+        </p:spPr>
+      </p:pic>
+      <p:sp>
+        <p:nvSpPr>
+          <p:cNvPr id="10" name="Text 6"/>
+          <p:cNvSpPr txBox="1"/>
+          <p:nvPr/>
+        </p:nvSpPr>
+        <p:spPr>
+          <a:xfrm>
+            <a:off x="640080" y="6446520"/>
+            <a:ext cx="8686800" cy="292608"/>
+          </a:xfrm>
+          <a:prstGeom prst="rect">
+            <a:avLst/>
+          </a:prstGeom>
+          <a:noFill/>
+          <a:ln/>
+        </p:spPr>
+        <p:txBody>
+          <a:bodyPr wrap="square" lIns="0" tIns="0" rIns="0" bIns="0" rtlCol="0" anchor="ctr"/>
+          <a:lstStyle/>
+          <a:p>
+            <a:pPr algn="l" indent="0" marL="0">
+              <a:buNone/>
+            </a:pPr>
+            <a:r>
+              <a:rPr lang="en-US" sz="900" dirty="0">
+                <a:solidFill>
+                  <a:srgbClr val="5D5D72"/>
+                </a:solidFill>
+                <a:latin typeface="Calibri" pitchFamily="34" charset="0"/>
+                <a:ea typeface="Calibri" pitchFamily="34" charset="-122"/>
+                <a:cs typeface="Calibri" pitchFamily="34" charset="-120"/>
+              </a:rPr>
+              <a:t>Usman Akram  •  COMSATS University Islamabad</a:t>
+            </a:r>
+            <a:endParaRPr lang="en-US" sz="900" dirty="0"/>
+          </a:p>
+        </p:txBody>
+      </p:sp>
+      <p:sp>
+        <p:nvSpPr>
+          <p:cNvPr id="11" name="Text 7"/>
+          <p:cNvSpPr txBox="1"/>
+          <p:nvPr/>
+        </p:nvSpPr>
+        <p:spPr>
+          <a:xfrm>
+            <a:off x="11155680" y="6446520"/>
+            <a:ext cx="457200" cy="292608"/>
+          </a:xfrm>
+          <a:prstGeom prst="rect">
+            <a:avLst/>
+          </a:prstGeom>
+          <a:noFill/>
+          <a:ln/>
+        </p:spPr>
+        <p:txBody>
+          <a:bodyPr wrap="square" lIns="0" tIns="0" rIns="0" bIns="0" rtlCol="0" anchor="ctr"/>
+          <a:lstStyle/>
+          <a:p>
+            <a:pPr algn="r" indent="0" marL="0">
+              <a:buNone/>
+            </a:pPr>
+            <a:r>
+              <a:rPr lang="en-US" sz="900" dirty="0">
+                <a:solidFill>
+                  <a:srgbClr val="5D5D72"/>
+                </a:solidFill>
+                <a:latin typeface="Calibri" pitchFamily="34" charset="0"/>
+                <a:ea typeface="Calibri" pitchFamily="34" charset="-122"/>
+                <a:cs typeface="Calibri" pitchFamily="34" charset="-120"/>
+              </a:rPr>
+              <a:t>10</a:t>
+            </a:r>
+            <a:endParaRPr lang="en-US" sz="900" dirty="0"/>
+          </a:p>
+        </p:txBody>
+      </p:sp>
+    </p:spTree>
+  </p:cSld>
+  <p:clrMapOvr>
+    <a:masterClrMapping/>
+  </p:clrMapOvr>
+</p:sld>
+</file>
+
+<file path=ppt/slides/slide11.xml><?xml version="1.0" encoding="utf-8"?>
+<p:sld xmlns:a="http://schemas.openxmlformats.org/drawingml/2006/main" xmlns:r="http://schemas.openxmlformats.org/officeDocument/2006/relationships" xmlns:p="http://schemas.openxmlformats.org/presentationml/2006/main">
+  <p:cSld name="Slide 11">
+    <p:bg>
+      <p:bgPr>
+        <a:solidFill>
+          <a:srgbClr val="FFFFFF"/>
+        </a:solidFill>
+      </p:bgPr>
+    </p:bg>
+    <p:spTree>
+      <p:nvGrpSpPr>
+        <p:cNvPr id="1" name=""/>
+        <p:cNvGrpSpPr/>
+        <p:nvPr/>
+      </p:nvGrpSpPr>
+      <p:grpSpPr>
+        <a:xfrm>
+          <a:off x="0" y="0"/>
+          <a:ext cx="0" cy="0"/>
+          <a:chOff x="0" y="0"/>
+          <a:chExt cx="0" cy="0"/>
+        </a:xfrm>
+      </p:grpSpPr>
+      <p:sp>
+        <p:nvSpPr>
+          <p:cNvPr id="2" name="Text 0"/>
+          <p:cNvSpPr txBox="1"/>
+          <p:nvPr/>
+        </p:nvSpPr>
+        <p:spPr>
+          <a:xfrm>
+            <a:off x="640080" y="457200"/>
+            <a:ext cx="10058400" cy="365760"/>
+          </a:xfrm>
+          <a:prstGeom prst="rect">
+            <a:avLst/>
+          </a:prstGeom>
+          <a:noFill/>
+          <a:ln/>
+        </p:spPr>
+        <p:txBody>
+          <a:bodyPr wrap="square" lIns="0" tIns="0" rIns="0" bIns="0" rtlCol="0" anchor="ctr"/>
+          <a:lstStyle/>
+          <a:p>
+            <a:pPr algn="l" indent="0" marL="0">
+              <a:buNone/>
+            </a:pPr>
+            <a:r>
+              <a:rPr lang="en-US" sz="1300" b="1" spc="300" kern="0" dirty="0">
+                <a:solidFill>
+                  <a:srgbClr val="FF8A3D"/>
+                </a:solidFill>
+                <a:latin typeface="Calibri" pitchFamily="34" charset="0"/>
+                <a:ea typeface="Calibri" pitchFamily="34" charset="-122"/>
+                <a:cs typeface="Calibri" pitchFamily="34" charset="-120"/>
+              </a:rPr>
+              <a:t>MEDIA QUERY SYNTAX</a:t>
+            </a:r>
+            <a:endParaRPr lang="en-US" sz="1300" dirty="0"/>
+          </a:p>
+        </p:txBody>
+      </p:sp>
+      <p:sp>
+        <p:nvSpPr>
+          <p:cNvPr id="3" name="Text 1"/>
+          <p:cNvSpPr txBox="1"/>
+          <p:nvPr/>
+        </p:nvSpPr>
+        <p:spPr>
+          <a:xfrm>
+            <a:off x="640080" y="841248"/>
+            <a:ext cx="10881360" cy="914400"/>
+          </a:xfrm>
+          <a:prstGeom prst="rect">
+            <a:avLst/>
+          </a:prstGeom>
+          <a:noFill/>
+          <a:ln/>
+        </p:spPr>
+        <p:txBody>
+          <a:bodyPr wrap="square" lIns="0" tIns="0" rIns="0" bIns="0" rtlCol="0" anchor="ctr"/>
+          <a:lstStyle/>
+          <a:p>
+            <a:pPr algn="l" indent="0" marL="0">
+              <a:buNone/>
+            </a:pPr>
+            <a:r>
+              <a:rPr lang="en-US" sz="3400" b="1" dirty="0">
+                <a:solidFill>
+                  <a:srgbClr val="2B2B7A"/>
+                </a:solidFill>
+                <a:latin typeface="Cambria" pitchFamily="34" charset="0"/>
+                <a:ea typeface="Cambria" pitchFamily="34" charset="-122"/>
+                <a:cs typeface="Cambria" pitchFamily="34" charset="-120"/>
+              </a:rPr>
               <a:t>and, Comma, and not</a:t>
             </a:r>
             <a:endParaRPr lang="en-US" sz="3400" dirty="0"/>
@@ -3558,7 +4118,7 @@
       </p:sp>
       <p:graphicFrame>
         <p:nvGraphicFramePr>
-          <p:cNvPr id="11" name="Table 0"/>
+          <p:cNvPr id="12" name="Table 0"/>
           <p:cNvGraphicFramePr>
             <a:graphicFrameLocks noGrp="1"/>
           </p:cNvGraphicFramePr>
@@ -4348,357 +4908,6 @@
                 <a:ea typeface="Calibri" pitchFamily="34" charset="-122"/>
                 <a:cs typeface="Calibri" pitchFamily="34" charset="-120"/>
               </a:rPr>
-              <a:t>10</a:t>
-            </a:r>
-            <a:endParaRPr lang="en-US" sz="900" dirty="0"/>
-          </a:p>
-        </p:txBody>
-      </p:sp>
-    </p:spTree>
-  </p:cSld>
-  <p:clrMapOvr>
-    <a:masterClrMapping/>
-  </p:clrMapOvr>
-</p:sld>
-</file>
-
-<file path=ppt/slides/slide11.xml><?xml version="1.0" encoding="utf-8"?>
-<p:sld xmlns:a="http://schemas.openxmlformats.org/drawingml/2006/main" xmlns:r="http://schemas.openxmlformats.org/officeDocument/2006/relationships" xmlns:p="http://schemas.openxmlformats.org/presentationml/2006/main">
-  <p:cSld name="Slide 11">
-    <p:bg>
-      <p:bgPr>
-        <a:solidFill>
-          <a:srgbClr val="FFFFFF"/>
-        </a:solidFill>
-      </p:bgPr>
-    </p:bg>
-    <p:spTree>
-      <p:nvGrpSpPr>
-        <p:cNvPr id="1" name=""/>
-        <p:cNvGrpSpPr/>
-        <p:nvPr/>
-      </p:nvGrpSpPr>
-      <p:grpSpPr>
-        <a:xfrm>
-          <a:off x="0" y="0"/>
-          <a:ext cx="0" cy="0"/>
-          <a:chOff x="0" y="0"/>
-          <a:chExt cx="0" cy="0"/>
-        </a:xfrm>
-      </p:grpSpPr>
-      <p:sp>
-        <p:nvSpPr>
-          <p:cNvPr id="2" name="Text 0"/>
-          <p:cNvSpPr txBox="1"/>
-          <p:nvPr/>
-        </p:nvSpPr>
-        <p:spPr>
-          <a:xfrm>
-            <a:off x="640080" y="457200"/>
-            <a:ext cx="10058400" cy="365760"/>
-          </a:xfrm>
-          <a:prstGeom prst="rect">
-            <a:avLst/>
-          </a:prstGeom>
-          <a:noFill/>
-          <a:ln/>
-        </p:spPr>
-        <p:txBody>
-          <a:bodyPr wrap="square" lIns="0" tIns="0" rIns="0" bIns="0" rtlCol="0" anchor="ctr"/>
-          <a:lstStyle/>
-          <a:p>
-            <a:pPr algn="l" indent="0" marL="0">
-              <a:buNone/>
-            </a:pPr>
-            <a:r>
-              <a:rPr lang="en-US" sz="1300" b="1" spc="300" kern="0" dirty="0">
-                <a:solidFill>
-                  <a:srgbClr val="FF8A3D"/>
-                </a:solidFill>
-                <a:latin typeface="Calibri" pitchFamily="34" charset="0"/>
-                <a:ea typeface="Calibri" pitchFamily="34" charset="-122"/>
-                <a:cs typeface="Calibri" pitchFamily="34" charset="-120"/>
-              </a:rPr>
-              <a:t>RESPONSIVE IMAGES</a:t>
-            </a:r>
-            <a:endParaRPr lang="en-US" sz="1300" dirty="0"/>
-          </a:p>
-        </p:txBody>
-      </p:sp>
-      <p:sp>
-        <p:nvSpPr>
-          <p:cNvPr id="3" name="Text 1"/>
-          <p:cNvSpPr txBox="1"/>
-          <p:nvPr/>
-        </p:nvSpPr>
-        <p:spPr>
-          <a:xfrm>
-            <a:off x="640080" y="841248"/>
-            <a:ext cx="10881360" cy="914400"/>
-          </a:xfrm>
-          <a:prstGeom prst="rect">
-            <a:avLst/>
-          </a:prstGeom>
-          <a:noFill/>
-          <a:ln/>
-        </p:spPr>
-        <p:txBody>
-          <a:bodyPr wrap="square" lIns="0" tIns="0" rIns="0" bIns="0" rtlCol="0" anchor="ctr"/>
-          <a:lstStyle/>
-          <a:p>
-            <a:pPr algn="l" indent="0" marL="0">
-              <a:buNone/>
-            </a:pPr>
-            <a:r>
-              <a:rPr lang="en-US" sz="3400" b="1" dirty="0">
-                <a:solidFill>
-                  <a:srgbClr val="2B2B7A"/>
-                </a:solidFill>
-                <a:latin typeface="Cambria" pitchFamily="34" charset="0"/>
-                <a:ea typeface="Cambria" pitchFamily="34" charset="-122"/>
-                <a:cs typeface="Cambria" pitchFamily="34" charset="-120"/>
-              </a:rPr>
-              <a:t>The One Rule That Matters</a:t>
-            </a:r>
-            <a:endParaRPr lang="en-US" sz="3400" dirty="0"/>
-          </a:p>
-        </p:txBody>
-      </p:sp>
-      <p:sp>
-        <p:nvSpPr>
-          <p:cNvPr id="4" name="Shape 2"/>
-          <p:cNvSpPr/>
-          <p:nvPr/>
-        </p:nvSpPr>
-        <p:spPr>
-          <a:xfrm>
-            <a:off x="640080" y="1965960"/>
-            <a:ext cx="10911535" cy="2221992"/>
-          </a:xfrm>
-          <a:prstGeom prst="roundRect">
-            <a:avLst>
-              <a:gd name="adj" fmla="val 3292"/>
-            </a:avLst>
-          </a:prstGeom>
-          <a:solidFill>
-            <a:srgbClr val="1E1E4C"/>
-          </a:solidFill>
-          <a:ln/>
-        </p:spPr>
-      </p:sp>
-      <p:sp>
-        <p:nvSpPr>
-          <p:cNvPr id="5" name="Text 3"/>
-          <p:cNvSpPr txBox="1"/>
-          <p:nvPr/>
-        </p:nvSpPr>
-        <p:spPr>
-          <a:xfrm>
-            <a:off x="960120" y="2194560"/>
-            <a:ext cx="10271455" cy="1764792"/>
-          </a:xfrm>
-          <a:prstGeom prst="rect">
-            <a:avLst/>
-          </a:prstGeom>
-          <a:noFill/>
-          <a:ln/>
-        </p:spPr>
-        <p:txBody>
-          <a:bodyPr wrap="square" lIns="0" tIns="0" rIns="0" bIns="0" rtlCol="0" anchor="t"/>
-          <a:lstStyle/>
-          <a:p>
-            <a:pPr indent="0" marL="0">
-              <a:lnSpc>
-                <a:spcPct val="125000"/>
-              </a:lnSpc>
-              <a:buNone/>
-            </a:pPr>
-            <a:r>
-              <a:rPr lang="en-US" sz="1400" dirty="0">
-                <a:solidFill>
-                  <a:srgbClr val="C9D3F5"/>
-                </a:solidFill>
-                <a:latin typeface="Courier New" pitchFamily="34" charset="0"/>
-                <a:ea typeface="Courier New" pitchFamily="34" charset="-122"/>
-                <a:cs typeface="Courier New" pitchFamily="34" charset="-120"/>
-              </a:rPr>
-              <a:t>img {</a:t>
-            </a:r>
-            <a:endParaRPr lang="en-US" sz="1400" dirty="0"/>
-          </a:p>
-          <a:p>
-            <a:pPr indent="0" marL="0">
-              <a:lnSpc>
-                <a:spcPct val="125000"/>
-              </a:lnSpc>
-              <a:buNone/>
-            </a:pPr>
-            <a:r>
-              <a:rPr lang="en-US" sz="1400" dirty="0">
-                <a:solidFill>
-                  <a:srgbClr val="C9D3F5"/>
-                </a:solidFill>
-                <a:latin typeface="Courier New" pitchFamily="34" charset="0"/>
-                <a:ea typeface="Courier New" pitchFamily="34" charset="-122"/>
-                <a:cs typeface="Courier New" pitchFamily="34" charset="-120"/>
-              </a:rPr>
-              <a:t>  max-width: 100%;</a:t>
-            </a:r>
-            <a:endParaRPr lang="en-US" sz="1400" dirty="0"/>
-          </a:p>
-          <a:p>
-            <a:pPr indent="0" marL="0">
-              <a:lnSpc>
-                <a:spcPct val="125000"/>
-              </a:lnSpc>
-              <a:buNone/>
-            </a:pPr>
-            <a:r>
-              <a:rPr lang="en-US" sz="1400" dirty="0">
-                <a:solidFill>
-                  <a:srgbClr val="C9D3F5"/>
-                </a:solidFill>
-                <a:latin typeface="Courier New" pitchFamily="34" charset="0"/>
-                <a:ea typeface="Courier New" pitchFamily="34" charset="-122"/>
-                <a:cs typeface="Courier New" pitchFamily="34" charset="-120"/>
-              </a:rPr>
-              <a:t>  height: auto;</a:t>
-            </a:r>
-            <a:endParaRPr lang="en-US" sz="1400" dirty="0"/>
-          </a:p>
-          <a:p>
-            <a:pPr indent="0" marL="0">
-              <a:lnSpc>
-                <a:spcPct val="125000"/>
-              </a:lnSpc>
-              <a:buNone/>
-            </a:pPr>
-            <a:r>
-              <a:rPr lang="en-US" sz="1400" dirty="0">
-                <a:solidFill>
-                  <a:srgbClr val="C9D3F5"/>
-                </a:solidFill>
-                <a:latin typeface="Courier New" pitchFamily="34" charset="0"/>
-                <a:ea typeface="Courier New" pitchFamily="34" charset="-122"/>
-                <a:cs typeface="Courier New" pitchFamily="34" charset="-120"/>
-              </a:rPr>
-              <a:t>}</a:t>
-            </a:r>
-            <a:endParaRPr lang="en-US" sz="1400" dirty="0"/>
-          </a:p>
-        </p:txBody>
-      </p:sp>
-      <p:sp>
-        <p:nvSpPr>
-          <p:cNvPr id="6" name="Text 4"/>
-          <p:cNvSpPr txBox="1"/>
-          <p:nvPr/>
-        </p:nvSpPr>
-        <p:spPr>
-          <a:xfrm>
-            <a:off x="640080" y="4416552"/>
-            <a:ext cx="10911535" cy="1847088"/>
-          </a:xfrm>
-          <a:prstGeom prst="rect">
-            <a:avLst/>
-          </a:prstGeom>
-          <a:noFill/>
-          <a:ln/>
-        </p:spPr>
-        <p:txBody>
-          <a:bodyPr wrap="square" lIns="0" tIns="0" rIns="0" bIns="0" rtlCol="0" anchor="t"/>
-          <a:lstStyle/>
-          <a:p>
-            <a:pPr indent="0" marL="0">
-              <a:buNone/>
-            </a:pPr>
-            <a:r>
-              <a:rPr lang="en-US" sz="1300" dirty="0">
-                <a:solidFill>
-                  <a:srgbClr val="26262F"/>
-                </a:solidFill>
-                <a:latin typeface="Calibri" pitchFamily="34" charset="0"/>
-                <a:ea typeface="Calibri" pitchFamily="34" charset="-122"/>
-                <a:cs typeface="Calibri" pitchFamily="34" charset="-120"/>
-              </a:rPr>
-              <a:t>max-width: 100% keeps an image from ever growing wider than its container; height: auto preserves its aspect ratio.</a:t>
-            </a:r>
-            <a:endParaRPr lang="en-US" sz="1300" dirty="0"/>
-          </a:p>
-        </p:txBody>
-      </p:sp>
-      <p:sp>
-        <p:nvSpPr>
-          <p:cNvPr id="7" name="Text 5"/>
-          <p:cNvSpPr txBox="1"/>
-          <p:nvPr/>
-        </p:nvSpPr>
-        <p:spPr>
-          <a:xfrm>
-            <a:off x="640080" y="6446520"/>
-            <a:ext cx="8686800" cy="292608"/>
-          </a:xfrm>
-          <a:prstGeom prst="rect">
-            <a:avLst/>
-          </a:prstGeom>
-          <a:noFill/>
-          <a:ln/>
-        </p:spPr>
-        <p:txBody>
-          <a:bodyPr wrap="square" lIns="0" tIns="0" rIns="0" bIns="0" rtlCol="0" anchor="ctr"/>
-          <a:lstStyle/>
-          <a:p>
-            <a:pPr algn="l" indent="0" marL="0">
-              <a:buNone/>
-            </a:pPr>
-            <a:r>
-              <a:rPr lang="en-US" sz="900" dirty="0">
-                <a:solidFill>
-                  <a:srgbClr val="5D5D72"/>
-                </a:solidFill>
-                <a:latin typeface="Calibri" pitchFamily="34" charset="0"/>
-                <a:ea typeface="Calibri" pitchFamily="34" charset="-122"/>
-                <a:cs typeface="Calibri" pitchFamily="34" charset="-120"/>
-              </a:rPr>
-              <a:t>Usman Akram  •  COMSATS University Islamabad</a:t>
-            </a:r>
-            <a:endParaRPr lang="en-US" sz="900" dirty="0"/>
-          </a:p>
-        </p:txBody>
-      </p:sp>
-      <p:sp>
-        <p:nvSpPr>
-          <p:cNvPr id="8" name="Text 6"/>
-          <p:cNvSpPr txBox="1"/>
-          <p:nvPr/>
-        </p:nvSpPr>
-        <p:spPr>
-          <a:xfrm>
-            <a:off x="11155680" y="6446520"/>
-            <a:ext cx="457200" cy="292608"/>
-          </a:xfrm>
-          <a:prstGeom prst="rect">
-            <a:avLst/>
-          </a:prstGeom>
-          <a:noFill/>
-          <a:ln/>
-        </p:spPr>
-        <p:txBody>
-          <a:bodyPr wrap="square" lIns="0" tIns="0" rIns="0" bIns="0" rtlCol="0" anchor="ctr"/>
-          <a:lstStyle/>
-          <a:p>
-            <a:pPr algn="r" indent="0" marL="0">
-              <a:buNone/>
-            </a:pPr>
-            <a:r>
-              <a:rPr lang="en-US" sz="900" dirty="0">
-                <a:solidFill>
-                  <a:srgbClr val="5D5D72"/>
-                </a:solidFill>
-                <a:latin typeface="Calibri" pitchFamily="34" charset="0"/>
-                <a:ea typeface="Calibri" pitchFamily="34" charset="-122"/>
-                <a:cs typeface="Calibri" pitchFamily="34" charset="-120"/>
-              </a:rPr>
               <a:t>11</a:t>
             </a:r>
             <a:endParaRPr lang="en-US" sz="900" dirty="0"/>
@@ -4809,7 +5018,7 @@
                 <a:ea typeface="Cambria" pitchFamily="34" charset="-122"/>
                 <a:cs typeface="Cambria" pitchFamily="34" charset="-120"/>
               </a:rPr>
-              <a:t>The Same Image, Two Widths</a:t>
+              <a:t>The One Rule That Matters</a:t>
             </a:r>
             <a:endParaRPr lang="en-US" sz="3400" dirty="0"/>
           </a:p>
@@ -4817,231 +5026,200 @@
       </p:sp>
       <p:sp>
         <p:nvSpPr>
-          <p:cNvPr id="4" name="Text 2"/>
-          <p:cNvSpPr txBox="1"/>
+          <p:cNvPr id="4" name="Shape 2"/>
+          <p:cNvSpPr/>
           <p:nvPr/>
         </p:nvSpPr>
         <p:spPr>
           <a:xfrm>
             <a:off x="640080" y="1965960"/>
-            <a:ext cx="5272888" cy="365760"/>
-          </a:xfrm>
-          <a:prstGeom prst="rect">
-            <a:avLst/>
-          </a:prstGeom>
-          <a:noFill/>
-          <a:ln/>
-        </p:spPr>
-        <p:txBody>
-          <a:bodyPr wrap="square" lIns="0" tIns="0" rIns="0" bIns="0" rtlCol="0" anchor="ctr"/>
-          <a:lstStyle/>
-          <a:p>
-            <a:pPr algn="ctr" indent="0" marL="0">
-              <a:buNone/>
-            </a:pPr>
-            <a:r>
-              <a:rPr lang="en-US" sz="1100" b="1" spc="150" kern="0" dirty="0">
-                <a:solidFill>
-                  <a:srgbClr val="E67528"/>
+            <a:ext cx="10911535" cy="1615440"/>
+          </a:xfrm>
+          <a:prstGeom prst="roundRect">
+            <a:avLst>
+              <a:gd name="adj" fmla="val 4528"/>
+            </a:avLst>
+          </a:prstGeom>
+          <a:solidFill>
+            <a:srgbClr val="1E1E4C"/>
+          </a:solidFill>
+          <a:ln/>
+        </p:spPr>
+      </p:sp>
+      <p:sp>
+        <p:nvSpPr>
+          <p:cNvPr id="5" name="Text 3"/>
+          <p:cNvSpPr txBox="1"/>
+          <p:nvPr/>
+        </p:nvSpPr>
+        <p:spPr>
+          <a:xfrm>
+            <a:off x="960120" y="2194560"/>
+            <a:ext cx="10271455" cy="1158240"/>
+          </a:xfrm>
+          <a:prstGeom prst="rect">
+            <a:avLst/>
+          </a:prstGeom>
+          <a:noFill/>
+          <a:ln/>
+        </p:spPr>
+        <p:txBody>
+          <a:bodyPr wrap="square" lIns="0" tIns="0" rIns="0" bIns="0" rtlCol="0" anchor="t"/>
+          <a:lstStyle/>
+          <a:p>
+            <a:pPr indent="0" marL="0">
+              <a:lnSpc>
+                <a:spcPct val="125000"/>
+              </a:lnSpc>
+              <a:buNone/>
+            </a:pPr>
+            <a:r>
+              <a:rPr lang="en-US" sz="1400" dirty="0">
+                <a:solidFill>
+                  <a:srgbClr val="C9D3F5"/>
+                </a:solidFill>
+                <a:latin typeface="Courier New" pitchFamily="34" charset="0"/>
+                <a:ea typeface="Courier New" pitchFamily="34" charset="-122"/>
+                <a:cs typeface="Courier New" pitchFamily="34" charset="-120"/>
+              </a:rPr>
+              <a:t>img {</a:t>
+            </a:r>
+            <a:endParaRPr lang="en-US" sz="1400" dirty="0"/>
+          </a:p>
+          <a:p>
+            <a:pPr indent="0" marL="0">
+              <a:lnSpc>
+                <a:spcPct val="125000"/>
+              </a:lnSpc>
+              <a:buNone/>
+            </a:pPr>
+            <a:r>
+              <a:rPr lang="en-US" sz="1400" dirty="0">
+                <a:solidFill>
+                  <a:srgbClr val="C9D3F5"/>
+                </a:solidFill>
+                <a:latin typeface="Courier New" pitchFamily="34" charset="0"/>
+                <a:ea typeface="Courier New" pitchFamily="34" charset="-122"/>
+                <a:cs typeface="Courier New" pitchFamily="34" charset="-120"/>
+              </a:rPr>
+              <a:t>  max-width: 100%;</a:t>
+            </a:r>
+            <a:endParaRPr lang="en-US" sz="1400" dirty="0"/>
+          </a:p>
+          <a:p>
+            <a:pPr indent="0" marL="0">
+              <a:lnSpc>
+                <a:spcPct val="125000"/>
+              </a:lnSpc>
+              <a:buNone/>
+            </a:pPr>
+            <a:r>
+              <a:rPr lang="en-US" sz="1400" dirty="0">
+                <a:solidFill>
+                  <a:srgbClr val="C9D3F5"/>
+                </a:solidFill>
+                <a:latin typeface="Courier New" pitchFamily="34" charset="0"/>
+                <a:ea typeface="Courier New" pitchFamily="34" charset="-122"/>
+                <a:cs typeface="Courier New" pitchFamily="34" charset="-120"/>
+              </a:rPr>
+              <a:t>  height: auto;</a:t>
+            </a:r>
+            <a:endParaRPr lang="en-US" sz="1400" dirty="0"/>
+          </a:p>
+          <a:p>
+            <a:pPr indent="0" marL="0">
+              <a:lnSpc>
+                <a:spcPct val="125000"/>
+              </a:lnSpc>
+              <a:buNone/>
+            </a:pPr>
+            <a:r>
+              <a:rPr lang="en-US" sz="1400" dirty="0">
+                <a:solidFill>
+                  <a:srgbClr val="C9D3F5"/>
+                </a:solidFill>
+                <a:latin typeface="Courier New" pitchFamily="34" charset="0"/>
+                <a:ea typeface="Courier New" pitchFamily="34" charset="-122"/>
+                <a:cs typeface="Courier New" pitchFamily="34" charset="-120"/>
+              </a:rPr>
+              <a:t>}</a:t>
+            </a:r>
+            <a:endParaRPr lang="en-US" sz="1400" dirty="0"/>
+          </a:p>
+        </p:txBody>
+      </p:sp>
+      <p:sp>
+        <p:nvSpPr>
+          <p:cNvPr id="6" name="Text 4"/>
+          <p:cNvSpPr txBox="1"/>
+          <p:nvPr/>
+        </p:nvSpPr>
+        <p:spPr>
+          <a:xfrm>
+            <a:off x="640080" y="3810000"/>
+            <a:ext cx="10911535" cy="2453640"/>
+          </a:xfrm>
+          <a:prstGeom prst="rect">
+            <a:avLst/>
+          </a:prstGeom>
+          <a:noFill/>
+          <a:ln/>
+        </p:spPr>
+        <p:txBody>
+          <a:bodyPr wrap="square" lIns="0" tIns="0" rIns="0" bIns="0" rtlCol="0" anchor="t"/>
+          <a:lstStyle/>
+          <a:p>
+            <a:pPr indent="0" marL="0">
+              <a:buNone/>
+            </a:pPr>
+            <a:r>
+              <a:rPr lang="en-US" sz="1300" dirty="0">
+                <a:solidFill>
+                  <a:srgbClr val="26262F"/>
                 </a:solidFill>
                 <a:latin typeface="Calibri" pitchFamily="34" charset="0"/>
                 <a:ea typeface="Calibri" pitchFamily="34" charset="-122"/>
                 <a:cs typeface="Calibri" pitchFamily="34" charset="-120"/>
               </a:rPr>
-              <a:t>WIDE</a:t>
-            </a:r>
-            <a:endParaRPr lang="en-US" sz="1100" dirty="0"/>
-          </a:p>
-        </p:txBody>
-      </p:sp>
-      <p:sp>
-        <p:nvSpPr>
-          <p:cNvPr id="5" name="Shape 3"/>
-          <p:cNvSpPr/>
-          <p:nvPr/>
-        </p:nvSpPr>
-        <p:spPr>
-          <a:xfrm>
-            <a:off x="530352" y="2313432"/>
-            <a:ext cx="5492344" cy="3831336"/>
-          </a:xfrm>
-          <a:prstGeom prst="roundRect">
-            <a:avLst>
-              <a:gd name="adj" fmla="val 1432"/>
-            </a:avLst>
-          </a:prstGeom>
-          <a:solidFill>
-            <a:srgbClr val="FFFFFF"/>
-          </a:solidFill>
-          <a:ln w="12700">
-            <a:solidFill>
-              <a:srgbClr val="E2E2EE"/>
-            </a:solidFill>
-            <a:prstDash val="solid"/>
-          </a:ln>
-          <a:effectLst>
-            <a:outerShdw sx="100000" sy="100000" kx="0" ky="0" algn="bl" rotWithShape="0" blurRad="101600" dist="38100" dir="5400000">
-              <a:srgbClr val="000000">
-                <a:alpha val="12000"/>
-              </a:srgbClr>
-            </a:outerShdw>
-          </a:effectLst>
-        </p:spPr>
-      </p:sp>
-      <p:pic>
-        <p:nvPicPr>
-          <p:cNvPr id="6" name="Image 0" descr="D:/GitHub/mern-web-book/docs/assets/img/lecture-10/responsive-image-wide.png">    </p:cNvPr>
-          <p:cNvPicPr>
-            <a:picLocks noChangeAspect="1"/>
-          </p:cNvPicPr>
-          <p:nvPr/>
-        </p:nvPicPr>
-        <p:blipFill>
-          <a:blip r:embed="rId1"/>
-          <a:stretch>
-            <a:fillRect/>
-          </a:stretch>
-        </p:blipFill>
-        <p:spPr>
-          <a:xfrm>
-            <a:off x="640080" y="2725129"/>
-            <a:ext cx="5272888" cy="3007943"/>
-          </a:xfrm>
-          <a:prstGeom prst="rect">
-            <a:avLst/>
-          </a:prstGeom>
-        </p:spPr>
-      </p:pic>
-      <p:sp>
-        <p:nvSpPr>
-          <p:cNvPr id="7" name="Text 4"/>
-          <p:cNvSpPr txBox="1"/>
-          <p:nvPr/>
-        </p:nvSpPr>
-        <p:spPr>
-          <a:xfrm>
-            <a:off x="6278728" y="1965960"/>
-            <a:ext cx="5272888" cy="365760"/>
-          </a:xfrm>
-          <a:prstGeom prst="rect">
-            <a:avLst/>
-          </a:prstGeom>
-          <a:noFill/>
-          <a:ln/>
-        </p:spPr>
-        <p:txBody>
-          <a:bodyPr wrap="square" lIns="0" tIns="0" rIns="0" bIns="0" rtlCol="0" anchor="ctr"/>
-          <a:lstStyle/>
-          <a:p>
-            <a:pPr algn="ctr" indent="0" marL="0">
-              <a:buNone/>
-            </a:pPr>
-            <a:r>
-              <a:rPr lang="en-US" sz="1100" b="1" spc="150" kern="0" dirty="0">
-                <a:solidFill>
-                  <a:srgbClr val="E67528"/>
+              <a:t>max-width: 100% keeps an image from ever growing wider than its container; height: auto preserves its aspect ratio.</a:t>
+            </a:r>
+            <a:endParaRPr lang="en-US" sz="1300" dirty="0"/>
+          </a:p>
+        </p:txBody>
+      </p:sp>
+      <p:sp>
+        <p:nvSpPr>
+          <p:cNvPr id="7" name="Text 5"/>
+          <p:cNvSpPr txBox="1"/>
+          <p:nvPr/>
+        </p:nvSpPr>
+        <p:spPr>
+          <a:xfrm>
+            <a:off x="640080" y="6446520"/>
+            <a:ext cx="8686800" cy="292608"/>
+          </a:xfrm>
+          <a:prstGeom prst="rect">
+            <a:avLst/>
+          </a:prstGeom>
+          <a:noFill/>
+          <a:ln/>
+        </p:spPr>
+        <p:txBody>
+          <a:bodyPr wrap="square" lIns="0" tIns="0" rIns="0" bIns="0" rtlCol="0" anchor="ctr"/>
+          <a:lstStyle/>
+          <a:p>
+            <a:pPr algn="l" indent="0" marL="0">
+              <a:buNone/>
+            </a:pPr>
+            <a:r>
+              <a:rPr lang="en-US" sz="900" dirty="0">
+                <a:solidFill>
+                  <a:srgbClr val="5D5D72"/>
                 </a:solidFill>
                 <a:latin typeface="Calibri" pitchFamily="34" charset="0"/>
                 <a:ea typeface="Calibri" pitchFamily="34" charset="-122"/>
                 <a:cs typeface="Calibri" pitchFamily="34" charset="-120"/>
               </a:rPr>
-              <a:t>NARROW</a:t>
-            </a:r>
-            <a:endParaRPr lang="en-US" sz="1100" dirty="0"/>
-          </a:p>
-        </p:txBody>
-      </p:sp>
-      <p:sp>
-        <p:nvSpPr>
-          <p:cNvPr id="8" name="Shape 5"/>
-          <p:cNvSpPr/>
-          <p:nvPr/>
-        </p:nvSpPr>
-        <p:spPr>
-          <a:xfrm>
-            <a:off x="6169000" y="2313432"/>
-            <a:ext cx="5492344" cy="3831336"/>
-          </a:xfrm>
-          <a:prstGeom prst="roundRect">
-            <a:avLst>
-              <a:gd name="adj" fmla="val 1432"/>
-            </a:avLst>
-          </a:prstGeom>
-          <a:solidFill>
-            <a:srgbClr val="FFFFFF"/>
-          </a:solidFill>
-          <a:ln w="12700">
-            <a:solidFill>
-              <a:srgbClr val="E2E2EE"/>
-            </a:solidFill>
-            <a:prstDash val="solid"/>
-          </a:ln>
-          <a:effectLst>
-            <a:outerShdw sx="100000" sy="100000" kx="0" ky="0" algn="bl" rotWithShape="0" blurRad="101600" dist="38100" dir="5400000">
-              <a:srgbClr val="000000">
-                <a:alpha val="12000"/>
-              </a:srgbClr>
-            </a:outerShdw>
-          </a:effectLst>
-        </p:spPr>
-      </p:sp>
-      <p:pic>
-        <p:nvPicPr>
-          <p:cNvPr id="9" name="Image 1" descr="D:/GitHub/mern-web-book/docs/assets/img/lecture-10/responsive-image-narrow.png">    </p:cNvPr>
-          <p:cNvPicPr>
-            <a:picLocks noChangeAspect="1"/>
-          </p:cNvPicPr>
-          <p:nvPr/>
-        </p:nvPicPr>
-        <p:blipFill>
-          <a:blip r:embed="rId2"/>
-          <a:stretch>
-            <a:fillRect/>
-          </a:stretch>
-        </p:blipFill>
-        <p:spPr>
-          <a:xfrm>
-            <a:off x="6278728" y="2942428"/>
-            <a:ext cx="5272888" cy="2573345"/>
-          </a:xfrm>
-          <a:prstGeom prst="rect">
-            <a:avLst/>
-          </a:prstGeom>
-        </p:spPr>
-      </p:pic>
-      <p:sp>
-        <p:nvSpPr>
-          <p:cNvPr id="10" name="Text 6"/>
-          <p:cNvSpPr txBox="1"/>
-          <p:nvPr/>
-        </p:nvSpPr>
-        <p:spPr>
-          <a:xfrm>
-            <a:off x="640080" y="6446520"/>
-            <a:ext cx="8686800" cy="292608"/>
-          </a:xfrm>
-          <a:prstGeom prst="rect">
-            <a:avLst/>
-          </a:prstGeom>
-          <a:noFill/>
-          <a:ln/>
-        </p:spPr>
-        <p:txBody>
-          <a:bodyPr wrap="square" lIns="0" tIns="0" rIns="0" bIns="0" rtlCol="0" anchor="ctr"/>
-          <a:lstStyle/>
-          <a:p>
-            <a:pPr algn="l" indent="0" marL="0">
-              <a:buNone/>
-            </a:pPr>
-            <a:r>
-              <a:rPr lang="en-US" sz="900" dirty="0">
-                <a:solidFill>
-                  <a:srgbClr val="5D5D72"/>
-                </a:solidFill>
-                <a:latin typeface="Calibri" pitchFamily="34" charset="0"/>
-                <a:ea typeface="Calibri" pitchFamily="34" charset="-122"/>
-                <a:cs typeface="Calibri" pitchFamily="34" charset="-120"/>
-              </a:rPr>
               <a:t>Usman Akram  •  COMSATS University Islamabad</a:t>
             </a:r>
             <a:endParaRPr lang="en-US" sz="900" dirty="0"/>
@@ -5050,7 +5228,7 @@
       </p:sp>
       <p:sp>
         <p:nvSpPr>
-          <p:cNvPr id="11" name="Text 7"/>
+          <p:cNvPr id="8" name="Text 6"/>
           <p:cNvSpPr txBox="1"/>
           <p:nvPr/>
         </p:nvSpPr>
@@ -5152,7 +5330,7 @@
                 <a:ea typeface="Calibri" pitchFamily="34" charset="-122"/>
                 <a:cs typeface="Calibri" pitchFamily="34" charset="-120"/>
               </a:rPr>
-              <a:t>FRAMEWORKS</a:t>
+              <a:t>RESPONSIVE IMAGES</a:t>
             </a:r>
             <a:endParaRPr lang="en-US" sz="1300" dirty="0"/>
           </a:p>
@@ -5191,7 +5369,7 @@
                 <a:ea typeface="Cambria" pitchFamily="34" charset="-122"/>
                 <a:cs typeface="Cambria" pitchFamily="34" charset="-120"/>
               </a:rPr>
-              <a:t>Component-Based vs. Utility-First</a:t>
+              <a:t>The Same Image, Two Widths</a:t>
             </a:r>
             <a:endParaRPr lang="en-US" sz="3400" dirty="0"/>
           </a:p>
@@ -5199,22 +5377,61 @@
       </p:sp>
       <p:sp>
         <p:nvSpPr>
-          <p:cNvPr id="4" name="Shape 2"/>
+          <p:cNvPr id="4" name="Text 2"/>
+          <p:cNvSpPr txBox="1"/>
+          <p:nvPr/>
+        </p:nvSpPr>
+        <p:spPr>
+          <a:xfrm>
+            <a:off x="640080" y="1965960"/>
+            <a:ext cx="5272888" cy="365760"/>
+          </a:xfrm>
+          <a:prstGeom prst="rect">
+            <a:avLst/>
+          </a:prstGeom>
+          <a:noFill/>
+          <a:ln/>
+        </p:spPr>
+        <p:txBody>
+          <a:bodyPr wrap="square" lIns="0" tIns="0" rIns="0" bIns="0" rtlCol="0" anchor="ctr"/>
+          <a:lstStyle/>
+          <a:p>
+            <a:pPr algn="ctr" indent="0" marL="0">
+              <a:buNone/>
+            </a:pPr>
+            <a:r>
+              <a:rPr lang="en-US" sz="1100" b="1" spc="150" kern="0" dirty="0">
+                <a:solidFill>
+                  <a:srgbClr val="E67528"/>
+                </a:solidFill>
+                <a:latin typeface="Calibri" pitchFamily="34" charset="0"/>
+                <a:ea typeface="Calibri" pitchFamily="34" charset="-122"/>
+                <a:cs typeface="Calibri" pitchFamily="34" charset="-120"/>
+              </a:rPr>
+              <a:t>WIDE</a:t>
+            </a:r>
+            <a:endParaRPr lang="en-US" sz="1100" dirty="0"/>
+          </a:p>
+        </p:txBody>
+      </p:sp>
+      <p:sp>
+        <p:nvSpPr>
+          <p:cNvPr id="5" name="Shape 3"/>
           <p:cNvSpPr/>
           <p:nvPr/>
         </p:nvSpPr>
         <p:spPr>
           <a:xfrm>
-            <a:off x="640080" y="1965960"/>
-            <a:ext cx="5341468" cy="4114800"/>
+            <a:off x="530352" y="2313432"/>
+            <a:ext cx="5492344" cy="3831336"/>
           </a:xfrm>
           <a:prstGeom prst="roundRect">
             <a:avLst>
-              <a:gd name="adj" fmla="val 2000"/>
+              <a:gd name="adj" fmla="val 1432"/>
             </a:avLst>
           </a:prstGeom>
           <a:solidFill>
-            <a:srgbClr val="F1F1F8"/>
+            <a:srgbClr val="FFFFFF"/>
           </a:solidFill>
           <a:ln w="12700">
             <a:solidFill>
@@ -5222,150 +5439,96 @@
             </a:solidFill>
             <a:prstDash val="solid"/>
           </a:ln>
-        </p:spPr>
-      </p:sp>
-      <p:sp>
-        <p:nvSpPr>
-          <p:cNvPr id="5" name="Text 3"/>
-          <p:cNvSpPr txBox="1"/>
-          <p:nvPr/>
-        </p:nvSpPr>
-        <p:spPr>
-          <a:xfrm>
-            <a:off x="896112" y="2194560"/>
-            <a:ext cx="4829404" cy="365760"/>
-          </a:xfrm>
-          <a:prstGeom prst="rect">
-            <a:avLst/>
-          </a:prstGeom>
-          <a:noFill/>
-          <a:ln/>
-        </p:spPr>
-        <p:txBody>
-          <a:bodyPr wrap="square" lIns="0" tIns="0" rIns="0" bIns="0" rtlCol="0" anchor="ctr"/>
-          <a:lstStyle/>
-          <a:p>
-            <a:pPr indent="0" marL="0">
-              <a:buNone/>
-            </a:pPr>
-            <a:r>
-              <a:rPr lang="en-US" sz="1250" b="1" spc="150" kern="0" dirty="0">
-                <a:solidFill>
-                  <a:srgbClr val="2B2B7A"/>
+          <a:effectLst>
+            <a:outerShdw sx="100000" sy="100000" kx="0" ky="0" algn="bl" rotWithShape="0" blurRad="101600" dist="38100" dir="5400000">
+              <a:srgbClr val="000000">
+                <a:alpha val="12000"/>
+              </a:srgbClr>
+            </a:outerShdw>
+          </a:effectLst>
+        </p:spPr>
+      </p:sp>
+      <p:pic>
+        <p:nvPicPr>
+          <p:cNvPr id="6" name="Image 0" descr="D:/GitHub/mern-web-book/docs/assets/img/lecture-10/responsive-image-wide.png">    </p:cNvPr>
+          <p:cNvPicPr>
+            <a:picLocks noChangeAspect="1"/>
+          </p:cNvPicPr>
+          <p:nvPr/>
+        </p:nvPicPr>
+        <p:blipFill>
+          <a:blip r:embed="rId1"/>
+          <a:stretch>
+            <a:fillRect/>
+          </a:stretch>
+        </p:blipFill>
+        <p:spPr>
+          <a:xfrm>
+            <a:off x="640080" y="2725129"/>
+            <a:ext cx="5272888" cy="3007943"/>
+          </a:xfrm>
+          <a:prstGeom prst="rect">
+            <a:avLst/>
+          </a:prstGeom>
+        </p:spPr>
+      </p:pic>
+      <p:sp>
+        <p:nvSpPr>
+          <p:cNvPr id="7" name="Text 4"/>
+          <p:cNvSpPr txBox="1"/>
+          <p:nvPr/>
+        </p:nvSpPr>
+        <p:spPr>
+          <a:xfrm>
+            <a:off x="6278728" y="1965960"/>
+            <a:ext cx="5272888" cy="365760"/>
+          </a:xfrm>
+          <a:prstGeom prst="rect">
+            <a:avLst/>
+          </a:prstGeom>
+          <a:noFill/>
+          <a:ln/>
+        </p:spPr>
+        <p:txBody>
+          <a:bodyPr wrap="square" lIns="0" tIns="0" rIns="0" bIns="0" rtlCol="0" anchor="ctr"/>
+          <a:lstStyle/>
+          <a:p>
+            <a:pPr algn="ctr" indent="0" marL="0">
+              <a:buNone/>
+            </a:pPr>
+            <a:r>
+              <a:rPr lang="en-US" sz="1100" b="1" spc="150" kern="0" dirty="0">
+                <a:solidFill>
+                  <a:srgbClr val="E67528"/>
                 </a:solidFill>
                 <a:latin typeface="Calibri" pitchFamily="34" charset="0"/>
                 <a:ea typeface="Calibri" pitchFamily="34" charset="-122"/>
                 <a:cs typeface="Calibri" pitchFamily="34" charset="-120"/>
               </a:rPr>
-              <a:t>BOOTSTRAP (COMPONENT-BASED)</a:t>
-            </a:r>
-            <a:endParaRPr lang="en-US" sz="1250" dirty="0"/>
-          </a:p>
-        </p:txBody>
-      </p:sp>
-      <p:sp>
-        <p:nvSpPr>
-          <p:cNvPr id="6" name="Text 4"/>
-          <p:cNvSpPr txBox="1"/>
-          <p:nvPr/>
-        </p:nvSpPr>
-        <p:spPr>
-          <a:xfrm>
-            <a:off x="896112" y="2651760"/>
-            <a:ext cx="4829404" cy="3200400"/>
-          </a:xfrm>
-          <a:prstGeom prst="rect">
-            <a:avLst/>
-          </a:prstGeom>
-          <a:noFill/>
-          <a:ln/>
-        </p:spPr>
-        <p:txBody>
-          <a:bodyPr wrap="square" lIns="0" tIns="0" rIns="0" bIns="0" rtlCol="0" anchor="t"/>
-          <a:lstStyle/>
-          <a:p>
-            <a:pPr marL="342900" indent="-342900">
-              <a:spcAft>
-                <a:spcPts val="600"/>
-              </a:spcAft>
-              <a:buSzPct val="100000"/>
-              <a:buChar char="•"/>
-            </a:pPr>
-            <a:r>
-              <a:rPr lang="en-US" sz="1200" dirty="0">
-                <a:solidFill>
-                  <a:srgbClr val="26262F"/>
-                </a:solidFill>
-                <a:latin typeface="Calibri" pitchFamily="34" charset="0"/>
-                <a:ea typeface="Calibri" pitchFamily="34" charset="-122"/>
-                <a:cs typeface="Calibri" pitchFamily="34" charset="-120"/>
-              </a:rPr>
-              <a:t>Ships pre-styled, ready-to-use components (.btn, .card, .navbar)</a:t>
-            </a:r>
-            <a:endParaRPr lang="en-US" sz="1200" dirty="0"/>
-          </a:p>
-          <a:p>
-            <a:pPr marL="342900" indent="-342900">
-              <a:spcAft>
-                <a:spcPts val="600"/>
-              </a:spcAft>
-              <a:buSzPct val="100000"/>
-              <a:buChar char="•"/>
-            </a:pPr>
-            <a:r>
-              <a:rPr lang="en-US" sz="1200" dirty="0">
-                <a:solidFill>
-                  <a:srgbClr val="26262F"/>
-                </a:solidFill>
-                <a:latin typeface="Calibri" pitchFamily="34" charset="0"/>
-                <a:ea typeface="Calibri" pitchFamily="34" charset="-122"/>
-                <a:cs typeface="Calibri" pitchFamily="34" charset="-120"/>
-              </a:rPr>
-              <a:t>Fast to get a decent-looking page up quickly</a:t>
-            </a:r>
-            <a:endParaRPr lang="en-US" sz="1200" dirty="0"/>
-          </a:p>
-          <a:p>
-            <a:pPr marL="342900" indent="-342900">
-              <a:spcAft>
-                <a:spcPts val="600"/>
-              </a:spcAft>
-              <a:buSzPct val="100000"/>
-              <a:buChar char="•"/>
-            </a:pPr>
-            <a:r>
-              <a:rPr lang="en-US" sz="1200" dirty="0">
-                <a:solidFill>
-                  <a:srgbClr val="26262F"/>
-                </a:solidFill>
-                <a:latin typeface="Calibri" pitchFamily="34" charset="0"/>
-                <a:ea typeface="Calibri" pitchFamily="34" charset="-122"/>
-                <a:cs typeface="Calibri" pitchFamily="34" charset="-120"/>
-              </a:rPr>
-              <a:t>Overriding built-in styles can fight the framework</a:t>
-            </a:r>
-            <a:endParaRPr lang="en-US" sz="1200" dirty="0"/>
-          </a:p>
-        </p:txBody>
-      </p:sp>
-      <p:sp>
-        <p:nvSpPr>
-          <p:cNvPr id="7" name="Shape 5"/>
+              <a:t>NARROW</a:t>
+            </a:r>
+            <a:endParaRPr lang="en-US" sz="1100" dirty="0"/>
+          </a:p>
+        </p:txBody>
+      </p:sp>
+      <p:sp>
+        <p:nvSpPr>
+          <p:cNvPr id="8" name="Shape 5"/>
           <p:cNvSpPr/>
           <p:nvPr/>
         </p:nvSpPr>
         <p:spPr>
           <a:xfrm>
-            <a:off x="6210148" y="1965960"/>
-            <a:ext cx="5341468" cy="4114800"/>
+            <a:off x="6169000" y="2313432"/>
+            <a:ext cx="5492344" cy="3831336"/>
           </a:xfrm>
           <a:prstGeom prst="roundRect">
             <a:avLst>
-              <a:gd name="adj" fmla="val 2000"/>
+              <a:gd name="adj" fmla="val 1432"/>
             </a:avLst>
           </a:prstGeom>
           <a:solidFill>
-            <a:srgbClr val="F1F1F8"/>
+            <a:srgbClr val="FFFFFF"/>
           </a:solidFill>
           <a:ln w="12700">
             <a:solidFill>
@@ -5373,165 +5536,72 @@
             </a:solidFill>
             <a:prstDash val="solid"/>
           </a:ln>
-        </p:spPr>
-      </p:sp>
-      <p:sp>
-        <p:nvSpPr>
-          <p:cNvPr id="8" name="Text 6"/>
-          <p:cNvSpPr txBox="1"/>
-          <p:nvPr/>
-        </p:nvSpPr>
-        <p:spPr>
-          <a:xfrm>
-            <a:off x="6466180" y="2194560"/>
-            <a:ext cx="4829404" cy="365760"/>
-          </a:xfrm>
-          <a:prstGeom prst="rect">
-            <a:avLst/>
-          </a:prstGeom>
-          <a:noFill/>
-          <a:ln/>
-        </p:spPr>
-        <p:txBody>
-          <a:bodyPr wrap="square" lIns="0" tIns="0" rIns="0" bIns="0" rtlCol="0" anchor="ctr"/>
-          <a:lstStyle/>
-          <a:p>
-            <a:pPr indent="0" marL="0">
-              <a:buNone/>
-            </a:pPr>
-            <a:r>
-              <a:rPr lang="en-US" sz="1250" b="1" spc="150" kern="0" dirty="0">
-                <a:solidFill>
-                  <a:srgbClr val="E67528"/>
+          <a:effectLst>
+            <a:outerShdw sx="100000" sy="100000" kx="0" ky="0" algn="bl" rotWithShape="0" blurRad="101600" dist="38100" dir="5400000">
+              <a:srgbClr val="000000">
+                <a:alpha val="12000"/>
+              </a:srgbClr>
+            </a:outerShdw>
+          </a:effectLst>
+        </p:spPr>
+      </p:sp>
+      <p:pic>
+        <p:nvPicPr>
+          <p:cNvPr id="9" name="Image 1" descr="D:/GitHub/mern-web-book/docs/assets/img/lecture-10/responsive-image-narrow.png">    </p:cNvPr>
+          <p:cNvPicPr>
+            <a:picLocks noChangeAspect="1"/>
+          </p:cNvPicPr>
+          <p:nvPr/>
+        </p:nvPicPr>
+        <p:blipFill>
+          <a:blip r:embed="rId2"/>
+          <a:stretch>
+            <a:fillRect/>
+          </a:stretch>
+        </p:blipFill>
+        <p:spPr>
+          <a:xfrm>
+            <a:off x="6278728" y="2942428"/>
+            <a:ext cx="5272888" cy="2573345"/>
+          </a:xfrm>
+          <a:prstGeom prst="rect">
+            <a:avLst/>
+          </a:prstGeom>
+        </p:spPr>
+      </p:pic>
+      <p:sp>
+        <p:nvSpPr>
+          <p:cNvPr id="10" name="Text 6"/>
+          <p:cNvSpPr txBox="1"/>
+          <p:nvPr/>
+        </p:nvSpPr>
+        <p:spPr>
+          <a:xfrm>
+            <a:off x="640080" y="6446520"/>
+            <a:ext cx="8686800" cy="292608"/>
+          </a:xfrm>
+          <a:prstGeom prst="rect">
+            <a:avLst/>
+          </a:prstGeom>
+          <a:noFill/>
+          <a:ln/>
+        </p:spPr>
+        <p:txBody>
+          <a:bodyPr wrap="square" lIns="0" tIns="0" rIns="0" bIns="0" rtlCol="0" anchor="ctr"/>
+          <a:lstStyle/>
+          <a:p>
+            <a:pPr algn="l" indent="0" marL="0">
+              <a:buNone/>
+            </a:pPr>
+            <a:r>
+              <a:rPr lang="en-US" sz="900" dirty="0">
+                <a:solidFill>
+                  <a:srgbClr val="5D5D72"/>
                 </a:solidFill>
                 <a:latin typeface="Calibri" pitchFamily="34" charset="0"/>
                 <a:ea typeface="Calibri" pitchFamily="34" charset="-122"/>
                 <a:cs typeface="Calibri" pitchFamily="34" charset="-120"/>
               </a:rPr>
-              <a:t>TAILWIND (UTILITY-FIRST)</a:t>
-            </a:r>
-            <a:endParaRPr lang="en-US" sz="1250" dirty="0"/>
-          </a:p>
-        </p:txBody>
-      </p:sp>
-      <p:sp>
-        <p:nvSpPr>
-          <p:cNvPr id="9" name="Text 7"/>
-          <p:cNvSpPr txBox="1"/>
-          <p:nvPr/>
-        </p:nvSpPr>
-        <p:spPr>
-          <a:xfrm>
-            <a:off x="6466180" y="2651760"/>
-            <a:ext cx="4829404" cy="3200400"/>
-          </a:xfrm>
-          <a:prstGeom prst="rect">
-            <a:avLst/>
-          </a:prstGeom>
-          <a:noFill/>
-          <a:ln/>
-        </p:spPr>
-        <p:txBody>
-          <a:bodyPr wrap="square" lIns="0" tIns="0" rIns="0" bIns="0" rtlCol="0" anchor="t"/>
-          <a:lstStyle/>
-          <a:p>
-            <a:pPr marL="342900" indent="-342900">
-              <a:spcAft>
-                <a:spcPts val="600"/>
-              </a:spcAft>
-              <a:buSzPct val="100000"/>
-              <a:buChar char="•"/>
-            </a:pPr>
-            <a:r>
-              <a:rPr lang="en-US" sz="1200" dirty="0">
-                <a:solidFill>
-                  <a:srgbClr val="26262F"/>
-                </a:solidFill>
-                <a:latin typeface="Calibri" pitchFamily="34" charset="0"/>
-                <a:ea typeface="Calibri" pitchFamily="34" charset="-122"/>
-                <a:cs typeface="Calibri" pitchFamily="34" charset="-120"/>
-              </a:rPr>
-              <a:t>Ships hundreds of tiny, single-purpose utility classes (flex, p-4)</a:t>
-            </a:r>
-            <a:endParaRPr lang="en-US" sz="1200" dirty="0"/>
-          </a:p>
-          <a:p>
-            <a:pPr marL="342900" indent="-342900">
-              <a:spcAft>
-                <a:spcPts val="600"/>
-              </a:spcAft>
-              <a:buSzPct val="100000"/>
-              <a:buChar char="•"/>
-            </a:pPr>
-            <a:r>
-              <a:rPr lang="en-US" sz="1200" dirty="0">
-                <a:solidFill>
-                  <a:srgbClr val="26262F"/>
-                </a:solidFill>
-                <a:latin typeface="Calibri" pitchFamily="34" charset="0"/>
-                <a:ea typeface="Calibri" pitchFamily="34" charset="-122"/>
-                <a:cs typeface="Calibri" pitchFamily="34" charset="-120"/>
-              </a:rPr>
-              <a:t>Nothing looks "designed" until you style it yourself</a:t>
-            </a:r>
-            <a:endParaRPr lang="en-US" sz="1200" dirty="0"/>
-          </a:p>
-          <a:p>
-            <a:pPr marL="342900" indent="-342900">
-              <a:spcAft>
-                <a:spcPts val="600"/>
-              </a:spcAft>
-              <a:buSzPct val="100000"/>
-              <a:buChar char="•"/>
-            </a:pPr>
-            <a:r>
-              <a:rPr lang="en-US" sz="1200" dirty="0">
-                <a:solidFill>
-                  <a:srgbClr val="26262F"/>
-                </a:solidFill>
-                <a:latin typeface="Calibri" pitchFamily="34" charset="0"/>
-                <a:ea typeface="Calibri" pitchFamily="34" charset="-122"/>
-                <a:cs typeface="Calibri" pitchFamily="34" charset="-120"/>
-              </a:rPr>
-              <a:t>Takes longer at first — many class names to learn</a:t>
-            </a:r>
-            <a:endParaRPr lang="en-US" sz="1200" dirty="0"/>
-          </a:p>
-        </p:txBody>
-      </p:sp>
-      <p:sp>
-        <p:nvSpPr>
-          <p:cNvPr id="10" name="Text 8"/>
-          <p:cNvSpPr txBox="1"/>
-          <p:nvPr/>
-        </p:nvSpPr>
-        <p:spPr>
-          <a:xfrm>
-            <a:off x="640080" y="6446520"/>
-            <a:ext cx="8686800" cy="292608"/>
-          </a:xfrm>
-          <a:prstGeom prst="rect">
-            <a:avLst/>
-          </a:prstGeom>
-          <a:noFill/>
-          <a:ln/>
-        </p:spPr>
-        <p:txBody>
-          <a:bodyPr wrap="square" lIns="0" tIns="0" rIns="0" bIns="0" rtlCol="0" anchor="ctr"/>
-          <a:lstStyle/>
-          <a:p>
-            <a:pPr algn="l" indent="0" marL="0">
-              <a:buNone/>
-            </a:pPr>
-            <a:r>
-              <a:rPr lang="en-US" sz="900" dirty="0">
-                <a:solidFill>
-                  <a:srgbClr val="5D5D72"/>
-                </a:solidFill>
-                <a:latin typeface="Calibri" pitchFamily="34" charset="0"/>
-                <a:ea typeface="Calibri" pitchFamily="34" charset="-122"/>
-                <a:cs typeface="Calibri" pitchFamily="34" charset="-120"/>
-              </a:rPr>
               <a:t>Usman Akram  •  COMSATS University Islamabad</a:t>
             </a:r>
             <a:endParaRPr lang="en-US" sz="900" dirty="0"/>
@@ -5540,7 +5610,7 @@
       </p:sp>
       <p:sp>
         <p:nvSpPr>
-          <p:cNvPr id="11" name="Text 9"/>
+          <p:cNvPr id="11" name="Text 7"/>
           <p:cNvSpPr txBox="1"/>
           <p:nvPr/>
         </p:nvSpPr>
@@ -5642,7 +5712,7 @@
                 <a:ea typeface="Calibri" pitchFamily="34" charset="-122"/>
                 <a:cs typeface="Calibri" pitchFamily="34" charset="-120"/>
               </a:rPr>
-              <a:t>BOOTSTRAP</a:t>
+              <a:t>FRAMEWORKS</a:t>
             </a:r>
             <a:endParaRPr lang="en-US" sz="1300" dirty="0"/>
           </a:p>
@@ -5681,7 +5751,7 @@
                 <a:ea typeface="Cambria" pitchFamily="34" charset="-122"/>
                 <a:cs typeface="Cambria" pitchFamily="34" charset="-120"/>
               </a:rPr>
-              <a:t>The 12-Column Grid</a:t>
+              <a:t>Component-Based vs. Utility-First</a:t>
             </a:r>
             <a:endParaRPr lang="en-US" sz="3400" dirty="0"/>
           </a:p>
@@ -5696,17 +5766,22 @@
         <p:spPr>
           <a:xfrm>
             <a:off x="640080" y="1965960"/>
-            <a:ext cx="10911535" cy="2990088"/>
+            <a:ext cx="5341468" cy="4114800"/>
           </a:xfrm>
           <a:prstGeom prst="roundRect">
             <a:avLst>
-              <a:gd name="adj" fmla="val 2446"/>
+              <a:gd name="adj" fmla="val 2000"/>
             </a:avLst>
           </a:prstGeom>
           <a:solidFill>
-            <a:srgbClr val="1E1E4C"/>
+            <a:srgbClr val="F1F1F8"/>
           </a:solidFill>
-          <a:ln/>
+          <a:ln w="12700">
+            <a:solidFill>
+              <a:srgbClr val="E2E2EE"/>
+            </a:solidFill>
+            <a:prstDash val="solid"/>
+          </a:ln>
         </p:spPr>
       </p:sp>
       <p:sp>
@@ -5717,173 +5792,306 @@
         </p:nvSpPr>
         <p:spPr>
           <a:xfrm>
-            <a:off x="960120" y="2194560"/>
-            <a:ext cx="10271455" cy="2532888"/>
-          </a:xfrm>
-          <a:prstGeom prst="rect">
-            <a:avLst/>
-          </a:prstGeom>
-          <a:noFill/>
-          <a:ln/>
-        </p:spPr>
-        <p:txBody>
-          <a:bodyPr wrap="square" lIns="0" tIns="0" rIns="0" bIns="0" rtlCol="0" anchor="t"/>
+            <a:off x="896112" y="2194560"/>
+            <a:ext cx="4829404" cy="365760"/>
+          </a:xfrm>
+          <a:prstGeom prst="rect">
+            <a:avLst/>
+          </a:prstGeom>
+          <a:noFill/>
+          <a:ln/>
+        </p:spPr>
+        <p:txBody>
+          <a:bodyPr wrap="square" lIns="0" tIns="0" rIns="0" bIns="0" rtlCol="0" anchor="ctr"/>
           <a:lstStyle/>
           <a:p>
             <a:pPr indent="0" marL="0">
-              <a:lnSpc>
-                <a:spcPct val="125000"/>
-              </a:lnSpc>
-              <a:buNone/>
-            </a:pPr>
-            <a:r>
-              <a:rPr lang="en-US" sz="1400" dirty="0">
-                <a:solidFill>
-                  <a:srgbClr val="C9D3F5"/>
-                </a:solidFill>
-                <a:latin typeface="Courier New" pitchFamily="34" charset="0"/>
-                <a:ea typeface="Courier New" pitchFamily="34" charset="-122"/>
-                <a:cs typeface="Courier New" pitchFamily="34" charset="-120"/>
-              </a:rPr>
-              <a:t>&lt;div class="container"&gt;</a:t>
-            </a:r>
-            <a:endParaRPr lang="en-US" sz="1400" dirty="0"/>
-          </a:p>
-          <a:p>
-            <a:pPr indent="0" marL="0">
-              <a:lnSpc>
-                <a:spcPct val="125000"/>
-              </a:lnSpc>
-              <a:buNone/>
-            </a:pPr>
-            <a:r>
-              <a:rPr lang="en-US" sz="1400" dirty="0">
-                <a:solidFill>
-                  <a:srgbClr val="C9D3F5"/>
-                </a:solidFill>
-                <a:latin typeface="Courier New" pitchFamily="34" charset="0"/>
-                <a:ea typeface="Courier New" pitchFamily="34" charset="-122"/>
-                <a:cs typeface="Courier New" pitchFamily="34" charset="-120"/>
-              </a:rPr>
-              <a:t>  &lt;div class="row"&gt;</a:t>
-            </a:r>
-            <a:endParaRPr lang="en-US" sz="1400" dirty="0"/>
-          </a:p>
-          <a:p>
-            <a:pPr indent="0" marL="0">
-              <a:lnSpc>
-                <a:spcPct val="125000"/>
-              </a:lnSpc>
-              <a:buNone/>
-            </a:pPr>
-            <a:r>
-              <a:rPr lang="en-US" sz="1400" dirty="0">
-                <a:solidFill>
-                  <a:srgbClr val="C9D3F5"/>
-                </a:solidFill>
-                <a:latin typeface="Courier New" pitchFamily="34" charset="0"/>
-                <a:ea typeface="Courier New" pitchFamily="34" charset="-122"/>
-                <a:cs typeface="Courier New" pitchFamily="34" charset="-120"/>
-              </a:rPr>
-              <a:t>    &lt;div class="col-md-8"&gt;Main content&lt;/div&gt;</a:t>
-            </a:r>
-            <a:endParaRPr lang="en-US" sz="1400" dirty="0"/>
-          </a:p>
-          <a:p>
-            <a:pPr indent="0" marL="0">
-              <a:lnSpc>
-                <a:spcPct val="125000"/>
-              </a:lnSpc>
-              <a:buNone/>
-            </a:pPr>
-            <a:r>
-              <a:rPr lang="en-US" sz="1400" dirty="0">
-                <a:solidFill>
-                  <a:srgbClr val="C9D3F5"/>
-                </a:solidFill>
-                <a:latin typeface="Courier New" pitchFamily="34" charset="0"/>
-                <a:ea typeface="Courier New" pitchFamily="34" charset="-122"/>
-                <a:cs typeface="Courier New" pitchFamily="34" charset="-120"/>
-              </a:rPr>
-              <a:t>    &lt;div class="col-md-4"&gt;Sidebar&lt;/div&gt;</a:t>
-            </a:r>
-            <a:endParaRPr lang="en-US" sz="1400" dirty="0"/>
-          </a:p>
-          <a:p>
-            <a:pPr indent="0" marL="0">
-              <a:lnSpc>
-                <a:spcPct val="125000"/>
-              </a:lnSpc>
-              <a:buNone/>
-            </a:pPr>
-            <a:r>
-              <a:rPr lang="en-US" sz="1400" dirty="0">
-                <a:solidFill>
-                  <a:srgbClr val="C9D3F5"/>
-                </a:solidFill>
-                <a:latin typeface="Courier New" pitchFamily="34" charset="0"/>
-                <a:ea typeface="Courier New" pitchFamily="34" charset="-122"/>
-                <a:cs typeface="Courier New" pitchFamily="34" charset="-120"/>
-              </a:rPr>
-              <a:t>  &lt;/div&gt;</a:t>
-            </a:r>
-            <a:endParaRPr lang="en-US" sz="1400" dirty="0"/>
-          </a:p>
-          <a:p>
-            <a:pPr indent="0" marL="0">
-              <a:lnSpc>
-                <a:spcPct val="125000"/>
-              </a:lnSpc>
-              <a:buNone/>
-            </a:pPr>
-            <a:r>
-              <a:rPr lang="en-US" sz="1400" dirty="0">
-                <a:solidFill>
-                  <a:srgbClr val="C9D3F5"/>
-                </a:solidFill>
-                <a:latin typeface="Courier New" pitchFamily="34" charset="0"/>
-                <a:ea typeface="Courier New" pitchFamily="34" charset="-122"/>
-                <a:cs typeface="Courier New" pitchFamily="34" charset="-120"/>
-              </a:rPr>
-              <a:t>&lt;/div&gt;</a:t>
-            </a:r>
-            <a:endParaRPr lang="en-US" sz="1400" dirty="0"/>
-          </a:p>
-        </p:txBody>
-      </p:sp>
-      <p:sp>
-        <p:nvSpPr>
-          <p:cNvPr id="6" name="Text 4"/>
-          <p:cNvSpPr txBox="1"/>
-          <p:nvPr/>
-        </p:nvSpPr>
-        <p:spPr>
-          <a:xfrm>
-            <a:off x="640080" y="6446520"/>
-            <a:ext cx="8686800" cy="292608"/>
-          </a:xfrm>
-          <a:prstGeom prst="rect">
-            <a:avLst/>
-          </a:prstGeom>
-          <a:noFill/>
-          <a:ln/>
-        </p:spPr>
-        <p:txBody>
-          <a:bodyPr wrap="square" lIns="0" tIns="0" rIns="0" bIns="0" rtlCol="0" anchor="ctr"/>
-          <a:lstStyle/>
-          <a:p>
-            <a:pPr algn="l" indent="0" marL="0">
-              <a:buNone/>
-            </a:pPr>
-            <a:r>
-              <a:rPr lang="en-US" sz="900" dirty="0">
-                <a:solidFill>
-                  <a:srgbClr val="5D5D72"/>
+              <a:buNone/>
+            </a:pPr>
+            <a:r>
+              <a:rPr lang="en-US" sz="1250" b="1" spc="150" kern="0" dirty="0">
+                <a:solidFill>
+                  <a:srgbClr val="2B2B7A"/>
                 </a:solidFill>
                 <a:latin typeface="Calibri" pitchFamily="34" charset="0"/>
                 <a:ea typeface="Calibri" pitchFamily="34" charset="-122"/>
                 <a:cs typeface="Calibri" pitchFamily="34" charset="-120"/>
               </a:rPr>
+              <a:t>BOOTSTRAP (COMPONENT-BASED)</a:t>
+            </a:r>
+            <a:endParaRPr lang="en-US" sz="1250" dirty="0"/>
+          </a:p>
+        </p:txBody>
+      </p:sp>
+      <p:sp>
+        <p:nvSpPr>
+          <p:cNvPr id="6" name="Text 4"/>
+          <p:cNvSpPr txBox="1"/>
+          <p:nvPr/>
+        </p:nvSpPr>
+        <p:spPr>
+          <a:xfrm>
+            <a:off x="896112" y="2651760"/>
+            <a:ext cx="4829404" cy="3200400"/>
+          </a:xfrm>
+          <a:prstGeom prst="rect">
+            <a:avLst/>
+          </a:prstGeom>
+          <a:noFill/>
+          <a:ln/>
+        </p:spPr>
+        <p:txBody>
+          <a:bodyPr wrap="square" lIns="0" tIns="0" rIns="0" bIns="0" rtlCol="0" anchor="t"/>
+          <a:lstStyle/>
+          <a:p>
+            <a:pPr marL="342900" indent="-342900">
+              <a:spcAft>
+                <a:spcPts val="600"/>
+              </a:spcAft>
+              <a:buSzPct val="100000"/>
+              <a:buChar char="•"/>
+            </a:pPr>
+            <a:r>
+              <a:rPr lang="en-US" sz="1200" dirty="0">
+                <a:solidFill>
+                  <a:srgbClr val="26262F"/>
+                </a:solidFill>
+                <a:latin typeface="Calibri" pitchFamily="34" charset="0"/>
+                <a:ea typeface="Calibri" pitchFamily="34" charset="-122"/>
+                <a:cs typeface="Calibri" pitchFamily="34" charset="-120"/>
+              </a:rPr>
+              <a:t>Ships pre-styled, ready-to-use components (.btn, .card, .navbar)</a:t>
+            </a:r>
+            <a:endParaRPr lang="en-US" sz="1200" dirty="0"/>
+          </a:p>
+          <a:p>
+            <a:pPr marL="342900" indent="-342900">
+              <a:spcAft>
+                <a:spcPts val="600"/>
+              </a:spcAft>
+              <a:buSzPct val="100000"/>
+              <a:buChar char="•"/>
+            </a:pPr>
+            <a:r>
+              <a:rPr lang="en-US" sz="1200" dirty="0">
+                <a:solidFill>
+                  <a:srgbClr val="26262F"/>
+                </a:solidFill>
+                <a:latin typeface="Calibri" pitchFamily="34" charset="0"/>
+                <a:ea typeface="Calibri" pitchFamily="34" charset="-122"/>
+                <a:cs typeface="Calibri" pitchFamily="34" charset="-120"/>
+              </a:rPr>
+              <a:t>Fast to get a decent-looking page up quickly</a:t>
+            </a:r>
+            <a:endParaRPr lang="en-US" sz="1200" dirty="0"/>
+          </a:p>
+          <a:p>
+            <a:pPr marL="342900" indent="-342900">
+              <a:spcAft>
+                <a:spcPts val="600"/>
+              </a:spcAft>
+              <a:buSzPct val="100000"/>
+              <a:buChar char="•"/>
+            </a:pPr>
+            <a:r>
+              <a:rPr lang="en-US" sz="1200" dirty="0">
+                <a:solidFill>
+                  <a:srgbClr val="26262F"/>
+                </a:solidFill>
+                <a:latin typeface="Calibri" pitchFamily="34" charset="0"/>
+                <a:ea typeface="Calibri" pitchFamily="34" charset="-122"/>
+                <a:cs typeface="Calibri" pitchFamily="34" charset="-120"/>
+              </a:rPr>
+              <a:t>Overriding built-in styles can fight the framework</a:t>
+            </a:r>
+            <a:endParaRPr lang="en-US" sz="1200" dirty="0"/>
+          </a:p>
+        </p:txBody>
+      </p:sp>
+      <p:sp>
+        <p:nvSpPr>
+          <p:cNvPr id="7" name="Shape 5"/>
+          <p:cNvSpPr/>
+          <p:nvPr/>
+        </p:nvSpPr>
+        <p:spPr>
+          <a:xfrm>
+            <a:off x="6210148" y="1965960"/>
+            <a:ext cx="5341468" cy="4114800"/>
+          </a:xfrm>
+          <a:prstGeom prst="roundRect">
+            <a:avLst>
+              <a:gd name="adj" fmla="val 2000"/>
+            </a:avLst>
+          </a:prstGeom>
+          <a:solidFill>
+            <a:srgbClr val="F1F1F8"/>
+          </a:solidFill>
+          <a:ln w="12700">
+            <a:solidFill>
+              <a:srgbClr val="E2E2EE"/>
+            </a:solidFill>
+            <a:prstDash val="solid"/>
+          </a:ln>
+        </p:spPr>
+      </p:sp>
+      <p:sp>
+        <p:nvSpPr>
+          <p:cNvPr id="8" name="Text 6"/>
+          <p:cNvSpPr txBox="1"/>
+          <p:nvPr/>
+        </p:nvSpPr>
+        <p:spPr>
+          <a:xfrm>
+            <a:off x="6466180" y="2194560"/>
+            <a:ext cx="4829404" cy="365760"/>
+          </a:xfrm>
+          <a:prstGeom prst="rect">
+            <a:avLst/>
+          </a:prstGeom>
+          <a:noFill/>
+          <a:ln/>
+        </p:spPr>
+        <p:txBody>
+          <a:bodyPr wrap="square" lIns="0" tIns="0" rIns="0" bIns="0" rtlCol="0" anchor="ctr"/>
+          <a:lstStyle/>
+          <a:p>
+            <a:pPr indent="0" marL="0">
+              <a:buNone/>
+            </a:pPr>
+            <a:r>
+              <a:rPr lang="en-US" sz="1250" b="1" spc="150" kern="0" dirty="0">
+                <a:solidFill>
+                  <a:srgbClr val="E67528"/>
+                </a:solidFill>
+                <a:latin typeface="Calibri" pitchFamily="34" charset="0"/>
+                <a:ea typeface="Calibri" pitchFamily="34" charset="-122"/>
+                <a:cs typeface="Calibri" pitchFamily="34" charset="-120"/>
+              </a:rPr>
+              <a:t>TAILWIND (UTILITY-FIRST)</a:t>
+            </a:r>
+            <a:endParaRPr lang="en-US" sz="1250" dirty="0"/>
+          </a:p>
+        </p:txBody>
+      </p:sp>
+      <p:sp>
+        <p:nvSpPr>
+          <p:cNvPr id="9" name="Text 7"/>
+          <p:cNvSpPr txBox="1"/>
+          <p:nvPr/>
+        </p:nvSpPr>
+        <p:spPr>
+          <a:xfrm>
+            <a:off x="6466180" y="2651760"/>
+            <a:ext cx="4829404" cy="3200400"/>
+          </a:xfrm>
+          <a:prstGeom prst="rect">
+            <a:avLst/>
+          </a:prstGeom>
+          <a:noFill/>
+          <a:ln/>
+        </p:spPr>
+        <p:txBody>
+          <a:bodyPr wrap="square" lIns="0" tIns="0" rIns="0" bIns="0" rtlCol="0" anchor="t"/>
+          <a:lstStyle/>
+          <a:p>
+            <a:pPr marL="342900" indent="-342900">
+              <a:spcAft>
+                <a:spcPts val="600"/>
+              </a:spcAft>
+              <a:buSzPct val="100000"/>
+              <a:buChar char="•"/>
+            </a:pPr>
+            <a:r>
+              <a:rPr lang="en-US" sz="1200" dirty="0">
+                <a:solidFill>
+                  <a:srgbClr val="26262F"/>
+                </a:solidFill>
+                <a:latin typeface="Calibri" pitchFamily="34" charset="0"/>
+                <a:ea typeface="Calibri" pitchFamily="34" charset="-122"/>
+                <a:cs typeface="Calibri" pitchFamily="34" charset="-120"/>
+              </a:rPr>
+              <a:t>Ships hundreds of tiny, single-purpose utility classes (flex, p-4)</a:t>
+            </a:r>
+            <a:endParaRPr lang="en-US" sz="1200" dirty="0"/>
+          </a:p>
+          <a:p>
+            <a:pPr marL="342900" indent="-342900">
+              <a:spcAft>
+                <a:spcPts val="600"/>
+              </a:spcAft>
+              <a:buSzPct val="100000"/>
+              <a:buChar char="•"/>
+            </a:pPr>
+            <a:r>
+              <a:rPr lang="en-US" sz="1200" dirty="0">
+                <a:solidFill>
+                  <a:srgbClr val="26262F"/>
+                </a:solidFill>
+                <a:latin typeface="Calibri" pitchFamily="34" charset="0"/>
+                <a:ea typeface="Calibri" pitchFamily="34" charset="-122"/>
+                <a:cs typeface="Calibri" pitchFamily="34" charset="-120"/>
+              </a:rPr>
+              <a:t>Nothing looks "designed" until you style it yourself</a:t>
+            </a:r>
+            <a:endParaRPr lang="en-US" sz="1200" dirty="0"/>
+          </a:p>
+          <a:p>
+            <a:pPr marL="342900" indent="-342900">
+              <a:spcAft>
+                <a:spcPts val="600"/>
+              </a:spcAft>
+              <a:buSzPct val="100000"/>
+              <a:buChar char="•"/>
+            </a:pPr>
+            <a:r>
+              <a:rPr lang="en-US" sz="1200" dirty="0">
+                <a:solidFill>
+                  <a:srgbClr val="26262F"/>
+                </a:solidFill>
+                <a:latin typeface="Calibri" pitchFamily="34" charset="0"/>
+                <a:ea typeface="Calibri" pitchFamily="34" charset="-122"/>
+                <a:cs typeface="Calibri" pitchFamily="34" charset="-120"/>
+              </a:rPr>
+              <a:t>Takes longer at first — many class names to learn</a:t>
+            </a:r>
+            <a:endParaRPr lang="en-US" sz="1200" dirty="0"/>
+          </a:p>
+        </p:txBody>
+      </p:sp>
+      <p:sp>
+        <p:nvSpPr>
+          <p:cNvPr id="10" name="Text 8"/>
+          <p:cNvSpPr txBox="1"/>
+          <p:nvPr/>
+        </p:nvSpPr>
+        <p:spPr>
+          <a:xfrm>
+            <a:off x="640080" y="6446520"/>
+            <a:ext cx="8686800" cy="292608"/>
+          </a:xfrm>
+          <a:prstGeom prst="rect">
+            <a:avLst/>
+          </a:prstGeom>
+          <a:noFill/>
+          <a:ln/>
+        </p:spPr>
+        <p:txBody>
+          <a:bodyPr wrap="square" lIns="0" tIns="0" rIns="0" bIns="0" rtlCol="0" anchor="ctr"/>
+          <a:lstStyle/>
+          <a:p>
+            <a:pPr algn="l" indent="0" marL="0">
+              <a:buNone/>
+            </a:pPr>
+            <a:r>
+              <a:rPr lang="en-US" sz="900" dirty="0">
+                <a:solidFill>
+                  <a:srgbClr val="5D5D72"/>
+                </a:solidFill>
+                <a:latin typeface="Calibri" pitchFamily="34" charset="0"/>
+                <a:ea typeface="Calibri" pitchFamily="34" charset="-122"/>
+                <a:cs typeface="Calibri" pitchFamily="34" charset="-120"/>
+              </a:rPr>
               <a:t>Usman Akram  •  COMSATS University Islamabad</a:t>
             </a:r>
             <a:endParaRPr lang="en-US" sz="900" dirty="0"/>
@@ -5892,7 +6100,7 @@
       </p:sp>
       <p:sp>
         <p:nvSpPr>
-          <p:cNvPr id="7" name="Text 5"/>
+          <p:cNvPr id="11" name="Text 9"/>
           <p:cNvSpPr txBox="1"/>
           <p:nvPr/>
         </p:nvSpPr>
@@ -6033,7 +6241,7 @@
                 <a:ea typeface="Cambria" pitchFamily="34" charset="-122"/>
                 <a:cs typeface="Cambria" pitchFamily="34" charset="-120"/>
               </a:rPr>
-              <a:t>The Grid, Two Widths</a:t>
+              <a:t>The 12-Column Grid</a:t>
             </a:r>
             <a:endParaRPr lang="en-US" sz="3400" dirty="0"/>
           </a:p>
@@ -6041,231 +6249,201 @@
       </p:sp>
       <p:sp>
         <p:nvSpPr>
-          <p:cNvPr id="4" name="Text 2"/>
-          <p:cNvSpPr txBox="1"/>
+          <p:cNvPr id="4" name="Shape 2"/>
+          <p:cNvSpPr/>
           <p:nvPr/>
         </p:nvSpPr>
         <p:spPr>
           <a:xfrm>
             <a:off x="640080" y="1965960"/>
-            <a:ext cx="5272888" cy="365760"/>
-          </a:xfrm>
-          <a:prstGeom prst="rect">
-            <a:avLst/>
-          </a:prstGeom>
-          <a:noFill/>
-          <a:ln/>
-        </p:spPr>
-        <p:txBody>
-          <a:bodyPr wrap="square" lIns="0" tIns="0" rIns="0" bIns="0" rtlCol="0" anchor="ctr"/>
-          <a:lstStyle/>
-          <a:p>
-            <a:pPr algn="ctr" indent="0" marL="0">
-              <a:buNone/>
-            </a:pPr>
-            <a:r>
-              <a:rPr lang="en-US" sz="1100" b="1" spc="150" kern="0" dirty="0">
-                <a:solidFill>
-                  <a:srgbClr val="E67528"/>
+            <a:ext cx="10911535" cy="2148840"/>
+          </a:xfrm>
+          <a:prstGeom prst="roundRect">
+            <a:avLst>
+              <a:gd name="adj" fmla="val 3404"/>
+            </a:avLst>
+          </a:prstGeom>
+          <a:solidFill>
+            <a:srgbClr val="1E1E4C"/>
+          </a:solidFill>
+          <a:ln/>
+        </p:spPr>
+      </p:sp>
+      <p:sp>
+        <p:nvSpPr>
+          <p:cNvPr id="5" name="Text 3"/>
+          <p:cNvSpPr txBox="1"/>
+          <p:nvPr/>
+        </p:nvSpPr>
+        <p:spPr>
+          <a:xfrm>
+            <a:off x="960120" y="2194560"/>
+            <a:ext cx="10271455" cy="1691640"/>
+          </a:xfrm>
+          <a:prstGeom prst="rect">
+            <a:avLst/>
+          </a:prstGeom>
+          <a:noFill/>
+          <a:ln/>
+        </p:spPr>
+        <p:txBody>
+          <a:bodyPr wrap="square" lIns="0" tIns="0" rIns="0" bIns="0" rtlCol="0" anchor="t"/>
+          <a:lstStyle/>
+          <a:p>
+            <a:pPr indent="0" marL="0">
+              <a:lnSpc>
+                <a:spcPct val="125000"/>
+              </a:lnSpc>
+              <a:buNone/>
+            </a:pPr>
+            <a:r>
+              <a:rPr lang="en-US" sz="1400" dirty="0">
+                <a:solidFill>
+                  <a:srgbClr val="C9D3F5"/>
+                </a:solidFill>
+                <a:latin typeface="Courier New" pitchFamily="34" charset="0"/>
+                <a:ea typeface="Courier New" pitchFamily="34" charset="-122"/>
+                <a:cs typeface="Courier New" pitchFamily="34" charset="-120"/>
+              </a:rPr>
+              <a:t>&lt;div class="container"&gt;</a:t>
+            </a:r>
+            <a:endParaRPr lang="en-US" sz="1400" dirty="0"/>
+          </a:p>
+          <a:p>
+            <a:pPr indent="0" marL="0">
+              <a:lnSpc>
+                <a:spcPct val="125000"/>
+              </a:lnSpc>
+              <a:buNone/>
+            </a:pPr>
+            <a:r>
+              <a:rPr lang="en-US" sz="1400" dirty="0">
+                <a:solidFill>
+                  <a:srgbClr val="C9D3F5"/>
+                </a:solidFill>
+                <a:latin typeface="Courier New" pitchFamily="34" charset="0"/>
+                <a:ea typeface="Courier New" pitchFamily="34" charset="-122"/>
+                <a:cs typeface="Courier New" pitchFamily="34" charset="-120"/>
+              </a:rPr>
+              <a:t>  &lt;div class="row"&gt;</a:t>
+            </a:r>
+            <a:endParaRPr lang="en-US" sz="1400" dirty="0"/>
+          </a:p>
+          <a:p>
+            <a:pPr indent="0" marL="0">
+              <a:lnSpc>
+                <a:spcPct val="125000"/>
+              </a:lnSpc>
+              <a:buNone/>
+            </a:pPr>
+            <a:r>
+              <a:rPr lang="en-US" sz="1400" dirty="0">
+                <a:solidFill>
+                  <a:srgbClr val="C9D3F5"/>
+                </a:solidFill>
+                <a:latin typeface="Courier New" pitchFamily="34" charset="0"/>
+                <a:ea typeface="Courier New" pitchFamily="34" charset="-122"/>
+                <a:cs typeface="Courier New" pitchFamily="34" charset="-120"/>
+              </a:rPr>
+              <a:t>    &lt;div class="col-md-8"&gt;Main content&lt;/div&gt;</a:t>
+            </a:r>
+            <a:endParaRPr lang="en-US" sz="1400" dirty="0"/>
+          </a:p>
+          <a:p>
+            <a:pPr indent="0" marL="0">
+              <a:lnSpc>
+                <a:spcPct val="125000"/>
+              </a:lnSpc>
+              <a:buNone/>
+            </a:pPr>
+            <a:r>
+              <a:rPr lang="en-US" sz="1400" dirty="0">
+                <a:solidFill>
+                  <a:srgbClr val="C9D3F5"/>
+                </a:solidFill>
+                <a:latin typeface="Courier New" pitchFamily="34" charset="0"/>
+                <a:ea typeface="Courier New" pitchFamily="34" charset="-122"/>
+                <a:cs typeface="Courier New" pitchFamily="34" charset="-120"/>
+              </a:rPr>
+              <a:t>    &lt;div class="col-md-4"&gt;Sidebar&lt;/div&gt;</a:t>
+            </a:r>
+            <a:endParaRPr lang="en-US" sz="1400" dirty="0"/>
+          </a:p>
+          <a:p>
+            <a:pPr indent="0" marL="0">
+              <a:lnSpc>
+                <a:spcPct val="125000"/>
+              </a:lnSpc>
+              <a:buNone/>
+            </a:pPr>
+            <a:r>
+              <a:rPr lang="en-US" sz="1400" dirty="0">
+                <a:solidFill>
+                  <a:srgbClr val="C9D3F5"/>
+                </a:solidFill>
+                <a:latin typeface="Courier New" pitchFamily="34" charset="0"/>
+                <a:ea typeface="Courier New" pitchFamily="34" charset="-122"/>
+                <a:cs typeface="Courier New" pitchFamily="34" charset="-120"/>
+              </a:rPr>
+              <a:t>  &lt;/div&gt;</a:t>
+            </a:r>
+            <a:endParaRPr lang="en-US" sz="1400" dirty="0"/>
+          </a:p>
+          <a:p>
+            <a:pPr indent="0" marL="0">
+              <a:lnSpc>
+                <a:spcPct val="125000"/>
+              </a:lnSpc>
+              <a:buNone/>
+            </a:pPr>
+            <a:r>
+              <a:rPr lang="en-US" sz="1400" dirty="0">
+                <a:solidFill>
+                  <a:srgbClr val="C9D3F5"/>
+                </a:solidFill>
+                <a:latin typeface="Courier New" pitchFamily="34" charset="0"/>
+                <a:ea typeface="Courier New" pitchFamily="34" charset="-122"/>
+                <a:cs typeface="Courier New" pitchFamily="34" charset="-120"/>
+              </a:rPr>
+              <a:t>&lt;/div&gt;</a:t>
+            </a:r>
+            <a:endParaRPr lang="en-US" sz="1400" dirty="0"/>
+          </a:p>
+        </p:txBody>
+      </p:sp>
+      <p:sp>
+        <p:nvSpPr>
+          <p:cNvPr id="6" name="Text 4"/>
+          <p:cNvSpPr txBox="1"/>
+          <p:nvPr/>
+        </p:nvSpPr>
+        <p:spPr>
+          <a:xfrm>
+            <a:off x="640080" y="6446520"/>
+            <a:ext cx="8686800" cy="292608"/>
+          </a:xfrm>
+          <a:prstGeom prst="rect">
+            <a:avLst/>
+          </a:prstGeom>
+          <a:noFill/>
+          <a:ln/>
+        </p:spPr>
+        <p:txBody>
+          <a:bodyPr wrap="square" lIns="0" tIns="0" rIns="0" bIns="0" rtlCol="0" anchor="ctr"/>
+          <a:lstStyle/>
+          <a:p>
+            <a:pPr algn="l" indent="0" marL="0">
+              <a:buNone/>
+            </a:pPr>
+            <a:r>
+              <a:rPr lang="en-US" sz="900" dirty="0">
+                <a:solidFill>
+                  <a:srgbClr val="5D5D72"/>
                 </a:solidFill>
                 <a:latin typeface="Calibri" pitchFamily="34" charset="0"/>
                 <a:ea typeface="Calibri" pitchFamily="34" charset="-122"/>
                 <a:cs typeface="Calibri" pitchFamily="34" charset="-120"/>
               </a:rPr>
-              <a:t>WIDE (SIDE BY SIDE)</a:t>
-            </a:r>
-            <a:endParaRPr lang="en-US" sz="1100" dirty="0"/>
-          </a:p>
-        </p:txBody>
-      </p:sp>
-      <p:sp>
-        <p:nvSpPr>
-          <p:cNvPr id="5" name="Shape 3"/>
-          <p:cNvSpPr/>
-          <p:nvPr/>
-        </p:nvSpPr>
-        <p:spPr>
-          <a:xfrm>
-            <a:off x="530352" y="2313432"/>
-            <a:ext cx="5492344" cy="3831336"/>
-          </a:xfrm>
-          <a:prstGeom prst="roundRect">
-            <a:avLst>
-              <a:gd name="adj" fmla="val 1432"/>
-            </a:avLst>
-          </a:prstGeom>
-          <a:solidFill>
-            <a:srgbClr val="FFFFFF"/>
-          </a:solidFill>
-          <a:ln w="12700">
-            <a:solidFill>
-              <a:srgbClr val="E2E2EE"/>
-            </a:solidFill>
-            <a:prstDash val="solid"/>
-          </a:ln>
-          <a:effectLst>
-            <a:outerShdw sx="100000" sy="100000" kx="0" ky="0" algn="bl" rotWithShape="0" blurRad="101600" dist="38100" dir="5400000">
-              <a:srgbClr val="000000">
-                <a:alpha val="12000"/>
-              </a:srgbClr>
-            </a:outerShdw>
-          </a:effectLst>
-        </p:spPr>
-      </p:sp>
-      <p:pic>
-        <p:nvPicPr>
-          <p:cNvPr id="6" name="Image 0" descr="D:/GitHub/mern-web-book/docs/assets/img/lecture-10/bootstrap-grid-wide.png">    </p:cNvPr>
-          <p:cNvPicPr>
-            <a:picLocks noChangeAspect="1"/>
-          </p:cNvPicPr>
-          <p:nvPr/>
-        </p:nvPicPr>
-        <p:blipFill>
-          <a:blip r:embed="rId1"/>
-          <a:stretch>
-            <a:fillRect/>
-          </a:stretch>
-        </p:blipFill>
-        <p:spPr>
-          <a:xfrm>
-            <a:off x="640080" y="3945093"/>
-            <a:ext cx="5272888" cy="568014"/>
-          </a:xfrm>
-          <a:prstGeom prst="rect">
-            <a:avLst/>
-          </a:prstGeom>
-        </p:spPr>
-      </p:pic>
-      <p:sp>
-        <p:nvSpPr>
-          <p:cNvPr id="7" name="Text 4"/>
-          <p:cNvSpPr txBox="1"/>
-          <p:nvPr/>
-        </p:nvSpPr>
-        <p:spPr>
-          <a:xfrm>
-            <a:off x="6278728" y="1965960"/>
-            <a:ext cx="5272888" cy="365760"/>
-          </a:xfrm>
-          <a:prstGeom prst="rect">
-            <a:avLst/>
-          </a:prstGeom>
-          <a:noFill/>
-          <a:ln/>
-        </p:spPr>
-        <p:txBody>
-          <a:bodyPr wrap="square" lIns="0" tIns="0" rIns="0" bIns="0" rtlCol="0" anchor="ctr"/>
-          <a:lstStyle/>
-          <a:p>
-            <a:pPr algn="ctr" indent="0" marL="0">
-              <a:buNone/>
-            </a:pPr>
-            <a:r>
-              <a:rPr lang="en-US" sz="1100" b="1" spc="150" kern="0" dirty="0">
-                <a:solidFill>
-                  <a:srgbClr val="E67528"/>
-                </a:solidFill>
-                <a:latin typeface="Calibri" pitchFamily="34" charset="0"/>
-                <a:ea typeface="Calibri" pitchFamily="34" charset="-122"/>
-                <a:cs typeface="Calibri" pitchFamily="34" charset="-120"/>
-              </a:rPr>
-              <a:t>NARROW (STACKED)</a:t>
-            </a:r>
-            <a:endParaRPr lang="en-US" sz="1100" dirty="0"/>
-          </a:p>
-        </p:txBody>
-      </p:sp>
-      <p:sp>
-        <p:nvSpPr>
-          <p:cNvPr id="8" name="Shape 5"/>
-          <p:cNvSpPr/>
-          <p:nvPr/>
-        </p:nvSpPr>
-        <p:spPr>
-          <a:xfrm>
-            <a:off x="6169000" y="2313432"/>
-            <a:ext cx="5492344" cy="3831336"/>
-          </a:xfrm>
-          <a:prstGeom prst="roundRect">
-            <a:avLst>
-              <a:gd name="adj" fmla="val 1432"/>
-            </a:avLst>
-          </a:prstGeom>
-          <a:solidFill>
-            <a:srgbClr val="FFFFFF"/>
-          </a:solidFill>
-          <a:ln w="12700">
-            <a:solidFill>
-              <a:srgbClr val="E2E2EE"/>
-            </a:solidFill>
-            <a:prstDash val="solid"/>
-          </a:ln>
-          <a:effectLst>
-            <a:outerShdw sx="100000" sy="100000" kx="0" ky="0" algn="bl" rotWithShape="0" blurRad="101600" dist="38100" dir="5400000">
-              <a:srgbClr val="000000">
-                <a:alpha val="12000"/>
-              </a:srgbClr>
-            </a:outerShdw>
-          </a:effectLst>
-        </p:spPr>
-      </p:sp>
-      <p:pic>
-        <p:nvPicPr>
-          <p:cNvPr id="9" name="Image 1" descr="D:/GitHub/mern-web-book/docs/assets/img/lecture-10/bootstrap-grid-narrow.png">    </p:cNvPr>
-          <p:cNvPicPr>
-            <a:picLocks noChangeAspect="1"/>
-          </p:cNvPicPr>
-          <p:nvPr/>
-        </p:nvPicPr>
-        <p:blipFill>
-          <a:blip r:embed="rId2"/>
-          <a:stretch>
-            <a:fillRect/>
-          </a:stretch>
-        </p:blipFill>
-        <p:spPr>
-          <a:xfrm>
-            <a:off x="6278728" y="3550603"/>
-            <a:ext cx="5272888" cy="1356993"/>
-          </a:xfrm>
-          <a:prstGeom prst="rect">
-            <a:avLst/>
-          </a:prstGeom>
-        </p:spPr>
-      </p:pic>
-      <p:sp>
-        <p:nvSpPr>
-          <p:cNvPr id="10" name="Text 6"/>
-          <p:cNvSpPr txBox="1"/>
-          <p:nvPr/>
-        </p:nvSpPr>
-        <p:spPr>
-          <a:xfrm>
-            <a:off x="640080" y="6446520"/>
-            <a:ext cx="8686800" cy="292608"/>
-          </a:xfrm>
-          <a:prstGeom prst="rect">
-            <a:avLst/>
-          </a:prstGeom>
-          <a:noFill/>
-          <a:ln/>
-        </p:spPr>
-        <p:txBody>
-          <a:bodyPr wrap="square" lIns="0" tIns="0" rIns="0" bIns="0" rtlCol="0" anchor="ctr"/>
-          <a:lstStyle/>
-          <a:p>
-            <a:pPr algn="l" indent="0" marL="0">
-              <a:buNone/>
-            </a:pPr>
-            <a:r>
-              <a:rPr lang="en-US" sz="900" dirty="0">
-                <a:solidFill>
-                  <a:srgbClr val="5D5D72"/>
-                </a:solidFill>
-                <a:latin typeface="Calibri" pitchFamily="34" charset="0"/>
-                <a:ea typeface="Calibri" pitchFamily="34" charset="-122"/>
-                <a:cs typeface="Calibri" pitchFamily="34" charset="-120"/>
-              </a:rPr>
               <a:t>Usman Akram  •  COMSATS University Islamabad</a:t>
             </a:r>
             <a:endParaRPr lang="en-US" sz="900" dirty="0"/>
@@ -6274,7 +6452,7 @@
       </p:sp>
       <p:sp>
         <p:nvSpPr>
-          <p:cNvPr id="11" name="Text 7"/>
+          <p:cNvPr id="7" name="Text 5"/>
           <p:cNvSpPr txBox="1"/>
           <p:nvPr/>
         </p:nvSpPr>
@@ -6415,7 +6593,7 @@
                 <a:ea typeface="Cambria" pitchFamily="34" charset="-122"/>
                 <a:cs typeface="Cambria" pitchFamily="34" charset="-120"/>
               </a:rPr>
-              <a:t>Components, Rendered</a:t>
+              <a:t>The Grid, Two Widths</a:t>
             </a:r>
             <a:endParaRPr lang="en-US" sz="3400" dirty="0"/>
           </a:p>
@@ -6429,34 +6607,34 @@
         </p:nvSpPr>
         <p:spPr>
           <a:xfrm>
-            <a:off x="640080" y="1691640"/>
-            <a:ext cx="10911535" cy="411480"/>
-          </a:xfrm>
-          <a:prstGeom prst="rect">
-            <a:avLst/>
-          </a:prstGeom>
-          <a:noFill/>
-          <a:ln/>
-        </p:spPr>
-        <p:txBody>
-          <a:bodyPr wrap="square" lIns="0" tIns="0" rIns="0" bIns="0" rtlCol="0" anchor="ctr"/>
-          <a:lstStyle/>
-          <a:p>
-            <a:pPr indent="0" marL="0">
-              <a:buNone/>
-            </a:pPr>
-            <a:r>
-              <a:rPr lang="en-US" sz="1350" i="1" dirty="0">
-                <a:solidFill>
-                  <a:srgbClr val="5D5D72"/>
+            <a:off x="640080" y="1965960"/>
+            <a:ext cx="5272888" cy="365760"/>
+          </a:xfrm>
+          <a:prstGeom prst="rect">
+            <a:avLst/>
+          </a:prstGeom>
+          <a:noFill/>
+          <a:ln/>
+        </p:spPr>
+        <p:txBody>
+          <a:bodyPr wrap="square" lIns="0" tIns="0" rIns="0" bIns="0" rtlCol="0" anchor="ctr"/>
+          <a:lstStyle/>
+          <a:p>
+            <a:pPr algn="ctr" indent="0" marL="0">
+              <a:buNone/>
+            </a:pPr>
+            <a:r>
+              <a:rPr lang="en-US" sz="1100" b="1" spc="150" kern="0" dirty="0">
+                <a:solidFill>
+                  <a:srgbClr val="E67528"/>
                 </a:solidFill>
                 <a:latin typeface="Calibri" pitchFamily="34" charset="0"/>
                 <a:ea typeface="Calibri" pitchFamily="34" charset="-122"/>
                 <a:cs typeface="Calibri" pitchFamily="34" charset="-120"/>
               </a:rPr>
-              <a:t>A button, a card, and a navbar — three lines of HTML, zero custom CSS.</a:t>
-            </a:r>
-            <a:endParaRPr lang="en-US" sz="1350" dirty="0"/>
+              <a:t>WIDE (SIDE BY SIDE)</a:t>
+            </a:r>
+            <a:endParaRPr lang="en-US" sz="1100" dirty="0"/>
           </a:p>
         </p:txBody>
       </p:sp>
@@ -6468,12 +6646,12 @@
         </p:nvSpPr>
         <p:spPr>
           <a:xfrm>
-            <a:off x="530352" y="2221992"/>
-            <a:ext cx="11130991" cy="4059936"/>
+            <a:off x="530352" y="2313432"/>
+            <a:ext cx="5492344" cy="3831336"/>
           </a:xfrm>
           <a:prstGeom prst="roundRect">
             <a:avLst>
-              <a:gd name="adj" fmla="val 1351"/>
+              <a:gd name="adj" fmla="val 1432"/>
             </a:avLst>
           </a:prstGeom>
           <a:solidFill>
@@ -6496,7 +6674,7 @@
       </p:sp>
       <p:pic>
         <p:nvPicPr>
-          <p:cNvPr id="6" name="Image 0" descr="D:/GitHub/mern-web-book/docs/assets/img/lecture-10/bootstrap-components.png">    </p:cNvPr>
+          <p:cNvPr id="6" name="Image 0" descr="D:/GitHub/mern-web-book/docs/assets/img/lecture-10/bootstrap-grid-wide.png">    </p:cNvPr>
           <p:cNvPicPr>
             <a:picLocks noChangeAspect="1"/>
           </p:cNvPicPr>
@@ -6510,8 +6688,8 @@
         </p:blipFill>
         <p:spPr>
           <a:xfrm>
-            <a:off x="3173218" y="2331720"/>
-            <a:ext cx="5845259" cy="3840480"/>
+            <a:off x="640080" y="3945093"/>
+            <a:ext cx="5272888" cy="568014"/>
           </a:xfrm>
           <a:prstGeom prst="rect">
             <a:avLst/>
@@ -6526,31 +6704,128 @@
         </p:nvSpPr>
         <p:spPr>
           <a:xfrm>
-            <a:off x="640080" y="6446520"/>
-            <a:ext cx="8686800" cy="292608"/>
-          </a:xfrm>
-          <a:prstGeom prst="rect">
-            <a:avLst/>
-          </a:prstGeom>
-          <a:noFill/>
-          <a:ln/>
-        </p:spPr>
-        <p:txBody>
-          <a:bodyPr wrap="square" lIns="0" tIns="0" rIns="0" bIns="0" rtlCol="0" anchor="ctr"/>
-          <a:lstStyle/>
-          <a:p>
-            <a:pPr algn="l" indent="0" marL="0">
-              <a:buNone/>
-            </a:pPr>
-            <a:r>
-              <a:rPr lang="en-US" sz="900" dirty="0">
-                <a:solidFill>
-                  <a:srgbClr val="5D5D72"/>
+            <a:off x="6278728" y="1965960"/>
+            <a:ext cx="5272888" cy="365760"/>
+          </a:xfrm>
+          <a:prstGeom prst="rect">
+            <a:avLst/>
+          </a:prstGeom>
+          <a:noFill/>
+          <a:ln/>
+        </p:spPr>
+        <p:txBody>
+          <a:bodyPr wrap="square" lIns="0" tIns="0" rIns="0" bIns="0" rtlCol="0" anchor="ctr"/>
+          <a:lstStyle/>
+          <a:p>
+            <a:pPr algn="ctr" indent="0" marL="0">
+              <a:buNone/>
+            </a:pPr>
+            <a:r>
+              <a:rPr lang="en-US" sz="1100" b="1" spc="150" kern="0" dirty="0">
+                <a:solidFill>
+                  <a:srgbClr val="E67528"/>
                 </a:solidFill>
                 <a:latin typeface="Calibri" pitchFamily="34" charset="0"/>
                 <a:ea typeface="Calibri" pitchFamily="34" charset="-122"/>
                 <a:cs typeface="Calibri" pitchFamily="34" charset="-120"/>
               </a:rPr>
+              <a:t>NARROW (STACKED)</a:t>
+            </a:r>
+            <a:endParaRPr lang="en-US" sz="1100" dirty="0"/>
+          </a:p>
+        </p:txBody>
+      </p:sp>
+      <p:sp>
+        <p:nvSpPr>
+          <p:cNvPr id="8" name="Shape 5"/>
+          <p:cNvSpPr/>
+          <p:nvPr/>
+        </p:nvSpPr>
+        <p:spPr>
+          <a:xfrm>
+            <a:off x="6169000" y="2313432"/>
+            <a:ext cx="5492344" cy="3831336"/>
+          </a:xfrm>
+          <a:prstGeom prst="roundRect">
+            <a:avLst>
+              <a:gd name="adj" fmla="val 1432"/>
+            </a:avLst>
+          </a:prstGeom>
+          <a:solidFill>
+            <a:srgbClr val="FFFFFF"/>
+          </a:solidFill>
+          <a:ln w="12700">
+            <a:solidFill>
+              <a:srgbClr val="E2E2EE"/>
+            </a:solidFill>
+            <a:prstDash val="solid"/>
+          </a:ln>
+          <a:effectLst>
+            <a:outerShdw sx="100000" sy="100000" kx="0" ky="0" algn="bl" rotWithShape="0" blurRad="101600" dist="38100" dir="5400000">
+              <a:srgbClr val="000000">
+                <a:alpha val="12000"/>
+              </a:srgbClr>
+            </a:outerShdw>
+          </a:effectLst>
+        </p:spPr>
+      </p:sp>
+      <p:pic>
+        <p:nvPicPr>
+          <p:cNvPr id="9" name="Image 1" descr="D:/GitHub/mern-web-book/docs/assets/img/lecture-10/bootstrap-grid-narrow.png">    </p:cNvPr>
+          <p:cNvPicPr>
+            <a:picLocks noChangeAspect="1"/>
+          </p:cNvPicPr>
+          <p:nvPr/>
+        </p:nvPicPr>
+        <p:blipFill>
+          <a:blip r:embed="rId2"/>
+          <a:stretch>
+            <a:fillRect/>
+          </a:stretch>
+        </p:blipFill>
+        <p:spPr>
+          <a:xfrm>
+            <a:off x="6278728" y="3550603"/>
+            <a:ext cx="5272888" cy="1356993"/>
+          </a:xfrm>
+          <a:prstGeom prst="rect">
+            <a:avLst/>
+          </a:prstGeom>
+        </p:spPr>
+      </p:pic>
+      <p:sp>
+        <p:nvSpPr>
+          <p:cNvPr id="10" name="Text 6"/>
+          <p:cNvSpPr txBox="1"/>
+          <p:nvPr/>
+        </p:nvSpPr>
+        <p:spPr>
+          <a:xfrm>
+            <a:off x="640080" y="6446520"/>
+            <a:ext cx="8686800" cy="292608"/>
+          </a:xfrm>
+          <a:prstGeom prst="rect">
+            <a:avLst/>
+          </a:prstGeom>
+          <a:noFill/>
+          <a:ln/>
+        </p:spPr>
+        <p:txBody>
+          <a:bodyPr wrap="square" lIns="0" tIns="0" rIns="0" bIns="0" rtlCol="0" anchor="ctr"/>
+          <a:lstStyle/>
+          <a:p>
+            <a:pPr algn="l" indent="0" marL="0">
+              <a:buNone/>
+            </a:pPr>
+            <a:r>
+              <a:rPr lang="en-US" sz="900" dirty="0">
+                <a:solidFill>
+                  <a:srgbClr val="5D5D72"/>
+                </a:solidFill>
+                <a:latin typeface="Calibri" pitchFamily="34" charset="0"/>
+                <a:ea typeface="Calibri" pitchFamily="34" charset="-122"/>
+                <a:cs typeface="Calibri" pitchFamily="34" charset="-120"/>
+              </a:rPr>
               <a:t>Usman Akram  •  COMSATS University Islamabad</a:t>
             </a:r>
             <a:endParaRPr lang="en-US" sz="900" dirty="0"/>
@@ -6559,7 +6834,7 @@
       </p:sp>
       <p:sp>
         <p:nvSpPr>
-          <p:cNvPr id="8" name="Text 5"/>
+          <p:cNvPr id="11" name="Text 7"/>
           <p:cNvSpPr txBox="1"/>
           <p:nvPr/>
         </p:nvSpPr>
@@ -6700,7 +6975,7 @@
                 <a:ea typeface="Cambria" pitchFamily="34" charset="-122"/>
                 <a:cs typeface="Cambria" pitchFamily="34" charset="-120"/>
               </a:rPr>
-              <a:t>Utilities, Rendered</a:t>
+              <a:t>Components, Rendered</a:t>
             </a:r>
             <a:endParaRPr lang="en-US" sz="3400" dirty="0"/>
           </a:p>
@@ -6739,7 +7014,7 @@
                 <a:ea typeface="Calibri" pitchFamily="34" charset="-122"/>
                 <a:cs typeface="Calibri" pitchFamily="34" charset="-120"/>
               </a:rPr>
-              <a:t>d-flex justify-content-between p-3 — spacing and alignment classes, similar in spirit to Tailwind.</a:t>
+              <a:t>Three lines of HTML, zero custom CSS.</a:t>
             </a:r>
             <a:endParaRPr lang="en-US" sz="1350" dirty="0"/>
           </a:p>
@@ -6753,12 +7028,174 @@
         </p:nvSpPr>
         <p:spPr>
           <a:xfrm>
-            <a:off x="530352" y="2221992"/>
-            <a:ext cx="11130991" cy="4059936"/>
+            <a:off x="640080" y="2240280"/>
+            <a:ext cx="10911535" cy="2215515"/>
           </a:xfrm>
           <a:prstGeom prst="roundRect">
             <a:avLst>
-              <a:gd name="adj" fmla="val 1351"/>
+              <a:gd name="adj" fmla="val 3302"/>
+            </a:avLst>
+          </a:prstGeom>
+          <a:solidFill>
+            <a:srgbClr val="1E1E4C"/>
+          </a:solidFill>
+          <a:ln/>
+        </p:spPr>
+      </p:sp>
+      <p:sp>
+        <p:nvSpPr>
+          <p:cNvPr id="6" name="Text 4"/>
+          <p:cNvSpPr txBox="1"/>
+          <p:nvPr/>
+        </p:nvSpPr>
+        <p:spPr>
+          <a:xfrm>
+            <a:off x="960120" y="2468880"/>
+            <a:ext cx="10271455" cy="1758315"/>
+          </a:xfrm>
+          <a:prstGeom prst="rect">
+            <a:avLst/>
+          </a:prstGeom>
+          <a:noFill/>
+          <a:ln/>
+        </p:spPr>
+        <p:txBody>
+          <a:bodyPr wrap="square" lIns="0" tIns="0" rIns="0" bIns="0" rtlCol="0" anchor="t"/>
+          <a:lstStyle/>
+          <a:p>
+            <a:pPr indent="0" marL="0">
+              <a:lnSpc>
+                <a:spcPct val="125000"/>
+              </a:lnSpc>
+              <a:buNone/>
+            </a:pPr>
+            <a:r>
+              <a:rPr lang="en-US" sz="1250" dirty="0">
+                <a:solidFill>
+                  <a:srgbClr val="C9D3F5"/>
+                </a:solidFill>
+                <a:latin typeface="Courier New" pitchFamily="34" charset="0"/>
+                <a:ea typeface="Courier New" pitchFamily="34" charset="-122"/>
+                <a:cs typeface="Courier New" pitchFamily="34" charset="-120"/>
+              </a:rPr>
+              <a:t>&lt;button class="btn btn-primary"&gt;Save Changes&lt;/button&gt;</a:t>
+            </a:r>
+            <a:endParaRPr lang="en-US" sz="1250" dirty="0"/>
+          </a:p>
+          <a:p>
+            <a:pPr indent="0" marL="0">
+              <a:lnSpc>
+                <a:spcPct val="125000"/>
+              </a:lnSpc>
+              <a:buNone/>
+            </a:pPr>
+            <a:endParaRPr lang="en-US" sz="1250" dirty="0"/>
+          </a:p>
+          <a:p>
+            <a:pPr indent="0" marL="0">
+              <a:lnSpc>
+                <a:spcPct val="125000"/>
+              </a:lnSpc>
+              <a:buNone/>
+            </a:pPr>
+            <a:r>
+              <a:rPr lang="en-US" sz="1250" dirty="0">
+                <a:solidFill>
+                  <a:srgbClr val="C9D3F5"/>
+                </a:solidFill>
+                <a:latin typeface="Courier New" pitchFamily="34" charset="0"/>
+                <a:ea typeface="Courier New" pitchFamily="34" charset="-122"/>
+                <a:cs typeface="Courier New" pitchFamily="34" charset="-120"/>
+              </a:rPr>
+              <a:t>&lt;div class="card"&gt;&lt;div class="card-body"&gt;</a:t>
+            </a:r>
+            <a:endParaRPr lang="en-US" sz="1250" dirty="0"/>
+          </a:p>
+          <a:p>
+            <a:pPr indent="0" marL="0">
+              <a:lnSpc>
+                <a:spcPct val="125000"/>
+              </a:lnSpc>
+              <a:buNone/>
+            </a:pPr>
+            <a:r>
+              <a:rPr lang="en-US" sz="1250" dirty="0">
+                <a:solidFill>
+                  <a:srgbClr val="C9D3F5"/>
+                </a:solidFill>
+                <a:latin typeface="Courier New" pitchFamily="34" charset="0"/>
+                <a:ea typeface="Courier New" pitchFamily="34" charset="-122"/>
+                <a:cs typeface="Courier New" pitchFamily="34" charset="-120"/>
+              </a:rPr>
+              <a:t>  &lt;h5 class="card-title"&gt;Card Title&lt;/h5&gt;</a:t>
+            </a:r>
+            <a:endParaRPr lang="en-US" sz="1250" dirty="0"/>
+          </a:p>
+          <a:p>
+            <a:pPr indent="0" marL="0">
+              <a:lnSpc>
+                <a:spcPct val="125000"/>
+              </a:lnSpc>
+              <a:buNone/>
+            </a:pPr>
+            <a:r>
+              <a:rPr lang="en-US" sz="1250" dirty="0">
+                <a:solidFill>
+                  <a:srgbClr val="C9D3F5"/>
+                </a:solidFill>
+                <a:latin typeface="Courier New" pitchFamily="34" charset="0"/>
+                <a:ea typeface="Courier New" pitchFamily="34" charset="-122"/>
+                <a:cs typeface="Courier New" pitchFamily="34" charset="-120"/>
+              </a:rPr>
+              <a:t>&lt;/div&gt;&lt;/div&gt;</a:t>
+            </a:r>
+            <a:endParaRPr lang="en-US" sz="1250" dirty="0"/>
+          </a:p>
+          <a:p>
+            <a:pPr indent="0" marL="0">
+              <a:lnSpc>
+                <a:spcPct val="125000"/>
+              </a:lnSpc>
+              <a:buNone/>
+            </a:pPr>
+            <a:endParaRPr lang="en-US" sz="1250" dirty="0"/>
+          </a:p>
+          <a:p>
+            <a:pPr indent="0" marL="0">
+              <a:lnSpc>
+                <a:spcPct val="125000"/>
+              </a:lnSpc>
+              <a:buNone/>
+            </a:pPr>
+            <a:r>
+              <a:rPr lang="en-US" sz="1250" dirty="0">
+                <a:solidFill>
+                  <a:srgbClr val="C9D3F5"/>
+                </a:solidFill>
+                <a:latin typeface="Courier New" pitchFamily="34" charset="0"/>
+                <a:ea typeface="Courier New" pitchFamily="34" charset="-122"/>
+                <a:cs typeface="Courier New" pitchFamily="34" charset="-120"/>
+              </a:rPr>
+              <a:t>&lt;nav class="navbar navbar-expand-lg navbar-light bg-light"&gt;...&lt;/nav&gt;</a:t>
+            </a:r>
+            <a:endParaRPr lang="en-US" sz="1250" dirty="0"/>
+          </a:p>
+        </p:txBody>
+      </p:sp>
+      <p:sp>
+        <p:nvSpPr>
+          <p:cNvPr id="7" name="Shape 5"/>
+          <p:cNvSpPr/>
+          <p:nvPr/>
+        </p:nvSpPr>
+        <p:spPr>
+          <a:xfrm>
+            <a:off x="530352" y="4620387"/>
+            <a:ext cx="11130991" cy="1707261"/>
+          </a:xfrm>
+          <a:prstGeom prst="roundRect">
+            <a:avLst>
+              <a:gd name="adj" fmla="val 3214"/>
             </a:avLst>
           </a:prstGeom>
           <a:solidFill>
@@ -6781,7 +7218,7 @@
       </p:sp>
       <p:pic>
         <p:nvPicPr>
-          <p:cNvPr id="6" name="Image 0" descr="D:/GitHub/mern-web-book/docs/assets/img/lecture-10/bootstrap-utilities.png">    </p:cNvPr>
+          <p:cNvPr id="8" name="Image 0" descr="D:/GitHub/mern-web-book/docs/assets/img/lecture-10/bootstrap-components.png">    </p:cNvPr>
           <p:cNvPicPr>
             <a:picLocks noChangeAspect="1"/>
           </p:cNvPicPr>
@@ -6795,8 +7232,8 @@
         </p:blipFill>
         <p:spPr>
           <a:xfrm>
-            <a:off x="640080" y="3467226"/>
-            <a:ext cx="10911535" cy="1569467"/>
+            <a:off x="4963619" y="4730115"/>
+            <a:ext cx="2264458" cy="1487805"/>
           </a:xfrm>
           <a:prstGeom prst="rect">
             <a:avLst/>
@@ -6805,7 +7242,7 @@
       </p:pic>
       <p:sp>
         <p:nvSpPr>
-          <p:cNvPr id="7" name="Text 4"/>
+          <p:cNvPr id="9" name="Text 6"/>
           <p:cNvSpPr txBox="1"/>
           <p:nvPr/>
         </p:nvSpPr>
@@ -6844,7 +7281,7 @@
       </p:sp>
       <p:sp>
         <p:nvSpPr>
-          <p:cNvPr id="8" name="Text 5"/>
+          <p:cNvPr id="10" name="Text 7"/>
           <p:cNvSpPr txBox="1"/>
           <p:nvPr/>
         </p:nvSpPr>
@@ -6946,7 +7383,7 @@
                 <a:ea typeface="Calibri" pitchFamily="34" charset="-122"/>
                 <a:cs typeface="Calibri" pitchFamily="34" charset="-120"/>
               </a:rPr>
-              <a:t>TAILWIND CSS</a:t>
+              <a:t>BOOTSTRAP</a:t>
             </a:r>
             <a:endParaRPr lang="en-US" sz="1300" dirty="0"/>
           </a:p>
@@ -6985,7 +7422,7 @@
                 <a:ea typeface="Cambria" pitchFamily="34" charset="-122"/>
                 <a:cs typeface="Cambria" pitchFamily="34" charset="-120"/>
               </a:rPr>
-              <a:t>A Fully Styled Button</a:t>
+              <a:t>Utilities, Rendered</a:t>
             </a:r>
             <a:endParaRPr lang="en-US" sz="3400" dirty="0"/>
           </a:p>
@@ -7000,11 +7437,11 @@
         <p:spPr>
           <a:xfrm>
             <a:off x="640080" y="1965960"/>
-            <a:ext cx="10911535" cy="2221992"/>
+            <a:ext cx="10911535" cy="1263015"/>
           </a:xfrm>
           <a:prstGeom prst="roundRect">
             <a:avLst>
-              <a:gd name="adj" fmla="val 3292"/>
+              <a:gd name="adj" fmla="val 5792"/>
             </a:avLst>
           </a:prstGeom>
           <a:solidFill>
@@ -7022,7 +7459,7 @@
         <p:spPr>
           <a:xfrm>
             <a:off x="960120" y="2194560"/>
-            <a:ext cx="10271455" cy="1764792"/>
+            <a:ext cx="10271455" cy="805815"/>
           </a:xfrm>
           <a:prstGeom prst="rect">
             <a:avLst/>
@@ -7041,7 +7478,7 @@
               <a:buNone/>
             </a:pPr>
             <a:r>
-              <a:rPr lang="en-US" sz="1400" dirty="0">
+              <a:rPr lang="en-US" sz="1250" dirty="0">
                 <a:solidFill>
                   <a:srgbClr val="C9D3F5"/>
                 </a:solidFill>
@@ -7049,9 +7486,9 @@
                 <a:ea typeface="Courier New" pitchFamily="34" charset="-122"/>
                 <a:cs typeface="Courier New" pitchFamily="34" charset="-120"/>
               </a:rPr>
-              <a:t>&lt;button class="bg-blue-600 hover:bg-blue-700 text-white font-semibold</a:t>
-            </a:r>
-            <a:endParaRPr lang="en-US" sz="1400" dirty="0"/>
+              <a:t>&lt;div class="d-flex justify-content-between p-3"&gt;</a:t>
+            </a:r>
+            <a:endParaRPr lang="en-US" sz="1250" dirty="0"/>
           </a:p>
           <a:p>
             <a:pPr indent="0" marL="0">
@@ -7061,7 +7498,7 @@
               <a:buNone/>
             </a:pPr>
             <a:r>
-              <a:rPr lang="en-US" sz="1400" dirty="0">
+              <a:rPr lang="en-US" sz="1250" dirty="0">
                 <a:solidFill>
                   <a:srgbClr val="C9D3F5"/>
                 </a:solidFill>
@@ -7069,9 +7506,9 @@
                 <a:ea typeface="Courier New" pitchFamily="34" charset="-122"/>
                 <a:cs typeface="Courier New" pitchFamily="34" charset="-120"/>
               </a:rPr>
-              <a:t>               px-4 py-2 rounded-lg shadow"&gt;</a:t>
-            </a:r>
-            <a:endParaRPr lang="en-US" sz="1400" dirty="0"/>
+              <a:t>  &lt;!-- d-flex: display:flex; justify-content-between: space-between; p-3: padding --&gt;</a:t>
+            </a:r>
+            <a:endParaRPr lang="en-US" sz="1250" dirty="0"/>
           </a:p>
           <a:p>
             <a:pPr indent="0" marL="0">
@@ -7081,7 +7518,7 @@
               <a:buNone/>
             </a:pPr>
             <a:r>
-              <a:rPr lang="en-US" sz="1400" dirty="0">
+              <a:rPr lang="en-US" sz="1250" dirty="0">
                 <a:solidFill>
                   <a:srgbClr val="C9D3F5"/>
                 </a:solidFill>
@@ -7089,35 +7526,73 @@
                 <a:ea typeface="Courier New" pitchFamily="34" charset="-122"/>
                 <a:cs typeface="Courier New" pitchFamily="34" charset="-120"/>
               </a:rPr>
-              <a:t>  Save Changes</a:t>
-            </a:r>
-            <a:endParaRPr lang="en-US" sz="1400" dirty="0"/>
-          </a:p>
-          <a:p>
-            <a:pPr indent="0" marL="0">
-              <a:lnSpc>
-                <a:spcPct val="125000"/>
-              </a:lnSpc>
-              <a:buNone/>
-            </a:pPr>
-            <a:r>
-              <a:rPr lang="en-US" sz="1400" dirty="0">
-                <a:solidFill>
-                  <a:srgbClr val="C9D3F5"/>
-                </a:solidFill>
-                <a:latin typeface="Courier New" pitchFamily="34" charset="0"/>
-                <a:ea typeface="Courier New" pitchFamily="34" charset="-122"/>
-                <a:cs typeface="Courier New" pitchFamily="34" charset="-120"/>
-              </a:rPr>
-              <a:t>&lt;/button&gt;</a:t>
-            </a:r>
-            <a:endParaRPr lang="en-US" sz="1400" dirty="0"/>
-          </a:p>
-        </p:txBody>
-      </p:sp>
-      <p:sp>
-        <p:nvSpPr>
-          <p:cNvPr id="6" name="Text 4"/>
+              <a:t>&lt;/div&gt;</a:t>
+            </a:r>
+            <a:endParaRPr lang="en-US" sz="1250" dirty="0"/>
+          </a:p>
+        </p:txBody>
+      </p:sp>
+      <p:sp>
+        <p:nvSpPr>
+          <p:cNvPr id="6" name="Shape 4"/>
+          <p:cNvSpPr/>
+          <p:nvPr/>
+        </p:nvSpPr>
+        <p:spPr>
+          <a:xfrm>
+            <a:off x="530352" y="3393567"/>
+            <a:ext cx="11130991" cy="2934081"/>
+          </a:xfrm>
+          <a:prstGeom prst="roundRect">
+            <a:avLst>
+              <a:gd name="adj" fmla="val 1870"/>
+            </a:avLst>
+          </a:prstGeom>
+          <a:solidFill>
+            <a:srgbClr val="FFFFFF"/>
+          </a:solidFill>
+          <a:ln w="12700">
+            <a:solidFill>
+              <a:srgbClr val="E2E2EE"/>
+            </a:solidFill>
+            <a:prstDash val="solid"/>
+          </a:ln>
+          <a:effectLst>
+            <a:outerShdw sx="100000" sy="100000" kx="0" ky="0" algn="bl" rotWithShape="0" blurRad="101600" dist="38100" dir="5400000">
+              <a:srgbClr val="000000">
+                <a:alpha val="12000"/>
+              </a:srgbClr>
+            </a:outerShdw>
+          </a:effectLst>
+        </p:spPr>
+      </p:sp>
+      <p:pic>
+        <p:nvPicPr>
+          <p:cNvPr id="7" name="Image 0" descr="D:/GitHub/mern-web-book/docs/assets/img/lecture-10/bootstrap-utilities.png">    </p:cNvPr>
+          <p:cNvPicPr>
+            <a:picLocks noChangeAspect="1"/>
+          </p:cNvPicPr>
+          <p:nvPr/>
+        </p:nvPicPr>
+        <p:blipFill>
+          <a:blip r:embed="rId1"/>
+          <a:stretch>
+            <a:fillRect/>
+          </a:stretch>
+        </p:blipFill>
+        <p:spPr>
+          <a:xfrm>
+            <a:off x="640080" y="4075874"/>
+            <a:ext cx="10911535" cy="1569467"/>
+          </a:xfrm>
+          <a:prstGeom prst="rect">
+            <a:avLst/>
+          </a:prstGeom>
+        </p:spPr>
+      </p:pic>
+      <p:sp>
+        <p:nvSpPr>
+          <p:cNvPr id="8" name="Text 5"/>
           <p:cNvSpPr txBox="1"/>
           <p:nvPr/>
         </p:nvSpPr>
@@ -7156,7 +7631,7 @@
       </p:sp>
       <p:sp>
         <p:nvSpPr>
-          <p:cNvPr id="7" name="Text 5"/>
+          <p:cNvPr id="9" name="Text 6"/>
           <p:cNvSpPr txBox="1"/>
           <p:nvPr/>
         </p:nvSpPr>
@@ -7297,7 +7772,7 @@
                 <a:ea typeface="Cambria" pitchFamily="34" charset="-122"/>
                 <a:cs typeface="Cambria" pitchFamily="34" charset="-120"/>
               </a:rPr>
-              <a:t>The Button, Rendered</a:t>
+              <a:t>A Fully Styled Button</a:t>
             </a:r>
             <a:endParaRPr lang="en-US" sz="3400" dirty="0"/>
           </a:p>
@@ -7311,59 +7786,125 @@
         </p:nvSpPr>
         <p:spPr>
           <a:xfrm>
-            <a:off x="530352" y="1947672"/>
-            <a:ext cx="11130991" cy="4334256"/>
+            <a:off x="640080" y="1965960"/>
+            <a:ext cx="10911535" cy="1615440"/>
           </a:xfrm>
           <a:prstGeom prst="roundRect">
             <a:avLst>
-              <a:gd name="adj" fmla="val 1266"/>
+              <a:gd name="adj" fmla="val 4528"/>
             </a:avLst>
           </a:prstGeom>
           <a:solidFill>
-            <a:srgbClr val="FFFFFF"/>
+            <a:srgbClr val="1E1E4C"/>
           </a:solidFill>
-          <a:ln w="12700">
-            <a:solidFill>
-              <a:srgbClr val="E2E2EE"/>
-            </a:solidFill>
-            <a:prstDash val="solid"/>
-          </a:ln>
-          <a:effectLst>
-            <a:outerShdw sx="100000" sy="100000" kx="0" ky="0" algn="bl" rotWithShape="0" blurRad="101600" dist="38100" dir="5400000">
-              <a:srgbClr val="000000">
-                <a:alpha val="12000"/>
-              </a:srgbClr>
-            </a:outerShdw>
-          </a:effectLst>
-        </p:spPr>
-      </p:sp>
-      <p:pic>
-        <p:nvPicPr>
-          <p:cNvPr id="5" name="Image 0" descr="D:/GitHub/mern-web-book/docs/assets/img/lecture-10/tailwind-button.png">    </p:cNvPr>
-          <p:cNvPicPr>
-            <a:picLocks noChangeAspect="1"/>
-          </p:cNvPicPr>
-          <p:nvPr/>
-        </p:nvPicPr>
-        <p:blipFill>
-          <a:blip r:embed="rId1"/>
-          <a:stretch>
-            <a:fillRect/>
-          </a:stretch>
-        </p:blipFill>
-        <p:spPr>
-          <a:xfrm>
-            <a:off x="3626968" y="3048000"/>
-            <a:ext cx="4937760" cy="2133600"/>
-          </a:xfrm>
-          <a:prstGeom prst="rect">
-            <a:avLst/>
-          </a:prstGeom>
-        </p:spPr>
-      </p:pic>
-      <p:sp>
-        <p:nvSpPr>
-          <p:cNvPr id="6" name="Text 3"/>
+          <a:ln/>
+        </p:spPr>
+      </p:sp>
+      <p:sp>
+        <p:nvSpPr>
+          <p:cNvPr id="5" name="Text 3"/>
+          <p:cNvSpPr txBox="1"/>
+          <p:nvPr/>
+        </p:nvSpPr>
+        <p:spPr>
+          <a:xfrm>
+            <a:off x="960120" y="2194560"/>
+            <a:ext cx="10271455" cy="1158240"/>
+          </a:xfrm>
+          <a:prstGeom prst="rect">
+            <a:avLst/>
+          </a:prstGeom>
+          <a:noFill/>
+          <a:ln/>
+        </p:spPr>
+        <p:txBody>
+          <a:bodyPr wrap="square" lIns="0" tIns="0" rIns="0" bIns="0" rtlCol="0" anchor="t"/>
+          <a:lstStyle/>
+          <a:p>
+            <a:pPr indent="0" marL="0">
+              <a:lnSpc>
+                <a:spcPct val="125000"/>
+              </a:lnSpc>
+              <a:buNone/>
+            </a:pPr>
+            <a:r>
+              <a:rPr lang="en-US" sz="1400" dirty="0">
+                <a:solidFill>
+                  <a:srgbClr val="C9D3F5"/>
+                </a:solidFill>
+                <a:latin typeface="Courier New" pitchFamily="34" charset="0"/>
+                <a:ea typeface="Courier New" pitchFamily="34" charset="-122"/>
+                <a:cs typeface="Courier New" pitchFamily="34" charset="-120"/>
+              </a:rPr>
+              <a:t>&lt;button class="bg-blue-600 hover:bg-blue-700 text-white font-semibold</a:t>
+            </a:r>
+            <a:endParaRPr lang="en-US" sz="1400" dirty="0"/>
+          </a:p>
+          <a:p>
+            <a:pPr indent="0" marL="0">
+              <a:lnSpc>
+                <a:spcPct val="125000"/>
+              </a:lnSpc>
+              <a:buNone/>
+            </a:pPr>
+            <a:r>
+              <a:rPr lang="en-US" sz="1400" dirty="0">
+                <a:solidFill>
+                  <a:srgbClr val="C9D3F5"/>
+                </a:solidFill>
+                <a:latin typeface="Courier New" pitchFamily="34" charset="0"/>
+                <a:ea typeface="Courier New" pitchFamily="34" charset="-122"/>
+                <a:cs typeface="Courier New" pitchFamily="34" charset="-120"/>
+              </a:rPr>
+              <a:t>               px-4 py-2 rounded-lg shadow"&gt;</a:t>
+            </a:r>
+            <a:endParaRPr lang="en-US" sz="1400" dirty="0"/>
+          </a:p>
+          <a:p>
+            <a:pPr indent="0" marL="0">
+              <a:lnSpc>
+                <a:spcPct val="125000"/>
+              </a:lnSpc>
+              <a:buNone/>
+            </a:pPr>
+            <a:r>
+              <a:rPr lang="en-US" sz="1400" dirty="0">
+                <a:solidFill>
+                  <a:srgbClr val="C9D3F5"/>
+                </a:solidFill>
+                <a:latin typeface="Courier New" pitchFamily="34" charset="0"/>
+                <a:ea typeface="Courier New" pitchFamily="34" charset="-122"/>
+                <a:cs typeface="Courier New" pitchFamily="34" charset="-120"/>
+              </a:rPr>
+              <a:t>  Save Changes</a:t>
+            </a:r>
+            <a:endParaRPr lang="en-US" sz="1400" dirty="0"/>
+          </a:p>
+          <a:p>
+            <a:pPr indent="0" marL="0">
+              <a:lnSpc>
+                <a:spcPct val="125000"/>
+              </a:lnSpc>
+              <a:buNone/>
+            </a:pPr>
+            <a:r>
+              <a:rPr lang="en-US" sz="1400" dirty="0">
+                <a:solidFill>
+                  <a:srgbClr val="C9D3F5"/>
+                </a:solidFill>
+                <a:latin typeface="Courier New" pitchFamily="34" charset="0"/>
+                <a:ea typeface="Courier New" pitchFamily="34" charset="-122"/>
+                <a:cs typeface="Courier New" pitchFamily="34" charset="-120"/>
+              </a:rPr>
+              <a:t>&lt;/button&gt;</a:t>
+            </a:r>
+            <a:endParaRPr lang="en-US" sz="1400" dirty="0"/>
+          </a:p>
+        </p:txBody>
+      </p:sp>
+      <p:sp>
+        <p:nvSpPr>
+          <p:cNvPr id="6" name="Text 4"/>
           <p:cNvSpPr txBox="1"/>
           <p:nvPr/>
         </p:nvSpPr>
@@ -7402,7 +7943,7 @@
       </p:sp>
       <p:sp>
         <p:nvSpPr>
-          <p:cNvPr id="7" name="Text 4"/>
+          <p:cNvPr id="7" name="Text 5"/>
           <p:cNvSpPr txBox="1"/>
           <p:nvPr/>
         </p:nvSpPr>
@@ -8319,7 +8860,7 @@
                 <a:ea typeface="Cambria" pitchFamily="34" charset="-122"/>
                 <a:cs typeface="Cambria" pitchFamily="34" charset="-120"/>
               </a:rPr>
-              <a:t>Responsive by Default</a:t>
+              <a:t>The Button, Rendered</a:t>
             </a:r>
             <a:endParaRPr lang="en-US" sz="3400" dirty="0"/>
           </a:p>
@@ -8333,105 +8874,59 @@
         </p:nvSpPr>
         <p:spPr>
           <a:xfrm>
-            <a:off x="640080" y="1965960"/>
-            <a:ext cx="10911535" cy="1837944"/>
+            <a:off x="530352" y="1947672"/>
+            <a:ext cx="11130991" cy="4334256"/>
           </a:xfrm>
           <a:prstGeom prst="roundRect">
             <a:avLst>
-              <a:gd name="adj" fmla="val 3980"/>
+              <a:gd name="adj" fmla="val 1266"/>
             </a:avLst>
           </a:prstGeom>
           <a:solidFill>
-            <a:srgbClr val="1E1E4C"/>
+            <a:srgbClr val="FFFFFF"/>
           </a:solidFill>
-          <a:ln/>
-        </p:spPr>
-      </p:sp>
-      <p:sp>
-        <p:nvSpPr>
-          <p:cNvPr id="5" name="Text 3"/>
-          <p:cNvSpPr txBox="1"/>
-          <p:nvPr/>
-        </p:nvSpPr>
-        <p:spPr>
-          <a:xfrm>
-            <a:off x="960120" y="2194560"/>
-            <a:ext cx="10271455" cy="1380744"/>
-          </a:xfrm>
-          <a:prstGeom prst="rect">
-            <a:avLst/>
-          </a:prstGeom>
-          <a:noFill/>
-          <a:ln/>
-        </p:spPr>
-        <p:txBody>
-          <a:bodyPr wrap="square" lIns="0" tIns="0" rIns="0" bIns="0" rtlCol="0" anchor="t"/>
-          <a:lstStyle/>
-          <a:p>
-            <a:pPr indent="0" marL="0">
-              <a:lnSpc>
-                <a:spcPct val="125000"/>
-              </a:lnSpc>
-              <a:buNone/>
-            </a:pPr>
-            <a:r>
-              <a:rPr lang="en-US" sz="1400" dirty="0">
-                <a:solidFill>
-                  <a:srgbClr val="C9D3F5"/>
-                </a:solidFill>
-                <a:latin typeface="Courier New" pitchFamily="34" charset="0"/>
-                <a:ea typeface="Courier New" pitchFamily="34" charset="-122"/>
-                <a:cs typeface="Courier New" pitchFamily="34" charset="-120"/>
-              </a:rPr>
-              <a:t>&lt;div class="flex flex-col md:flex-row"&gt;</a:t>
-            </a:r>
-            <a:endParaRPr lang="en-US" sz="1400" dirty="0"/>
-          </a:p>
-          <a:p>
-            <a:pPr indent="0" marL="0">
-              <a:lnSpc>
-                <a:spcPct val="125000"/>
-              </a:lnSpc>
-              <a:buNone/>
-            </a:pPr>
-            <a:r>
-              <a:rPr lang="en-US" sz="1400" dirty="0">
-                <a:solidFill>
-                  <a:srgbClr val="C9D3F5"/>
-                </a:solidFill>
-                <a:latin typeface="Courier New" pitchFamily="34" charset="0"/>
-                <a:ea typeface="Courier New" pitchFamily="34" charset="-122"/>
-                <a:cs typeface="Courier New" pitchFamily="34" charset="-120"/>
-              </a:rPr>
-              <a:t>  &lt;!-- stacked by default, a row from md breakpoint up --&gt;</a:t>
-            </a:r>
-            <a:endParaRPr lang="en-US" sz="1400" dirty="0"/>
-          </a:p>
-          <a:p>
-            <a:pPr indent="0" marL="0">
-              <a:lnSpc>
-                <a:spcPct val="125000"/>
-              </a:lnSpc>
-              <a:buNone/>
-            </a:pPr>
-            <a:r>
-              <a:rPr lang="en-US" sz="1400" dirty="0">
-                <a:solidFill>
-                  <a:srgbClr val="C9D3F5"/>
-                </a:solidFill>
-                <a:latin typeface="Courier New" pitchFamily="34" charset="0"/>
-                <a:ea typeface="Courier New" pitchFamily="34" charset="-122"/>
-                <a:cs typeface="Courier New" pitchFamily="34" charset="-120"/>
-              </a:rPr>
-              <a:t>&lt;/div&gt;</a:t>
-            </a:r>
-            <a:endParaRPr lang="en-US" sz="1400" dirty="0"/>
-          </a:p>
-        </p:txBody>
-      </p:sp>
-      <p:sp>
-        <p:nvSpPr>
-          <p:cNvPr id="6" name="Text 4"/>
+          <a:ln w="12700">
+            <a:solidFill>
+              <a:srgbClr val="E2E2EE"/>
+            </a:solidFill>
+            <a:prstDash val="solid"/>
+          </a:ln>
+          <a:effectLst>
+            <a:outerShdw sx="100000" sy="100000" kx="0" ky="0" algn="bl" rotWithShape="0" blurRad="101600" dist="38100" dir="5400000">
+              <a:srgbClr val="000000">
+                <a:alpha val="12000"/>
+              </a:srgbClr>
+            </a:outerShdw>
+          </a:effectLst>
+        </p:spPr>
+      </p:sp>
+      <p:pic>
+        <p:nvPicPr>
+          <p:cNvPr id="5" name="Image 0" descr="D:/GitHub/mern-web-book/docs/assets/img/lecture-10/tailwind-button.png">    </p:cNvPr>
+          <p:cNvPicPr>
+            <a:picLocks noChangeAspect="1"/>
+          </p:cNvPicPr>
+          <p:nvPr/>
+        </p:nvPicPr>
+        <p:blipFill>
+          <a:blip r:embed="rId1"/>
+          <a:stretch>
+            <a:fillRect/>
+          </a:stretch>
+        </p:blipFill>
+        <p:spPr>
+          <a:xfrm>
+            <a:off x="3626968" y="3048000"/>
+            <a:ext cx="4937760" cy="2133600"/>
+          </a:xfrm>
+          <a:prstGeom prst="rect">
+            <a:avLst/>
+          </a:prstGeom>
+        </p:spPr>
+      </p:pic>
+      <p:sp>
+        <p:nvSpPr>
+          <p:cNvPr id="6" name="Text 3"/>
           <p:cNvSpPr txBox="1"/>
           <p:nvPr/>
         </p:nvSpPr>
@@ -8470,7 +8965,7 @@
       </p:sp>
       <p:sp>
         <p:nvSpPr>
-          <p:cNvPr id="7" name="Text 5"/>
+          <p:cNvPr id="7" name="Text 4"/>
           <p:cNvSpPr txBox="1"/>
           <p:nvPr/>
         </p:nvSpPr>
@@ -8611,7 +9106,7 @@
                 <a:ea typeface="Cambria" pitchFamily="34" charset="-122"/>
                 <a:cs typeface="Cambria" pitchFamily="34" charset="-120"/>
               </a:rPr>
-              <a:t>flex-col md:flex-row, Two Widths</a:t>
+              <a:t>Responsive by Default</a:t>
             </a:r>
             <a:endParaRPr lang="en-US" sz="3400" dirty="0"/>
           </a:p>
@@ -8619,231 +9114,141 @@
       </p:sp>
       <p:sp>
         <p:nvSpPr>
-          <p:cNvPr id="4" name="Text 2"/>
-          <p:cNvSpPr txBox="1"/>
+          <p:cNvPr id="4" name="Shape 2"/>
+          <p:cNvSpPr/>
           <p:nvPr/>
         </p:nvSpPr>
         <p:spPr>
           <a:xfrm>
             <a:off x="640080" y="1965960"/>
-            <a:ext cx="5272888" cy="365760"/>
-          </a:xfrm>
-          <a:prstGeom prst="rect">
-            <a:avLst/>
-          </a:prstGeom>
-          <a:noFill/>
-          <a:ln/>
-        </p:spPr>
-        <p:txBody>
-          <a:bodyPr wrap="square" lIns="0" tIns="0" rIns="0" bIns="0" rtlCol="0" anchor="ctr"/>
-          <a:lstStyle/>
-          <a:p>
-            <a:pPr algn="ctr" indent="0" marL="0">
-              <a:buNone/>
-            </a:pPr>
-            <a:r>
-              <a:rPr lang="en-US" sz="1100" b="1" spc="150" kern="0" dirty="0">
-                <a:solidFill>
-                  <a:srgbClr val="E67528"/>
+            <a:ext cx="10911535" cy="1348740"/>
+          </a:xfrm>
+          <a:prstGeom prst="roundRect">
+            <a:avLst>
+              <a:gd name="adj" fmla="val 5424"/>
+            </a:avLst>
+          </a:prstGeom>
+          <a:solidFill>
+            <a:srgbClr val="1E1E4C"/>
+          </a:solidFill>
+          <a:ln/>
+        </p:spPr>
+      </p:sp>
+      <p:sp>
+        <p:nvSpPr>
+          <p:cNvPr id="5" name="Text 3"/>
+          <p:cNvSpPr txBox="1"/>
+          <p:nvPr/>
+        </p:nvSpPr>
+        <p:spPr>
+          <a:xfrm>
+            <a:off x="960120" y="2194560"/>
+            <a:ext cx="10271455" cy="891540"/>
+          </a:xfrm>
+          <a:prstGeom prst="rect">
+            <a:avLst/>
+          </a:prstGeom>
+          <a:noFill/>
+          <a:ln/>
+        </p:spPr>
+        <p:txBody>
+          <a:bodyPr wrap="square" lIns="0" tIns="0" rIns="0" bIns="0" rtlCol="0" anchor="t"/>
+          <a:lstStyle/>
+          <a:p>
+            <a:pPr indent="0" marL="0">
+              <a:lnSpc>
+                <a:spcPct val="125000"/>
+              </a:lnSpc>
+              <a:buNone/>
+            </a:pPr>
+            <a:r>
+              <a:rPr lang="en-US" sz="1400" dirty="0">
+                <a:solidFill>
+                  <a:srgbClr val="C9D3F5"/>
+                </a:solidFill>
+                <a:latin typeface="Courier New" pitchFamily="34" charset="0"/>
+                <a:ea typeface="Courier New" pitchFamily="34" charset="-122"/>
+                <a:cs typeface="Courier New" pitchFamily="34" charset="-120"/>
+              </a:rPr>
+              <a:t>&lt;div class="flex flex-col md:flex-row"&gt;</a:t>
+            </a:r>
+            <a:endParaRPr lang="en-US" sz="1400" dirty="0"/>
+          </a:p>
+          <a:p>
+            <a:pPr indent="0" marL="0">
+              <a:lnSpc>
+                <a:spcPct val="125000"/>
+              </a:lnSpc>
+              <a:buNone/>
+            </a:pPr>
+            <a:r>
+              <a:rPr lang="en-US" sz="1400" dirty="0">
+                <a:solidFill>
+                  <a:srgbClr val="C9D3F5"/>
+                </a:solidFill>
+                <a:latin typeface="Courier New" pitchFamily="34" charset="0"/>
+                <a:ea typeface="Courier New" pitchFamily="34" charset="-122"/>
+                <a:cs typeface="Courier New" pitchFamily="34" charset="-120"/>
+              </a:rPr>
+              <a:t>  &lt;!-- stacked by default, a row from md breakpoint up --&gt;</a:t>
+            </a:r>
+            <a:endParaRPr lang="en-US" sz="1400" dirty="0"/>
+          </a:p>
+          <a:p>
+            <a:pPr indent="0" marL="0">
+              <a:lnSpc>
+                <a:spcPct val="125000"/>
+              </a:lnSpc>
+              <a:buNone/>
+            </a:pPr>
+            <a:r>
+              <a:rPr lang="en-US" sz="1400" dirty="0">
+                <a:solidFill>
+                  <a:srgbClr val="C9D3F5"/>
+                </a:solidFill>
+                <a:latin typeface="Courier New" pitchFamily="34" charset="0"/>
+                <a:ea typeface="Courier New" pitchFamily="34" charset="-122"/>
+                <a:cs typeface="Courier New" pitchFamily="34" charset="-120"/>
+              </a:rPr>
+              <a:t>&lt;/div&gt;</a:t>
+            </a:r>
+            <a:endParaRPr lang="en-US" sz="1400" dirty="0"/>
+          </a:p>
+        </p:txBody>
+      </p:sp>
+      <p:sp>
+        <p:nvSpPr>
+          <p:cNvPr id="6" name="Text 4"/>
+          <p:cNvSpPr txBox="1"/>
+          <p:nvPr/>
+        </p:nvSpPr>
+        <p:spPr>
+          <a:xfrm>
+            <a:off x="640080" y="6446520"/>
+            <a:ext cx="8686800" cy="292608"/>
+          </a:xfrm>
+          <a:prstGeom prst="rect">
+            <a:avLst/>
+          </a:prstGeom>
+          <a:noFill/>
+          <a:ln/>
+        </p:spPr>
+        <p:txBody>
+          <a:bodyPr wrap="square" lIns="0" tIns="0" rIns="0" bIns="0" rtlCol="0" anchor="ctr"/>
+          <a:lstStyle/>
+          <a:p>
+            <a:pPr algn="l" indent="0" marL="0">
+              <a:buNone/>
+            </a:pPr>
+            <a:r>
+              <a:rPr lang="en-US" sz="900" dirty="0">
+                <a:solidFill>
+                  <a:srgbClr val="5D5D72"/>
                 </a:solidFill>
                 <a:latin typeface="Calibri" pitchFamily="34" charset="0"/>
                 <a:ea typeface="Calibri" pitchFamily="34" charset="-122"/>
                 <a:cs typeface="Calibri" pitchFamily="34" charset="-120"/>
               </a:rPr>
-              <a:t>WIDE (ROW)</a:t>
-            </a:r>
-            <a:endParaRPr lang="en-US" sz="1100" dirty="0"/>
-          </a:p>
-        </p:txBody>
-      </p:sp>
-      <p:sp>
-        <p:nvSpPr>
-          <p:cNvPr id="5" name="Shape 3"/>
-          <p:cNvSpPr/>
-          <p:nvPr/>
-        </p:nvSpPr>
-        <p:spPr>
-          <a:xfrm>
-            <a:off x="530352" y="2313432"/>
-            <a:ext cx="5492344" cy="3831336"/>
-          </a:xfrm>
-          <a:prstGeom prst="roundRect">
-            <a:avLst>
-              <a:gd name="adj" fmla="val 1432"/>
-            </a:avLst>
-          </a:prstGeom>
-          <a:solidFill>
-            <a:srgbClr val="FFFFFF"/>
-          </a:solidFill>
-          <a:ln w="12700">
-            <a:solidFill>
-              <a:srgbClr val="E2E2EE"/>
-            </a:solidFill>
-            <a:prstDash val="solid"/>
-          </a:ln>
-          <a:effectLst>
-            <a:outerShdw sx="100000" sy="100000" kx="0" ky="0" algn="bl" rotWithShape="0" blurRad="101600" dist="38100" dir="5400000">
-              <a:srgbClr val="000000">
-                <a:alpha val="12000"/>
-              </a:srgbClr>
-            </a:outerShdw>
-          </a:effectLst>
-        </p:spPr>
-      </p:sp>
-      <p:pic>
-        <p:nvPicPr>
-          <p:cNvPr id="6" name="Image 0" descr="D:/GitHub/mern-web-book/docs/assets/img/lecture-10/tailwind-flex-wide.png">    </p:cNvPr>
-          <p:cNvPicPr>
-            <a:picLocks noChangeAspect="1"/>
-          </p:cNvPicPr>
-          <p:nvPr/>
-        </p:nvPicPr>
-        <p:blipFill>
-          <a:blip r:embed="rId1"/>
-          <a:stretch>
-            <a:fillRect/>
-          </a:stretch>
-        </p:blipFill>
-        <p:spPr>
-          <a:xfrm>
-            <a:off x="640080" y="4021435"/>
-            <a:ext cx="5272888" cy="415330"/>
-          </a:xfrm>
-          <a:prstGeom prst="rect">
-            <a:avLst/>
-          </a:prstGeom>
-        </p:spPr>
-      </p:pic>
-      <p:sp>
-        <p:nvSpPr>
-          <p:cNvPr id="7" name="Text 4"/>
-          <p:cNvSpPr txBox="1"/>
-          <p:nvPr/>
-        </p:nvSpPr>
-        <p:spPr>
-          <a:xfrm>
-            <a:off x="6278728" y="1965960"/>
-            <a:ext cx="5272888" cy="365760"/>
-          </a:xfrm>
-          <a:prstGeom prst="rect">
-            <a:avLst/>
-          </a:prstGeom>
-          <a:noFill/>
-          <a:ln/>
-        </p:spPr>
-        <p:txBody>
-          <a:bodyPr wrap="square" lIns="0" tIns="0" rIns="0" bIns="0" rtlCol="0" anchor="ctr"/>
-          <a:lstStyle/>
-          <a:p>
-            <a:pPr algn="ctr" indent="0" marL="0">
-              <a:buNone/>
-            </a:pPr>
-            <a:r>
-              <a:rPr lang="en-US" sz="1100" b="1" spc="150" kern="0" dirty="0">
-                <a:solidFill>
-                  <a:srgbClr val="E67528"/>
-                </a:solidFill>
-                <a:latin typeface="Calibri" pitchFamily="34" charset="0"/>
-                <a:ea typeface="Calibri" pitchFamily="34" charset="-122"/>
-                <a:cs typeface="Calibri" pitchFamily="34" charset="-120"/>
-              </a:rPr>
-              <a:t>NARROW (COLUMN)</a:t>
-            </a:r>
-            <a:endParaRPr lang="en-US" sz="1100" dirty="0"/>
-          </a:p>
-        </p:txBody>
-      </p:sp>
-      <p:sp>
-        <p:nvSpPr>
-          <p:cNvPr id="8" name="Shape 5"/>
-          <p:cNvSpPr/>
-          <p:nvPr/>
-        </p:nvSpPr>
-        <p:spPr>
-          <a:xfrm>
-            <a:off x="6169000" y="2313432"/>
-            <a:ext cx="5492344" cy="3831336"/>
-          </a:xfrm>
-          <a:prstGeom prst="roundRect">
-            <a:avLst>
-              <a:gd name="adj" fmla="val 1432"/>
-            </a:avLst>
-          </a:prstGeom>
-          <a:solidFill>
-            <a:srgbClr val="FFFFFF"/>
-          </a:solidFill>
-          <a:ln w="12700">
-            <a:solidFill>
-              <a:srgbClr val="E2E2EE"/>
-            </a:solidFill>
-            <a:prstDash val="solid"/>
-          </a:ln>
-          <a:effectLst>
-            <a:outerShdw sx="100000" sy="100000" kx="0" ky="0" algn="bl" rotWithShape="0" blurRad="101600" dist="38100" dir="5400000">
-              <a:srgbClr val="000000">
-                <a:alpha val="12000"/>
-              </a:srgbClr>
-            </a:outerShdw>
-          </a:effectLst>
-        </p:spPr>
-      </p:sp>
-      <p:pic>
-        <p:nvPicPr>
-          <p:cNvPr id="9" name="Image 1" descr="D:/GitHub/mern-web-book/docs/assets/img/lecture-10/tailwind-flex-narrow.png">    </p:cNvPr>
-          <p:cNvPicPr>
-            <a:picLocks noChangeAspect="1"/>
-          </p:cNvPicPr>
-          <p:nvPr/>
-        </p:nvPicPr>
-        <p:blipFill>
-          <a:blip r:embed="rId2"/>
-          <a:stretch>
-            <a:fillRect/>
-          </a:stretch>
-        </p:blipFill>
-        <p:spPr>
-          <a:xfrm>
-            <a:off x="6278728" y="2930851"/>
-            <a:ext cx="5272888" cy="2596498"/>
-          </a:xfrm>
-          <a:prstGeom prst="rect">
-            <a:avLst/>
-          </a:prstGeom>
-        </p:spPr>
-      </p:pic>
-      <p:sp>
-        <p:nvSpPr>
-          <p:cNvPr id="10" name="Text 6"/>
-          <p:cNvSpPr txBox="1"/>
-          <p:nvPr/>
-        </p:nvSpPr>
-        <p:spPr>
-          <a:xfrm>
-            <a:off x="640080" y="6446520"/>
-            <a:ext cx="8686800" cy="292608"/>
-          </a:xfrm>
-          <a:prstGeom prst="rect">
-            <a:avLst/>
-          </a:prstGeom>
-          <a:noFill/>
-          <a:ln/>
-        </p:spPr>
-        <p:txBody>
-          <a:bodyPr wrap="square" lIns="0" tIns="0" rIns="0" bIns="0" rtlCol="0" anchor="ctr"/>
-          <a:lstStyle/>
-          <a:p>
-            <a:pPr algn="l" indent="0" marL="0">
-              <a:buNone/>
-            </a:pPr>
-            <a:r>
-              <a:rPr lang="en-US" sz="900" dirty="0">
-                <a:solidFill>
-                  <a:srgbClr val="5D5D72"/>
-                </a:solidFill>
-                <a:latin typeface="Calibri" pitchFamily="34" charset="0"/>
-                <a:ea typeface="Calibri" pitchFamily="34" charset="-122"/>
-                <a:cs typeface="Calibri" pitchFamily="34" charset="-120"/>
-              </a:rPr>
               <a:t>Usman Akram  •  COMSATS University Islamabad</a:t>
             </a:r>
             <a:endParaRPr lang="en-US" sz="900" dirty="0"/>
@@ -8852,7 +9257,7 @@
       </p:sp>
       <p:sp>
         <p:nvSpPr>
-          <p:cNvPr id="11" name="Text 7"/>
+          <p:cNvPr id="7" name="Text 5"/>
           <p:cNvSpPr txBox="1"/>
           <p:nvPr/>
         </p:nvSpPr>
@@ -8993,7 +9398,7 @@
                 <a:ea typeface="Cambria" pitchFamily="34" charset="-122"/>
                 <a:cs typeface="Cambria" pitchFamily="34" charset="-120"/>
               </a:rPr>
-              <a:t>w-full lg:w-1/3, Two Widths</a:t>
+              <a:t>flex-col md:flex-row, Two Widths</a:t>
             </a:r>
             <a:endParaRPr lang="en-US" sz="3400" dirty="0"/>
           </a:p>
@@ -9032,7 +9437,7 @@
                 <a:ea typeface="Calibri" pitchFamily="34" charset="-122"/>
                 <a:cs typeface="Calibri" pitchFamily="34" charset="-120"/>
               </a:rPr>
-              <a:t>WIDE (1/3)</a:t>
+              <a:t>WIDE (ROW)</a:t>
             </a:r>
             <a:endParaRPr lang="en-US" sz="1100" dirty="0"/>
           </a:p>
@@ -9074,7 +9479,7 @@
       </p:sp>
       <p:pic>
         <p:nvPicPr>
-          <p:cNvPr id="6" name="Image 0" descr="D:/GitHub/mern-web-book/docs/assets/img/lecture-10/tailwind-width-wide.png">    </p:cNvPr>
+          <p:cNvPr id="6" name="Image 0" descr="D:/GitHub/mern-web-book/docs/assets/img/lecture-10/tailwind-flex-wide.png">    </p:cNvPr>
           <p:cNvPicPr>
             <a:picLocks noChangeAspect="1"/>
           </p:cNvPicPr>
@@ -9088,8 +9493,8 @@
         </p:blipFill>
         <p:spPr>
           <a:xfrm>
-            <a:off x="640080" y="3925272"/>
-            <a:ext cx="5272888" cy="607656"/>
+            <a:off x="640080" y="4021435"/>
+            <a:ext cx="5272888" cy="415330"/>
           </a:xfrm>
           <a:prstGeom prst="rect">
             <a:avLst/>
@@ -9129,7 +9534,7 @@
                 <a:ea typeface="Calibri" pitchFamily="34" charset="-122"/>
                 <a:cs typeface="Calibri" pitchFamily="34" charset="-120"/>
               </a:rPr>
-              <a:t>NARROW (FULL)</a:t>
+              <a:t>NARROW (COLUMN)</a:t>
             </a:r>
             <a:endParaRPr lang="en-US" sz="1100" dirty="0"/>
           </a:p>
@@ -9171,7 +9576,7 @@
       </p:sp>
       <p:pic>
         <p:nvPicPr>
-          <p:cNvPr id="9" name="Image 1" descr="D:/GitHub/mern-web-book/docs/assets/img/lecture-10/tailwind-width-narrow.png">    </p:cNvPr>
+          <p:cNvPr id="9" name="Image 1" descr="D:/GitHub/mern-web-book/docs/assets/img/lecture-10/tailwind-flex-narrow.png">    </p:cNvPr>
           <p:cNvPicPr>
             <a:picLocks noChangeAspect="1"/>
           </p:cNvPicPr>
@@ -9185,8 +9590,8 @@
         </p:blipFill>
         <p:spPr>
           <a:xfrm>
-            <a:off x="6278728" y="3675225"/>
-            <a:ext cx="5272888" cy="1107749"/>
+            <a:off x="6278728" y="2930851"/>
+            <a:ext cx="5272888" cy="2596498"/>
           </a:xfrm>
           <a:prstGeom prst="rect">
             <a:avLst/>
@@ -9336,7 +9741,7 @@
                 <a:ea typeface="Calibri" pitchFamily="34" charset="-122"/>
                 <a:cs typeface="Calibri" pitchFamily="34" charset="-120"/>
               </a:rPr>
-              <a:t>CUSTOM CLASSES</a:t>
+              <a:t>TAILWIND CSS</a:t>
             </a:r>
             <a:endParaRPr lang="en-US" sz="1300" dirty="0"/>
           </a:p>
@@ -9375,7 +9780,7 @@
                 <a:ea typeface="Cambria" pitchFamily="34" charset="-122"/>
                 <a:cs typeface="Cambria" pitchFamily="34" charset="-120"/>
               </a:rPr>
-              <a:t>Bootstrap + Your Own Class</a:t>
+              <a:t>Responsive Width</a:t>
             </a:r>
             <a:endParaRPr lang="en-US" sz="3400" dirty="0"/>
           </a:p>
@@ -9390,11 +9795,11 @@
         <p:spPr>
           <a:xfrm>
             <a:off x="640080" y="1965960"/>
-            <a:ext cx="10911535" cy="1837944"/>
+            <a:ext cx="10911535" cy="1348740"/>
           </a:xfrm>
           <a:prstGeom prst="roundRect">
             <a:avLst>
-              <a:gd name="adj" fmla="val 3980"/>
+              <a:gd name="adj" fmla="val 5424"/>
             </a:avLst>
           </a:prstGeom>
           <a:solidFill>
@@ -9412,7 +9817,7 @@
         <p:spPr>
           <a:xfrm>
             <a:off x="960120" y="2194560"/>
-            <a:ext cx="10271455" cy="1380744"/>
+            <a:ext cx="10271455" cy="891540"/>
           </a:xfrm>
           <a:prstGeom prst="rect">
             <a:avLst/>
@@ -9439,7 +9844,7 @@
                 <a:ea typeface="Courier New" pitchFamily="34" charset="-122"/>
                 <a:cs typeface="Courier New" pitchFamily="34" charset="-120"/>
               </a:rPr>
-              <a:t>&lt;button class="btn btn-primary my-cta-button"&gt;Get Started&lt;/button&gt;</a:t>
+              <a:t>&lt;div class="w-full lg:w-1/3"&gt;</a:t>
             </a:r>
             <a:endParaRPr lang="en-US" sz="1400" dirty="0"/>
           </a:p>
@@ -9450,6 +9855,17 @@
               </a:lnSpc>
               <a:buNone/>
             </a:pPr>
+            <a:r>
+              <a:rPr lang="en-US" sz="1400" dirty="0">
+                <a:solidFill>
+                  <a:srgbClr val="C9D3F5"/>
+                </a:solidFill>
+                <a:latin typeface="Courier New" pitchFamily="34" charset="0"/>
+                <a:ea typeface="Courier New" pitchFamily="34" charset="-122"/>
+                <a:cs typeface="Courier New" pitchFamily="34" charset="-120"/>
+              </a:rPr>
+              <a:t>  &lt;!-- full width by default, one-third width from the "lg" breakpoint up --&gt;</a:t>
+            </a:r>
             <a:endParaRPr lang="en-US" sz="1400" dirty="0"/>
           </a:p>
           <a:p>
@@ -9468,7 +9884,7 @@
                 <a:ea typeface="Courier New" pitchFamily="34" charset="-122"/>
                 <a:cs typeface="Courier New" pitchFamily="34" charset="-120"/>
               </a:rPr>
-              <a:t>.my-cta-button { text-transform: uppercase; letter-spacing: 1px; }</a:t>
+              <a:t>&lt;/div&gt;</a:t>
             </a:r>
             <a:endParaRPr lang="en-US" sz="1400" dirty="0"/>
           </a:p>
@@ -9617,7 +10033,7 @@
                 <a:ea typeface="Calibri" pitchFamily="34" charset="-122"/>
                 <a:cs typeface="Calibri" pitchFamily="34" charset="-120"/>
               </a:rPr>
-              <a:t>CUSTOM CLASSES</a:t>
+              <a:t>TAILWIND CSS</a:t>
             </a:r>
             <a:endParaRPr lang="en-US" sz="1300" dirty="0"/>
           </a:p>
@@ -9656,7 +10072,7 @@
                 <a:ea typeface="Cambria" pitchFamily="34" charset="-122"/>
                 <a:cs typeface="Cambria" pitchFamily="34" charset="-120"/>
               </a:rPr>
-              <a:t>Bootstrap + Custom, Rendered</a:t>
+              <a:t>w-full lg:w-1/3, Two Widths</a:t>
             </a:r>
             <a:endParaRPr lang="en-US" sz="3400" dirty="0"/>
           </a:p>
@@ -9664,18 +10080,57 @@
       </p:sp>
       <p:sp>
         <p:nvSpPr>
-          <p:cNvPr id="4" name="Shape 2"/>
+          <p:cNvPr id="4" name="Text 2"/>
+          <p:cNvSpPr txBox="1"/>
+          <p:nvPr/>
+        </p:nvSpPr>
+        <p:spPr>
+          <a:xfrm>
+            <a:off x="640080" y="1965960"/>
+            <a:ext cx="5272888" cy="365760"/>
+          </a:xfrm>
+          <a:prstGeom prst="rect">
+            <a:avLst/>
+          </a:prstGeom>
+          <a:noFill/>
+          <a:ln/>
+        </p:spPr>
+        <p:txBody>
+          <a:bodyPr wrap="square" lIns="0" tIns="0" rIns="0" bIns="0" rtlCol="0" anchor="ctr"/>
+          <a:lstStyle/>
+          <a:p>
+            <a:pPr algn="ctr" indent="0" marL="0">
+              <a:buNone/>
+            </a:pPr>
+            <a:r>
+              <a:rPr lang="en-US" sz="1100" b="1" spc="150" kern="0" dirty="0">
+                <a:solidFill>
+                  <a:srgbClr val="E67528"/>
+                </a:solidFill>
+                <a:latin typeface="Calibri" pitchFamily="34" charset="0"/>
+                <a:ea typeface="Calibri" pitchFamily="34" charset="-122"/>
+                <a:cs typeface="Calibri" pitchFamily="34" charset="-120"/>
+              </a:rPr>
+              <a:t>WIDE (1/3)</a:t>
+            </a:r>
+            <a:endParaRPr lang="en-US" sz="1100" dirty="0"/>
+          </a:p>
+        </p:txBody>
+      </p:sp>
+      <p:sp>
+        <p:nvSpPr>
+          <p:cNvPr id="5" name="Shape 3"/>
           <p:cNvSpPr/>
           <p:nvPr/>
         </p:nvSpPr>
         <p:spPr>
           <a:xfrm>
-            <a:off x="530352" y="1947672"/>
-            <a:ext cx="11130991" cy="4334256"/>
+            <a:off x="530352" y="2313432"/>
+            <a:ext cx="5492344" cy="3831336"/>
           </a:xfrm>
           <a:prstGeom prst="roundRect">
             <a:avLst>
-              <a:gd name="adj" fmla="val 1266"/>
+              <a:gd name="adj" fmla="val 1432"/>
             </a:avLst>
           </a:prstGeom>
           <a:solidFill>
@@ -9698,7 +10153,7 @@
       </p:sp>
       <p:pic>
         <p:nvPicPr>
-          <p:cNvPr id="5" name="Image 0" descr="D:/GitHub/mern-web-book/docs/assets/img/lecture-10/bootstrap-custom-class.png">    </p:cNvPr>
+          <p:cNvPr id="6" name="Image 0" descr="D:/GitHub/mern-web-book/docs/assets/img/lecture-10/tailwind-width-wide.png">    </p:cNvPr>
           <p:cNvPicPr>
             <a:picLocks noChangeAspect="1"/>
           </p:cNvPicPr>
@@ -9712,8 +10167,8 @@
         </p:blipFill>
         <p:spPr>
           <a:xfrm>
-            <a:off x="3726028" y="3169920"/>
-            <a:ext cx="4739640" cy="1889760"/>
+            <a:off x="640080" y="3925272"/>
+            <a:ext cx="5272888" cy="607656"/>
           </a:xfrm>
           <a:prstGeom prst="rect">
             <a:avLst/>
@@ -9722,37 +10177,134 @@
       </p:pic>
       <p:sp>
         <p:nvSpPr>
-          <p:cNvPr id="6" name="Text 3"/>
-          <p:cNvSpPr txBox="1"/>
-          <p:nvPr/>
-        </p:nvSpPr>
-        <p:spPr>
-          <a:xfrm>
-            <a:off x="640080" y="6446520"/>
-            <a:ext cx="8686800" cy="292608"/>
-          </a:xfrm>
-          <a:prstGeom prst="rect">
-            <a:avLst/>
-          </a:prstGeom>
-          <a:noFill/>
-          <a:ln/>
-        </p:spPr>
-        <p:txBody>
-          <a:bodyPr wrap="square" lIns="0" tIns="0" rIns="0" bIns="0" rtlCol="0" anchor="ctr"/>
-          <a:lstStyle/>
-          <a:p>
-            <a:pPr algn="l" indent="0" marL="0">
-              <a:buNone/>
-            </a:pPr>
-            <a:r>
-              <a:rPr lang="en-US" sz="900" dirty="0">
-                <a:solidFill>
-                  <a:srgbClr val="5D5D72"/>
+          <p:cNvPr id="7" name="Text 4"/>
+          <p:cNvSpPr txBox="1"/>
+          <p:nvPr/>
+        </p:nvSpPr>
+        <p:spPr>
+          <a:xfrm>
+            <a:off x="6278728" y="1965960"/>
+            <a:ext cx="5272888" cy="365760"/>
+          </a:xfrm>
+          <a:prstGeom prst="rect">
+            <a:avLst/>
+          </a:prstGeom>
+          <a:noFill/>
+          <a:ln/>
+        </p:spPr>
+        <p:txBody>
+          <a:bodyPr wrap="square" lIns="0" tIns="0" rIns="0" bIns="0" rtlCol="0" anchor="ctr"/>
+          <a:lstStyle/>
+          <a:p>
+            <a:pPr algn="ctr" indent="0" marL="0">
+              <a:buNone/>
+            </a:pPr>
+            <a:r>
+              <a:rPr lang="en-US" sz="1100" b="1" spc="150" kern="0" dirty="0">
+                <a:solidFill>
+                  <a:srgbClr val="E67528"/>
                 </a:solidFill>
                 <a:latin typeface="Calibri" pitchFamily="34" charset="0"/>
                 <a:ea typeface="Calibri" pitchFamily="34" charset="-122"/>
                 <a:cs typeface="Calibri" pitchFamily="34" charset="-120"/>
               </a:rPr>
+              <a:t>NARROW (FULL)</a:t>
+            </a:r>
+            <a:endParaRPr lang="en-US" sz="1100" dirty="0"/>
+          </a:p>
+        </p:txBody>
+      </p:sp>
+      <p:sp>
+        <p:nvSpPr>
+          <p:cNvPr id="8" name="Shape 5"/>
+          <p:cNvSpPr/>
+          <p:nvPr/>
+        </p:nvSpPr>
+        <p:spPr>
+          <a:xfrm>
+            <a:off x="6169000" y="2313432"/>
+            <a:ext cx="5492344" cy="3831336"/>
+          </a:xfrm>
+          <a:prstGeom prst="roundRect">
+            <a:avLst>
+              <a:gd name="adj" fmla="val 1432"/>
+            </a:avLst>
+          </a:prstGeom>
+          <a:solidFill>
+            <a:srgbClr val="FFFFFF"/>
+          </a:solidFill>
+          <a:ln w="12700">
+            <a:solidFill>
+              <a:srgbClr val="E2E2EE"/>
+            </a:solidFill>
+            <a:prstDash val="solid"/>
+          </a:ln>
+          <a:effectLst>
+            <a:outerShdw sx="100000" sy="100000" kx="0" ky="0" algn="bl" rotWithShape="0" blurRad="101600" dist="38100" dir="5400000">
+              <a:srgbClr val="000000">
+                <a:alpha val="12000"/>
+              </a:srgbClr>
+            </a:outerShdw>
+          </a:effectLst>
+        </p:spPr>
+      </p:sp>
+      <p:pic>
+        <p:nvPicPr>
+          <p:cNvPr id="9" name="Image 1" descr="D:/GitHub/mern-web-book/docs/assets/img/lecture-10/tailwind-width-narrow.png">    </p:cNvPr>
+          <p:cNvPicPr>
+            <a:picLocks noChangeAspect="1"/>
+          </p:cNvPicPr>
+          <p:nvPr/>
+        </p:nvPicPr>
+        <p:blipFill>
+          <a:blip r:embed="rId2"/>
+          <a:stretch>
+            <a:fillRect/>
+          </a:stretch>
+        </p:blipFill>
+        <p:spPr>
+          <a:xfrm>
+            <a:off x="6278728" y="3675225"/>
+            <a:ext cx="5272888" cy="1107749"/>
+          </a:xfrm>
+          <a:prstGeom prst="rect">
+            <a:avLst/>
+          </a:prstGeom>
+        </p:spPr>
+      </p:pic>
+      <p:sp>
+        <p:nvSpPr>
+          <p:cNvPr id="10" name="Text 6"/>
+          <p:cNvSpPr txBox="1"/>
+          <p:nvPr/>
+        </p:nvSpPr>
+        <p:spPr>
+          <a:xfrm>
+            <a:off x="640080" y="6446520"/>
+            <a:ext cx="8686800" cy="292608"/>
+          </a:xfrm>
+          <a:prstGeom prst="rect">
+            <a:avLst/>
+          </a:prstGeom>
+          <a:noFill/>
+          <a:ln/>
+        </p:spPr>
+        <p:txBody>
+          <a:bodyPr wrap="square" lIns="0" tIns="0" rIns="0" bIns="0" rtlCol="0" anchor="ctr"/>
+          <a:lstStyle/>
+          <a:p>
+            <a:pPr algn="l" indent="0" marL="0">
+              <a:buNone/>
+            </a:pPr>
+            <a:r>
+              <a:rPr lang="en-US" sz="900" dirty="0">
+                <a:solidFill>
+                  <a:srgbClr val="5D5D72"/>
+                </a:solidFill>
+                <a:latin typeface="Calibri" pitchFamily="34" charset="0"/>
+                <a:ea typeface="Calibri" pitchFamily="34" charset="-122"/>
+                <a:cs typeface="Calibri" pitchFamily="34" charset="-120"/>
+              </a:rPr>
               <a:t>Usman Akram  •  COMSATS University Islamabad</a:t>
             </a:r>
             <a:endParaRPr lang="en-US" sz="900" dirty="0"/>
@@ -9761,7 +10313,7 @@
       </p:sp>
       <p:sp>
         <p:nvSpPr>
-          <p:cNvPr id="7" name="Text 4"/>
+          <p:cNvPr id="11" name="Text 7"/>
           <p:cNvSpPr txBox="1"/>
           <p:nvPr/>
         </p:nvSpPr>
@@ -9902,7 +10454,7 @@
                 <a:ea typeface="Cambria" pitchFamily="34" charset="-122"/>
                 <a:cs typeface="Cambria" pitchFamily="34" charset="-120"/>
               </a:rPr>
-              <a:t>Tailwind + Your Own Class</a:t>
+              <a:t>Bootstrap + Your Own Class</a:t>
             </a:r>
             <a:endParaRPr lang="en-US" sz="3400" dirty="0"/>
           </a:p>
@@ -9917,11 +10469,11 @@
         <p:spPr>
           <a:xfrm>
             <a:off x="640080" y="1965960"/>
-            <a:ext cx="10911535" cy="1837944"/>
+            <a:ext cx="10911535" cy="1348740"/>
           </a:xfrm>
           <a:prstGeom prst="roundRect">
             <a:avLst>
-              <a:gd name="adj" fmla="val 3980"/>
+              <a:gd name="adj" fmla="val 5424"/>
             </a:avLst>
           </a:prstGeom>
           <a:solidFill>
@@ -9939,7 +10491,7 @@
         <p:spPr>
           <a:xfrm>
             <a:off x="960120" y="2194560"/>
-            <a:ext cx="10271455" cy="1380744"/>
+            <a:ext cx="10271455" cy="891540"/>
           </a:xfrm>
           <a:prstGeom prst="rect">
             <a:avLst/>
@@ -9966,7 +10518,7 @@
                 <a:ea typeface="Courier New" pitchFamily="34" charset="-122"/>
                 <a:cs typeface="Courier New" pitchFamily="34" charset="-120"/>
               </a:rPr>
-              <a:t>&lt;span class="text-blue-600 font-bold brand-underline"&gt;New!&lt;/span&gt;</a:t>
+              <a:t>&lt;button class="btn btn-primary my-cta-button"&gt;Get Started&lt;/button&gt;</a:t>
             </a:r>
             <a:endParaRPr lang="en-US" sz="1400" dirty="0"/>
           </a:p>
@@ -9995,7 +10547,7 @@
                 <a:ea typeface="Courier New" pitchFamily="34" charset="-122"/>
                 <a:cs typeface="Courier New" pitchFamily="34" charset="-120"/>
               </a:rPr>
-              <a:t>.brand-underline { text-decoration: underline wavy; text-underline-offset: 4px; }</a:t>
+              <a:t>.my-cta-button { text-transform: uppercase; letter-spacing: 1px; }</a:t>
             </a:r>
             <a:endParaRPr lang="en-US" sz="1400" dirty="0"/>
           </a:p>
@@ -10183,7 +10735,7 @@
                 <a:ea typeface="Cambria" pitchFamily="34" charset="-122"/>
                 <a:cs typeface="Cambria" pitchFamily="34" charset="-120"/>
               </a:rPr>
-              <a:t>Tailwind + Custom, Rendered</a:t>
+              <a:t>Bootstrap + Custom, Rendered</a:t>
             </a:r>
             <a:endParaRPr lang="en-US" sz="3400" dirty="0"/>
           </a:p>
@@ -10225,7 +10777,7 @@
       </p:sp>
       <p:pic>
         <p:nvPicPr>
-          <p:cNvPr id="5" name="Image 0" descr="D:/GitHub/mern-web-book/docs/assets/img/lecture-10/tailwind-custom-class.png">    </p:cNvPr>
+          <p:cNvPr id="5" name="Image 0" descr="D:/GitHub/mern-web-book/docs/assets/img/lecture-10/bootstrap-custom-class.png">    </p:cNvPr>
           <p:cNvPicPr>
             <a:picLocks noChangeAspect="1"/>
           </p:cNvPicPr>
@@ -10239,8 +10791,8 @@
         </p:blipFill>
         <p:spPr>
           <a:xfrm>
-            <a:off x="4830928" y="3322320"/>
-            <a:ext cx="2529840" cy="1584960"/>
+            <a:off x="3726028" y="3169920"/>
+            <a:ext cx="4739640" cy="1889760"/>
           </a:xfrm>
           <a:prstGeom prst="rect">
             <a:avLst/>
@@ -10336,6 +10888,533 @@
 <file path=ppt/slides/slide27.xml><?xml version="1.0" encoding="utf-8"?>
 <p:sld xmlns:a="http://schemas.openxmlformats.org/drawingml/2006/main" xmlns:r="http://schemas.openxmlformats.org/officeDocument/2006/relationships" xmlns:p="http://schemas.openxmlformats.org/presentationml/2006/main">
   <p:cSld name="Slide 27">
+    <p:bg>
+      <p:bgPr>
+        <a:solidFill>
+          <a:srgbClr val="FFFFFF"/>
+        </a:solidFill>
+      </p:bgPr>
+    </p:bg>
+    <p:spTree>
+      <p:nvGrpSpPr>
+        <p:cNvPr id="1" name=""/>
+        <p:cNvGrpSpPr/>
+        <p:nvPr/>
+      </p:nvGrpSpPr>
+      <p:grpSpPr>
+        <a:xfrm>
+          <a:off x="0" y="0"/>
+          <a:ext cx="0" cy="0"/>
+          <a:chOff x="0" y="0"/>
+          <a:chExt cx="0" cy="0"/>
+        </a:xfrm>
+      </p:grpSpPr>
+      <p:sp>
+        <p:nvSpPr>
+          <p:cNvPr id="2" name="Text 0"/>
+          <p:cNvSpPr txBox="1"/>
+          <p:nvPr/>
+        </p:nvSpPr>
+        <p:spPr>
+          <a:xfrm>
+            <a:off x="640080" y="457200"/>
+            <a:ext cx="10058400" cy="365760"/>
+          </a:xfrm>
+          <a:prstGeom prst="rect">
+            <a:avLst/>
+          </a:prstGeom>
+          <a:noFill/>
+          <a:ln/>
+        </p:spPr>
+        <p:txBody>
+          <a:bodyPr wrap="square" lIns="0" tIns="0" rIns="0" bIns="0" rtlCol="0" anchor="ctr"/>
+          <a:lstStyle/>
+          <a:p>
+            <a:pPr algn="l" indent="0" marL="0">
+              <a:buNone/>
+            </a:pPr>
+            <a:r>
+              <a:rPr lang="en-US" sz="1300" b="1" spc="300" kern="0" dirty="0">
+                <a:solidFill>
+                  <a:srgbClr val="FF8A3D"/>
+                </a:solidFill>
+                <a:latin typeface="Calibri" pitchFamily="34" charset="0"/>
+                <a:ea typeface="Calibri" pitchFamily="34" charset="-122"/>
+                <a:cs typeface="Calibri" pitchFamily="34" charset="-120"/>
+              </a:rPr>
+              <a:t>CUSTOM CLASSES</a:t>
+            </a:r>
+            <a:endParaRPr lang="en-US" sz="1300" dirty="0"/>
+          </a:p>
+        </p:txBody>
+      </p:sp>
+      <p:sp>
+        <p:nvSpPr>
+          <p:cNvPr id="3" name="Text 1"/>
+          <p:cNvSpPr txBox="1"/>
+          <p:nvPr/>
+        </p:nvSpPr>
+        <p:spPr>
+          <a:xfrm>
+            <a:off x="640080" y="841248"/>
+            <a:ext cx="10881360" cy="914400"/>
+          </a:xfrm>
+          <a:prstGeom prst="rect">
+            <a:avLst/>
+          </a:prstGeom>
+          <a:noFill/>
+          <a:ln/>
+        </p:spPr>
+        <p:txBody>
+          <a:bodyPr wrap="square" lIns="0" tIns="0" rIns="0" bIns="0" rtlCol="0" anchor="ctr"/>
+          <a:lstStyle/>
+          <a:p>
+            <a:pPr algn="l" indent="0" marL="0">
+              <a:buNone/>
+            </a:pPr>
+            <a:r>
+              <a:rPr lang="en-US" sz="3400" b="1" dirty="0">
+                <a:solidFill>
+                  <a:srgbClr val="2B2B7A"/>
+                </a:solidFill>
+                <a:latin typeface="Cambria" pitchFamily="34" charset="0"/>
+                <a:ea typeface="Cambria" pitchFamily="34" charset="-122"/>
+                <a:cs typeface="Cambria" pitchFamily="34" charset="-120"/>
+              </a:rPr>
+              <a:t>Tailwind + Your Own Class</a:t>
+            </a:r>
+            <a:endParaRPr lang="en-US" sz="3400" dirty="0"/>
+          </a:p>
+        </p:txBody>
+      </p:sp>
+      <p:sp>
+        <p:nvSpPr>
+          <p:cNvPr id="4" name="Shape 2"/>
+          <p:cNvSpPr/>
+          <p:nvPr/>
+        </p:nvSpPr>
+        <p:spPr>
+          <a:xfrm>
+            <a:off x="640080" y="1965960"/>
+            <a:ext cx="10911535" cy="1348740"/>
+          </a:xfrm>
+          <a:prstGeom prst="roundRect">
+            <a:avLst>
+              <a:gd name="adj" fmla="val 5424"/>
+            </a:avLst>
+          </a:prstGeom>
+          <a:solidFill>
+            <a:srgbClr val="1E1E4C"/>
+          </a:solidFill>
+          <a:ln/>
+        </p:spPr>
+      </p:sp>
+      <p:sp>
+        <p:nvSpPr>
+          <p:cNvPr id="5" name="Text 3"/>
+          <p:cNvSpPr txBox="1"/>
+          <p:nvPr/>
+        </p:nvSpPr>
+        <p:spPr>
+          <a:xfrm>
+            <a:off x="960120" y="2194560"/>
+            <a:ext cx="10271455" cy="891540"/>
+          </a:xfrm>
+          <a:prstGeom prst="rect">
+            <a:avLst/>
+          </a:prstGeom>
+          <a:noFill/>
+          <a:ln/>
+        </p:spPr>
+        <p:txBody>
+          <a:bodyPr wrap="square" lIns="0" tIns="0" rIns="0" bIns="0" rtlCol="0" anchor="t"/>
+          <a:lstStyle/>
+          <a:p>
+            <a:pPr indent="0" marL="0">
+              <a:lnSpc>
+                <a:spcPct val="125000"/>
+              </a:lnSpc>
+              <a:buNone/>
+            </a:pPr>
+            <a:r>
+              <a:rPr lang="en-US" sz="1400" dirty="0">
+                <a:solidFill>
+                  <a:srgbClr val="C9D3F5"/>
+                </a:solidFill>
+                <a:latin typeface="Courier New" pitchFamily="34" charset="0"/>
+                <a:ea typeface="Courier New" pitchFamily="34" charset="-122"/>
+                <a:cs typeface="Courier New" pitchFamily="34" charset="-120"/>
+              </a:rPr>
+              <a:t>&lt;span class="text-blue-600 font-bold brand-underline"&gt;New!&lt;/span&gt;</a:t>
+            </a:r>
+            <a:endParaRPr lang="en-US" sz="1400" dirty="0"/>
+          </a:p>
+          <a:p>
+            <a:pPr indent="0" marL="0">
+              <a:lnSpc>
+                <a:spcPct val="125000"/>
+              </a:lnSpc>
+              <a:buNone/>
+            </a:pPr>
+            <a:endParaRPr lang="en-US" sz="1400" dirty="0"/>
+          </a:p>
+          <a:p>
+            <a:pPr indent="0" marL="0">
+              <a:lnSpc>
+                <a:spcPct val="125000"/>
+              </a:lnSpc>
+              <a:buNone/>
+            </a:pPr>
+            <a:r>
+              <a:rPr lang="en-US" sz="1400" dirty="0">
+                <a:solidFill>
+                  <a:srgbClr val="C9D3F5"/>
+                </a:solidFill>
+                <a:latin typeface="Courier New" pitchFamily="34" charset="0"/>
+                <a:ea typeface="Courier New" pitchFamily="34" charset="-122"/>
+                <a:cs typeface="Courier New" pitchFamily="34" charset="-120"/>
+              </a:rPr>
+              <a:t>.brand-underline { text-decoration: underline wavy; text-underline-offset: 4px; }</a:t>
+            </a:r>
+            <a:endParaRPr lang="en-US" sz="1400" dirty="0"/>
+          </a:p>
+        </p:txBody>
+      </p:sp>
+      <p:sp>
+        <p:nvSpPr>
+          <p:cNvPr id="6" name="Text 4"/>
+          <p:cNvSpPr txBox="1"/>
+          <p:nvPr/>
+        </p:nvSpPr>
+        <p:spPr>
+          <a:xfrm>
+            <a:off x="640080" y="6446520"/>
+            <a:ext cx="8686800" cy="292608"/>
+          </a:xfrm>
+          <a:prstGeom prst="rect">
+            <a:avLst/>
+          </a:prstGeom>
+          <a:noFill/>
+          <a:ln/>
+        </p:spPr>
+        <p:txBody>
+          <a:bodyPr wrap="square" lIns="0" tIns="0" rIns="0" bIns="0" rtlCol="0" anchor="ctr"/>
+          <a:lstStyle/>
+          <a:p>
+            <a:pPr algn="l" indent="0" marL="0">
+              <a:buNone/>
+            </a:pPr>
+            <a:r>
+              <a:rPr lang="en-US" sz="900" dirty="0">
+                <a:solidFill>
+                  <a:srgbClr val="5D5D72"/>
+                </a:solidFill>
+                <a:latin typeface="Calibri" pitchFamily="34" charset="0"/>
+                <a:ea typeface="Calibri" pitchFamily="34" charset="-122"/>
+                <a:cs typeface="Calibri" pitchFamily="34" charset="-120"/>
+              </a:rPr>
+              <a:t>Usman Akram  •  COMSATS University Islamabad</a:t>
+            </a:r>
+            <a:endParaRPr lang="en-US" sz="900" dirty="0"/>
+          </a:p>
+        </p:txBody>
+      </p:sp>
+      <p:sp>
+        <p:nvSpPr>
+          <p:cNvPr id="7" name="Text 5"/>
+          <p:cNvSpPr txBox="1"/>
+          <p:nvPr/>
+        </p:nvSpPr>
+        <p:spPr>
+          <a:xfrm>
+            <a:off x="11155680" y="6446520"/>
+            <a:ext cx="457200" cy="292608"/>
+          </a:xfrm>
+          <a:prstGeom prst="rect">
+            <a:avLst/>
+          </a:prstGeom>
+          <a:noFill/>
+          <a:ln/>
+        </p:spPr>
+        <p:txBody>
+          <a:bodyPr wrap="square" lIns="0" tIns="0" rIns="0" bIns="0" rtlCol="0" anchor="ctr"/>
+          <a:lstStyle/>
+          <a:p>
+            <a:pPr algn="r" indent="0" marL="0">
+              <a:buNone/>
+            </a:pPr>
+            <a:r>
+              <a:rPr lang="en-US" sz="900" dirty="0">
+                <a:solidFill>
+                  <a:srgbClr val="5D5D72"/>
+                </a:solidFill>
+                <a:latin typeface="Calibri" pitchFamily="34" charset="0"/>
+                <a:ea typeface="Calibri" pitchFamily="34" charset="-122"/>
+                <a:cs typeface="Calibri" pitchFamily="34" charset="-120"/>
+              </a:rPr>
+              <a:t>27</a:t>
+            </a:r>
+            <a:endParaRPr lang="en-US" sz="900" dirty="0"/>
+          </a:p>
+        </p:txBody>
+      </p:sp>
+    </p:spTree>
+  </p:cSld>
+  <p:clrMapOvr>
+    <a:masterClrMapping/>
+  </p:clrMapOvr>
+</p:sld>
+</file>
+
+<file path=ppt/slides/slide28.xml><?xml version="1.0" encoding="utf-8"?>
+<p:sld xmlns:a="http://schemas.openxmlformats.org/drawingml/2006/main" xmlns:r="http://schemas.openxmlformats.org/officeDocument/2006/relationships" xmlns:p="http://schemas.openxmlformats.org/presentationml/2006/main">
+  <p:cSld name="Slide 28">
+    <p:bg>
+      <p:bgPr>
+        <a:solidFill>
+          <a:srgbClr val="FFFFFF"/>
+        </a:solidFill>
+      </p:bgPr>
+    </p:bg>
+    <p:spTree>
+      <p:nvGrpSpPr>
+        <p:cNvPr id="1" name=""/>
+        <p:cNvGrpSpPr/>
+        <p:nvPr/>
+      </p:nvGrpSpPr>
+      <p:grpSpPr>
+        <a:xfrm>
+          <a:off x="0" y="0"/>
+          <a:ext cx="0" cy="0"/>
+          <a:chOff x="0" y="0"/>
+          <a:chExt cx="0" cy="0"/>
+        </a:xfrm>
+      </p:grpSpPr>
+      <p:sp>
+        <p:nvSpPr>
+          <p:cNvPr id="2" name="Text 0"/>
+          <p:cNvSpPr txBox="1"/>
+          <p:nvPr/>
+        </p:nvSpPr>
+        <p:spPr>
+          <a:xfrm>
+            <a:off x="640080" y="457200"/>
+            <a:ext cx="10058400" cy="365760"/>
+          </a:xfrm>
+          <a:prstGeom prst="rect">
+            <a:avLst/>
+          </a:prstGeom>
+          <a:noFill/>
+          <a:ln/>
+        </p:spPr>
+        <p:txBody>
+          <a:bodyPr wrap="square" lIns="0" tIns="0" rIns="0" bIns="0" rtlCol="0" anchor="ctr"/>
+          <a:lstStyle/>
+          <a:p>
+            <a:pPr algn="l" indent="0" marL="0">
+              <a:buNone/>
+            </a:pPr>
+            <a:r>
+              <a:rPr lang="en-US" sz="1300" b="1" spc="300" kern="0" dirty="0">
+                <a:solidFill>
+                  <a:srgbClr val="FF8A3D"/>
+                </a:solidFill>
+                <a:latin typeface="Calibri" pitchFamily="34" charset="0"/>
+                <a:ea typeface="Calibri" pitchFamily="34" charset="-122"/>
+                <a:cs typeface="Calibri" pitchFamily="34" charset="-120"/>
+              </a:rPr>
+              <a:t>CUSTOM CLASSES</a:t>
+            </a:r>
+            <a:endParaRPr lang="en-US" sz="1300" dirty="0"/>
+          </a:p>
+        </p:txBody>
+      </p:sp>
+      <p:sp>
+        <p:nvSpPr>
+          <p:cNvPr id="3" name="Text 1"/>
+          <p:cNvSpPr txBox="1"/>
+          <p:nvPr/>
+        </p:nvSpPr>
+        <p:spPr>
+          <a:xfrm>
+            <a:off x="640080" y="841248"/>
+            <a:ext cx="10881360" cy="914400"/>
+          </a:xfrm>
+          <a:prstGeom prst="rect">
+            <a:avLst/>
+          </a:prstGeom>
+          <a:noFill/>
+          <a:ln/>
+        </p:spPr>
+        <p:txBody>
+          <a:bodyPr wrap="square" lIns="0" tIns="0" rIns="0" bIns="0" rtlCol="0" anchor="ctr"/>
+          <a:lstStyle/>
+          <a:p>
+            <a:pPr algn="l" indent="0" marL="0">
+              <a:buNone/>
+            </a:pPr>
+            <a:r>
+              <a:rPr lang="en-US" sz="3400" b="1" dirty="0">
+                <a:solidFill>
+                  <a:srgbClr val="2B2B7A"/>
+                </a:solidFill>
+                <a:latin typeface="Cambria" pitchFamily="34" charset="0"/>
+                <a:ea typeface="Cambria" pitchFamily="34" charset="-122"/>
+                <a:cs typeface="Cambria" pitchFamily="34" charset="-120"/>
+              </a:rPr>
+              <a:t>Tailwind + Custom, Rendered</a:t>
+            </a:r>
+            <a:endParaRPr lang="en-US" sz="3400" dirty="0"/>
+          </a:p>
+        </p:txBody>
+      </p:sp>
+      <p:sp>
+        <p:nvSpPr>
+          <p:cNvPr id="4" name="Shape 2"/>
+          <p:cNvSpPr/>
+          <p:nvPr/>
+        </p:nvSpPr>
+        <p:spPr>
+          <a:xfrm>
+            <a:off x="530352" y="1947672"/>
+            <a:ext cx="11130991" cy="4334256"/>
+          </a:xfrm>
+          <a:prstGeom prst="roundRect">
+            <a:avLst>
+              <a:gd name="adj" fmla="val 1266"/>
+            </a:avLst>
+          </a:prstGeom>
+          <a:solidFill>
+            <a:srgbClr val="FFFFFF"/>
+          </a:solidFill>
+          <a:ln w="12700">
+            <a:solidFill>
+              <a:srgbClr val="E2E2EE"/>
+            </a:solidFill>
+            <a:prstDash val="solid"/>
+          </a:ln>
+          <a:effectLst>
+            <a:outerShdw sx="100000" sy="100000" kx="0" ky="0" algn="bl" rotWithShape="0" blurRad="101600" dist="38100" dir="5400000">
+              <a:srgbClr val="000000">
+                <a:alpha val="12000"/>
+              </a:srgbClr>
+            </a:outerShdw>
+          </a:effectLst>
+        </p:spPr>
+      </p:sp>
+      <p:pic>
+        <p:nvPicPr>
+          <p:cNvPr id="5" name="Image 0" descr="D:/GitHub/mern-web-book/docs/assets/img/lecture-10/tailwind-custom-class.png">    </p:cNvPr>
+          <p:cNvPicPr>
+            <a:picLocks noChangeAspect="1"/>
+          </p:cNvPicPr>
+          <p:nvPr/>
+        </p:nvPicPr>
+        <p:blipFill>
+          <a:blip r:embed="rId1"/>
+          <a:stretch>
+            <a:fillRect/>
+          </a:stretch>
+        </p:blipFill>
+        <p:spPr>
+          <a:xfrm>
+            <a:off x="4830928" y="3322320"/>
+            <a:ext cx="2529840" cy="1584960"/>
+          </a:xfrm>
+          <a:prstGeom prst="rect">
+            <a:avLst/>
+          </a:prstGeom>
+        </p:spPr>
+      </p:pic>
+      <p:sp>
+        <p:nvSpPr>
+          <p:cNvPr id="6" name="Text 3"/>
+          <p:cNvSpPr txBox="1"/>
+          <p:nvPr/>
+        </p:nvSpPr>
+        <p:spPr>
+          <a:xfrm>
+            <a:off x="640080" y="6446520"/>
+            <a:ext cx="8686800" cy="292608"/>
+          </a:xfrm>
+          <a:prstGeom prst="rect">
+            <a:avLst/>
+          </a:prstGeom>
+          <a:noFill/>
+          <a:ln/>
+        </p:spPr>
+        <p:txBody>
+          <a:bodyPr wrap="square" lIns="0" tIns="0" rIns="0" bIns="0" rtlCol="0" anchor="ctr"/>
+          <a:lstStyle/>
+          <a:p>
+            <a:pPr algn="l" indent="0" marL="0">
+              <a:buNone/>
+            </a:pPr>
+            <a:r>
+              <a:rPr lang="en-US" sz="900" dirty="0">
+                <a:solidFill>
+                  <a:srgbClr val="5D5D72"/>
+                </a:solidFill>
+                <a:latin typeface="Calibri" pitchFamily="34" charset="0"/>
+                <a:ea typeface="Calibri" pitchFamily="34" charset="-122"/>
+                <a:cs typeface="Calibri" pitchFamily="34" charset="-120"/>
+              </a:rPr>
+              <a:t>Usman Akram  •  COMSATS University Islamabad</a:t>
+            </a:r>
+            <a:endParaRPr lang="en-US" sz="900" dirty="0"/>
+          </a:p>
+        </p:txBody>
+      </p:sp>
+      <p:sp>
+        <p:nvSpPr>
+          <p:cNvPr id="7" name="Text 4"/>
+          <p:cNvSpPr txBox="1"/>
+          <p:nvPr/>
+        </p:nvSpPr>
+        <p:spPr>
+          <a:xfrm>
+            <a:off x="11155680" y="6446520"/>
+            <a:ext cx="457200" cy="292608"/>
+          </a:xfrm>
+          <a:prstGeom prst="rect">
+            <a:avLst/>
+          </a:prstGeom>
+          <a:noFill/>
+          <a:ln/>
+        </p:spPr>
+        <p:txBody>
+          <a:bodyPr wrap="square" lIns="0" tIns="0" rIns="0" bIns="0" rtlCol="0" anchor="ctr"/>
+          <a:lstStyle/>
+          <a:p>
+            <a:pPr algn="r" indent="0" marL="0">
+              <a:buNone/>
+            </a:pPr>
+            <a:r>
+              <a:rPr lang="en-US" sz="900" dirty="0">
+                <a:solidFill>
+                  <a:srgbClr val="5D5D72"/>
+                </a:solidFill>
+                <a:latin typeface="Calibri" pitchFamily="34" charset="0"/>
+                <a:ea typeface="Calibri" pitchFamily="34" charset="-122"/>
+                <a:cs typeface="Calibri" pitchFamily="34" charset="-120"/>
+              </a:rPr>
+              <a:t>28</a:t>
+            </a:r>
+            <a:endParaRPr lang="en-US" sz="900" dirty="0"/>
+          </a:p>
+        </p:txBody>
+      </p:sp>
+    </p:spTree>
+  </p:cSld>
+  <p:clrMapOvr>
+    <a:masterClrMapping/>
+  </p:clrMapOvr>
+</p:sld>
+</file>
+
+<file path=ppt/slides/slide29.xml><?xml version="1.0" encoding="utf-8"?>
+<p:sld xmlns:a="http://schemas.openxmlformats.org/drawingml/2006/main" xmlns:r="http://schemas.openxmlformats.org/officeDocument/2006/relationships" xmlns:p="http://schemas.openxmlformats.org/presentationml/2006/main">
+  <p:cSld name="Slide 29">
     <p:bg>
       <p:bgPr>
         <a:solidFill>
@@ -11095,7 +12174,7 @@
                 <a:ea typeface="Calibri" pitchFamily="34" charset="-122"/>
                 <a:cs typeface="Calibri" pitchFamily="34" charset="-120"/>
               </a:rPr>
-              <a:t>27</a:t>
+              <a:t>29</a:t>
             </a:r>
             <a:endParaRPr lang="en-US" sz="900" dirty="0"/>
           </a:p>
@@ -11702,11 +12781,11 @@
         <p:spPr>
           <a:xfrm>
             <a:off x="640080" y="1965960"/>
-            <a:ext cx="10911535" cy="1069848"/>
+            <a:ext cx="10911535" cy="815340"/>
           </a:xfrm>
           <a:prstGeom prst="roundRect">
             <a:avLst>
-              <a:gd name="adj" fmla="val 6838"/>
+              <a:gd name="adj" fmla="val 8972"/>
             </a:avLst>
           </a:prstGeom>
           <a:solidFill>
@@ -11724,7 +12803,7 @@
         <p:spPr>
           <a:xfrm>
             <a:off x="960120" y="2194560"/>
-            <a:ext cx="10271455" cy="612648"/>
+            <a:ext cx="10271455" cy="358140"/>
           </a:xfrm>
           <a:prstGeom prst="rect">
             <a:avLst/>
@@ -11765,8 +12844,8 @@
         </p:nvSpPr>
         <p:spPr>
           <a:xfrm>
-            <a:off x="640080" y="3264408"/>
-            <a:ext cx="10911535" cy="2999232"/>
+            <a:off x="640080" y="3009900"/>
+            <a:ext cx="10911535" cy="3253740"/>
           </a:xfrm>
           <a:prstGeom prst="rect">
             <a:avLst/>
@@ -13179,7 +14258,7 @@
                 <a:ea typeface="Cambria" pitchFamily="34" charset="-122"/>
                 <a:cs typeface="Cambria" pitchFamily="34" charset="-120"/>
               </a:rPr>
-              <a:t>The Same Page, Two Widths</a:t>
+              <a:t>Fluid Units in Practice</a:t>
             </a:r>
             <a:endParaRPr lang="en-US" sz="3400" dirty="0"/>
           </a:p>
@@ -13187,231 +14266,181 @@
       </p:sp>
       <p:sp>
         <p:nvSpPr>
-          <p:cNvPr id="4" name="Text 2"/>
-          <p:cNvSpPr txBox="1"/>
+          <p:cNvPr id="4" name="Shape 2"/>
+          <p:cNvSpPr/>
           <p:nvPr/>
         </p:nvSpPr>
         <p:spPr>
           <a:xfrm>
             <a:off x="640080" y="1965960"/>
-            <a:ext cx="5272888" cy="365760"/>
-          </a:xfrm>
-          <a:prstGeom prst="rect">
-            <a:avLst/>
-          </a:prstGeom>
-          <a:noFill/>
-          <a:ln/>
-        </p:spPr>
-        <p:txBody>
-          <a:bodyPr wrap="square" lIns="0" tIns="0" rIns="0" bIns="0" rtlCol="0" anchor="ctr"/>
-          <a:lstStyle/>
-          <a:p>
-            <a:pPr algn="ctr" indent="0" marL="0">
-              <a:buNone/>
-            </a:pPr>
-            <a:r>
-              <a:rPr lang="en-US" sz="1100" b="1" spc="150" kern="0" dirty="0">
-                <a:solidFill>
-                  <a:srgbClr val="E67528"/>
+            <a:ext cx="10911535" cy="1882140"/>
+          </a:xfrm>
+          <a:prstGeom prst="roundRect">
+            <a:avLst>
+              <a:gd name="adj" fmla="val 3887"/>
+            </a:avLst>
+          </a:prstGeom>
+          <a:solidFill>
+            <a:srgbClr val="1E1E4C"/>
+          </a:solidFill>
+          <a:ln/>
+        </p:spPr>
+      </p:sp>
+      <p:sp>
+        <p:nvSpPr>
+          <p:cNvPr id="5" name="Text 3"/>
+          <p:cNvSpPr txBox="1"/>
+          <p:nvPr/>
+        </p:nvSpPr>
+        <p:spPr>
+          <a:xfrm>
+            <a:off x="960120" y="2194560"/>
+            <a:ext cx="10271455" cy="1424940"/>
+          </a:xfrm>
+          <a:prstGeom prst="rect">
+            <a:avLst/>
+          </a:prstGeom>
+          <a:noFill/>
+          <a:ln/>
+        </p:spPr>
+        <p:txBody>
+          <a:bodyPr wrap="square" lIns="0" tIns="0" rIns="0" bIns="0" rtlCol="0" anchor="t"/>
+          <a:lstStyle/>
+          <a:p>
+            <a:pPr indent="0" marL="0">
+              <a:lnSpc>
+                <a:spcPct val="125000"/>
+              </a:lnSpc>
+              <a:buNone/>
+            </a:pPr>
+            <a:r>
+              <a:rPr lang="en-US" sz="1400" dirty="0">
+                <a:solidFill>
+                  <a:srgbClr val="C9D3F5"/>
+                </a:solidFill>
+                <a:latin typeface="Courier New" pitchFamily="34" charset="0"/>
+                <a:ea typeface="Courier New" pitchFamily="34" charset="-122"/>
+                <a:cs typeface="Courier New" pitchFamily="34" charset="-120"/>
+              </a:rPr>
+              <a:t>.hero {</a:t>
+            </a:r>
+            <a:endParaRPr lang="en-US" sz="1400" dirty="0"/>
+          </a:p>
+          <a:p>
+            <a:pPr indent="0" marL="0">
+              <a:lnSpc>
+                <a:spcPct val="125000"/>
+              </a:lnSpc>
+              <a:buNone/>
+            </a:pPr>
+            <a:r>
+              <a:rPr lang="en-US" sz="1400" dirty="0">
+                <a:solidFill>
+                  <a:srgbClr val="C9D3F5"/>
+                </a:solidFill>
+                <a:latin typeface="Courier New" pitchFamily="34" charset="0"/>
+                <a:ea typeface="Courier New" pitchFamily="34" charset="-122"/>
+                <a:cs typeface="Courier New" pitchFamily="34" charset="-120"/>
+              </a:rPr>
+              <a:t>  width: 100vw;   /* always fills the full screen width */</a:t>
+            </a:r>
+            <a:endParaRPr lang="en-US" sz="1400" dirty="0"/>
+          </a:p>
+          <a:p>
+            <a:pPr indent="0" marL="0">
+              <a:lnSpc>
+                <a:spcPct val="125000"/>
+              </a:lnSpc>
+              <a:buNone/>
+            </a:pPr>
+            <a:r>
+              <a:rPr lang="en-US" sz="1400" dirty="0">
+                <a:solidFill>
+                  <a:srgbClr val="C9D3F5"/>
+                </a:solidFill>
+                <a:latin typeface="Courier New" pitchFamily="34" charset="0"/>
+                <a:ea typeface="Courier New" pitchFamily="34" charset="-122"/>
+                <a:cs typeface="Courier New" pitchFamily="34" charset="-120"/>
+              </a:rPr>
+              <a:t>  height: 60vh;   /* always 60% of the visible screen height */</a:t>
+            </a:r>
+            <a:endParaRPr lang="en-US" sz="1400" dirty="0"/>
+          </a:p>
+          <a:p>
+            <a:pPr indent="0" marL="0">
+              <a:lnSpc>
+                <a:spcPct val="125000"/>
+              </a:lnSpc>
+              <a:buNone/>
+            </a:pPr>
+            <a:r>
+              <a:rPr lang="en-US" sz="1400" dirty="0">
+                <a:solidFill>
+                  <a:srgbClr val="C9D3F5"/>
+                </a:solidFill>
+                <a:latin typeface="Courier New" pitchFamily="34" charset="0"/>
+                <a:ea typeface="Courier New" pitchFamily="34" charset="-122"/>
+                <a:cs typeface="Courier New" pitchFamily="34" charset="-120"/>
+              </a:rPr>
+              <a:t>}</a:t>
+            </a:r>
+            <a:endParaRPr lang="en-US" sz="1400" dirty="0"/>
+          </a:p>
+          <a:p>
+            <a:pPr indent="0" marL="0">
+              <a:lnSpc>
+                <a:spcPct val="125000"/>
+              </a:lnSpc>
+              <a:buNone/>
+            </a:pPr>
+            <a:r>
+              <a:rPr lang="en-US" sz="1400" dirty="0">
+                <a:solidFill>
+                  <a:srgbClr val="C9D3F5"/>
+                </a:solidFill>
+                <a:latin typeface="Courier New" pitchFamily="34" charset="0"/>
+                <a:ea typeface="Courier New" pitchFamily="34" charset="-122"/>
+                <a:cs typeface="Courier New" pitchFamily="34" charset="-120"/>
+              </a:rPr>
+              <a:t>.card { width: 90%; } /* always 90% of its parent, whatever that is */</a:t>
+            </a:r>
+            <a:endParaRPr lang="en-US" sz="1400" dirty="0"/>
+          </a:p>
+        </p:txBody>
+      </p:sp>
+      <p:sp>
+        <p:nvSpPr>
+          <p:cNvPr id="6" name="Text 4"/>
+          <p:cNvSpPr txBox="1"/>
+          <p:nvPr/>
+        </p:nvSpPr>
+        <p:spPr>
+          <a:xfrm>
+            <a:off x="640080" y="6446520"/>
+            <a:ext cx="8686800" cy="292608"/>
+          </a:xfrm>
+          <a:prstGeom prst="rect">
+            <a:avLst/>
+          </a:prstGeom>
+          <a:noFill/>
+          <a:ln/>
+        </p:spPr>
+        <p:txBody>
+          <a:bodyPr wrap="square" lIns="0" tIns="0" rIns="0" bIns="0" rtlCol="0" anchor="ctr"/>
+          <a:lstStyle/>
+          <a:p>
+            <a:pPr algn="l" indent="0" marL="0">
+              <a:buNone/>
+            </a:pPr>
+            <a:r>
+              <a:rPr lang="en-US" sz="900" dirty="0">
+                <a:solidFill>
+                  <a:srgbClr val="5D5D72"/>
                 </a:solidFill>
                 <a:latin typeface="Calibri" pitchFamily="34" charset="0"/>
                 <a:ea typeface="Calibri" pitchFamily="34" charset="-122"/>
                 <a:cs typeface="Calibri" pitchFamily="34" charset="-120"/>
               </a:rPr>
-              <a:t>WIDE</a:t>
-            </a:r>
-            <a:endParaRPr lang="en-US" sz="1100" dirty="0"/>
-          </a:p>
-        </p:txBody>
-      </p:sp>
-      <p:sp>
-        <p:nvSpPr>
-          <p:cNvPr id="5" name="Shape 3"/>
-          <p:cNvSpPr/>
-          <p:nvPr/>
-        </p:nvSpPr>
-        <p:spPr>
-          <a:xfrm>
-            <a:off x="530352" y="2313432"/>
-            <a:ext cx="5492344" cy="3831336"/>
-          </a:xfrm>
-          <a:prstGeom prst="roundRect">
-            <a:avLst>
-              <a:gd name="adj" fmla="val 1432"/>
-            </a:avLst>
-          </a:prstGeom>
-          <a:solidFill>
-            <a:srgbClr val="FFFFFF"/>
-          </a:solidFill>
-          <a:ln w="12700">
-            <a:solidFill>
-              <a:srgbClr val="E2E2EE"/>
-            </a:solidFill>
-            <a:prstDash val="solid"/>
-          </a:ln>
-          <a:effectLst>
-            <a:outerShdw sx="100000" sy="100000" kx="0" ky="0" algn="bl" rotWithShape="0" blurRad="101600" dist="38100" dir="5400000">
-              <a:srgbClr val="000000">
-                <a:alpha val="12000"/>
-              </a:srgbClr>
-            </a:outerShdw>
-          </a:effectLst>
-        </p:spPr>
-      </p:sp>
-      <p:pic>
-        <p:nvPicPr>
-          <p:cNvPr id="6" name="Image 0" descr="D:/GitHub/mern-web-book/docs/assets/img/lecture-10/fluid-units-wide.png">    </p:cNvPr>
-          <p:cNvPicPr>
-            <a:picLocks noChangeAspect="1"/>
-          </p:cNvPicPr>
-          <p:nvPr/>
-        </p:nvPicPr>
-        <p:blipFill>
-          <a:blip r:embed="rId1"/>
-          <a:stretch>
-            <a:fillRect/>
-          </a:stretch>
-        </p:blipFill>
-        <p:spPr>
-          <a:xfrm>
-            <a:off x="640080" y="3178579"/>
-            <a:ext cx="5272888" cy="2101043"/>
-          </a:xfrm>
-          <a:prstGeom prst="rect">
-            <a:avLst/>
-          </a:prstGeom>
-        </p:spPr>
-      </p:pic>
-      <p:sp>
-        <p:nvSpPr>
-          <p:cNvPr id="7" name="Text 4"/>
-          <p:cNvSpPr txBox="1"/>
-          <p:nvPr/>
-        </p:nvSpPr>
-        <p:spPr>
-          <a:xfrm>
-            <a:off x="6278728" y="1965960"/>
-            <a:ext cx="5272888" cy="365760"/>
-          </a:xfrm>
-          <a:prstGeom prst="rect">
-            <a:avLst/>
-          </a:prstGeom>
-          <a:noFill/>
-          <a:ln/>
-        </p:spPr>
-        <p:txBody>
-          <a:bodyPr wrap="square" lIns="0" tIns="0" rIns="0" bIns="0" rtlCol="0" anchor="ctr"/>
-          <a:lstStyle/>
-          <a:p>
-            <a:pPr algn="ctr" indent="0" marL="0">
-              <a:buNone/>
-            </a:pPr>
-            <a:r>
-              <a:rPr lang="en-US" sz="1100" b="1" spc="150" kern="0" dirty="0">
-                <a:solidFill>
-                  <a:srgbClr val="E67528"/>
-                </a:solidFill>
-                <a:latin typeface="Calibri" pitchFamily="34" charset="0"/>
-                <a:ea typeface="Calibri" pitchFamily="34" charset="-122"/>
-                <a:cs typeface="Calibri" pitchFamily="34" charset="-120"/>
-              </a:rPr>
-              <a:t>NARROW</a:t>
-            </a:r>
-            <a:endParaRPr lang="en-US" sz="1100" dirty="0"/>
-          </a:p>
-        </p:txBody>
-      </p:sp>
-      <p:sp>
-        <p:nvSpPr>
-          <p:cNvPr id="8" name="Shape 5"/>
-          <p:cNvSpPr/>
-          <p:nvPr/>
-        </p:nvSpPr>
-        <p:spPr>
-          <a:xfrm>
-            <a:off x="6169000" y="2313432"/>
-            <a:ext cx="5492344" cy="3831336"/>
-          </a:xfrm>
-          <a:prstGeom prst="roundRect">
-            <a:avLst>
-              <a:gd name="adj" fmla="val 1432"/>
-            </a:avLst>
-          </a:prstGeom>
-          <a:solidFill>
-            <a:srgbClr val="FFFFFF"/>
-          </a:solidFill>
-          <a:ln w="12700">
-            <a:solidFill>
-              <a:srgbClr val="E2E2EE"/>
-            </a:solidFill>
-            <a:prstDash val="solid"/>
-          </a:ln>
-          <a:effectLst>
-            <a:outerShdw sx="100000" sy="100000" kx="0" ky="0" algn="bl" rotWithShape="0" blurRad="101600" dist="38100" dir="5400000">
-              <a:srgbClr val="000000">
-                <a:alpha val="12000"/>
-              </a:srgbClr>
-            </a:outerShdw>
-          </a:effectLst>
-        </p:spPr>
-      </p:sp>
-      <p:pic>
-        <p:nvPicPr>
-          <p:cNvPr id="9" name="Image 1" descr="D:/GitHub/mern-web-book/docs/assets/img/lecture-10/fluid-units-narrow.png">    </p:cNvPr>
-          <p:cNvPicPr>
-            <a:picLocks noChangeAspect="1"/>
-          </p:cNvPicPr>
-          <p:nvPr/>
-        </p:nvPicPr>
-        <p:blipFill>
-          <a:blip r:embed="rId2"/>
-          <a:stretch>
-            <a:fillRect/>
-          </a:stretch>
-        </p:blipFill>
-        <p:spPr>
-          <a:xfrm>
-            <a:off x="6962804" y="2423160"/>
-            <a:ext cx="3904735" cy="3611880"/>
-          </a:xfrm>
-          <a:prstGeom prst="rect">
-            <a:avLst/>
-          </a:prstGeom>
-        </p:spPr>
-      </p:pic>
-      <p:sp>
-        <p:nvSpPr>
-          <p:cNvPr id="10" name="Text 6"/>
-          <p:cNvSpPr txBox="1"/>
-          <p:nvPr/>
-        </p:nvSpPr>
-        <p:spPr>
-          <a:xfrm>
-            <a:off x="640080" y="6446520"/>
-            <a:ext cx="8686800" cy="292608"/>
-          </a:xfrm>
-          <a:prstGeom prst="rect">
-            <a:avLst/>
-          </a:prstGeom>
-          <a:noFill/>
-          <a:ln/>
-        </p:spPr>
-        <p:txBody>
-          <a:bodyPr wrap="square" lIns="0" tIns="0" rIns="0" bIns="0" rtlCol="0" anchor="ctr"/>
-          <a:lstStyle/>
-          <a:p>
-            <a:pPr algn="l" indent="0" marL="0">
-              <a:buNone/>
-            </a:pPr>
-            <a:r>
-              <a:rPr lang="en-US" sz="900" dirty="0">
-                <a:solidFill>
-                  <a:srgbClr val="5D5D72"/>
-                </a:solidFill>
-                <a:latin typeface="Calibri" pitchFamily="34" charset="0"/>
-                <a:ea typeface="Calibri" pitchFamily="34" charset="-122"/>
-                <a:cs typeface="Calibri" pitchFamily="34" charset="-120"/>
-              </a:rPr>
               <a:t>Usman Akram  •  COMSATS University Islamabad</a:t>
             </a:r>
             <a:endParaRPr lang="en-US" sz="900" dirty="0"/>
@@ -13420,7 +14449,7 @@
       </p:sp>
       <p:sp>
         <p:nvSpPr>
-          <p:cNvPr id="11" name="Text 7"/>
+          <p:cNvPr id="7" name="Text 5"/>
           <p:cNvSpPr txBox="1"/>
           <p:nvPr/>
         </p:nvSpPr>
@@ -13522,7 +14551,7 @@
                 <a:ea typeface="Calibri" pitchFamily="34" charset="-122"/>
                 <a:cs typeface="Calibri" pitchFamily="34" charset="-120"/>
               </a:rPr>
-              <a:t>MEDIA QUERIES</a:t>
+              <a:t>FLUID UNITS</a:t>
             </a:r>
             <a:endParaRPr lang="en-US" sz="1300" dirty="0"/>
           </a:p>
@@ -13561,7 +14590,7 @@
                 <a:ea typeface="Cambria" pitchFamily="34" charset="-122"/>
                 <a:cs typeface="Cambria" pitchFamily="34" charset="-120"/>
               </a:rPr>
-              <a:t>A Mobile-First Breakpoint</a:t>
+              <a:t>The Same Page, Two Widths</a:t>
             </a:r>
             <a:endParaRPr lang="en-US" sz="3400" dirty="0"/>
           </a:p>
@@ -13569,170 +14598,231 @@
       </p:sp>
       <p:sp>
         <p:nvSpPr>
-          <p:cNvPr id="4" name="Shape 2"/>
-          <p:cNvSpPr/>
+          <p:cNvPr id="4" name="Text 2"/>
+          <p:cNvSpPr txBox="1"/>
           <p:nvPr/>
         </p:nvSpPr>
         <p:spPr>
           <a:xfrm>
             <a:off x="640080" y="1965960"/>
-            <a:ext cx="10911535" cy="2606040"/>
-          </a:xfrm>
-          <a:prstGeom prst="roundRect">
-            <a:avLst>
-              <a:gd name="adj" fmla="val 2807"/>
-            </a:avLst>
-          </a:prstGeom>
-          <a:solidFill>
-            <a:srgbClr val="1E1E4C"/>
-          </a:solidFill>
-          <a:ln/>
-        </p:spPr>
-      </p:sp>
-      <p:sp>
-        <p:nvSpPr>
-          <p:cNvPr id="5" name="Text 3"/>
-          <p:cNvSpPr txBox="1"/>
-          <p:nvPr/>
-        </p:nvSpPr>
-        <p:spPr>
-          <a:xfrm>
-            <a:off x="960120" y="2194560"/>
-            <a:ext cx="10271455" cy="2148840"/>
-          </a:xfrm>
-          <a:prstGeom prst="rect">
-            <a:avLst/>
-          </a:prstGeom>
-          <a:noFill/>
-          <a:ln/>
-        </p:spPr>
-        <p:txBody>
-          <a:bodyPr wrap="square" lIns="0" tIns="0" rIns="0" bIns="0" rtlCol="0" anchor="t"/>
-          <a:lstStyle/>
-          <a:p>
-            <a:pPr indent="0" marL="0">
-              <a:lnSpc>
-                <a:spcPct val="125000"/>
-              </a:lnSpc>
-              <a:buNone/>
-            </a:pPr>
-            <a:r>
-              <a:rPr lang="en-US" sz="1400" dirty="0">
-                <a:solidFill>
-                  <a:srgbClr val="C9D3F5"/>
-                </a:solidFill>
-                <a:latin typeface="Courier New" pitchFamily="34" charset="0"/>
-                <a:ea typeface="Courier New" pitchFamily="34" charset="-122"/>
-                <a:cs typeface="Courier New" pitchFamily="34" charset="-120"/>
-              </a:rPr>
-              <a:t>.container { display: flex; flex-direction: column; }</a:t>
-            </a:r>
-            <a:endParaRPr lang="en-US" sz="1400" dirty="0"/>
-          </a:p>
-          <a:p>
-            <a:pPr indent="0" marL="0">
-              <a:lnSpc>
-                <a:spcPct val="125000"/>
-              </a:lnSpc>
-              <a:buNone/>
-            </a:pPr>
-            <a:endParaRPr lang="en-US" sz="1400" dirty="0"/>
-          </a:p>
-          <a:p>
-            <a:pPr indent="0" marL="0">
-              <a:lnSpc>
-                <a:spcPct val="125000"/>
-              </a:lnSpc>
-              <a:buNone/>
-            </a:pPr>
-            <a:r>
-              <a:rPr lang="en-US" sz="1400" dirty="0">
-                <a:solidFill>
-                  <a:srgbClr val="C9D3F5"/>
-                </a:solidFill>
-                <a:latin typeface="Courier New" pitchFamily="34" charset="0"/>
-                <a:ea typeface="Courier New" pitchFamily="34" charset="-122"/>
-                <a:cs typeface="Courier New" pitchFamily="34" charset="-120"/>
-              </a:rPr>
-              <a:t>@media (min-width: 768px) {</a:t>
-            </a:r>
-            <a:endParaRPr lang="en-US" sz="1400" dirty="0"/>
-          </a:p>
-          <a:p>
-            <a:pPr indent="0" marL="0">
-              <a:lnSpc>
-                <a:spcPct val="125000"/>
-              </a:lnSpc>
-              <a:buNone/>
-            </a:pPr>
-            <a:r>
-              <a:rPr lang="en-US" sz="1400" dirty="0">
-                <a:solidFill>
-                  <a:srgbClr val="C9D3F5"/>
-                </a:solidFill>
-                <a:latin typeface="Courier New" pitchFamily="34" charset="0"/>
-                <a:ea typeface="Courier New" pitchFamily="34" charset="-122"/>
-                <a:cs typeface="Courier New" pitchFamily="34" charset="-120"/>
-              </a:rPr>
-              <a:t>  .container { flex-direction: row; }</a:t>
-            </a:r>
-            <a:endParaRPr lang="en-US" sz="1400" dirty="0"/>
-          </a:p>
-          <a:p>
-            <a:pPr indent="0" marL="0">
-              <a:lnSpc>
-                <a:spcPct val="125000"/>
-              </a:lnSpc>
-              <a:buNone/>
-            </a:pPr>
-            <a:r>
-              <a:rPr lang="en-US" sz="1400" dirty="0">
-                <a:solidFill>
-                  <a:srgbClr val="C9D3F5"/>
-                </a:solidFill>
-                <a:latin typeface="Courier New" pitchFamily="34" charset="0"/>
-                <a:ea typeface="Courier New" pitchFamily="34" charset="-122"/>
-                <a:cs typeface="Courier New" pitchFamily="34" charset="-120"/>
-              </a:rPr>
-              <a:t>}</a:t>
-            </a:r>
-            <a:endParaRPr lang="en-US" sz="1400" dirty="0"/>
-          </a:p>
-        </p:txBody>
-      </p:sp>
-      <p:sp>
-        <p:nvSpPr>
-          <p:cNvPr id="6" name="Text 4"/>
-          <p:cNvSpPr txBox="1"/>
-          <p:nvPr/>
-        </p:nvSpPr>
-        <p:spPr>
-          <a:xfrm>
-            <a:off x="640080" y="6446520"/>
-            <a:ext cx="8686800" cy="292608"/>
-          </a:xfrm>
-          <a:prstGeom prst="rect">
-            <a:avLst/>
-          </a:prstGeom>
-          <a:noFill/>
-          <a:ln/>
-        </p:spPr>
-        <p:txBody>
-          <a:bodyPr wrap="square" lIns="0" tIns="0" rIns="0" bIns="0" rtlCol="0" anchor="ctr"/>
-          <a:lstStyle/>
-          <a:p>
-            <a:pPr algn="l" indent="0" marL="0">
-              <a:buNone/>
-            </a:pPr>
-            <a:r>
-              <a:rPr lang="en-US" sz="900" dirty="0">
-                <a:solidFill>
-                  <a:srgbClr val="5D5D72"/>
+            <a:ext cx="5272888" cy="365760"/>
+          </a:xfrm>
+          <a:prstGeom prst="rect">
+            <a:avLst/>
+          </a:prstGeom>
+          <a:noFill/>
+          <a:ln/>
+        </p:spPr>
+        <p:txBody>
+          <a:bodyPr wrap="square" lIns="0" tIns="0" rIns="0" bIns="0" rtlCol="0" anchor="ctr"/>
+          <a:lstStyle/>
+          <a:p>
+            <a:pPr algn="ctr" indent="0" marL="0">
+              <a:buNone/>
+            </a:pPr>
+            <a:r>
+              <a:rPr lang="en-US" sz="1100" b="1" spc="150" kern="0" dirty="0">
+                <a:solidFill>
+                  <a:srgbClr val="E67528"/>
                 </a:solidFill>
                 <a:latin typeface="Calibri" pitchFamily="34" charset="0"/>
                 <a:ea typeface="Calibri" pitchFamily="34" charset="-122"/>
                 <a:cs typeface="Calibri" pitchFamily="34" charset="-120"/>
               </a:rPr>
+              <a:t>WIDE</a:t>
+            </a:r>
+            <a:endParaRPr lang="en-US" sz="1100" dirty="0"/>
+          </a:p>
+        </p:txBody>
+      </p:sp>
+      <p:sp>
+        <p:nvSpPr>
+          <p:cNvPr id="5" name="Shape 3"/>
+          <p:cNvSpPr/>
+          <p:nvPr/>
+        </p:nvSpPr>
+        <p:spPr>
+          <a:xfrm>
+            <a:off x="530352" y="2313432"/>
+            <a:ext cx="5492344" cy="3831336"/>
+          </a:xfrm>
+          <a:prstGeom prst="roundRect">
+            <a:avLst>
+              <a:gd name="adj" fmla="val 1432"/>
+            </a:avLst>
+          </a:prstGeom>
+          <a:solidFill>
+            <a:srgbClr val="FFFFFF"/>
+          </a:solidFill>
+          <a:ln w="12700">
+            <a:solidFill>
+              <a:srgbClr val="E2E2EE"/>
+            </a:solidFill>
+            <a:prstDash val="solid"/>
+          </a:ln>
+          <a:effectLst>
+            <a:outerShdw sx="100000" sy="100000" kx="0" ky="0" algn="bl" rotWithShape="0" blurRad="101600" dist="38100" dir="5400000">
+              <a:srgbClr val="000000">
+                <a:alpha val="12000"/>
+              </a:srgbClr>
+            </a:outerShdw>
+          </a:effectLst>
+        </p:spPr>
+      </p:sp>
+      <p:pic>
+        <p:nvPicPr>
+          <p:cNvPr id="6" name="Image 0" descr="D:/GitHub/mern-web-book/docs/assets/img/lecture-10/fluid-units-wide.png">    </p:cNvPr>
+          <p:cNvPicPr>
+            <a:picLocks noChangeAspect="1"/>
+          </p:cNvPicPr>
+          <p:nvPr/>
+        </p:nvPicPr>
+        <p:blipFill>
+          <a:blip r:embed="rId1"/>
+          <a:stretch>
+            <a:fillRect/>
+          </a:stretch>
+        </p:blipFill>
+        <p:spPr>
+          <a:xfrm>
+            <a:off x="640080" y="3178579"/>
+            <a:ext cx="5272888" cy="2101043"/>
+          </a:xfrm>
+          <a:prstGeom prst="rect">
+            <a:avLst/>
+          </a:prstGeom>
+        </p:spPr>
+      </p:pic>
+      <p:sp>
+        <p:nvSpPr>
+          <p:cNvPr id="7" name="Text 4"/>
+          <p:cNvSpPr txBox="1"/>
+          <p:nvPr/>
+        </p:nvSpPr>
+        <p:spPr>
+          <a:xfrm>
+            <a:off x="6278728" y="1965960"/>
+            <a:ext cx="5272888" cy="365760"/>
+          </a:xfrm>
+          <a:prstGeom prst="rect">
+            <a:avLst/>
+          </a:prstGeom>
+          <a:noFill/>
+          <a:ln/>
+        </p:spPr>
+        <p:txBody>
+          <a:bodyPr wrap="square" lIns="0" tIns="0" rIns="0" bIns="0" rtlCol="0" anchor="ctr"/>
+          <a:lstStyle/>
+          <a:p>
+            <a:pPr algn="ctr" indent="0" marL="0">
+              <a:buNone/>
+            </a:pPr>
+            <a:r>
+              <a:rPr lang="en-US" sz="1100" b="1" spc="150" kern="0" dirty="0">
+                <a:solidFill>
+                  <a:srgbClr val="E67528"/>
+                </a:solidFill>
+                <a:latin typeface="Calibri" pitchFamily="34" charset="0"/>
+                <a:ea typeface="Calibri" pitchFamily="34" charset="-122"/>
+                <a:cs typeface="Calibri" pitchFamily="34" charset="-120"/>
+              </a:rPr>
+              <a:t>NARROW</a:t>
+            </a:r>
+            <a:endParaRPr lang="en-US" sz="1100" dirty="0"/>
+          </a:p>
+        </p:txBody>
+      </p:sp>
+      <p:sp>
+        <p:nvSpPr>
+          <p:cNvPr id="8" name="Shape 5"/>
+          <p:cNvSpPr/>
+          <p:nvPr/>
+        </p:nvSpPr>
+        <p:spPr>
+          <a:xfrm>
+            <a:off x="6169000" y="2313432"/>
+            <a:ext cx="5492344" cy="3831336"/>
+          </a:xfrm>
+          <a:prstGeom prst="roundRect">
+            <a:avLst>
+              <a:gd name="adj" fmla="val 1432"/>
+            </a:avLst>
+          </a:prstGeom>
+          <a:solidFill>
+            <a:srgbClr val="FFFFFF"/>
+          </a:solidFill>
+          <a:ln w="12700">
+            <a:solidFill>
+              <a:srgbClr val="E2E2EE"/>
+            </a:solidFill>
+            <a:prstDash val="solid"/>
+          </a:ln>
+          <a:effectLst>
+            <a:outerShdw sx="100000" sy="100000" kx="0" ky="0" algn="bl" rotWithShape="0" blurRad="101600" dist="38100" dir="5400000">
+              <a:srgbClr val="000000">
+                <a:alpha val="12000"/>
+              </a:srgbClr>
+            </a:outerShdw>
+          </a:effectLst>
+        </p:spPr>
+      </p:sp>
+      <p:pic>
+        <p:nvPicPr>
+          <p:cNvPr id="9" name="Image 1" descr="D:/GitHub/mern-web-book/docs/assets/img/lecture-10/fluid-units-narrow.png">    </p:cNvPr>
+          <p:cNvPicPr>
+            <a:picLocks noChangeAspect="1"/>
+          </p:cNvPicPr>
+          <p:nvPr/>
+        </p:nvPicPr>
+        <p:blipFill>
+          <a:blip r:embed="rId2"/>
+          <a:stretch>
+            <a:fillRect/>
+          </a:stretch>
+        </p:blipFill>
+        <p:spPr>
+          <a:xfrm>
+            <a:off x="6962804" y="2423160"/>
+            <a:ext cx="3904735" cy="3611880"/>
+          </a:xfrm>
+          <a:prstGeom prst="rect">
+            <a:avLst/>
+          </a:prstGeom>
+        </p:spPr>
+      </p:pic>
+      <p:sp>
+        <p:nvSpPr>
+          <p:cNvPr id="10" name="Text 6"/>
+          <p:cNvSpPr txBox="1"/>
+          <p:nvPr/>
+        </p:nvSpPr>
+        <p:spPr>
+          <a:xfrm>
+            <a:off x="640080" y="6446520"/>
+            <a:ext cx="8686800" cy="292608"/>
+          </a:xfrm>
+          <a:prstGeom prst="rect">
+            <a:avLst/>
+          </a:prstGeom>
+          <a:noFill/>
+          <a:ln/>
+        </p:spPr>
+        <p:txBody>
+          <a:bodyPr wrap="square" lIns="0" tIns="0" rIns="0" bIns="0" rtlCol="0" anchor="ctr"/>
+          <a:lstStyle/>
+          <a:p>
+            <a:pPr algn="l" indent="0" marL="0">
+              <a:buNone/>
+            </a:pPr>
+            <a:r>
+              <a:rPr lang="en-US" sz="900" dirty="0">
+                <a:solidFill>
+                  <a:srgbClr val="5D5D72"/>
+                </a:solidFill>
+                <a:latin typeface="Calibri" pitchFamily="34" charset="0"/>
+                <a:ea typeface="Calibri" pitchFamily="34" charset="-122"/>
+                <a:cs typeface="Calibri" pitchFamily="34" charset="-120"/>
+              </a:rPr>
               <a:t>Usman Akram  •  COMSATS University Islamabad</a:t>
             </a:r>
             <a:endParaRPr lang="en-US" sz="900" dirty="0"/>
@@ -13741,7 +14831,7 @@
       </p:sp>
       <p:sp>
         <p:nvSpPr>
-          <p:cNvPr id="7" name="Text 5"/>
+          <p:cNvPr id="11" name="Text 7"/>
           <p:cNvSpPr txBox="1"/>
           <p:nvPr/>
         </p:nvSpPr>
@@ -13882,7 +14972,7 @@
                 <a:ea typeface="Cambria" pitchFamily="34" charset="-122"/>
                 <a:cs typeface="Cambria" pitchFamily="34" charset="-120"/>
               </a:rPr>
-              <a:t>Three Cards, Two Widths</a:t>
+              <a:t>A Mobile-First Breakpoint</a:t>
             </a:r>
             <a:endParaRPr lang="en-US" sz="3400" dirty="0"/>
           </a:p>
@@ -13890,231 +14980,170 @@
       </p:sp>
       <p:sp>
         <p:nvSpPr>
-          <p:cNvPr id="4" name="Text 2"/>
-          <p:cNvSpPr txBox="1"/>
+          <p:cNvPr id="4" name="Shape 2"/>
+          <p:cNvSpPr/>
           <p:nvPr/>
         </p:nvSpPr>
         <p:spPr>
           <a:xfrm>
             <a:off x="640080" y="1965960"/>
-            <a:ext cx="5272888" cy="365760"/>
-          </a:xfrm>
-          <a:prstGeom prst="rect">
-            <a:avLst/>
-          </a:prstGeom>
-          <a:noFill/>
-          <a:ln/>
-        </p:spPr>
-        <p:txBody>
-          <a:bodyPr wrap="square" lIns="0" tIns="0" rIns="0" bIns="0" rtlCol="0" anchor="ctr"/>
-          <a:lstStyle/>
-          <a:p>
-            <a:pPr algn="ctr" indent="0" marL="0">
-              <a:buNone/>
-            </a:pPr>
-            <a:r>
-              <a:rPr lang="en-US" sz="1100" b="1" spc="150" kern="0" dirty="0">
-                <a:solidFill>
-                  <a:srgbClr val="E67528"/>
+            <a:ext cx="10911535" cy="1882140"/>
+          </a:xfrm>
+          <a:prstGeom prst="roundRect">
+            <a:avLst>
+              <a:gd name="adj" fmla="val 3887"/>
+            </a:avLst>
+          </a:prstGeom>
+          <a:solidFill>
+            <a:srgbClr val="1E1E4C"/>
+          </a:solidFill>
+          <a:ln/>
+        </p:spPr>
+      </p:sp>
+      <p:sp>
+        <p:nvSpPr>
+          <p:cNvPr id="5" name="Text 3"/>
+          <p:cNvSpPr txBox="1"/>
+          <p:nvPr/>
+        </p:nvSpPr>
+        <p:spPr>
+          <a:xfrm>
+            <a:off x="960120" y="2194560"/>
+            <a:ext cx="10271455" cy="1424940"/>
+          </a:xfrm>
+          <a:prstGeom prst="rect">
+            <a:avLst/>
+          </a:prstGeom>
+          <a:noFill/>
+          <a:ln/>
+        </p:spPr>
+        <p:txBody>
+          <a:bodyPr wrap="square" lIns="0" tIns="0" rIns="0" bIns="0" rtlCol="0" anchor="t"/>
+          <a:lstStyle/>
+          <a:p>
+            <a:pPr indent="0" marL="0">
+              <a:lnSpc>
+                <a:spcPct val="125000"/>
+              </a:lnSpc>
+              <a:buNone/>
+            </a:pPr>
+            <a:r>
+              <a:rPr lang="en-US" sz="1400" dirty="0">
+                <a:solidFill>
+                  <a:srgbClr val="C9D3F5"/>
+                </a:solidFill>
+                <a:latin typeface="Courier New" pitchFamily="34" charset="0"/>
+                <a:ea typeface="Courier New" pitchFamily="34" charset="-122"/>
+                <a:cs typeface="Courier New" pitchFamily="34" charset="-120"/>
+              </a:rPr>
+              <a:t>.container { display: flex; flex-direction: column; }</a:t>
+            </a:r>
+            <a:endParaRPr lang="en-US" sz="1400" dirty="0"/>
+          </a:p>
+          <a:p>
+            <a:pPr indent="0" marL="0">
+              <a:lnSpc>
+                <a:spcPct val="125000"/>
+              </a:lnSpc>
+              <a:buNone/>
+            </a:pPr>
+            <a:endParaRPr lang="en-US" sz="1400" dirty="0"/>
+          </a:p>
+          <a:p>
+            <a:pPr indent="0" marL="0">
+              <a:lnSpc>
+                <a:spcPct val="125000"/>
+              </a:lnSpc>
+              <a:buNone/>
+            </a:pPr>
+            <a:r>
+              <a:rPr lang="en-US" sz="1400" dirty="0">
+                <a:solidFill>
+                  <a:srgbClr val="C9D3F5"/>
+                </a:solidFill>
+                <a:latin typeface="Courier New" pitchFamily="34" charset="0"/>
+                <a:ea typeface="Courier New" pitchFamily="34" charset="-122"/>
+                <a:cs typeface="Courier New" pitchFamily="34" charset="-120"/>
+              </a:rPr>
+              <a:t>@media (min-width: 768px) {</a:t>
+            </a:r>
+            <a:endParaRPr lang="en-US" sz="1400" dirty="0"/>
+          </a:p>
+          <a:p>
+            <a:pPr indent="0" marL="0">
+              <a:lnSpc>
+                <a:spcPct val="125000"/>
+              </a:lnSpc>
+              <a:buNone/>
+            </a:pPr>
+            <a:r>
+              <a:rPr lang="en-US" sz="1400" dirty="0">
+                <a:solidFill>
+                  <a:srgbClr val="C9D3F5"/>
+                </a:solidFill>
+                <a:latin typeface="Courier New" pitchFamily="34" charset="0"/>
+                <a:ea typeface="Courier New" pitchFamily="34" charset="-122"/>
+                <a:cs typeface="Courier New" pitchFamily="34" charset="-120"/>
+              </a:rPr>
+              <a:t>  .container { flex-direction: row; }</a:t>
+            </a:r>
+            <a:endParaRPr lang="en-US" sz="1400" dirty="0"/>
+          </a:p>
+          <a:p>
+            <a:pPr indent="0" marL="0">
+              <a:lnSpc>
+                <a:spcPct val="125000"/>
+              </a:lnSpc>
+              <a:buNone/>
+            </a:pPr>
+            <a:r>
+              <a:rPr lang="en-US" sz="1400" dirty="0">
+                <a:solidFill>
+                  <a:srgbClr val="C9D3F5"/>
+                </a:solidFill>
+                <a:latin typeface="Courier New" pitchFamily="34" charset="0"/>
+                <a:ea typeface="Courier New" pitchFamily="34" charset="-122"/>
+                <a:cs typeface="Courier New" pitchFamily="34" charset="-120"/>
+              </a:rPr>
+              <a:t>}</a:t>
+            </a:r>
+            <a:endParaRPr lang="en-US" sz="1400" dirty="0"/>
+          </a:p>
+        </p:txBody>
+      </p:sp>
+      <p:sp>
+        <p:nvSpPr>
+          <p:cNvPr id="6" name="Text 4"/>
+          <p:cNvSpPr txBox="1"/>
+          <p:nvPr/>
+        </p:nvSpPr>
+        <p:spPr>
+          <a:xfrm>
+            <a:off x="640080" y="6446520"/>
+            <a:ext cx="8686800" cy="292608"/>
+          </a:xfrm>
+          <a:prstGeom prst="rect">
+            <a:avLst/>
+          </a:prstGeom>
+          <a:noFill/>
+          <a:ln/>
+        </p:spPr>
+        <p:txBody>
+          <a:bodyPr wrap="square" lIns="0" tIns="0" rIns="0" bIns="0" rtlCol="0" anchor="ctr"/>
+          <a:lstStyle/>
+          <a:p>
+            <a:pPr algn="l" indent="0" marL="0">
+              <a:buNone/>
+            </a:pPr>
+            <a:r>
+              <a:rPr lang="en-US" sz="900" dirty="0">
+                <a:solidFill>
+                  <a:srgbClr val="5D5D72"/>
                 </a:solidFill>
                 <a:latin typeface="Calibri" pitchFamily="34" charset="0"/>
                 <a:ea typeface="Calibri" pitchFamily="34" charset="-122"/>
                 <a:cs typeface="Calibri" pitchFamily="34" charset="-120"/>
               </a:rPr>
-              <a:t>WIDE (ROW)</a:t>
-            </a:r>
-            <a:endParaRPr lang="en-US" sz="1100" dirty="0"/>
-          </a:p>
-        </p:txBody>
-      </p:sp>
-      <p:sp>
-        <p:nvSpPr>
-          <p:cNvPr id="5" name="Shape 3"/>
-          <p:cNvSpPr/>
-          <p:nvPr/>
-        </p:nvSpPr>
-        <p:spPr>
-          <a:xfrm>
-            <a:off x="530352" y="2313432"/>
-            <a:ext cx="5492344" cy="3831336"/>
-          </a:xfrm>
-          <a:prstGeom prst="roundRect">
-            <a:avLst>
-              <a:gd name="adj" fmla="val 1432"/>
-            </a:avLst>
-          </a:prstGeom>
-          <a:solidFill>
-            <a:srgbClr val="FFFFFF"/>
-          </a:solidFill>
-          <a:ln w="12700">
-            <a:solidFill>
-              <a:srgbClr val="E2E2EE"/>
-            </a:solidFill>
-            <a:prstDash val="solid"/>
-          </a:ln>
-          <a:effectLst>
-            <a:outerShdw sx="100000" sy="100000" kx="0" ky="0" algn="bl" rotWithShape="0" blurRad="101600" dist="38100" dir="5400000">
-              <a:srgbClr val="000000">
-                <a:alpha val="12000"/>
-              </a:srgbClr>
-            </a:outerShdw>
-          </a:effectLst>
-        </p:spPr>
-      </p:sp>
-      <p:pic>
-        <p:nvPicPr>
-          <p:cNvPr id="6" name="Image 0" descr="D:/GitHub/mern-web-book/docs/assets/img/lecture-10/media-query-wide.png">    </p:cNvPr>
-          <p:cNvPicPr>
-            <a:picLocks noChangeAspect="1"/>
-          </p:cNvPicPr>
-          <p:nvPr/>
-        </p:nvPicPr>
-        <p:blipFill>
-          <a:blip r:embed="rId1"/>
-          <a:stretch>
-            <a:fillRect/>
-          </a:stretch>
-        </p:blipFill>
-        <p:spPr>
-          <a:xfrm>
-            <a:off x="640080" y="4021687"/>
-            <a:ext cx="5272888" cy="414825"/>
-          </a:xfrm>
-          <a:prstGeom prst="rect">
-            <a:avLst/>
-          </a:prstGeom>
-        </p:spPr>
-      </p:pic>
-      <p:sp>
-        <p:nvSpPr>
-          <p:cNvPr id="7" name="Text 4"/>
-          <p:cNvSpPr txBox="1"/>
-          <p:nvPr/>
-        </p:nvSpPr>
-        <p:spPr>
-          <a:xfrm>
-            <a:off x="6278728" y="1965960"/>
-            <a:ext cx="5272888" cy="365760"/>
-          </a:xfrm>
-          <a:prstGeom prst="rect">
-            <a:avLst/>
-          </a:prstGeom>
-          <a:noFill/>
-          <a:ln/>
-        </p:spPr>
-        <p:txBody>
-          <a:bodyPr wrap="square" lIns="0" tIns="0" rIns="0" bIns="0" rtlCol="0" anchor="ctr"/>
-          <a:lstStyle/>
-          <a:p>
-            <a:pPr algn="ctr" indent="0" marL="0">
-              <a:buNone/>
-            </a:pPr>
-            <a:r>
-              <a:rPr lang="en-US" sz="1100" b="1" spc="150" kern="0" dirty="0">
-                <a:solidFill>
-                  <a:srgbClr val="E67528"/>
-                </a:solidFill>
-                <a:latin typeface="Calibri" pitchFamily="34" charset="0"/>
-                <a:ea typeface="Calibri" pitchFamily="34" charset="-122"/>
-                <a:cs typeface="Calibri" pitchFamily="34" charset="-120"/>
-              </a:rPr>
-              <a:t>NARROW (COLUMN)</a:t>
-            </a:r>
-            <a:endParaRPr lang="en-US" sz="1100" dirty="0"/>
-          </a:p>
-        </p:txBody>
-      </p:sp>
-      <p:sp>
-        <p:nvSpPr>
-          <p:cNvPr id="8" name="Shape 5"/>
-          <p:cNvSpPr/>
-          <p:nvPr/>
-        </p:nvSpPr>
-        <p:spPr>
-          <a:xfrm>
-            <a:off x="6169000" y="2313432"/>
-            <a:ext cx="5492344" cy="3831336"/>
-          </a:xfrm>
-          <a:prstGeom prst="roundRect">
-            <a:avLst>
-              <a:gd name="adj" fmla="val 1432"/>
-            </a:avLst>
-          </a:prstGeom>
-          <a:solidFill>
-            <a:srgbClr val="FFFFFF"/>
-          </a:solidFill>
-          <a:ln w="12700">
-            <a:solidFill>
-              <a:srgbClr val="E2E2EE"/>
-            </a:solidFill>
-            <a:prstDash val="solid"/>
-          </a:ln>
-          <a:effectLst>
-            <a:outerShdw sx="100000" sy="100000" kx="0" ky="0" algn="bl" rotWithShape="0" blurRad="101600" dist="38100" dir="5400000">
-              <a:srgbClr val="000000">
-                <a:alpha val="12000"/>
-              </a:srgbClr>
-            </a:outerShdw>
-          </a:effectLst>
-        </p:spPr>
-      </p:sp>
-      <p:pic>
-        <p:nvPicPr>
-          <p:cNvPr id="9" name="Image 1" descr="D:/GitHub/mern-web-book/docs/assets/img/lecture-10/media-query-narrow.png">    </p:cNvPr>
-          <p:cNvPicPr>
-            <a:picLocks noChangeAspect="1"/>
-          </p:cNvPicPr>
-          <p:nvPr/>
-        </p:nvPicPr>
-        <p:blipFill>
-          <a:blip r:embed="rId2"/>
-          <a:stretch>
-            <a:fillRect/>
-          </a:stretch>
-        </p:blipFill>
-        <p:spPr>
-          <a:xfrm>
-            <a:off x="6278728" y="2910878"/>
-            <a:ext cx="5272888" cy="2636444"/>
-          </a:xfrm>
-          <a:prstGeom prst="rect">
-            <a:avLst/>
-          </a:prstGeom>
-        </p:spPr>
-      </p:pic>
-      <p:sp>
-        <p:nvSpPr>
-          <p:cNvPr id="10" name="Text 6"/>
-          <p:cNvSpPr txBox="1"/>
-          <p:nvPr/>
-        </p:nvSpPr>
-        <p:spPr>
-          <a:xfrm>
-            <a:off x="640080" y="6446520"/>
-            <a:ext cx="8686800" cy="292608"/>
-          </a:xfrm>
-          <a:prstGeom prst="rect">
-            <a:avLst/>
-          </a:prstGeom>
-          <a:noFill/>
-          <a:ln/>
-        </p:spPr>
-        <p:txBody>
-          <a:bodyPr wrap="square" lIns="0" tIns="0" rIns="0" bIns="0" rtlCol="0" anchor="ctr"/>
-          <a:lstStyle/>
-          <a:p>
-            <a:pPr algn="l" indent="0" marL="0">
-              <a:buNone/>
-            </a:pPr>
-            <a:r>
-              <a:rPr lang="en-US" sz="900" dirty="0">
-                <a:solidFill>
-                  <a:srgbClr val="5D5D72"/>
-                </a:solidFill>
-                <a:latin typeface="Calibri" pitchFamily="34" charset="0"/>
-                <a:ea typeface="Calibri" pitchFamily="34" charset="-122"/>
-                <a:cs typeface="Calibri" pitchFamily="34" charset="-120"/>
-              </a:rPr>
               <a:t>Usman Akram  •  COMSATS University Islamabad</a:t>
             </a:r>
             <a:endParaRPr lang="en-US" sz="900" dirty="0"/>
@@ -14123,7 +15152,7 @@
       </p:sp>
       <p:sp>
         <p:nvSpPr>
-          <p:cNvPr id="11" name="Text 7"/>
+          <p:cNvPr id="7" name="Text 5"/>
           <p:cNvSpPr txBox="1"/>
           <p:nvPr/>
         </p:nvSpPr>

--- a/slides/CSC336-Lecture-10-Responsive-Design-and-Frameworks.pptx
+++ b/slides/CSC336-Lecture-10-Responsive-Design-and-Frameworks.pptx
@@ -4,6 +4,9 @@
   <p:sldMasterIdLst>
     <p:sldMasterId id="2147483648" r:id="rId1"/>
   </p:sldMasterIdLst>
+  <p:notesMasterIdLst>
+    <p:notesMasterId r:id="rId53"/>
+  </p:notesMasterIdLst>
   <p:sldIdLst>
     <p:sldId id="256" r:id="rId2"/>
     <p:sldId id="257" r:id="rId3"/>
@@ -17,49 +20,46 @@
     <p:sldId id="265" r:id="rId11"/>
     <p:sldId id="266" r:id="rId12"/>
     <p:sldId id="267" r:id="rId13"/>
-    <p:sldId id="302" r:id="rId53"/>
-    <p:sldId id="268" r:id="rId14"/>
-    <p:sldId id="269" r:id="rId15"/>
-    <p:sldId id="270" r:id="rId16"/>
-    <p:sldId id="303" r:id="rId54"/>
-    <p:sldId id="304" r:id="rId55"/>
-    <p:sldId id="271" r:id="rId17"/>
-    <p:sldId id="272" r:id="rId18"/>
-    <p:sldId id="273" r:id="rId19"/>
-    <p:sldId id="274" r:id="rId20"/>
-    <p:sldId id="275" r:id="rId21"/>
-    <p:sldId id="276" r:id="rId22"/>
-    <p:sldId id="277" r:id="rId23"/>
-    <p:sldId id="305" r:id="rId56"/>
-    <p:sldId id="278" r:id="rId24"/>
-    <p:sldId id="279" r:id="rId25"/>
-    <p:sldId id="280" r:id="rId26"/>
-    <p:sldId id="281" r:id="rId27"/>
-    <p:sldId id="282" r:id="rId28"/>
-    <p:sldId id="283" r:id="rId29"/>
-    <p:sldId id="284" r:id="rId30"/>
-    <p:sldId id="285" r:id="rId31"/>
-    <p:sldId id="286" r:id="rId32"/>
-    <p:sldId id="287" r:id="rId33"/>
-    <p:sldId id="288" r:id="rId34"/>
-    <p:sldId id="289" r:id="rId35"/>
-    <p:sldId id="290" r:id="rId36"/>
-    <p:sldId id="291" r:id="rId37"/>
-    <p:sldId id="292" r:id="rId38"/>
-    <p:sldId id="293" r:id="rId39"/>
-    <p:sldId id="306" r:id="rId57"/>
-    <p:sldId id="294" r:id="rId40"/>
-    <p:sldId id="295" r:id="rId41"/>
-    <p:sldId id="296" r:id="rId42"/>
-    <p:sldId id="297" r:id="rId43"/>
-    <p:sldId id="298" r:id="rId44"/>
-    <p:sldId id="299" r:id="rId45"/>
-    <p:sldId id="300" r:id="rId46"/>
-    <p:sldId id="301" r:id="rId47"/>
+    <p:sldId id="302" r:id="rId14"/>
+    <p:sldId id="268" r:id="rId15"/>
+    <p:sldId id="269" r:id="rId16"/>
+    <p:sldId id="270" r:id="rId17"/>
+    <p:sldId id="303" r:id="rId18"/>
+    <p:sldId id="304" r:id="rId19"/>
+    <p:sldId id="271" r:id="rId20"/>
+    <p:sldId id="272" r:id="rId21"/>
+    <p:sldId id="273" r:id="rId22"/>
+    <p:sldId id="274" r:id="rId23"/>
+    <p:sldId id="275" r:id="rId24"/>
+    <p:sldId id="276" r:id="rId25"/>
+    <p:sldId id="277" r:id="rId26"/>
+    <p:sldId id="305" r:id="rId27"/>
+    <p:sldId id="278" r:id="rId28"/>
+    <p:sldId id="279" r:id="rId29"/>
+    <p:sldId id="280" r:id="rId30"/>
+    <p:sldId id="281" r:id="rId31"/>
+    <p:sldId id="282" r:id="rId32"/>
+    <p:sldId id="283" r:id="rId33"/>
+    <p:sldId id="284" r:id="rId34"/>
+    <p:sldId id="285" r:id="rId35"/>
+    <p:sldId id="286" r:id="rId36"/>
+    <p:sldId id="287" r:id="rId37"/>
+    <p:sldId id="288" r:id="rId38"/>
+    <p:sldId id="289" r:id="rId39"/>
+    <p:sldId id="290" r:id="rId40"/>
+    <p:sldId id="291" r:id="rId41"/>
+    <p:sldId id="292" r:id="rId42"/>
+    <p:sldId id="293" r:id="rId43"/>
+    <p:sldId id="306" r:id="rId44"/>
+    <p:sldId id="294" r:id="rId45"/>
+    <p:sldId id="295" r:id="rId46"/>
+    <p:sldId id="296" r:id="rId47"/>
+    <p:sldId id="297" r:id="rId48"/>
+    <p:sldId id="298" r:id="rId49"/>
+    <p:sldId id="299" r:id="rId50"/>
+    <p:sldId id="300" r:id="rId51"/>
+    <p:sldId id="301" r:id="rId52"/>
   </p:sldIdLst>
-  <p:notesMasterIdLst>
-    <p:notesMasterId r:id="rId48"/>
-  </p:notesMasterIdLst>
   <p:sldSz cx="12192000" cy="6858000"/>
   <p:notesSz cx="6858000" cy="12192000"/>
   <p:defaultTextStyle>
@@ -154,6 +154,11 @@
       </a:defRPr>
     </a:lvl9pPr>
   </p:defaultTextStyle>
+  <p:extLst>
+    <p:ext uri="{EFAFB233-063F-42B5-8137-9DF3F51BA10A}">
+      <p15:sldGuideLst xmlns:p15="http://schemas.microsoft.com/office/powerpoint/2012/main"/>
+    </p:ext>
+  </p:extLst>
 </p:presentation>
 </file>
 
@@ -179,234 +184,10 @@
           <a:chExt cx="0" cy="0"/>
         </a:xfrm>
       </p:grpSpPr>
-      <p:sp>
-        <p:nvSpPr>
-          <p:cNvPr id="2" name="Header Placeholder 1"/>
-          <p:cNvSpPr>
-            <a:spLocks noGrp="1"/>
-          </p:cNvSpPr>
-          <p:nvPr>
-            <p:ph type="hdr" sz="quarter"/>
-          </p:nvPr>
-        </p:nvSpPr>
-        <p:spPr>
-          <a:xfrm>
-            <a:off x="0" y="0"/>
-            <a:ext cx="2971800" cy="458788"/>
-          </a:xfrm>
-          <a:prstGeom prst="rect">
-            <a:avLst/>
-          </a:prstGeom>
-        </p:spPr>
-        <p:txBody>
-          <a:bodyPr vert="horz" lIns="91440" tIns="45720" rIns="91440" bIns="45720" rtlCol="0"/>
-          <a:lstStyle>
-            <a:lvl1pPr algn="l">
-              <a:defRPr sz="1200"/>
-            </a:lvl1pPr>
-          </a:lstStyle>
-          <a:p>
-            <a:endParaRPr lang="en-US"/>
-          </a:p>
-        </p:txBody>
-      </p:sp>
-      <p:sp>
-        <p:nvSpPr>
-          <p:cNvPr id="3" name="Date Placeholder 2"/>
-          <p:cNvSpPr>
-            <a:spLocks noGrp="1"/>
-          </p:cNvSpPr>
-          <p:nvPr>
-            <p:ph type="dt" idx="1"/>
-          </p:nvPr>
-        </p:nvSpPr>
-        <p:spPr>
-          <a:xfrm>
-            <a:off x="3884613" y="0"/>
-            <a:ext cx="2971800" cy="458788"/>
-          </a:xfrm>
-          <a:prstGeom prst="rect">
-            <a:avLst/>
-          </a:prstGeom>
-        </p:spPr>
-        <p:txBody>
-          <a:bodyPr vert="horz" lIns="91440" tIns="45720" rIns="91440" bIns="45720" rtlCol="0"/>
-          <a:lstStyle>
-            <a:lvl1pPr algn="r">
-              <a:defRPr sz="1200"/>
-            </a:lvl1pPr>
-          </a:lstStyle>
-          <a:p>
-            <a:fld id="{5282F153-3F37-0F45-9E97-73ACFA13230C}" type="datetimeFigureOut">
-              <a:rPr lang="en-US"/>
-              <a:t>7/23/19</a:t>
-            </a:fld>
-            <a:endParaRPr lang="en-US"/>
-          </a:p>
-        </p:txBody>
-      </p:sp>
-      <p:sp>
-        <p:nvSpPr>
-          <p:cNvPr id="4" name="Slide Image Placeholder 3"/>
-          <p:cNvSpPr>
-            <a:spLocks noGrp="1" noRot="1" noChangeAspect="1"/>
-          </p:cNvSpPr>
-          <p:nvPr>
-            <p:ph type="sldImg" idx="2"/>
-          </p:nvPr>
-        </p:nvSpPr>
-        <p:spPr>
-          <a:xfrm>
-            <a:off x="685800" y="1143000"/>
-            <a:ext cx="5486400" cy="3086100"/>
-          </a:xfrm>
-          <a:prstGeom prst="rect">
-            <a:avLst/>
-          </a:prstGeom>
-          <a:noFill/>
-          <a:ln w="12700">
-            <a:solidFill>
-              <a:prstClr val="black"/>
-            </a:solidFill>
-          </a:ln>
-        </p:spPr>
-        <p:txBody>
-          <a:bodyPr vert="horz" lIns="91440" tIns="45720" rIns="91440" bIns="45720" rtlCol="0" anchor="ctr"/>
-          <a:lstStyle/>
-          <a:p>
-            <a:endParaRPr lang="en-US"/>
-          </a:p>
-        </p:txBody>
-      </p:sp>
-      <p:sp>
-        <p:nvSpPr>
-          <p:cNvPr id="5" name="Notes Placeholder 4"/>
-          <p:cNvSpPr>
-            <a:spLocks noGrp="1"/>
-          </p:cNvSpPr>
-          <p:nvPr>
-            <p:ph type="body" sz="quarter" idx="3"/>
-          </p:nvPr>
-        </p:nvSpPr>
-        <p:spPr>
-          <a:xfrm>
-            <a:off x="685800" y="4400550"/>
-            <a:ext cx="5486400" cy="3600450"/>
-          </a:xfrm>
-          <a:prstGeom prst="rect">
-            <a:avLst/>
-          </a:prstGeom>
-        </p:spPr>
-        <p:txBody>
-          <a:bodyPr vert="horz" lIns="91440" tIns="45720" rIns="91440" bIns="45720" rtlCol="0"/>
-          <a:lstStyle/>
-          <a:p>
-            <a:pPr lvl="0"/>
-            <a:r>
-              <a:rPr lang="en-US"/>
-              <a:t>Click to edit Master text styles</a:t>
-            </a:r>
-          </a:p>
-          <a:p>
-            <a:pPr lvl="1"/>
-            <a:r>
-              <a:rPr lang="en-US"/>
-              <a:t>Second level</a:t>
-            </a:r>
-          </a:p>
-          <a:p>
-            <a:pPr lvl="2"/>
-            <a:r>
-              <a:rPr lang="en-US"/>
-              <a:t>Third level</a:t>
-            </a:r>
-          </a:p>
-          <a:p>
-            <a:pPr lvl="3"/>
-            <a:r>
-              <a:rPr lang="en-US"/>
-              <a:t>Fourth level</a:t>
-            </a:r>
-          </a:p>
-          <a:p>
-            <a:pPr lvl="4"/>
-            <a:r>
-              <a:rPr lang="en-US"/>
-              <a:t>Fifth level</a:t>
-            </a:r>
-          </a:p>
-        </p:txBody>
-      </p:sp>
-      <p:sp>
-        <p:nvSpPr>
-          <p:cNvPr id="6" name="Footer Placeholder 5"/>
-          <p:cNvSpPr>
-            <a:spLocks noGrp="1"/>
-          </p:cNvSpPr>
-          <p:nvPr>
-            <p:ph type="ftr" sz="quarter" idx="4"/>
-          </p:nvPr>
-        </p:nvSpPr>
-        <p:spPr>
-          <a:xfrm>
-            <a:off x="0" y="8685213"/>
-            <a:ext cx="2971800" cy="458787"/>
-          </a:xfrm>
-          <a:prstGeom prst="rect">
-            <a:avLst/>
-          </a:prstGeom>
-        </p:spPr>
-        <p:txBody>
-          <a:bodyPr vert="horz" lIns="91440" tIns="45720" rIns="91440" bIns="45720" rtlCol="0" anchor="b"/>
-          <a:lstStyle>
-            <a:lvl1pPr algn="l">
-              <a:defRPr sz="1200"/>
-            </a:lvl1pPr>
-          </a:lstStyle>
-          <a:p>
-            <a:endParaRPr lang="en-US"/>
-          </a:p>
-        </p:txBody>
-      </p:sp>
-      <p:sp>
-        <p:nvSpPr>
-          <p:cNvPr id="7" name="Slide Number Placeholder 6"/>
-          <p:cNvSpPr>
-            <a:spLocks noGrp="1"/>
-          </p:cNvSpPr>
-          <p:nvPr>
-            <p:ph type="sldNum" sz="quarter" idx="5"/>
-          </p:nvPr>
-        </p:nvSpPr>
-        <p:spPr>
-          <a:xfrm>
-            <a:off x="3884613" y="8685213"/>
-            <a:ext cx="2971800" cy="458787"/>
-          </a:xfrm>
-          <a:prstGeom prst="rect">
-            <a:avLst/>
-          </a:prstGeom>
-        </p:spPr>
-        <p:txBody>
-          <a:bodyPr vert="horz" lIns="91440" tIns="45720" rIns="91440" bIns="45720" rtlCol="0" anchor="b"/>
-          <a:lstStyle>
-            <a:lvl1pPr algn="r">
-              <a:defRPr sz="1200"/>
-            </a:lvl1pPr>
-          </a:lstStyle>
-          <a:p>
-            <a:fld id="{CE5E9CC1-C706-0F49-92D6-E571CC5EEA8F}" type="slidenum">
-              <a:rPr lang="en-US"/>
-              <a:t>‹#›</a:t>
-            </a:fld>
-            <a:endParaRPr lang="en-US"/>
-          </a:p>
-        </p:txBody>
-      </p:sp>
     </p:spTree>
     <p:extLst>
       <p:ext uri="{BB962C8B-B14F-4D97-AF65-F5344CB8AC3E}">
-        <p14:creationId xmlns:p14="http://schemas.microsoft.com/office/powerpoint/2010/main" val="1024086991"/>
+        <p14:creationId xmlns:p14="http://schemas.microsoft.com/office/powerpoint/2010/main" val="754428886"/>
       </p:ext>
     </p:extLst>
   </p:cSld>
@@ -550,10 +331,6 @@
           <a:bodyPr/>
           <a:lstStyle/>
           <a:p>
-            <a:r>
-              <a:rPr lang="en-US" dirty="0"/>
-              <a:t/>
-            </a:r>
             <a:endParaRPr lang="en-US" dirty="0"/>
           </a:p>
         </p:txBody>
@@ -638,10 +415,6 @@
           <a:bodyPr/>
           <a:lstStyle/>
           <a:p>
-            <a:r>
-              <a:rPr lang="en-US" dirty="0"/>
-              <a:t/>
-            </a:r>
             <a:endParaRPr lang="en-US" dirty="0"/>
           </a:p>
         </p:txBody>
@@ -726,10 +499,6 @@
           <a:bodyPr/>
           <a:lstStyle/>
           <a:p>
-            <a:r>
-              <a:rPr lang="en-US" dirty="0"/>
-              <a:t/>
-            </a:r>
             <a:endParaRPr lang="en-US" dirty="0"/>
           </a:p>
         </p:txBody>
@@ -814,10 +583,6 @@
           <a:bodyPr/>
           <a:lstStyle/>
           <a:p>
-            <a:r>
-              <a:rPr lang="en-US" dirty="0"/>
-              <a:t/>
-            </a:r>
             <a:endParaRPr lang="en-US" dirty="0"/>
           </a:p>
         </p:txBody>
@@ -902,10 +667,6 @@
           <a:bodyPr/>
           <a:lstStyle/>
           <a:p>
-            <a:r>
-              <a:rPr lang="en-US" dirty="0"/>
-              <a:t/>
-            </a:r>
             <a:endParaRPr lang="en-US" dirty="0"/>
           </a:p>
         </p:txBody>
@@ -927,7 +688,7 @@
           <a:p>
             <a:fld id="{F7021451-1387-4CA6-816F-3879F97B5CBC}" type="slidenum">
               <a:rPr lang="en-US"/>
-              <a:t>13</a:t>
+              <a:t>14</a:t>
             </a:fld>
             <a:endParaRPr lang="en-US"/>
           </a:p>
@@ -990,10 +751,6 @@
           <a:bodyPr/>
           <a:lstStyle/>
           <a:p>
-            <a:r>
-              <a:rPr lang="en-US" dirty="0"/>
-              <a:t/>
-            </a:r>
             <a:endParaRPr lang="en-US" dirty="0"/>
           </a:p>
         </p:txBody>
@@ -1015,7 +772,7 @@
           <a:p>
             <a:fld id="{F7021451-1387-4CA6-816F-3879F97B5CBC}" type="slidenum">
               <a:rPr lang="en-US"/>
-              <a:t>14</a:t>
+              <a:t>15</a:t>
             </a:fld>
             <a:endParaRPr lang="en-US"/>
           </a:p>
@@ -1078,10 +835,6 @@
           <a:bodyPr/>
           <a:lstStyle/>
           <a:p>
-            <a:r>
-              <a:rPr lang="en-US" dirty="0"/>
-              <a:t/>
-            </a:r>
             <a:endParaRPr lang="en-US" dirty="0"/>
           </a:p>
         </p:txBody>
@@ -1103,7 +856,7 @@
           <a:p>
             <a:fld id="{F7021451-1387-4CA6-816F-3879F97B5CBC}" type="slidenum">
               <a:rPr lang="en-US"/>
-              <a:t>15</a:t>
+              <a:t>16</a:t>
             </a:fld>
             <a:endParaRPr lang="en-US"/>
           </a:p>
@@ -1166,10 +919,6 @@
           <a:bodyPr/>
           <a:lstStyle/>
           <a:p>
-            <a:r>
-              <a:rPr lang="en-US" dirty="0"/>
-              <a:t/>
-            </a:r>
             <a:endParaRPr lang="en-US" dirty="0"/>
           </a:p>
         </p:txBody>
@@ -1191,7 +940,7 @@
           <a:p>
             <a:fld id="{F7021451-1387-4CA6-816F-3879F97B5CBC}" type="slidenum">
               <a:rPr lang="en-US"/>
-              <a:t>16</a:t>
+              <a:t>19</a:t>
             </a:fld>
             <a:endParaRPr lang="en-US"/>
           </a:p>
@@ -1254,10 +1003,6 @@
           <a:bodyPr/>
           <a:lstStyle/>
           <a:p>
-            <a:r>
-              <a:rPr lang="en-US" dirty="0"/>
-              <a:t/>
-            </a:r>
             <a:endParaRPr lang="en-US" dirty="0"/>
           </a:p>
         </p:txBody>
@@ -1279,7 +1024,7 @@
           <a:p>
             <a:fld id="{F7021451-1387-4CA6-816F-3879F97B5CBC}" type="slidenum">
               <a:rPr lang="en-US"/>
-              <a:t>17</a:t>
+              <a:t>20</a:t>
             </a:fld>
             <a:endParaRPr lang="en-US"/>
           </a:p>
@@ -1342,10 +1087,6 @@
           <a:bodyPr/>
           <a:lstStyle/>
           <a:p>
-            <a:r>
-              <a:rPr lang="en-US" dirty="0"/>
-              <a:t/>
-            </a:r>
             <a:endParaRPr lang="en-US" dirty="0"/>
           </a:p>
         </p:txBody>
@@ -1367,7 +1108,7 @@
           <a:p>
             <a:fld id="{F7021451-1387-4CA6-816F-3879F97B5CBC}" type="slidenum">
               <a:rPr lang="en-US"/>
-              <a:t>18</a:t>
+              <a:t>21</a:t>
             </a:fld>
             <a:endParaRPr lang="en-US"/>
           </a:p>
@@ -1430,10 +1171,6 @@
           <a:bodyPr/>
           <a:lstStyle/>
           <a:p>
-            <a:r>
-              <a:rPr lang="en-US" dirty="0"/>
-              <a:t/>
-            </a:r>
             <a:endParaRPr lang="en-US" dirty="0"/>
           </a:p>
         </p:txBody>
@@ -1455,7 +1192,7 @@
           <a:p>
             <a:fld id="{F7021451-1387-4CA6-816F-3879F97B5CBC}" type="slidenum">
               <a:rPr lang="en-US"/>
-              <a:t>19</a:t>
+              <a:t>22</a:t>
             </a:fld>
             <a:endParaRPr lang="en-US"/>
           </a:p>
@@ -1518,10 +1255,6 @@
           <a:bodyPr/>
           <a:lstStyle/>
           <a:p>
-            <a:r>
-              <a:rPr lang="en-US" dirty="0"/>
-              <a:t/>
-            </a:r>
             <a:endParaRPr lang="en-US" dirty="0"/>
           </a:p>
         </p:txBody>
@@ -1606,10 +1339,6 @@
           <a:bodyPr/>
           <a:lstStyle/>
           <a:p>
-            <a:r>
-              <a:rPr lang="en-US" dirty="0"/>
-              <a:t/>
-            </a:r>
             <a:endParaRPr lang="en-US" dirty="0"/>
           </a:p>
         </p:txBody>
@@ -1631,7 +1360,7 @@
           <a:p>
             <a:fld id="{F7021451-1387-4CA6-816F-3879F97B5CBC}" type="slidenum">
               <a:rPr lang="en-US"/>
-              <a:t>20</a:t>
+              <a:t>23</a:t>
             </a:fld>
             <a:endParaRPr lang="en-US"/>
           </a:p>
@@ -1694,10 +1423,6 @@
           <a:bodyPr/>
           <a:lstStyle/>
           <a:p>
-            <a:r>
-              <a:rPr lang="en-US" dirty="0"/>
-              <a:t/>
-            </a:r>
             <a:endParaRPr lang="en-US" dirty="0"/>
           </a:p>
         </p:txBody>
@@ -1719,7 +1444,7 @@
           <a:p>
             <a:fld id="{F7021451-1387-4CA6-816F-3879F97B5CBC}" type="slidenum">
               <a:rPr lang="en-US"/>
-              <a:t>21</a:t>
+              <a:t>24</a:t>
             </a:fld>
             <a:endParaRPr lang="en-US"/>
           </a:p>
@@ -1782,10 +1507,6 @@
           <a:bodyPr/>
           <a:lstStyle/>
           <a:p>
-            <a:r>
-              <a:rPr lang="en-US" dirty="0"/>
-              <a:t/>
-            </a:r>
             <a:endParaRPr lang="en-US" dirty="0"/>
           </a:p>
         </p:txBody>
@@ -1807,7 +1528,7 @@
           <a:p>
             <a:fld id="{F7021451-1387-4CA6-816F-3879F97B5CBC}" type="slidenum">
               <a:rPr lang="en-US"/>
-              <a:t>22</a:t>
+              <a:t>25</a:t>
             </a:fld>
             <a:endParaRPr lang="en-US"/>
           </a:p>
@@ -1870,10 +1591,6 @@
           <a:bodyPr/>
           <a:lstStyle/>
           <a:p>
-            <a:r>
-              <a:rPr lang="en-US" dirty="0"/>
-              <a:t/>
-            </a:r>
             <a:endParaRPr lang="en-US" dirty="0"/>
           </a:p>
         </p:txBody>
@@ -1895,7 +1612,7 @@
           <a:p>
             <a:fld id="{F7021451-1387-4CA6-816F-3879F97B5CBC}" type="slidenum">
               <a:rPr lang="en-US"/>
-              <a:t>23</a:t>
+              <a:t>27</a:t>
             </a:fld>
             <a:endParaRPr lang="en-US"/>
           </a:p>
@@ -1958,10 +1675,6 @@
           <a:bodyPr/>
           <a:lstStyle/>
           <a:p>
-            <a:r>
-              <a:rPr lang="en-US" dirty="0"/>
-              <a:t/>
-            </a:r>
             <a:endParaRPr lang="en-US" dirty="0"/>
           </a:p>
         </p:txBody>
@@ -1983,7 +1696,7 @@
           <a:p>
             <a:fld id="{F7021451-1387-4CA6-816F-3879F97B5CBC}" type="slidenum">
               <a:rPr lang="en-US"/>
-              <a:t>24</a:t>
+              <a:t>28</a:t>
             </a:fld>
             <a:endParaRPr lang="en-US"/>
           </a:p>
@@ -2046,10 +1759,6 @@
           <a:bodyPr/>
           <a:lstStyle/>
           <a:p>
-            <a:r>
-              <a:rPr lang="en-US" dirty="0"/>
-              <a:t/>
-            </a:r>
             <a:endParaRPr lang="en-US" dirty="0"/>
           </a:p>
         </p:txBody>
@@ -2071,7 +1780,7 @@
           <a:p>
             <a:fld id="{F7021451-1387-4CA6-816F-3879F97B5CBC}" type="slidenum">
               <a:rPr lang="en-US"/>
-              <a:t>25</a:t>
+              <a:t>29</a:t>
             </a:fld>
             <a:endParaRPr lang="en-US"/>
           </a:p>
@@ -2134,10 +1843,6 @@
           <a:bodyPr/>
           <a:lstStyle/>
           <a:p>
-            <a:r>
-              <a:rPr lang="en-US" dirty="0"/>
-              <a:t/>
-            </a:r>
             <a:endParaRPr lang="en-US" dirty="0"/>
           </a:p>
         </p:txBody>
@@ -2159,7 +1864,7 @@
           <a:p>
             <a:fld id="{F7021451-1387-4CA6-816F-3879F97B5CBC}" type="slidenum">
               <a:rPr lang="en-US"/>
-              <a:t>26</a:t>
+              <a:t>30</a:t>
             </a:fld>
             <a:endParaRPr lang="en-US"/>
           </a:p>
@@ -2222,10 +1927,6 @@
           <a:bodyPr/>
           <a:lstStyle/>
           <a:p>
-            <a:r>
-              <a:rPr lang="en-US" dirty="0"/>
-              <a:t/>
-            </a:r>
             <a:endParaRPr lang="en-US" dirty="0"/>
           </a:p>
         </p:txBody>
@@ -2247,7 +1948,7 @@
           <a:p>
             <a:fld id="{F7021451-1387-4CA6-816F-3879F97B5CBC}" type="slidenum">
               <a:rPr lang="en-US"/>
-              <a:t>27</a:t>
+              <a:t>31</a:t>
             </a:fld>
             <a:endParaRPr lang="en-US"/>
           </a:p>
@@ -2310,10 +2011,6 @@
           <a:bodyPr/>
           <a:lstStyle/>
           <a:p>
-            <a:r>
-              <a:rPr lang="en-US" dirty="0"/>
-              <a:t/>
-            </a:r>
             <a:endParaRPr lang="en-US" dirty="0"/>
           </a:p>
         </p:txBody>
@@ -2335,7 +2032,7 @@
           <a:p>
             <a:fld id="{F7021451-1387-4CA6-816F-3879F97B5CBC}" type="slidenum">
               <a:rPr lang="en-US"/>
-              <a:t>28</a:t>
+              <a:t>32</a:t>
             </a:fld>
             <a:endParaRPr lang="en-US"/>
           </a:p>
@@ -2398,10 +2095,6 @@
           <a:bodyPr/>
           <a:lstStyle/>
           <a:p>
-            <a:r>
-              <a:rPr lang="en-US" dirty="0"/>
-              <a:t/>
-            </a:r>
             <a:endParaRPr lang="en-US" dirty="0"/>
           </a:p>
         </p:txBody>
@@ -2423,7 +2116,7 @@
           <a:p>
             <a:fld id="{F7021451-1387-4CA6-816F-3879F97B5CBC}" type="slidenum">
               <a:rPr lang="en-US"/>
-              <a:t>29</a:t>
+              <a:t>33</a:t>
             </a:fld>
             <a:endParaRPr lang="en-US"/>
           </a:p>
@@ -2486,10 +2179,6 @@
           <a:bodyPr/>
           <a:lstStyle/>
           <a:p>
-            <a:r>
-              <a:rPr lang="en-US" dirty="0"/>
-              <a:t/>
-            </a:r>
             <a:endParaRPr lang="en-US" dirty="0"/>
           </a:p>
         </p:txBody>
@@ -2574,10 +2263,6 @@
           <a:bodyPr/>
           <a:lstStyle/>
           <a:p>
-            <a:r>
-              <a:rPr lang="en-US" dirty="0"/>
-              <a:t/>
-            </a:r>
             <a:endParaRPr lang="en-US" dirty="0"/>
           </a:p>
         </p:txBody>
@@ -2599,7 +2284,7 @@
           <a:p>
             <a:fld id="{F7021451-1387-4CA6-816F-3879F97B5CBC}" type="slidenum">
               <a:rPr lang="en-US"/>
-              <a:t>30</a:t>
+              <a:t>34</a:t>
             </a:fld>
             <a:endParaRPr lang="en-US"/>
           </a:p>
@@ -2662,10 +2347,6 @@
           <a:bodyPr/>
           <a:lstStyle/>
           <a:p>
-            <a:r>
-              <a:rPr lang="en-US" dirty="0"/>
-              <a:t/>
-            </a:r>
             <a:endParaRPr lang="en-US" dirty="0"/>
           </a:p>
         </p:txBody>
@@ -2687,7 +2368,7 @@
           <a:p>
             <a:fld id="{F7021451-1387-4CA6-816F-3879F97B5CBC}" type="slidenum">
               <a:rPr lang="en-US"/>
-              <a:t>31</a:t>
+              <a:t>35</a:t>
             </a:fld>
             <a:endParaRPr lang="en-US"/>
           </a:p>
@@ -2750,10 +2431,6 @@
           <a:bodyPr/>
           <a:lstStyle/>
           <a:p>
-            <a:r>
-              <a:rPr lang="en-US" dirty="0"/>
-              <a:t/>
-            </a:r>
             <a:endParaRPr lang="en-US" dirty="0"/>
           </a:p>
         </p:txBody>
@@ -2775,7 +2452,7 @@
           <a:p>
             <a:fld id="{F7021451-1387-4CA6-816F-3879F97B5CBC}" type="slidenum">
               <a:rPr lang="en-US"/>
-              <a:t>32</a:t>
+              <a:t>36</a:t>
             </a:fld>
             <a:endParaRPr lang="en-US"/>
           </a:p>
@@ -2838,10 +2515,6 @@
           <a:bodyPr/>
           <a:lstStyle/>
           <a:p>
-            <a:r>
-              <a:rPr lang="en-US" dirty="0"/>
-              <a:t/>
-            </a:r>
             <a:endParaRPr lang="en-US" dirty="0"/>
           </a:p>
         </p:txBody>
@@ -2863,7 +2536,7 @@
           <a:p>
             <a:fld id="{F7021451-1387-4CA6-816F-3879F97B5CBC}" type="slidenum">
               <a:rPr lang="en-US"/>
-              <a:t>33</a:t>
+              <a:t>37</a:t>
             </a:fld>
             <a:endParaRPr lang="en-US"/>
           </a:p>
@@ -2926,10 +2599,6 @@
           <a:bodyPr/>
           <a:lstStyle/>
           <a:p>
-            <a:r>
-              <a:rPr lang="en-US" dirty="0"/>
-              <a:t/>
-            </a:r>
             <a:endParaRPr lang="en-US" dirty="0"/>
           </a:p>
         </p:txBody>
@@ -2951,7 +2620,7 @@
           <a:p>
             <a:fld id="{F7021451-1387-4CA6-816F-3879F97B5CBC}" type="slidenum">
               <a:rPr lang="en-US"/>
-              <a:t>34</a:t>
+              <a:t>38</a:t>
             </a:fld>
             <a:endParaRPr lang="en-US"/>
           </a:p>
@@ -3014,10 +2683,6 @@
           <a:bodyPr/>
           <a:lstStyle/>
           <a:p>
-            <a:r>
-              <a:rPr lang="en-US" dirty="0"/>
-              <a:t/>
-            </a:r>
             <a:endParaRPr lang="en-US" dirty="0"/>
           </a:p>
         </p:txBody>
@@ -3039,7 +2704,7 @@
           <a:p>
             <a:fld id="{F7021451-1387-4CA6-816F-3879F97B5CBC}" type="slidenum">
               <a:rPr lang="en-US"/>
-              <a:t>35</a:t>
+              <a:t>39</a:t>
             </a:fld>
             <a:endParaRPr lang="en-US"/>
           </a:p>
@@ -3102,10 +2767,6 @@
           <a:bodyPr/>
           <a:lstStyle/>
           <a:p>
-            <a:r>
-              <a:rPr lang="en-US" dirty="0"/>
-              <a:t/>
-            </a:r>
             <a:endParaRPr lang="en-US" dirty="0"/>
           </a:p>
         </p:txBody>
@@ -3127,7 +2788,7 @@
           <a:p>
             <a:fld id="{F7021451-1387-4CA6-816F-3879F97B5CBC}" type="slidenum">
               <a:rPr lang="en-US"/>
-              <a:t>36</a:t>
+              <a:t>40</a:t>
             </a:fld>
             <a:endParaRPr lang="en-US"/>
           </a:p>
@@ -3190,10 +2851,6 @@
           <a:bodyPr/>
           <a:lstStyle/>
           <a:p>
-            <a:r>
-              <a:rPr lang="en-US" dirty="0"/>
-              <a:t/>
-            </a:r>
             <a:endParaRPr lang="en-US" dirty="0"/>
           </a:p>
         </p:txBody>
@@ -3215,7 +2872,7 @@
           <a:p>
             <a:fld id="{F7021451-1387-4CA6-816F-3879F97B5CBC}" type="slidenum">
               <a:rPr lang="en-US"/>
-              <a:t>37</a:t>
+              <a:t>41</a:t>
             </a:fld>
             <a:endParaRPr lang="en-US"/>
           </a:p>
@@ -3278,10 +2935,6 @@
           <a:bodyPr/>
           <a:lstStyle/>
           <a:p>
-            <a:r>
-              <a:rPr lang="en-US" dirty="0"/>
-              <a:t/>
-            </a:r>
             <a:endParaRPr lang="en-US" dirty="0"/>
           </a:p>
         </p:txBody>
@@ -3303,7 +2956,7 @@
           <a:p>
             <a:fld id="{F7021451-1387-4CA6-816F-3879F97B5CBC}" type="slidenum">
               <a:rPr lang="en-US"/>
-              <a:t>38</a:t>
+              <a:t>42</a:t>
             </a:fld>
             <a:endParaRPr lang="en-US"/>
           </a:p>
@@ -3366,10 +3019,6 @@
           <a:bodyPr/>
           <a:lstStyle/>
           <a:p>
-            <a:r>
-              <a:rPr lang="en-US" dirty="0"/>
-              <a:t/>
-            </a:r>
             <a:endParaRPr lang="en-US" dirty="0"/>
           </a:p>
         </p:txBody>
@@ -3391,7 +3040,7 @@
           <a:p>
             <a:fld id="{F7021451-1387-4CA6-816F-3879F97B5CBC}" type="slidenum">
               <a:rPr lang="en-US"/>
-              <a:t>39</a:t>
+              <a:t>44</a:t>
             </a:fld>
             <a:endParaRPr lang="en-US"/>
           </a:p>
@@ -3454,10 +3103,6 @@
           <a:bodyPr/>
           <a:lstStyle/>
           <a:p>
-            <a:r>
-              <a:rPr lang="en-US" dirty="0"/>
-              <a:t/>
-            </a:r>
             <a:endParaRPr lang="en-US" dirty="0"/>
           </a:p>
         </p:txBody>
@@ -3542,10 +3187,6 @@
           <a:bodyPr/>
           <a:lstStyle/>
           <a:p>
-            <a:r>
-              <a:rPr lang="en-US" dirty="0"/>
-              <a:t/>
-            </a:r>
             <a:endParaRPr lang="en-US" dirty="0"/>
           </a:p>
         </p:txBody>
@@ -3567,7 +3208,7 @@
           <a:p>
             <a:fld id="{F7021451-1387-4CA6-816F-3879F97B5CBC}" type="slidenum">
               <a:rPr lang="en-US"/>
-              <a:t>40</a:t>
+              <a:t>45</a:t>
             </a:fld>
             <a:endParaRPr lang="en-US"/>
           </a:p>
@@ -3630,10 +3271,6 @@
           <a:bodyPr/>
           <a:lstStyle/>
           <a:p>
-            <a:r>
-              <a:rPr lang="en-US" dirty="0"/>
-              <a:t/>
-            </a:r>
             <a:endParaRPr lang="en-US" dirty="0"/>
           </a:p>
         </p:txBody>
@@ -3655,7 +3292,7 @@
           <a:p>
             <a:fld id="{F7021451-1387-4CA6-816F-3879F97B5CBC}" type="slidenum">
               <a:rPr lang="en-US"/>
-              <a:t>41</a:t>
+              <a:t>46</a:t>
             </a:fld>
             <a:endParaRPr lang="en-US"/>
           </a:p>
@@ -3718,10 +3355,6 @@
           <a:bodyPr/>
           <a:lstStyle/>
           <a:p>
-            <a:r>
-              <a:rPr lang="en-US" dirty="0"/>
-              <a:t/>
-            </a:r>
             <a:endParaRPr lang="en-US" dirty="0"/>
           </a:p>
         </p:txBody>
@@ -3743,7 +3376,7 @@
           <a:p>
             <a:fld id="{F7021451-1387-4CA6-816F-3879F97B5CBC}" type="slidenum">
               <a:rPr lang="en-US"/>
-              <a:t>42</a:t>
+              <a:t>47</a:t>
             </a:fld>
             <a:endParaRPr lang="en-US"/>
           </a:p>
@@ -3806,10 +3439,6 @@
           <a:bodyPr/>
           <a:lstStyle/>
           <a:p>
-            <a:r>
-              <a:rPr lang="en-US" dirty="0"/>
-              <a:t/>
-            </a:r>
             <a:endParaRPr lang="en-US" dirty="0"/>
           </a:p>
         </p:txBody>
@@ -3831,7 +3460,7 @@
           <a:p>
             <a:fld id="{F7021451-1387-4CA6-816F-3879F97B5CBC}" type="slidenum">
               <a:rPr lang="en-US"/>
-              <a:t>43</a:t>
+              <a:t>48</a:t>
             </a:fld>
             <a:endParaRPr lang="en-US"/>
           </a:p>
@@ -3894,10 +3523,6 @@
           <a:bodyPr/>
           <a:lstStyle/>
           <a:p>
-            <a:r>
-              <a:rPr lang="en-US" dirty="0"/>
-              <a:t/>
-            </a:r>
             <a:endParaRPr lang="en-US" dirty="0"/>
           </a:p>
         </p:txBody>
@@ -3919,7 +3544,7 @@
           <a:p>
             <a:fld id="{F7021451-1387-4CA6-816F-3879F97B5CBC}" type="slidenum">
               <a:rPr lang="en-US"/>
-              <a:t>44</a:t>
+              <a:t>49</a:t>
             </a:fld>
             <a:endParaRPr lang="en-US"/>
           </a:p>
@@ -3982,10 +3607,6 @@
           <a:bodyPr/>
           <a:lstStyle/>
           <a:p>
-            <a:r>
-              <a:rPr lang="en-US" dirty="0"/>
-              <a:t/>
-            </a:r>
             <a:endParaRPr lang="en-US" dirty="0"/>
           </a:p>
         </p:txBody>
@@ -4007,7 +3628,7 @@
           <a:p>
             <a:fld id="{F7021451-1387-4CA6-816F-3879F97B5CBC}" type="slidenum">
               <a:rPr lang="en-US"/>
-              <a:t>45</a:t>
+              <a:t>50</a:t>
             </a:fld>
             <a:endParaRPr lang="en-US"/>
           </a:p>
@@ -4070,10 +3691,6 @@
           <a:bodyPr/>
           <a:lstStyle/>
           <a:p>
-            <a:r>
-              <a:rPr lang="en-US" dirty="0"/>
-              <a:t/>
-            </a:r>
             <a:endParaRPr lang="en-US" dirty="0"/>
           </a:p>
         </p:txBody>
@@ -4095,7 +3712,7 @@
           <a:p>
             <a:fld id="{F7021451-1387-4CA6-816F-3879F97B5CBC}" type="slidenum">
               <a:rPr lang="en-US"/>
-              <a:t>46</a:t>
+              <a:t>51</a:t>
             </a:fld>
             <a:endParaRPr lang="en-US"/>
           </a:p>
@@ -4158,10 +3775,6 @@
           <a:bodyPr/>
           <a:lstStyle/>
           <a:p>
-            <a:r>
-              <a:rPr lang="en-US" dirty="0"/>
-              <a:t/>
-            </a:r>
             <a:endParaRPr lang="en-US" dirty="0"/>
           </a:p>
         </p:txBody>
@@ -4246,10 +3859,6 @@
           <a:bodyPr/>
           <a:lstStyle/>
           <a:p>
-            <a:r>
-              <a:rPr lang="en-US" dirty="0"/>
-              <a:t/>
-            </a:r>
             <a:endParaRPr lang="en-US" dirty="0"/>
           </a:p>
         </p:txBody>
@@ -4334,10 +3943,6 @@
           <a:bodyPr/>
           <a:lstStyle/>
           <a:p>
-            <a:r>
-              <a:rPr lang="en-US" dirty="0"/>
-              <a:t/>
-            </a:r>
             <a:endParaRPr lang="en-US" dirty="0"/>
           </a:p>
         </p:txBody>
@@ -4422,10 +4027,6 @@
           <a:bodyPr/>
           <a:lstStyle/>
           <a:p>
-            <a:r>
-              <a:rPr lang="en-US" dirty="0"/>
-              <a:t/>
-            </a:r>
             <a:endParaRPr lang="en-US" dirty="0"/>
           </a:p>
         </p:txBody>
@@ -4510,10 +4111,6 @@
           <a:bodyPr/>
           <a:lstStyle/>
           <a:p>
-            <a:r>
-              <a:rPr lang="en-US" dirty="0"/>
-              <a:t/>
-            </a:r>
             <a:endParaRPr lang="en-US" dirty="0"/>
           </a:p>
         </p:txBody>
@@ -4587,6 +4184,11 @@
 <file path=ppt/slideMasters/slideMaster1.xml><?xml version="1.0" encoding="utf-8"?>
 <p:sldMaster xmlns:a="http://schemas.openxmlformats.org/drawingml/2006/main" xmlns:r="http://schemas.openxmlformats.org/officeDocument/2006/relationships" xmlns:p="http://schemas.openxmlformats.org/presentationml/2006/main">
   <p:cSld>
+    <p:bg>
+      <p:bgRef idx="1001">
+        <a:schemeClr val="bg1"/>
+      </p:bgRef>
+    </p:bg>
     <p:spTree>
       <p:nvGrpSpPr>
         <p:cNvPr id="1" name=""/>
@@ -4869,6 +4471,7 @@
         <a:solidFill>
           <a:srgbClr val="2B2B7A"/>
         </a:solidFill>
+        <a:effectLst/>
       </p:bgPr>
     </p:bg>
     <p:spTree>
@@ -4906,11 +4509,11 @@
           <a:bodyPr wrap="square" lIns="0" tIns="0" rIns="0" bIns="0" rtlCol="0" anchor="ctr"/>
           <a:lstStyle/>
           <a:p>
-            <a:pPr indent="0" marL="0">
+            <a:pPr marL="0" indent="0">
               <a:buNone/>
             </a:pPr>
             <a:r>
-              <a:rPr lang="en-US" sz="1500" b="1" spc="400" kern="0" dirty="0">
+              <a:rPr lang="en-US" sz="1500" b="1" kern="0" spc="400" dirty="0">
                 <a:solidFill>
                   <a:srgbClr val="FF8A3D"/>
                 </a:solidFill>
@@ -4945,7 +4548,7 @@
           <a:bodyPr wrap="square" lIns="0" tIns="0" rIns="0" bIns="0" rtlCol="0" anchor="ctr"/>
           <a:lstStyle/>
           <a:p>
-            <a:pPr indent="0" marL="0">
+            <a:pPr marL="0" indent="0">
               <a:lnSpc>
                 <a:spcPct val="105000"/>
               </a:lnSpc>
@@ -4965,7 +4568,7 @@
             <a:endParaRPr lang="en-US" sz="4000" dirty="0"/>
           </a:p>
           <a:p>
-            <a:pPr indent="0" marL="0">
+            <a:pPr marL="0" indent="0">
               <a:lnSpc>
                 <a:spcPct val="105000"/>
               </a:lnSpc>
@@ -5007,7 +4610,7 @@
           <a:bodyPr wrap="square" lIns="0" tIns="0" rIns="0" bIns="0" rtlCol="0" anchor="ctr"/>
           <a:lstStyle/>
           <a:p>
-            <a:pPr indent="0" marL="0">
+            <a:pPr marL="0" indent="0">
               <a:buNone/>
             </a:pPr>
             <a:r>
@@ -5046,7 +4649,7 @@
           <a:bodyPr wrap="square" lIns="0" tIns="0" rIns="0" bIns="0" rtlCol="0" anchor="ctr"/>
           <a:lstStyle/>
           <a:p>
-            <a:pPr indent="0" marL="0">
+            <a:pPr marL="0" indent="0">
               <a:buNone/>
             </a:pPr>
             <a:r>
@@ -5081,7 +4684,7 @@
           <a:noFill/>
         </p:spPr>
         <p:txBody>
-          <a:bodyPr wrap="none" lIns="0" rIns="0" tIns="0" bIns="0">
+          <a:bodyPr wrap="none" lIns="0" tIns="0" rIns="0" bIns="0">
             <a:spAutoFit/>
           </a:bodyPr>
           <a:lstStyle/>
@@ -5123,6 +4726,7 @@
         <a:solidFill>
           <a:srgbClr val="FFFFFF"/>
         </a:solidFill>
+        <a:effectLst/>
       </p:bgPr>
     </p:bg>
     <p:spTree>
@@ -5160,11 +4764,11 @@
           <a:bodyPr wrap="square" lIns="0" tIns="0" rIns="0" bIns="0" rtlCol="0" anchor="ctr"/>
           <a:lstStyle/>
           <a:p>
-            <a:pPr algn="l" indent="0" marL="0">
+            <a:pPr marL="0" indent="0" algn="l">
               <a:buNone/>
             </a:pPr>
             <a:r>
-              <a:rPr lang="en-US" sz="1300" b="1" spc="300" kern="0" dirty="0">
+              <a:rPr lang="en-US" sz="1300" b="1" kern="0" spc="300" dirty="0">
                 <a:solidFill>
                   <a:srgbClr val="FF8A3D"/>
                 </a:solidFill>
@@ -5199,7 +4803,7 @@
           <a:bodyPr wrap="square" lIns="0" tIns="0" rIns="0" bIns="0" rtlCol="0" anchor="ctr"/>
           <a:lstStyle/>
           <a:p>
-            <a:pPr algn="l" indent="0" marL="0">
+            <a:pPr marL="0" indent="0" algn="l">
               <a:buNone/>
             </a:pPr>
             <a:r>
@@ -5240,7 +4844,10 @@
         </p:spPr>
         <p:txBody>
           <a:bodyPr/>
-          <a:p/>
+          <a:lstStyle/>
+          <a:p>
+            <a:endParaRPr/>
+          </a:p>
         </p:txBody>
       </p:sp>
       <p:sp>
@@ -5264,7 +4871,7 @@
           <a:bodyPr wrap="square" lIns="0" tIns="0" rIns="0" bIns="0" rtlCol="0" anchor="ctr"/>
           <a:lstStyle/>
           <a:p>
-            <a:pPr algn="ctr" indent="0" marL="0">
+            <a:pPr marL="0" indent="0" algn="ctr">
               <a:buNone/>
             </a:pPr>
             <a:r>
@@ -5281,7 +4888,7 @@
             <a:endParaRPr lang="en-US" sz="1250" dirty="0"/>
           </a:p>
           <a:p>
-            <a:pPr algn="ctr" indent="0" marL="0">
+            <a:pPr marL="0" indent="0" algn="ctr">
               <a:buNone/>
             </a:pPr>
             <a:r>
@@ -5298,7 +4905,7 @@
             <a:endParaRPr lang="en-US" sz="1250" dirty="0"/>
           </a:p>
           <a:p>
-            <a:pPr algn="ctr" indent="0" marL="0">
+            <a:pPr marL="0" indent="0" algn="ctr">
               <a:buNone/>
             </a:pPr>
             <a:r>
@@ -5341,7 +4948,10 @@
         </p:spPr>
         <p:txBody>
           <a:bodyPr/>
-          <a:p/>
+          <a:lstStyle/>
+          <a:p>
+            <a:endParaRPr/>
+          </a:p>
         </p:txBody>
       </p:sp>
       <p:sp>
@@ -5367,7 +4977,10 @@
         </p:spPr>
         <p:txBody>
           <a:bodyPr/>
-          <a:p/>
+          <a:lstStyle/>
+          <a:p>
+            <a:endParaRPr/>
+          </a:p>
         </p:txBody>
       </p:sp>
       <p:sp>
@@ -5391,7 +5004,7 @@
           <a:bodyPr wrap="square" lIns="0" tIns="0" rIns="0" bIns="0" rtlCol="0" anchor="ctr"/>
           <a:lstStyle/>
           <a:p>
-            <a:pPr algn="ctr" indent="0" marL="0">
+            <a:pPr marL="0" indent="0" algn="ctr">
               <a:buNone/>
             </a:pPr>
             <a:r>
@@ -5408,7 +5021,7 @@
             <a:endParaRPr lang="en-US" sz="1250" dirty="0"/>
           </a:p>
           <a:p>
-            <a:pPr algn="ctr" indent="0" marL="0">
+            <a:pPr marL="0" indent="0" algn="ctr">
               <a:buNone/>
             </a:pPr>
             <a:r>
@@ -5451,7 +5064,10 @@
         </p:spPr>
         <p:txBody>
           <a:bodyPr/>
-          <a:p/>
+          <a:lstStyle/>
+          <a:p>
+            <a:endParaRPr/>
+          </a:p>
         </p:txBody>
       </p:sp>
       <p:sp>
@@ -5477,7 +5093,10 @@
         </p:spPr>
         <p:txBody>
           <a:bodyPr/>
-          <a:p/>
+          <a:lstStyle/>
+          <a:p>
+            <a:endParaRPr/>
+          </a:p>
         </p:txBody>
       </p:sp>
       <p:sp>
@@ -5501,7 +5120,7 @@
           <a:bodyPr wrap="square" lIns="0" tIns="0" rIns="0" bIns="0" rtlCol="0" anchor="ctr"/>
           <a:lstStyle/>
           <a:p>
-            <a:pPr algn="ctr" indent="0" marL="0">
+            <a:pPr marL="0" indent="0" algn="ctr">
               <a:buNone/>
             </a:pPr>
             <a:r>
@@ -5518,7 +5137,7 @@
             <a:endParaRPr lang="en-US" sz="1250" dirty="0"/>
           </a:p>
           <a:p>
-            <a:pPr algn="ctr" indent="0" marL="0">
+            <a:pPr marL="0" indent="0" algn="ctr">
               <a:buNone/>
             </a:pPr>
             <a:r>
@@ -5561,7 +5180,10 @@
         </p:spPr>
         <p:txBody>
           <a:bodyPr/>
-          <a:p/>
+          <a:lstStyle/>
+          <a:p>
+            <a:endParaRPr/>
+          </a:p>
         </p:txBody>
       </p:sp>
       <p:sp>
@@ -5587,7 +5209,10 @@
         </p:spPr>
         <p:txBody>
           <a:bodyPr/>
-          <a:p/>
+          <a:lstStyle/>
+          <a:p>
+            <a:endParaRPr/>
+          </a:p>
         </p:txBody>
       </p:sp>
       <p:sp>
@@ -5611,7 +5236,7 @@
           <a:bodyPr wrap="square" lIns="0" tIns="0" rIns="0" bIns="0" rtlCol="0" anchor="ctr"/>
           <a:lstStyle/>
           <a:p>
-            <a:pPr algn="ctr" indent="0" marL="0">
+            <a:pPr marL="0" indent="0" algn="ctr">
               <a:buNone/>
             </a:pPr>
             <a:r>
@@ -5628,7 +5253,7 @@
             <a:endParaRPr lang="en-US" sz="1250" dirty="0"/>
           </a:p>
           <a:p>
-            <a:pPr algn="ctr" indent="0" marL="0">
+            <a:pPr marL="0" indent="0" algn="ctr">
               <a:buNone/>
             </a:pPr>
             <a:r>
@@ -5671,7 +5296,10 @@
         </p:spPr>
         <p:txBody>
           <a:bodyPr/>
-          <a:p/>
+          <a:lstStyle/>
+          <a:p>
+            <a:endParaRPr/>
+          </a:p>
         </p:txBody>
       </p:sp>
       <p:sp>
@@ -5697,7 +5325,10 @@
         </p:spPr>
         <p:txBody>
           <a:bodyPr/>
-          <a:p/>
+          <a:lstStyle/>
+          <a:p>
+            <a:endParaRPr/>
+          </a:p>
         </p:txBody>
       </p:sp>
       <p:sp>
@@ -5721,7 +5352,7 @@
           <a:bodyPr wrap="square" lIns="0" tIns="0" rIns="0" bIns="0" rtlCol="0" anchor="ctr"/>
           <a:lstStyle/>
           <a:p>
-            <a:pPr algn="ctr" indent="0" marL="0">
+            <a:pPr marL="0" indent="0" algn="ctr">
               <a:buNone/>
             </a:pPr>
             <a:r>
@@ -5738,7 +5369,7 @@
             <a:endParaRPr lang="en-US" sz="1250" dirty="0"/>
           </a:p>
           <a:p>
-            <a:pPr algn="ctr" indent="0" marL="0">
+            <a:pPr marL="0" indent="0" algn="ctr">
               <a:buNone/>
             </a:pPr>
             <a:r>
@@ -5777,7 +5408,7 @@
           <a:bodyPr wrap="square" lIns="0" tIns="0" rIns="0" bIns="0" rtlCol="0" anchor="t"/>
           <a:lstStyle/>
           <a:p>
-            <a:pPr indent="0" marL="0">
+            <a:pPr marL="0" indent="0">
               <a:buNone/>
             </a:pPr>
             <a:r>
@@ -5812,7 +5443,7 @@
           <a:noFill/>
         </p:spPr>
         <p:txBody>
-          <a:bodyPr wrap="none" lIns="0" rIns="0" tIns="0" bIns="0">
+          <a:bodyPr wrap="none" lIns="0" tIns="0" rIns="0" bIns="0">
             <a:spAutoFit/>
           </a:bodyPr>
           <a:lstStyle/>
@@ -5854,6 +5485,7 @@
         <a:solidFill>
           <a:srgbClr val="FFFFFF"/>
         </a:solidFill>
+        <a:effectLst/>
       </p:bgPr>
     </p:bg>
     <p:spTree>
@@ -5891,11 +5523,11 @@
           <a:bodyPr wrap="square" lIns="0" tIns="0" rIns="0" bIns="0" rtlCol="0" anchor="ctr"/>
           <a:lstStyle/>
           <a:p>
-            <a:pPr algn="l" indent="0" marL="0">
+            <a:pPr marL="0" indent="0" algn="l">
               <a:buNone/>
             </a:pPr>
             <a:r>
-              <a:rPr lang="en-US" sz="1300" b="1" spc="300" kern="0" dirty="0">
+              <a:rPr lang="en-US" sz="1300" b="1" kern="0" spc="300" dirty="0">
                 <a:solidFill>
                   <a:srgbClr val="FF8A3D"/>
                 </a:solidFill>
@@ -5930,7 +5562,7 @@
           <a:bodyPr wrap="square" lIns="0" tIns="0" rIns="0" bIns="0" rtlCol="0" anchor="ctr"/>
           <a:lstStyle/>
           <a:p>
-            <a:pPr algn="l" indent="0" marL="0">
+            <a:pPr marL="0" indent="0" algn="l">
               <a:buNone/>
             </a:pPr>
             <a:r>
@@ -5969,11 +5601,11 @@
           <a:bodyPr wrap="square" lIns="0" tIns="0" rIns="0" bIns="0" rtlCol="0" anchor="ctr"/>
           <a:lstStyle/>
           <a:p>
-            <a:pPr algn="ctr" indent="0" marL="0">
+            <a:pPr marL="0" indent="0" algn="ctr">
               <a:buNone/>
             </a:pPr>
             <a:r>
-              <a:rPr lang="en-US" sz="1100" b="1" spc="150" kern="0" dirty="0">
+              <a:rPr lang="en-US" sz="1100" b="1" kern="0" spc="150" dirty="0">
                 <a:solidFill>
                   <a:srgbClr val="E67528"/>
                 </a:solidFill>
@@ -6013,7 +5645,7 @@
             <a:prstDash val="solid"/>
           </a:ln>
           <a:effectLst>
-            <a:outerShdw sx="100000" sy="100000" kx="0" ky="0" algn="bl" rotWithShape="0" blurRad="101600" dist="38100" dir="5400000">
+            <a:outerShdw blurRad="101600" dist="38100" dir="5400000" algn="bl" rotWithShape="0">
               <a:srgbClr val="000000">
                 <a:alpha val="12000"/>
               </a:srgbClr>
@@ -6022,19 +5654,22 @@
         </p:spPr>
         <p:txBody>
           <a:bodyPr/>
-          <a:p/>
+          <a:lstStyle/>
+          <a:p>
+            <a:endParaRPr/>
+          </a:p>
         </p:txBody>
       </p:sp>
       <p:pic>
         <p:nvPicPr>
-          <p:cNvPr id="6" name="Image 0" descr="D:/GitHub/mern-web-book/docs/assets/img/lecture-10/media-query-wide.png">    </p:cNvPr>
+          <p:cNvPr id="6" name="Image 0" descr="D:/GitHub/mern-web-book/docs/assets/img/lecture-10/media-query-wide.png"/>
           <p:cNvPicPr>
             <a:picLocks noChangeAspect="1"/>
           </p:cNvPicPr>
           <p:nvPr/>
         </p:nvPicPr>
         <p:blipFill>
-          <a:blip r:embed="rId1"/>
+          <a:blip r:embed="rId3"/>
           <a:stretch>
             <a:fillRect/>
           </a:stretch>
@@ -6070,11 +5705,11 @@
           <a:bodyPr wrap="square" lIns="0" tIns="0" rIns="0" bIns="0" rtlCol="0" anchor="ctr"/>
           <a:lstStyle/>
           <a:p>
-            <a:pPr algn="ctr" indent="0" marL="0">
+            <a:pPr marL="0" indent="0" algn="ctr">
               <a:buNone/>
             </a:pPr>
             <a:r>
-              <a:rPr lang="en-US" sz="1100" b="1" spc="150" kern="0" dirty="0">
+              <a:rPr lang="en-US" sz="1100" b="1" kern="0" spc="150" dirty="0">
                 <a:solidFill>
                   <a:srgbClr val="E67528"/>
                 </a:solidFill>
@@ -6114,7 +5749,7 @@
             <a:prstDash val="solid"/>
           </a:ln>
           <a:effectLst>
-            <a:outerShdw sx="100000" sy="100000" kx="0" ky="0" algn="bl" rotWithShape="0" blurRad="101600" dist="38100" dir="5400000">
+            <a:outerShdw blurRad="101600" dist="38100" dir="5400000" algn="bl" rotWithShape="0">
               <a:srgbClr val="000000">
                 <a:alpha val="12000"/>
               </a:srgbClr>
@@ -6123,19 +5758,22 @@
         </p:spPr>
         <p:txBody>
           <a:bodyPr/>
-          <a:p/>
+          <a:lstStyle/>
+          <a:p>
+            <a:endParaRPr/>
+          </a:p>
         </p:txBody>
       </p:sp>
       <p:pic>
         <p:nvPicPr>
-          <p:cNvPr id="9" name="Image 1" descr="D:/GitHub/mern-web-book/docs/assets/img/lecture-10/media-query-narrow.png">    </p:cNvPr>
+          <p:cNvPr id="9" name="Image 1" descr="D:/GitHub/mern-web-book/docs/assets/img/lecture-10/media-query-narrow.png"/>
           <p:cNvPicPr>
             <a:picLocks noChangeAspect="1"/>
           </p:cNvPicPr>
           <p:nvPr/>
         </p:nvPicPr>
         <p:blipFill>
-          <a:blip r:embed="rId2"/>
+          <a:blip r:embed="rId4"/>
           <a:stretch>
             <a:fillRect/>
           </a:stretch>
@@ -6167,7 +5805,7 @@
           <a:noFill/>
         </p:spPr>
         <p:txBody>
-          <a:bodyPr wrap="none" lIns="0" rIns="0" tIns="0" bIns="0">
+          <a:bodyPr wrap="none" lIns="0" tIns="0" rIns="0" bIns="0">
             <a:spAutoFit/>
           </a:bodyPr>
           <a:lstStyle/>
@@ -6209,6 +5847,7 @@
         <a:solidFill>
           <a:srgbClr val="FFFFFF"/>
         </a:solidFill>
+        <a:effectLst/>
       </p:bgPr>
     </p:bg>
     <p:spTree>
@@ -6246,11 +5885,11 @@
           <a:bodyPr wrap="square" lIns="0" tIns="0" rIns="0" bIns="0" rtlCol="0" anchor="ctr"/>
           <a:lstStyle/>
           <a:p>
-            <a:pPr algn="l" indent="0" marL="0">
+            <a:pPr marL="0" indent="0" algn="l">
               <a:buNone/>
             </a:pPr>
             <a:r>
-              <a:rPr lang="en-US" sz="1300" b="1" spc="300" kern="0" dirty="0">
+              <a:rPr lang="en-US" sz="1300" b="1" kern="0" spc="300" dirty="0">
                 <a:solidFill>
                   <a:srgbClr val="FF8A3D"/>
                 </a:solidFill>
@@ -6285,7 +5924,7 @@
           <a:bodyPr wrap="square" lIns="0" tIns="0" rIns="0" bIns="0" rtlCol="0" anchor="ctr"/>
           <a:lstStyle/>
           <a:p>
-            <a:pPr algn="l" indent="0" marL="0">
+            <a:pPr marL="0" indent="0" algn="l">
               <a:buNone/>
             </a:pPr>
             <a:r>
@@ -6326,8 +5965,20 @@
             <a:tbl>
               <a:tblPr/>
               <a:tblGrid>
-                <a:gridCol w="2377440"/>
-                <a:gridCol w="8595360"/>
+                <a:gridCol w="2377440">
+                  <a:extLst>
+                    <a:ext uri="{9D8B030D-6E8A-4147-A177-3AD203B41FA5}">
+                      <a16:colId xmlns:a16="http://schemas.microsoft.com/office/drawing/2014/main" val="20000"/>
+                    </a:ext>
+                  </a:extLst>
+                </a:gridCol>
+                <a:gridCol w="8595360">
+                  <a:extLst>
+                    <a:ext uri="{9D8B030D-6E8A-4147-A177-3AD203B41FA5}">
+                      <a16:colId xmlns:a16="http://schemas.microsoft.com/office/drawing/2014/main" val="20001"/>
+                    </a:ext>
+                  </a:extLst>
+                </a:gridCol>
               </a:tblGrid>
               <a:tr h="777240">
                 <a:tc>
@@ -6335,7 +5986,7 @@
                     <a:bodyPr/>
                     <a:lstStyle/>
                     <a:p>
-                      <a:pPr algn="ctr" indent="0" marL="0">
+                      <a:pPr marL="0" indent="0" algn="ctr">
                         <a:buNone/>
                       </a:pPr>
                       <a:r>
@@ -6356,7 +6007,7 @@
                       </a:endParaRPr>
                     </a:p>
                   </a:txBody>
-                  <a:tcPr marL="91440" marR="91440" marT="45720" marB="45720" anchor="ctr">
+                  <a:tcPr anchor="ctr">
                     <a:lnL w="12700" cap="flat" cmpd="sng" algn="ctr">
                       <a:solidFill>
                         <a:srgbClr val="D8D8E6"/>
@@ -6403,7 +6054,7 @@
                     <a:bodyPr/>
                     <a:lstStyle/>
                     <a:p>
-                      <a:pPr algn="ctr" indent="0" marL="0">
+                      <a:pPr marL="0" indent="0" algn="ctr">
                         <a:buNone/>
                       </a:pPr>
                       <a:r>
@@ -6424,7 +6075,7 @@
                       </a:endParaRPr>
                     </a:p>
                   </a:txBody>
-                  <a:tcPr marL="91440" marR="91440" marT="45720" marB="45720" anchor="ctr">
+                  <a:tcPr anchor="ctr">
                     <a:lnL w="12700" cap="flat" cmpd="sng" algn="ctr">
                       <a:solidFill>
                         <a:srgbClr val="D8D8E6"/>
@@ -6466,6 +6117,11 @@
                     </a:solidFill>
                   </a:tcPr>
                 </a:tc>
+                <a:extLst>
+                  <a:ext uri="{0D108BD9-81ED-4DB2-BD59-A6C34878D82A}">
+                    <a16:rowId xmlns:a16="http://schemas.microsoft.com/office/drawing/2014/main" val="10000"/>
+                  </a:ext>
+                </a:extLst>
               </a:tr>
               <a:tr h="777240">
                 <a:tc>
@@ -6473,7 +6129,7 @@
                     <a:bodyPr/>
                     <a:lstStyle/>
                     <a:p>
-                      <a:pPr algn="l" indent="0" marL="0">
+                      <a:pPr marL="0" indent="0" algn="l">
                         <a:buNone/>
                       </a:pPr>
                       <a:r>
@@ -6494,7 +6150,7 @@
                       </a:endParaRPr>
                     </a:p>
                   </a:txBody>
-                  <a:tcPr marL="91440" marR="91440" marT="45720" marB="45720" anchor="ctr">
+                  <a:tcPr anchor="ctr">
                     <a:lnL w="12700" cap="flat" cmpd="sng" algn="ctr">
                       <a:solidFill>
                         <a:srgbClr val="D8D8E6"/>
@@ -6541,7 +6197,7 @@
                     <a:bodyPr/>
                     <a:lstStyle/>
                     <a:p>
-                      <a:pPr algn="ctr" indent="0" marL="0">
+                      <a:pPr marL="0" indent="0" algn="ctr">
                         <a:buNone/>
                       </a:pPr>
                       <a:r>
@@ -6562,7 +6218,7 @@
                       </a:endParaRPr>
                     </a:p>
                   </a:txBody>
-                  <a:tcPr marL="91440" marR="91440" marT="45720" marB="45720" anchor="ctr">
+                  <a:tcPr anchor="ctr">
                     <a:lnL w="12700" cap="flat" cmpd="sng" algn="ctr">
                       <a:solidFill>
                         <a:srgbClr val="D8D8E6"/>
@@ -6604,6 +6260,11 @@
                     </a:solidFill>
                   </a:tcPr>
                 </a:tc>
+                <a:extLst>
+                  <a:ext uri="{0D108BD9-81ED-4DB2-BD59-A6C34878D82A}">
+                    <a16:rowId xmlns:a16="http://schemas.microsoft.com/office/drawing/2014/main" val="10001"/>
+                  </a:ext>
+                </a:extLst>
               </a:tr>
               <a:tr h="777240">
                 <a:tc>
@@ -6611,7 +6272,7 @@
                     <a:bodyPr/>
                     <a:lstStyle/>
                     <a:p>
-                      <a:pPr algn="l" indent="0" marL="0">
+                      <a:pPr marL="0" indent="0" algn="l">
                         <a:buNone/>
                       </a:pPr>
                       <a:r>
@@ -6632,7 +6293,7 @@
                       </a:endParaRPr>
                     </a:p>
                   </a:txBody>
-                  <a:tcPr marL="91440" marR="91440" marT="45720" marB="45720" anchor="ctr">
+                  <a:tcPr anchor="ctr">
                     <a:lnL w="12700" cap="flat" cmpd="sng" algn="ctr">
                       <a:solidFill>
                         <a:srgbClr val="D8D8E6"/>
@@ -6679,7 +6340,7 @@
                     <a:bodyPr/>
                     <a:lstStyle/>
                     <a:p>
-                      <a:pPr algn="ctr" indent="0" marL="0">
+                      <a:pPr marL="0" indent="0" algn="ctr">
                         <a:buNone/>
                       </a:pPr>
                       <a:r>
@@ -6700,7 +6361,7 @@
                       </a:endParaRPr>
                     </a:p>
                   </a:txBody>
-                  <a:tcPr marL="91440" marR="91440" marT="45720" marB="45720" anchor="ctr">
+                  <a:tcPr anchor="ctr">
                     <a:lnL w="12700" cap="flat" cmpd="sng" algn="ctr">
                       <a:solidFill>
                         <a:srgbClr val="D8D8E6"/>
@@ -6742,6 +6403,11 @@
                     </a:solidFill>
                   </a:tcPr>
                 </a:tc>
+                <a:extLst>
+                  <a:ext uri="{0D108BD9-81ED-4DB2-BD59-A6C34878D82A}">
+                    <a16:rowId xmlns:a16="http://schemas.microsoft.com/office/drawing/2014/main" val="10002"/>
+                  </a:ext>
+                </a:extLst>
               </a:tr>
               <a:tr h="777240">
                 <a:tc>
@@ -6749,7 +6415,7 @@
                     <a:bodyPr/>
                     <a:lstStyle/>
                     <a:p>
-                      <a:pPr algn="l" indent="0" marL="0">
+                      <a:pPr marL="0" indent="0" algn="l">
                         <a:buNone/>
                       </a:pPr>
                       <a:r>
@@ -6770,7 +6436,7 @@
                       </a:endParaRPr>
                     </a:p>
                   </a:txBody>
-                  <a:tcPr marL="91440" marR="91440" marT="45720" marB="45720" anchor="ctr">
+                  <a:tcPr anchor="ctr">
                     <a:lnL w="12700" cap="flat" cmpd="sng" algn="ctr">
                       <a:solidFill>
                         <a:srgbClr val="D8D8E6"/>
@@ -6817,7 +6483,7 @@
                     <a:bodyPr/>
                     <a:lstStyle/>
                     <a:p>
-                      <a:pPr algn="ctr" indent="0" marL="0">
+                      <a:pPr marL="0" indent="0" algn="ctr">
                         <a:buNone/>
                       </a:pPr>
                       <a:r>
@@ -6838,7 +6504,7 @@
                       </a:endParaRPr>
                     </a:p>
                   </a:txBody>
-                  <a:tcPr marL="91440" marR="91440" marT="45720" marB="45720" anchor="ctr">
+                  <a:tcPr anchor="ctr">
                     <a:lnL w="12700" cap="flat" cmpd="sng" algn="ctr">
                       <a:solidFill>
                         <a:srgbClr val="D8D8E6"/>
@@ -6880,6 +6546,11 @@
                     </a:solidFill>
                   </a:tcPr>
                 </a:tc>
+                <a:extLst>
+                  <a:ext uri="{0D108BD9-81ED-4DB2-BD59-A6C34878D82A}">
+                    <a16:rowId xmlns:a16="http://schemas.microsoft.com/office/drawing/2014/main" val="10003"/>
+                  </a:ext>
+                </a:extLst>
               </a:tr>
               <a:tr h="777240">
                 <a:tc>
@@ -6887,7 +6558,7 @@
                     <a:bodyPr/>
                     <a:lstStyle/>
                     <a:p>
-                      <a:pPr algn="l" indent="0" marL="0">
+                      <a:pPr marL="0" indent="0" algn="l">
                         <a:buNone/>
                       </a:pPr>
                       <a:r>
@@ -6908,7 +6579,7 @@
                       </a:endParaRPr>
                     </a:p>
                   </a:txBody>
-                  <a:tcPr marL="91440" marR="91440" marT="45720" marB="45720" anchor="ctr">
+                  <a:tcPr anchor="ctr">
                     <a:lnL w="12700" cap="flat" cmpd="sng" algn="ctr">
                       <a:solidFill>
                         <a:srgbClr val="D8D8E6"/>
@@ -6955,7 +6626,7 @@
                     <a:bodyPr/>
                     <a:lstStyle/>
                     <a:p>
-                      <a:pPr algn="ctr" indent="0" marL="0">
+                      <a:pPr marL="0" indent="0" algn="ctr">
                         <a:buNone/>
                       </a:pPr>
                       <a:r>
@@ -6976,7 +6647,7 @@
                       </a:endParaRPr>
                     </a:p>
                   </a:txBody>
-                  <a:tcPr marL="91440" marR="91440" marT="45720" marB="45720" anchor="ctr">
+                  <a:tcPr anchor="ctr">
                     <a:lnL w="12700" cap="flat" cmpd="sng" algn="ctr">
                       <a:solidFill>
                         <a:srgbClr val="D8D8E6"/>
@@ -7018,6 +6689,11 @@
                     </a:solidFill>
                   </a:tcPr>
                 </a:tc>
+                <a:extLst>
+                  <a:ext uri="{0D108BD9-81ED-4DB2-BD59-A6C34878D82A}">
+                    <a16:rowId xmlns:a16="http://schemas.microsoft.com/office/drawing/2014/main" val="10004"/>
+                  </a:ext>
+                </a:extLst>
               </a:tr>
             </a:tbl>
           </a:graphicData>
@@ -7040,7 +6716,7 @@
           <a:noFill/>
         </p:spPr>
         <p:txBody>
-          <a:bodyPr wrap="none" lIns="0" rIns="0" tIns="0" bIns="0">
+          <a:bodyPr wrap="none" lIns="0" tIns="0" rIns="0" bIns="0">
             <a:spAutoFit/>
           </a:bodyPr>
           <a:lstStyle/>
@@ -7075,7 +6751,7 @@
 </file>
 
 <file path=ppt/slides/slide13.xml><?xml version="1.0" encoding="utf-8"?>
-<p:sld xmlns:a="http://schemas.openxmlformats.org/drawingml/2006/main" xmlns:p="http://schemas.openxmlformats.org/presentationml/2006/main" xmlns:r="http://schemas.openxmlformats.org/officeDocument/2006/relationships">
+<p:sld xmlns:a="http://schemas.openxmlformats.org/drawingml/2006/main" xmlns:r="http://schemas.openxmlformats.org/officeDocument/2006/relationships" xmlns:p="http://schemas.openxmlformats.org/presentationml/2006/main">
   <p:cSld>
     <p:spTree>
       <p:nvGrpSpPr>
@@ -7083,7 +6759,14 @@
         <p:cNvGrpSpPr/>
         <p:nvPr/>
       </p:nvGrpSpPr>
-      <p:grpSpPr/>
+      <p:grpSpPr>
+        <a:xfrm>
+          <a:off x="0" y="0"/>
+          <a:ext cx="0" cy="0"/>
+          <a:chOff x="0" y="0"/>
+          <a:chExt cx="0" cy="0"/>
+        </a:xfrm>
+      </p:grpSpPr>
       <p:sp>
         <p:nvSpPr>
           <p:cNvPr id="2" name="Text 0"/>
@@ -7270,6 +6953,7 @@
           <a:lstStyle/>
           <a:p>
             <a:pPr algn="ctr"/>
+            <a:endParaRPr/>
           </a:p>
         </p:txBody>
       </p:sp>
@@ -7306,15 +6990,12 @@
             </a:r>
           </a:p>
           <a:p>
-            <a:r>
-              <a:rPr sz="1200">
-                <a:solidFill>
-                  <a:srgbClr val="C9D3F5"/>
-                </a:solidFill>
-                <a:latin typeface="Courier New"/>
-              </a:rPr>
-              <a:t/>
-            </a:r>
+            <a:endParaRPr sz="1200">
+              <a:solidFill>
+                <a:srgbClr val="C9D3F5"/>
+              </a:solidFill>
+              <a:latin typeface="Courier New"/>
+            </a:endParaRPr>
           </a:p>
           <a:p>
             <a:r>
@@ -7479,7 +7160,9 @@
       </p:pic>
       <p:sp>
         <p:nvSpPr>
-          <p:cNvPr id="11" name="Rounded Rectangle 10"/>
+          <p:cNvPr id="11" name="Rounded Rectangle 10">
+            <a:hlinkClick r:id="rId4"/>
+          </p:cNvPr>
           <p:cNvSpPr/>
           <p:nvPr/>
         </p:nvSpPr>
@@ -7518,7 +7201,7 @@
           </a:fontRef>
         </p:style>
         <p:txBody>
-          <a:bodyPr rtlCol="0" anchor="ctr" wrap="square" lIns="109728" rIns="109728" tIns="73152" bIns="73152"/>
+          <a:bodyPr wrap="square" lIns="109728" tIns="73152" rIns="109728" bIns="73152" rtlCol="0" anchor="ctr"/>
           <a:lstStyle/>
           <a:p>
             <a:pPr algn="ctr"/>
@@ -7564,7 +7247,7 @@
           <a:noFill/>
         </p:spPr>
         <p:txBody>
-          <a:bodyPr wrap="none" lIns="0" rIns="0" tIns="0" bIns="0">
+          <a:bodyPr wrap="none" lIns="0" tIns="0" rIns="0" bIns="0">
             <a:spAutoFit/>
           </a:bodyPr>
           <a:lstStyle/>
@@ -7606,6 +7289,7 @@
         <a:solidFill>
           <a:srgbClr val="FFFFFF"/>
         </a:solidFill>
+        <a:effectLst/>
       </p:bgPr>
     </p:bg>
     <p:spTree>
@@ -7643,11 +7327,11 @@
           <a:bodyPr wrap="square" lIns="0" tIns="0" rIns="0" bIns="0" rtlCol="0" anchor="ctr"/>
           <a:lstStyle/>
           <a:p>
-            <a:pPr algn="l" indent="0" marL="0">
+            <a:pPr marL="0" indent="0" algn="l">
               <a:buNone/>
             </a:pPr>
             <a:r>
-              <a:rPr lang="en-US" sz="1300" b="1" spc="300" kern="0" dirty="0">
+              <a:rPr lang="en-US" sz="1300" b="1" kern="0" spc="300" dirty="0">
                 <a:solidFill>
                   <a:srgbClr val="FF8A3D"/>
                 </a:solidFill>
@@ -7682,7 +7366,7 @@
           <a:bodyPr wrap="square" lIns="0" tIns="0" rIns="0" bIns="0" rtlCol="0" anchor="ctr"/>
           <a:lstStyle/>
           <a:p>
-            <a:pPr algn="l" indent="0" marL="0">
+            <a:pPr marL="0" indent="0" algn="l">
               <a:buNone/>
             </a:pPr>
             <a:r>
@@ -7723,7 +7407,10 @@
         </p:spPr>
         <p:txBody>
           <a:bodyPr/>
-          <a:p/>
+          <a:lstStyle/>
+          <a:p>
+            <a:endParaRPr/>
+          </a:p>
         </p:txBody>
       </p:sp>
       <p:sp>
@@ -7747,7 +7434,7 @@
           <a:bodyPr wrap="square" lIns="0" tIns="0" rIns="0" bIns="0" rtlCol="0" anchor="t"/>
           <a:lstStyle/>
           <a:p>
-            <a:pPr indent="0" marL="0">
+            <a:pPr marL="0" indent="0">
               <a:lnSpc>
                 <a:spcPct val="125000"/>
               </a:lnSpc>
@@ -7767,7 +7454,7 @@
             <a:endParaRPr lang="en-US" sz="1400" dirty="0"/>
           </a:p>
           <a:p>
-            <a:pPr indent="0" marL="0">
+            <a:pPr marL="0" indent="0">
               <a:lnSpc>
                 <a:spcPct val="125000"/>
               </a:lnSpc>
@@ -7787,7 +7474,7 @@
             <a:endParaRPr lang="en-US" sz="1400" dirty="0"/>
           </a:p>
           <a:p>
-            <a:pPr indent="0" marL="0">
+            <a:pPr marL="0" indent="0">
               <a:lnSpc>
                 <a:spcPct val="125000"/>
               </a:lnSpc>
@@ -7807,7 +7494,7 @@
             <a:endParaRPr lang="en-US" sz="1400" dirty="0"/>
           </a:p>
           <a:p>
-            <a:pPr indent="0" marL="0">
+            <a:pPr marL="0" indent="0">
               <a:lnSpc>
                 <a:spcPct val="125000"/>
               </a:lnSpc>
@@ -7849,7 +7536,7 @@
           <a:bodyPr wrap="square" lIns="0" tIns="0" rIns="0" bIns="0" rtlCol="0" anchor="t"/>
           <a:lstStyle/>
           <a:p>
-            <a:pPr indent="0" marL="0">
+            <a:pPr marL="0" indent="0">
               <a:buNone/>
             </a:pPr>
             <a:r>
@@ -7884,7 +7571,7 @@
           <a:noFill/>
         </p:spPr>
         <p:txBody>
-          <a:bodyPr wrap="none" lIns="0" rIns="0" tIns="0" bIns="0">
+          <a:bodyPr wrap="none" lIns="0" tIns="0" rIns="0" bIns="0">
             <a:spAutoFit/>
           </a:bodyPr>
           <a:lstStyle/>
@@ -7926,6 +7613,7 @@
         <a:solidFill>
           <a:srgbClr val="FFFFFF"/>
         </a:solidFill>
+        <a:effectLst/>
       </p:bgPr>
     </p:bg>
     <p:spTree>
@@ -7963,11 +7651,11 @@
           <a:bodyPr wrap="square" lIns="0" tIns="0" rIns="0" bIns="0" rtlCol="0" anchor="ctr"/>
           <a:lstStyle/>
           <a:p>
-            <a:pPr algn="l" indent="0" marL="0">
+            <a:pPr marL="0" indent="0" algn="l">
               <a:buNone/>
             </a:pPr>
             <a:r>
-              <a:rPr lang="en-US" sz="1300" b="1" spc="300" kern="0" dirty="0">
+              <a:rPr lang="en-US" sz="1300" b="1" kern="0" spc="300" dirty="0">
                 <a:solidFill>
                   <a:srgbClr val="FF8A3D"/>
                 </a:solidFill>
@@ -8002,7 +7690,7 @@
           <a:bodyPr wrap="square" lIns="0" tIns="0" rIns="0" bIns="0" rtlCol="0" anchor="ctr"/>
           <a:lstStyle/>
           <a:p>
-            <a:pPr algn="l" indent="0" marL="0">
+            <a:pPr marL="0" indent="0" algn="l">
               <a:buNone/>
             </a:pPr>
             <a:r>
@@ -8041,11 +7729,11 @@
           <a:bodyPr wrap="square" lIns="0" tIns="0" rIns="0" bIns="0" rtlCol="0" anchor="ctr"/>
           <a:lstStyle/>
           <a:p>
-            <a:pPr algn="ctr" indent="0" marL="0">
+            <a:pPr marL="0" indent="0" algn="ctr">
               <a:buNone/>
             </a:pPr>
             <a:r>
-              <a:rPr lang="en-US" sz="1100" b="1" spc="150" kern="0" dirty="0">
+              <a:rPr lang="en-US" sz="1100" b="1" kern="0" spc="150" dirty="0">
                 <a:solidFill>
                   <a:srgbClr val="E67528"/>
                 </a:solidFill>
@@ -8085,7 +7773,7 @@
             <a:prstDash val="solid"/>
           </a:ln>
           <a:effectLst>
-            <a:outerShdw sx="100000" sy="100000" kx="0" ky="0" algn="bl" rotWithShape="0" blurRad="101600" dist="38100" dir="5400000">
+            <a:outerShdw blurRad="101600" dist="38100" dir="5400000" algn="bl" rotWithShape="0">
               <a:srgbClr val="000000">
                 <a:alpha val="12000"/>
               </a:srgbClr>
@@ -8094,19 +7782,22 @@
         </p:spPr>
         <p:txBody>
           <a:bodyPr/>
-          <a:p/>
+          <a:lstStyle/>
+          <a:p>
+            <a:endParaRPr/>
+          </a:p>
         </p:txBody>
       </p:sp>
       <p:pic>
         <p:nvPicPr>
-          <p:cNvPr id="6" name="Image 0" descr="D:/GitHub/mern-web-book/docs/assets/img/lecture-10/responsive-image-wide.png">    </p:cNvPr>
+          <p:cNvPr id="6" name="Image 0" descr="D:/GitHub/mern-web-book/docs/assets/img/lecture-10/responsive-image-wide.png"/>
           <p:cNvPicPr>
             <a:picLocks noChangeAspect="1"/>
           </p:cNvPicPr>
           <p:nvPr/>
         </p:nvPicPr>
         <p:blipFill>
-          <a:blip r:embed="rId1"/>
+          <a:blip r:embed="rId3"/>
           <a:stretch>
             <a:fillRect/>
           </a:stretch>
@@ -8142,11 +7833,11 @@
           <a:bodyPr wrap="square" lIns="0" tIns="0" rIns="0" bIns="0" rtlCol="0" anchor="ctr"/>
           <a:lstStyle/>
           <a:p>
-            <a:pPr algn="ctr" indent="0" marL="0">
+            <a:pPr marL="0" indent="0" algn="ctr">
               <a:buNone/>
             </a:pPr>
             <a:r>
-              <a:rPr lang="en-US" sz="1100" b="1" spc="150" kern="0" dirty="0">
+              <a:rPr lang="en-US" sz="1100" b="1" kern="0" spc="150" dirty="0">
                 <a:solidFill>
                   <a:srgbClr val="E67528"/>
                 </a:solidFill>
@@ -8186,7 +7877,7 @@
             <a:prstDash val="solid"/>
           </a:ln>
           <a:effectLst>
-            <a:outerShdw sx="100000" sy="100000" kx="0" ky="0" algn="bl" rotWithShape="0" blurRad="101600" dist="38100" dir="5400000">
+            <a:outerShdw blurRad="101600" dist="38100" dir="5400000" algn="bl" rotWithShape="0">
               <a:srgbClr val="000000">
                 <a:alpha val="12000"/>
               </a:srgbClr>
@@ -8195,19 +7886,22 @@
         </p:spPr>
         <p:txBody>
           <a:bodyPr/>
-          <a:p/>
+          <a:lstStyle/>
+          <a:p>
+            <a:endParaRPr/>
+          </a:p>
         </p:txBody>
       </p:sp>
       <p:pic>
         <p:nvPicPr>
-          <p:cNvPr id="9" name="Image 1" descr="D:/GitHub/mern-web-book/docs/assets/img/lecture-10/responsive-image-narrow.png">    </p:cNvPr>
+          <p:cNvPr id="9" name="Image 1" descr="D:/GitHub/mern-web-book/docs/assets/img/lecture-10/responsive-image-narrow.png"/>
           <p:cNvPicPr>
             <a:picLocks noChangeAspect="1"/>
           </p:cNvPicPr>
           <p:nvPr/>
         </p:nvPicPr>
         <p:blipFill>
-          <a:blip r:embed="rId2"/>
+          <a:blip r:embed="rId4"/>
           <a:stretch>
             <a:fillRect/>
           </a:stretch>
@@ -8239,7 +7933,7 @@
           <a:noFill/>
         </p:spPr>
         <p:txBody>
-          <a:bodyPr wrap="none" lIns="0" rIns="0" tIns="0" bIns="0">
+          <a:bodyPr wrap="none" lIns="0" tIns="0" rIns="0" bIns="0">
             <a:spAutoFit/>
           </a:bodyPr>
           <a:lstStyle/>
@@ -8281,6 +7975,7 @@
         <a:solidFill>
           <a:srgbClr val="FFFFFF"/>
         </a:solidFill>
+        <a:effectLst/>
       </p:bgPr>
     </p:bg>
     <p:spTree>
@@ -8318,11 +8013,11 @@
           <a:bodyPr wrap="square" lIns="0" tIns="0" rIns="0" bIns="0" rtlCol="0" anchor="ctr"/>
           <a:lstStyle/>
           <a:p>
-            <a:pPr algn="l" indent="0" marL="0">
+            <a:pPr marL="0" indent="0" algn="l">
               <a:buNone/>
             </a:pPr>
             <a:r>
-              <a:rPr lang="en-US" sz="1300" b="1" spc="300" kern="0" dirty="0">
+              <a:rPr lang="en-US" sz="1300" b="1" kern="0" spc="300" dirty="0">
                 <a:solidFill>
                   <a:srgbClr val="FF8A3D"/>
                 </a:solidFill>
@@ -8357,7 +8052,7 @@
           <a:bodyPr wrap="square" lIns="0" tIns="0" rIns="0" bIns="0" rtlCol="0" anchor="ctr"/>
           <a:lstStyle/>
           <a:p>
-            <a:pPr algn="l" indent="0" marL="0">
+            <a:pPr marL="0" indent="0" algn="l">
               <a:buNone/>
             </a:pPr>
             <a:r>
@@ -8403,7 +8098,10 @@
         </p:spPr>
         <p:txBody>
           <a:bodyPr/>
-          <a:p/>
+          <a:lstStyle/>
+          <a:p>
+            <a:endParaRPr/>
+          </a:p>
         </p:txBody>
       </p:sp>
       <p:sp>
@@ -8427,11 +8125,11 @@
           <a:bodyPr wrap="square" lIns="0" tIns="0" rIns="0" bIns="0" rtlCol="0" anchor="ctr"/>
           <a:lstStyle/>
           <a:p>
-            <a:pPr indent="0" marL="0">
+            <a:pPr marL="0" indent="0">
               <a:buNone/>
             </a:pPr>
             <a:r>
-              <a:rPr lang="en-US" sz="1250" b="1" spc="150" kern="0" dirty="0">
+              <a:rPr lang="en-US" sz="1250" b="1" kern="0" spc="150" dirty="0">
                 <a:solidFill>
                   <a:srgbClr val="2B2B7A"/>
                 </a:solidFill>
@@ -8558,7 +8256,10 @@
         </p:spPr>
         <p:txBody>
           <a:bodyPr/>
-          <a:p/>
+          <a:lstStyle/>
+          <a:p>
+            <a:endParaRPr/>
+          </a:p>
         </p:txBody>
       </p:sp>
       <p:sp>
@@ -8582,11 +8283,11 @@
           <a:bodyPr wrap="square" lIns="0" tIns="0" rIns="0" bIns="0" rtlCol="0" anchor="ctr"/>
           <a:lstStyle/>
           <a:p>
-            <a:pPr indent="0" marL="0">
+            <a:pPr marL="0" indent="0">
               <a:buNone/>
             </a:pPr>
             <a:r>
-              <a:rPr lang="en-US" sz="1250" b="1" spc="150" kern="0" dirty="0">
+              <a:rPr lang="en-US" sz="1250" b="1" kern="0" spc="150" dirty="0">
                 <a:solidFill>
                   <a:srgbClr val="E67528"/>
                 </a:solidFill>
@@ -8702,7 +8403,7 @@
           <a:noFill/>
         </p:spPr>
         <p:txBody>
-          <a:bodyPr wrap="none" lIns="0" rIns="0" tIns="0" bIns="0">
+          <a:bodyPr wrap="none" lIns="0" tIns="0" rIns="0" bIns="0">
             <a:spAutoFit/>
           </a:bodyPr>
           <a:lstStyle/>
@@ -8737,7 +8438,7 @@
 </file>
 
 <file path=ppt/slides/slide17.xml><?xml version="1.0" encoding="utf-8"?>
-<p:sld xmlns:a="http://schemas.openxmlformats.org/drawingml/2006/main" xmlns:p="http://schemas.openxmlformats.org/presentationml/2006/main" xmlns:r="http://schemas.openxmlformats.org/officeDocument/2006/relationships">
+<p:sld xmlns:a="http://schemas.openxmlformats.org/drawingml/2006/main" xmlns:r="http://schemas.openxmlformats.org/officeDocument/2006/relationships" xmlns:p="http://schemas.openxmlformats.org/presentationml/2006/main">
   <p:cSld>
     <p:spTree>
       <p:nvGrpSpPr>
@@ -8745,7 +8446,14 @@
         <p:cNvGrpSpPr/>
         <p:nvPr/>
       </p:nvGrpSpPr>
-      <p:grpSpPr/>
+      <p:grpSpPr>
+        <a:xfrm>
+          <a:off x="0" y="0"/>
+          <a:ext cx="0" cy="0"/>
+          <a:chOff x="0" y="0"/>
+          <a:chExt cx="0" cy="0"/>
+        </a:xfrm>
+      </p:grpSpPr>
       <p:sp>
         <p:nvSpPr>
           <p:cNvPr id="2" name="Text 0"/>
@@ -8989,7 +8697,7 @@
           <a:noFill/>
         </p:spPr>
         <p:txBody>
-          <a:bodyPr wrap="none" lIns="0" rIns="0" tIns="0" bIns="0">
+          <a:bodyPr wrap="none" lIns="0" tIns="0" rIns="0" bIns="0">
             <a:spAutoFit/>
           </a:bodyPr>
           <a:lstStyle/>
@@ -9024,7 +8732,7 @@
 </file>
 
 <file path=ppt/slides/slide18.xml><?xml version="1.0" encoding="utf-8"?>
-<p:sld xmlns:a="http://schemas.openxmlformats.org/drawingml/2006/main" xmlns:p="http://schemas.openxmlformats.org/presentationml/2006/main" xmlns:r="http://schemas.openxmlformats.org/officeDocument/2006/relationships">
+<p:sld xmlns:a="http://schemas.openxmlformats.org/drawingml/2006/main" xmlns:r="http://schemas.openxmlformats.org/officeDocument/2006/relationships" xmlns:p="http://schemas.openxmlformats.org/presentationml/2006/main">
   <p:cSld>
     <p:spTree>
       <p:nvGrpSpPr>
@@ -9032,7 +8740,14 @@
         <p:cNvGrpSpPr/>
         <p:nvPr/>
       </p:nvGrpSpPr>
-      <p:grpSpPr/>
+      <p:grpSpPr>
+        <a:xfrm>
+          <a:off x="0" y="0"/>
+          <a:ext cx="0" cy="0"/>
+          <a:chOff x="0" y="0"/>
+          <a:chExt cx="0" cy="0"/>
+        </a:xfrm>
+      </p:grpSpPr>
       <p:sp>
         <p:nvSpPr>
           <p:cNvPr id="2" name="Text 0"/>
@@ -9144,6 +8859,7 @@
           <a:lstStyle/>
           <a:p>
             <a:pPr algn="ctr"/>
+            <a:endParaRPr/>
           </a:p>
         </p:txBody>
       </p:sp>
@@ -9202,7 +8918,9 @@
             <a:spAutoFit/>
           </a:bodyPr>
           <a:lstStyle/>
-          <a:p/>
+          <a:p>
+            <a:endParaRPr/>
+          </a:p>
         </p:txBody>
       </p:sp>
       <p:sp>
@@ -9246,6 +8964,7 @@
           <a:lstStyle/>
           <a:p>
             <a:pPr algn="ctr"/>
+            <a:endParaRPr/>
           </a:p>
         </p:txBody>
       </p:sp>
@@ -9422,6 +9141,7 @@
           <a:lstStyle/>
           <a:p>
             <a:pPr algn="ctr"/>
+            <a:endParaRPr/>
           </a:p>
         </p:txBody>
       </p:sp>
@@ -9480,7 +9200,9 @@
             <a:spAutoFit/>
           </a:bodyPr>
           <a:lstStyle/>
-          <a:p/>
+          <a:p>
+            <a:endParaRPr/>
+          </a:p>
         </p:txBody>
       </p:sp>
       <p:sp>
@@ -9524,6 +9246,7 @@
           <a:lstStyle/>
           <a:p>
             <a:pPr algn="ctr"/>
+            <a:endParaRPr/>
           </a:p>
         </p:txBody>
       </p:sp>
@@ -9648,7 +9371,7 @@
           <a:noFill/>
         </p:spPr>
         <p:txBody>
-          <a:bodyPr wrap="none" lIns="0" rIns="0" tIns="0" bIns="0">
+          <a:bodyPr wrap="none" lIns="0" tIns="0" rIns="0" bIns="0">
             <a:spAutoFit/>
           </a:bodyPr>
           <a:lstStyle/>
@@ -9690,6 +9413,7 @@
         <a:solidFill>
           <a:srgbClr val="FFFFFF"/>
         </a:solidFill>
+        <a:effectLst/>
       </p:bgPr>
     </p:bg>
     <p:spTree>
@@ -9727,11 +9451,11 @@
           <a:bodyPr wrap="square" lIns="0" tIns="0" rIns="0" bIns="0" rtlCol="0" anchor="ctr"/>
           <a:lstStyle/>
           <a:p>
-            <a:pPr algn="l" indent="0" marL="0">
+            <a:pPr marL="0" indent="0" algn="l">
               <a:buNone/>
             </a:pPr>
             <a:r>
-              <a:rPr lang="en-US" sz="1300" b="1" spc="300" kern="0" dirty="0">
+              <a:rPr lang="en-US" sz="1300" b="1" kern="0" spc="300" dirty="0">
                 <a:solidFill>
                   <a:srgbClr val="FF8A3D"/>
                 </a:solidFill>
@@ -9766,7 +9490,7 @@
           <a:bodyPr wrap="square" lIns="0" tIns="0" rIns="0" bIns="0" rtlCol="0" anchor="ctr"/>
           <a:lstStyle/>
           <a:p>
-            <a:pPr algn="l" indent="0" marL="0">
+            <a:pPr marL="0" indent="0" algn="l">
               <a:buNone/>
             </a:pPr>
             <a:r>
@@ -9807,7 +9531,10 @@
         </p:spPr>
         <p:txBody>
           <a:bodyPr/>
-          <a:p/>
+          <a:lstStyle/>
+          <a:p>
+            <a:endParaRPr/>
+          </a:p>
         </p:txBody>
       </p:sp>
       <p:sp>
@@ -9831,7 +9558,7 @@
           <a:bodyPr wrap="square" lIns="0" tIns="0" rIns="0" bIns="0" rtlCol="0" anchor="t"/>
           <a:lstStyle/>
           <a:p>
-            <a:pPr indent="0" marL="0">
+            <a:pPr marL="0" indent="0">
               <a:lnSpc>
                 <a:spcPct val="125000"/>
               </a:lnSpc>
@@ -9851,7 +9578,7 @@
             <a:endParaRPr lang="en-US" sz="1400" dirty="0"/>
           </a:p>
           <a:p>
-            <a:pPr indent="0" marL="0">
+            <a:pPr marL="0" indent="0">
               <a:lnSpc>
                 <a:spcPct val="125000"/>
               </a:lnSpc>
@@ -9871,7 +9598,7 @@
             <a:endParaRPr lang="en-US" sz="1400" dirty="0"/>
           </a:p>
           <a:p>
-            <a:pPr indent="0" marL="0">
+            <a:pPr marL="0" indent="0">
               <a:lnSpc>
                 <a:spcPct val="125000"/>
               </a:lnSpc>
@@ -9891,7 +9618,7 @@
             <a:endParaRPr lang="en-US" sz="1400" dirty="0"/>
           </a:p>
           <a:p>
-            <a:pPr indent="0" marL="0">
+            <a:pPr marL="0" indent="0">
               <a:lnSpc>
                 <a:spcPct val="125000"/>
               </a:lnSpc>
@@ -9911,7 +9638,7 @@
             <a:endParaRPr lang="en-US" sz="1400" dirty="0"/>
           </a:p>
           <a:p>
-            <a:pPr indent="0" marL="0">
+            <a:pPr marL="0" indent="0">
               <a:lnSpc>
                 <a:spcPct val="125000"/>
               </a:lnSpc>
@@ -9931,7 +9658,7 @@
             <a:endParaRPr lang="en-US" sz="1400" dirty="0"/>
           </a:p>
           <a:p>
-            <a:pPr indent="0" marL="0">
+            <a:pPr marL="0" indent="0">
               <a:lnSpc>
                 <a:spcPct val="125000"/>
               </a:lnSpc>
@@ -9969,7 +9696,7 @@
           <a:noFill/>
         </p:spPr>
         <p:txBody>
-          <a:bodyPr wrap="none" lIns="0" rIns="0" tIns="0" bIns="0">
+          <a:bodyPr wrap="none" lIns="0" tIns="0" rIns="0" bIns="0">
             <a:spAutoFit/>
           </a:bodyPr>
           <a:lstStyle/>
@@ -10011,6 +9738,7 @@
         <a:solidFill>
           <a:srgbClr val="FFFFFF"/>
         </a:solidFill>
+        <a:effectLst/>
       </p:bgPr>
     </p:bg>
     <p:spTree>
@@ -10048,11 +9776,11 @@
           <a:bodyPr wrap="square" lIns="0" tIns="0" rIns="0" bIns="0" rtlCol="0" anchor="ctr"/>
           <a:lstStyle/>
           <a:p>
-            <a:pPr algn="l" indent="0" marL="0">
+            <a:pPr marL="0" indent="0" algn="l">
               <a:buNone/>
             </a:pPr>
             <a:r>
-              <a:rPr lang="en-US" sz="1300" b="1" spc="300" kern="0" dirty="0">
+              <a:rPr lang="en-US" sz="1300" b="1" kern="0" spc="300" dirty="0">
                 <a:solidFill>
                   <a:srgbClr val="FF8A3D"/>
                 </a:solidFill>
@@ -10087,7 +9815,7 @@
           <a:bodyPr wrap="square" lIns="0" tIns="0" rIns="0" bIns="0" rtlCol="0" anchor="ctr"/>
           <a:lstStyle/>
           <a:p>
-            <a:pPr algn="l" indent="0" marL="0">
+            <a:pPr marL="0" indent="0" algn="l">
               <a:buNone/>
             </a:pPr>
             <a:r>
@@ -10126,7 +9854,10 @@
         </p:spPr>
         <p:txBody>
           <a:bodyPr/>
-          <a:p/>
+          <a:lstStyle/>
+          <a:p>
+            <a:endParaRPr/>
+          </a:p>
         </p:txBody>
       </p:sp>
       <p:sp>
@@ -10150,7 +9881,7 @@
           <a:bodyPr wrap="square" lIns="0" tIns="0" rIns="0" bIns="0" rtlCol="0" anchor="ctr"/>
           <a:lstStyle/>
           <a:p>
-            <a:pPr algn="ctr" indent="0" marL="0">
+            <a:pPr marL="0" indent="0" algn="ctr">
               <a:buNone/>
             </a:pPr>
             <a:r>
@@ -10189,7 +9920,7 @@
           <a:bodyPr wrap="square" lIns="0" tIns="0" rIns="0" bIns="0" rtlCol="0" anchor="ctr"/>
           <a:lstStyle/>
           <a:p>
-            <a:pPr indent="0" marL="0">
+            <a:pPr marL="0" indent="0">
               <a:buNone/>
             </a:pPr>
             <a:r>
@@ -10228,7 +9959,10 @@
         </p:spPr>
         <p:txBody>
           <a:bodyPr/>
-          <a:p/>
+          <a:lstStyle/>
+          <a:p>
+            <a:endParaRPr/>
+          </a:p>
         </p:txBody>
       </p:sp>
       <p:sp>
@@ -10252,7 +9986,7 @@
           <a:bodyPr wrap="square" lIns="0" tIns="0" rIns="0" bIns="0" rtlCol="0" anchor="ctr"/>
           <a:lstStyle/>
           <a:p>
-            <a:pPr algn="ctr" indent="0" marL="0">
+            <a:pPr marL="0" indent="0" algn="ctr">
               <a:buNone/>
             </a:pPr>
             <a:r>
@@ -10291,7 +10025,7 @@
           <a:bodyPr wrap="square" lIns="0" tIns="0" rIns="0" bIns="0" rtlCol="0" anchor="ctr"/>
           <a:lstStyle/>
           <a:p>
-            <a:pPr indent="0" marL="0">
+            <a:pPr marL="0" indent="0">
               <a:buNone/>
             </a:pPr>
             <a:r>
@@ -10330,7 +10064,10 @@
         </p:spPr>
         <p:txBody>
           <a:bodyPr/>
-          <a:p/>
+          <a:lstStyle/>
+          <a:p>
+            <a:endParaRPr/>
+          </a:p>
         </p:txBody>
       </p:sp>
       <p:sp>
@@ -10354,7 +10091,7 @@
           <a:bodyPr wrap="square" lIns="0" tIns="0" rIns="0" bIns="0" rtlCol="0" anchor="ctr"/>
           <a:lstStyle/>
           <a:p>
-            <a:pPr algn="ctr" indent="0" marL="0">
+            <a:pPr marL="0" indent="0" algn="ctr">
               <a:buNone/>
             </a:pPr>
             <a:r>
@@ -10393,7 +10130,7 @@
           <a:bodyPr wrap="square" lIns="0" tIns="0" rIns="0" bIns="0" rtlCol="0" anchor="ctr"/>
           <a:lstStyle/>
           <a:p>
-            <a:pPr indent="0" marL="0">
+            <a:pPr marL="0" indent="0">
               <a:buNone/>
             </a:pPr>
             <a:r>
@@ -10432,7 +10169,10 @@
         </p:spPr>
         <p:txBody>
           <a:bodyPr/>
-          <a:p/>
+          <a:lstStyle/>
+          <a:p>
+            <a:endParaRPr/>
+          </a:p>
         </p:txBody>
       </p:sp>
       <p:sp>
@@ -10456,7 +10196,7 @@
           <a:bodyPr wrap="square" lIns="0" tIns="0" rIns="0" bIns="0" rtlCol="0" anchor="ctr"/>
           <a:lstStyle/>
           <a:p>
-            <a:pPr algn="ctr" indent="0" marL="0">
+            <a:pPr marL="0" indent="0" algn="ctr">
               <a:buNone/>
             </a:pPr>
             <a:r>
@@ -10495,7 +10235,7 @@
           <a:bodyPr wrap="square" lIns="0" tIns="0" rIns="0" bIns="0" rtlCol="0" anchor="ctr"/>
           <a:lstStyle/>
           <a:p>
-            <a:pPr indent="0" marL="0">
+            <a:pPr marL="0" indent="0">
               <a:buNone/>
             </a:pPr>
             <a:r>
@@ -10534,7 +10274,10 @@
         </p:spPr>
         <p:txBody>
           <a:bodyPr/>
-          <a:p/>
+          <a:lstStyle/>
+          <a:p>
+            <a:endParaRPr/>
+          </a:p>
         </p:txBody>
       </p:sp>
       <p:sp>
@@ -10558,7 +10301,7 @@
           <a:bodyPr wrap="square" lIns="0" tIns="0" rIns="0" bIns="0" rtlCol="0" anchor="ctr"/>
           <a:lstStyle/>
           <a:p>
-            <a:pPr algn="ctr" indent="0" marL="0">
+            <a:pPr marL="0" indent="0" algn="ctr">
               <a:buNone/>
             </a:pPr>
             <a:r>
@@ -10597,7 +10340,7 @@
           <a:bodyPr wrap="square" lIns="0" tIns="0" rIns="0" bIns="0" rtlCol="0" anchor="ctr"/>
           <a:lstStyle/>
           <a:p>
-            <a:pPr indent="0" marL="0">
+            <a:pPr marL="0" indent="0">
               <a:buNone/>
             </a:pPr>
             <a:r>
@@ -10636,7 +10379,10 @@
         </p:spPr>
         <p:txBody>
           <a:bodyPr/>
-          <a:p/>
+          <a:lstStyle/>
+          <a:p>
+            <a:endParaRPr/>
+          </a:p>
         </p:txBody>
       </p:sp>
       <p:sp>
@@ -10660,7 +10406,7 @@
           <a:bodyPr wrap="square" lIns="0" tIns="0" rIns="0" bIns="0" rtlCol="0" anchor="ctr"/>
           <a:lstStyle/>
           <a:p>
-            <a:pPr algn="ctr" indent="0" marL="0">
+            <a:pPr marL="0" indent="0" algn="ctr">
               <a:buNone/>
             </a:pPr>
             <a:r>
@@ -10699,7 +10445,7 @@
           <a:bodyPr wrap="square" lIns="0" tIns="0" rIns="0" bIns="0" rtlCol="0" anchor="ctr"/>
           <a:lstStyle/>
           <a:p>
-            <a:pPr indent="0" marL="0">
+            <a:pPr marL="0" indent="0">
               <a:buNone/>
             </a:pPr>
             <a:r>
@@ -10738,7 +10484,10 @@
         </p:spPr>
         <p:txBody>
           <a:bodyPr/>
-          <a:p/>
+          <a:lstStyle/>
+          <a:p>
+            <a:endParaRPr/>
+          </a:p>
         </p:txBody>
       </p:sp>
       <p:sp>
@@ -10762,7 +10511,7 @@
           <a:bodyPr wrap="square" lIns="0" tIns="0" rIns="0" bIns="0" rtlCol="0" anchor="ctr"/>
           <a:lstStyle/>
           <a:p>
-            <a:pPr algn="ctr" indent="0" marL="0">
+            <a:pPr marL="0" indent="0" algn="ctr">
               <a:buNone/>
             </a:pPr>
             <a:r>
@@ -10801,7 +10550,7 @@
           <a:bodyPr wrap="square" lIns="0" tIns="0" rIns="0" bIns="0" rtlCol="0" anchor="ctr"/>
           <a:lstStyle/>
           <a:p>
-            <a:pPr indent="0" marL="0">
+            <a:pPr marL="0" indent="0">
               <a:buNone/>
             </a:pPr>
             <a:r>
@@ -10836,7 +10585,7 @@
           <a:noFill/>
         </p:spPr>
         <p:txBody>
-          <a:bodyPr wrap="none" lIns="0" rIns="0" tIns="0" bIns="0">
+          <a:bodyPr wrap="none" lIns="0" tIns="0" rIns="0" bIns="0">
             <a:spAutoFit/>
           </a:bodyPr>
           <a:lstStyle/>
@@ -10878,6 +10627,7 @@
         <a:solidFill>
           <a:srgbClr val="FFFFFF"/>
         </a:solidFill>
+        <a:effectLst/>
       </p:bgPr>
     </p:bg>
     <p:spTree>
@@ -10915,11 +10665,11 @@
           <a:bodyPr wrap="square" lIns="0" tIns="0" rIns="0" bIns="0" rtlCol="0" anchor="ctr"/>
           <a:lstStyle/>
           <a:p>
-            <a:pPr algn="l" indent="0" marL="0">
+            <a:pPr marL="0" indent="0" algn="l">
               <a:buNone/>
             </a:pPr>
             <a:r>
-              <a:rPr lang="en-US" sz="1300" b="1" spc="300" kern="0" dirty="0">
+              <a:rPr lang="en-US" sz="1300" b="1" kern="0" spc="300" dirty="0">
                 <a:solidFill>
                   <a:srgbClr val="FF8A3D"/>
                 </a:solidFill>
@@ -10954,7 +10704,7 @@
           <a:bodyPr wrap="square" lIns="0" tIns="0" rIns="0" bIns="0" rtlCol="0" anchor="ctr"/>
           <a:lstStyle/>
           <a:p>
-            <a:pPr algn="l" indent="0" marL="0">
+            <a:pPr marL="0" indent="0" algn="l">
               <a:buNone/>
             </a:pPr>
             <a:r>
@@ -10993,11 +10743,11 @@
           <a:bodyPr wrap="square" lIns="0" tIns="0" rIns="0" bIns="0" rtlCol="0" anchor="ctr"/>
           <a:lstStyle/>
           <a:p>
-            <a:pPr algn="ctr" indent="0" marL="0">
+            <a:pPr marL="0" indent="0" algn="ctr">
               <a:buNone/>
             </a:pPr>
             <a:r>
-              <a:rPr lang="en-US" sz="1100" b="1" spc="150" kern="0" dirty="0">
+              <a:rPr lang="en-US" sz="1100" b="1" kern="0" spc="150" dirty="0">
                 <a:solidFill>
                   <a:srgbClr val="E67528"/>
                 </a:solidFill>
@@ -11037,7 +10787,7 @@
             <a:prstDash val="solid"/>
           </a:ln>
           <a:effectLst>
-            <a:outerShdw sx="100000" sy="100000" kx="0" ky="0" algn="bl" rotWithShape="0" blurRad="101600" dist="38100" dir="5400000">
+            <a:outerShdw blurRad="101600" dist="38100" dir="5400000" algn="bl" rotWithShape="0">
               <a:srgbClr val="000000">
                 <a:alpha val="12000"/>
               </a:srgbClr>
@@ -11046,19 +10796,22 @@
         </p:spPr>
         <p:txBody>
           <a:bodyPr/>
-          <a:p/>
+          <a:lstStyle/>
+          <a:p>
+            <a:endParaRPr/>
+          </a:p>
         </p:txBody>
       </p:sp>
       <p:pic>
         <p:nvPicPr>
-          <p:cNvPr id="6" name="Image 0" descr="D:/GitHub/mern-web-book/docs/assets/img/lecture-10/bootstrap-grid-wide.png">    </p:cNvPr>
+          <p:cNvPr id="6" name="Image 0" descr="D:/GitHub/mern-web-book/docs/assets/img/lecture-10/bootstrap-grid-wide.png"/>
           <p:cNvPicPr>
             <a:picLocks noChangeAspect="1"/>
           </p:cNvPicPr>
           <p:nvPr/>
         </p:nvPicPr>
         <p:blipFill>
-          <a:blip r:embed="rId1"/>
+          <a:blip r:embed="rId3"/>
           <a:stretch>
             <a:fillRect/>
           </a:stretch>
@@ -11094,11 +10847,11 @@
           <a:bodyPr wrap="square" lIns="0" tIns="0" rIns="0" bIns="0" rtlCol="0" anchor="ctr"/>
           <a:lstStyle/>
           <a:p>
-            <a:pPr algn="ctr" indent="0" marL="0">
+            <a:pPr marL="0" indent="0" algn="ctr">
               <a:buNone/>
             </a:pPr>
             <a:r>
-              <a:rPr lang="en-US" sz="1100" b="1" spc="150" kern="0" dirty="0">
+              <a:rPr lang="en-US" sz="1100" b="1" kern="0" spc="150" dirty="0">
                 <a:solidFill>
                   <a:srgbClr val="E67528"/>
                 </a:solidFill>
@@ -11138,7 +10891,7 @@
             <a:prstDash val="solid"/>
           </a:ln>
           <a:effectLst>
-            <a:outerShdw sx="100000" sy="100000" kx="0" ky="0" algn="bl" rotWithShape="0" blurRad="101600" dist="38100" dir="5400000">
+            <a:outerShdw blurRad="101600" dist="38100" dir="5400000" algn="bl" rotWithShape="0">
               <a:srgbClr val="000000">
                 <a:alpha val="12000"/>
               </a:srgbClr>
@@ -11147,19 +10900,22 @@
         </p:spPr>
         <p:txBody>
           <a:bodyPr/>
-          <a:p/>
+          <a:lstStyle/>
+          <a:p>
+            <a:endParaRPr/>
+          </a:p>
         </p:txBody>
       </p:sp>
       <p:pic>
         <p:nvPicPr>
-          <p:cNvPr id="9" name="Image 1" descr="D:/GitHub/mern-web-book/docs/assets/img/lecture-10/bootstrap-grid-narrow.png">    </p:cNvPr>
+          <p:cNvPr id="9" name="Image 1" descr="D:/GitHub/mern-web-book/docs/assets/img/lecture-10/bootstrap-grid-narrow.png"/>
           <p:cNvPicPr>
             <a:picLocks noChangeAspect="1"/>
           </p:cNvPicPr>
           <p:nvPr/>
         </p:nvPicPr>
         <p:blipFill>
-          <a:blip r:embed="rId2"/>
+          <a:blip r:embed="rId4"/>
           <a:stretch>
             <a:fillRect/>
           </a:stretch>
@@ -11191,7 +10947,7 @@
           <a:noFill/>
         </p:spPr>
         <p:txBody>
-          <a:bodyPr wrap="none" lIns="0" rIns="0" tIns="0" bIns="0">
+          <a:bodyPr wrap="none" lIns="0" tIns="0" rIns="0" bIns="0">
             <a:spAutoFit/>
           </a:bodyPr>
           <a:lstStyle/>
@@ -11233,6 +10989,7 @@
         <a:solidFill>
           <a:srgbClr val="FFFFFF"/>
         </a:solidFill>
+        <a:effectLst/>
       </p:bgPr>
     </p:bg>
     <p:spTree>
@@ -11270,11 +11027,11 @@
           <a:bodyPr wrap="square" lIns="0" tIns="0" rIns="0" bIns="0" rtlCol="0" anchor="ctr"/>
           <a:lstStyle/>
           <a:p>
-            <a:pPr algn="l" indent="0" marL="0">
+            <a:pPr marL="0" indent="0" algn="l">
               <a:buNone/>
             </a:pPr>
             <a:r>
-              <a:rPr lang="en-US" sz="1300" b="1" spc="300" kern="0" dirty="0">
+              <a:rPr lang="en-US" sz="1300" b="1" kern="0" spc="300" dirty="0">
                 <a:solidFill>
                   <a:srgbClr val="FF8A3D"/>
                 </a:solidFill>
@@ -11309,7 +11066,7 @@
           <a:bodyPr wrap="square" lIns="0" tIns="0" rIns="0" bIns="0" rtlCol="0" anchor="ctr"/>
           <a:lstStyle/>
           <a:p>
-            <a:pPr algn="l" indent="0" marL="0">
+            <a:pPr marL="0" indent="0" algn="l">
               <a:buNone/>
             </a:pPr>
             <a:r>
@@ -11350,8 +11107,20 @@
             <a:tbl>
               <a:tblPr/>
               <a:tblGrid>
-                <a:gridCol w="3291840"/>
-                <a:gridCol w="7680960"/>
+                <a:gridCol w="3291840">
+                  <a:extLst>
+                    <a:ext uri="{9D8B030D-6E8A-4147-A177-3AD203B41FA5}">
+                      <a16:colId xmlns:a16="http://schemas.microsoft.com/office/drawing/2014/main" val="20000"/>
+                    </a:ext>
+                  </a:extLst>
+                </a:gridCol>
+                <a:gridCol w="7680960">
+                  <a:extLst>
+                    <a:ext uri="{9D8B030D-6E8A-4147-A177-3AD203B41FA5}">
+                      <a16:colId xmlns:a16="http://schemas.microsoft.com/office/drawing/2014/main" val="20001"/>
+                    </a:ext>
+                  </a:extLst>
+                </a:gridCol>
               </a:tblGrid>
               <a:tr h="566928">
                 <a:tc>
@@ -11359,7 +11128,7 @@
                     <a:bodyPr/>
                     <a:lstStyle/>
                     <a:p>
-                      <a:pPr algn="ctr" indent="0" marL="0">
+                      <a:pPr marL="0" indent="0" algn="ctr">
                         <a:buNone/>
                       </a:pPr>
                       <a:r>
@@ -11380,7 +11149,7 @@
                       </a:endParaRPr>
                     </a:p>
                   </a:txBody>
-                  <a:tcPr marL="91440" marR="91440" marT="45720" marB="45720" anchor="ctr">
+                  <a:tcPr anchor="ctr">
                     <a:lnL w="12700" cap="flat" cmpd="sng" algn="ctr">
                       <a:solidFill>
                         <a:srgbClr val="D8D8E6"/>
@@ -11427,7 +11196,7 @@
                     <a:bodyPr/>
                     <a:lstStyle/>
                     <a:p>
-                      <a:pPr algn="ctr" indent="0" marL="0">
+                      <a:pPr marL="0" indent="0" algn="ctr">
                         <a:buNone/>
                       </a:pPr>
                       <a:r>
@@ -11448,7 +11217,7 @@
                       </a:endParaRPr>
                     </a:p>
                   </a:txBody>
-                  <a:tcPr marL="91440" marR="91440" marT="45720" marB="45720" anchor="ctr">
+                  <a:tcPr anchor="ctr">
                     <a:lnL w="12700" cap="flat" cmpd="sng" algn="ctr">
                       <a:solidFill>
                         <a:srgbClr val="D8D8E6"/>
@@ -11490,6 +11259,11 @@
                     </a:solidFill>
                   </a:tcPr>
                 </a:tc>
+                <a:extLst>
+                  <a:ext uri="{0D108BD9-81ED-4DB2-BD59-A6C34878D82A}">
+                    <a16:rowId xmlns:a16="http://schemas.microsoft.com/office/drawing/2014/main" val="10000"/>
+                  </a:ext>
+                </a:extLst>
               </a:tr>
               <a:tr h="566928">
                 <a:tc>
@@ -11497,7 +11271,7 @@
                     <a:bodyPr/>
                     <a:lstStyle/>
                     <a:p>
-                      <a:pPr algn="l" indent="0" marL="0">
+                      <a:pPr marL="0" indent="0" algn="l">
                         <a:buNone/>
                       </a:pPr>
                       <a:r>
@@ -11518,7 +11292,7 @@
                       </a:endParaRPr>
                     </a:p>
                   </a:txBody>
-                  <a:tcPr marL="91440" marR="91440" marT="45720" marB="45720" anchor="ctr">
+                  <a:tcPr anchor="ctr">
                     <a:lnL w="12700" cap="flat" cmpd="sng" algn="ctr">
                       <a:solidFill>
                         <a:srgbClr val="D8D8E6"/>
@@ -11565,7 +11339,7 @@
                     <a:bodyPr/>
                     <a:lstStyle/>
                     <a:p>
-                      <a:pPr algn="ctr" indent="0" marL="0">
+                      <a:pPr marL="0" indent="0" algn="ctr">
                         <a:buNone/>
                       </a:pPr>
                       <a:r>
@@ -11586,7 +11360,7 @@
                       </a:endParaRPr>
                     </a:p>
                   </a:txBody>
-                  <a:tcPr marL="91440" marR="91440" marT="45720" marB="45720" anchor="ctr">
+                  <a:tcPr anchor="ctr">
                     <a:lnL w="12700" cap="flat" cmpd="sng" algn="ctr">
                       <a:solidFill>
                         <a:srgbClr val="D8D8E6"/>
@@ -11628,6 +11402,11 @@
                     </a:solidFill>
                   </a:tcPr>
                 </a:tc>
+                <a:extLst>
+                  <a:ext uri="{0D108BD9-81ED-4DB2-BD59-A6C34878D82A}">
+                    <a16:rowId xmlns:a16="http://schemas.microsoft.com/office/drawing/2014/main" val="10001"/>
+                  </a:ext>
+                </a:extLst>
               </a:tr>
               <a:tr h="566928">
                 <a:tc>
@@ -11635,7 +11414,7 @@
                     <a:bodyPr/>
                     <a:lstStyle/>
                     <a:p>
-                      <a:pPr algn="l" indent="0" marL="0">
+                      <a:pPr marL="0" indent="0" algn="l">
                         <a:buNone/>
                       </a:pPr>
                       <a:r>
@@ -11656,7 +11435,7 @@
                       </a:endParaRPr>
                     </a:p>
                   </a:txBody>
-                  <a:tcPr marL="91440" marR="91440" marT="45720" marB="45720" anchor="ctr">
+                  <a:tcPr anchor="ctr">
                     <a:lnL w="12700" cap="flat" cmpd="sng" algn="ctr">
                       <a:solidFill>
                         <a:srgbClr val="D8D8E6"/>
@@ -11703,7 +11482,7 @@
                     <a:bodyPr/>
                     <a:lstStyle/>
                     <a:p>
-                      <a:pPr algn="ctr" indent="0" marL="0">
+                      <a:pPr marL="0" indent="0" algn="ctr">
                         <a:buNone/>
                       </a:pPr>
                       <a:r>
@@ -11724,7 +11503,7 @@
                       </a:endParaRPr>
                     </a:p>
                   </a:txBody>
-                  <a:tcPr marL="91440" marR="91440" marT="45720" marB="45720" anchor="ctr">
+                  <a:tcPr anchor="ctr">
                     <a:lnL w="12700" cap="flat" cmpd="sng" algn="ctr">
                       <a:solidFill>
                         <a:srgbClr val="D8D8E6"/>
@@ -11766,6 +11545,11 @@
                     </a:solidFill>
                   </a:tcPr>
                 </a:tc>
+                <a:extLst>
+                  <a:ext uri="{0D108BD9-81ED-4DB2-BD59-A6C34878D82A}">
+                    <a16:rowId xmlns:a16="http://schemas.microsoft.com/office/drawing/2014/main" val="10002"/>
+                  </a:ext>
+                </a:extLst>
               </a:tr>
               <a:tr h="566928">
                 <a:tc>
@@ -11773,7 +11557,7 @@
                     <a:bodyPr/>
                     <a:lstStyle/>
                     <a:p>
-                      <a:pPr algn="l" indent="0" marL="0">
+                      <a:pPr marL="0" indent="0" algn="l">
                         <a:buNone/>
                       </a:pPr>
                       <a:r>
@@ -11794,7 +11578,7 @@
                       </a:endParaRPr>
                     </a:p>
                   </a:txBody>
-                  <a:tcPr marL="91440" marR="91440" marT="45720" marB="45720" anchor="ctr">
+                  <a:tcPr anchor="ctr">
                     <a:lnL w="12700" cap="flat" cmpd="sng" algn="ctr">
                       <a:solidFill>
                         <a:srgbClr val="D8D8E6"/>
@@ -11841,7 +11625,7 @@
                     <a:bodyPr/>
                     <a:lstStyle/>
                     <a:p>
-                      <a:pPr algn="ctr" indent="0" marL="0">
+                      <a:pPr marL="0" indent="0" algn="ctr">
                         <a:buNone/>
                       </a:pPr>
                       <a:r>
@@ -11862,7 +11646,7 @@
                       </a:endParaRPr>
                     </a:p>
                   </a:txBody>
-                  <a:tcPr marL="91440" marR="91440" marT="45720" marB="45720" anchor="ctr">
+                  <a:tcPr anchor="ctr">
                     <a:lnL w="12700" cap="flat" cmpd="sng" algn="ctr">
                       <a:solidFill>
                         <a:srgbClr val="D8D8E6"/>
@@ -11904,6 +11688,11 @@
                     </a:solidFill>
                   </a:tcPr>
                 </a:tc>
+                <a:extLst>
+                  <a:ext uri="{0D108BD9-81ED-4DB2-BD59-A6C34878D82A}">
+                    <a16:rowId xmlns:a16="http://schemas.microsoft.com/office/drawing/2014/main" val="10003"/>
+                  </a:ext>
+                </a:extLst>
               </a:tr>
               <a:tr h="566928">
                 <a:tc>
@@ -11911,7 +11700,7 @@
                     <a:bodyPr/>
                     <a:lstStyle/>
                     <a:p>
-                      <a:pPr algn="l" indent="0" marL="0">
+                      <a:pPr marL="0" indent="0" algn="l">
                         <a:buNone/>
                       </a:pPr>
                       <a:r>
@@ -11932,7 +11721,7 @@
                       </a:endParaRPr>
                     </a:p>
                   </a:txBody>
-                  <a:tcPr marL="91440" marR="91440" marT="45720" marB="45720" anchor="ctr">
+                  <a:tcPr anchor="ctr">
                     <a:lnL w="12700" cap="flat" cmpd="sng" algn="ctr">
                       <a:solidFill>
                         <a:srgbClr val="D8D8E6"/>
@@ -11979,7 +11768,7 @@
                     <a:bodyPr/>
                     <a:lstStyle/>
                     <a:p>
-                      <a:pPr algn="ctr" indent="0" marL="0">
+                      <a:pPr marL="0" indent="0" algn="ctr">
                         <a:buNone/>
                       </a:pPr>
                       <a:r>
@@ -12000,7 +11789,7 @@
                       </a:endParaRPr>
                     </a:p>
                   </a:txBody>
-                  <a:tcPr marL="91440" marR="91440" marT="45720" marB="45720" anchor="ctr">
+                  <a:tcPr anchor="ctr">
                     <a:lnL w="12700" cap="flat" cmpd="sng" algn="ctr">
                       <a:solidFill>
                         <a:srgbClr val="D8D8E6"/>
@@ -12042,6 +11831,11 @@
                     </a:solidFill>
                   </a:tcPr>
                 </a:tc>
+                <a:extLst>
+                  <a:ext uri="{0D108BD9-81ED-4DB2-BD59-A6C34878D82A}">
+                    <a16:rowId xmlns:a16="http://schemas.microsoft.com/office/drawing/2014/main" val="10004"/>
+                  </a:ext>
+                </a:extLst>
               </a:tr>
               <a:tr h="566928">
                 <a:tc>
@@ -12049,7 +11843,7 @@
                     <a:bodyPr/>
                     <a:lstStyle/>
                     <a:p>
-                      <a:pPr algn="l" indent="0" marL="0">
+                      <a:pPr marL="0" indent="0" algn="l">
                         <a:buNone/>
                       </a:pPr>
                       <a:r>
@@ -12070,7 +11864,7 @@
                       </a:endParaRPr>
                     </a:p>
                   </a:txBody>
-                  <a:tcPr marL="91440" marR="91440" marT="45720" marB="45720" anchor="ctr">
+                  <a:tcPr anchor="ctr">
                     <a:lnL w="12700" cap="flat" cmpd="sng" algn="ctr">
                       <a:solidFill>
                         <a:srgbClr val="D8D8E6"/>
@@ -12117,7 +11911,7 @@
                     <a:bodyPr/>
                     <a:lstStyle/>
                     <a:p>
-                      <a:pPr algn="ctr" indent="0" marL="0">
+                      <a:pPr marL="0" indent="0" algn="ctr">
                         <a:buNone/>
                       </a:pPr>
                       <a:r>
@@ -12138,7 +11932,7 @@
                       </a:endParaRPr>
                     </a:p>
                   </a:txBody>
-                  <a:tcPr marL="91440" marR="91440" marT="45720" marB="45720" anchor="ctr">
+                  <a:tcPr anchor="ctr">
                     <a:lnL w="12700" cap="flat" cmpd="sng" algn="ctr">
                       <a:solidFill>
                         <a:srgbClr val="D8D8E6"/>
@@ -12180,6 +11974,11 @@
                     </a:solidFill>
                   </a:tcPr>
                 </a:tc>
+                <a:extLst>
+                  <a:ext uri="{0D108BD9-81ED-4DB2-BD59-A6C34878D82A}">
+                    <a16:rowId xmlns:a16="http://schemas.microsoft.com/office/drawing/2014/main" val="10005"/>
+                  </a:ext>
+                </a:extLst>
               </a:tr>
               <a:tr h="566928">
                 <a:tc>
@@ -12187,7 +11986,7 @@
                     <a:bodyPr/>
                     <a:lstStyle/>
                     <a:p>
-                      <a:pPr algn="l" indent="0" marL="0">
+                      <a:pPr marL="0" indent="0" algn="l">
                         <a:buNone/>
                       </a:pPr>
                       <a:r>
@@ -12208,7 +12007,7 @@
                       </a:endParaRPr>
                     </a:p>
                   </a:txBody>
-                  <a:tcPr marL="91440" marR="91440" marT="45720" marB="45720" anchor="ctr">
+                  <a:tcPr anchor="ctr">
                     <a:lnL w="12700" cap="flat" cmpd="sng" algn="ctr">
                       <a:solidFill>
                         <a:srgbClr val="D8D8E6"/>
@@ -12255,7 +12054,7 @@
                     <a:bodyPr/>
                     <a:lstStyle/>
                     <a:p>
-                      <a:pPr algn="ctr" indent="0" marL="0">
+                      <a:pPr marL="0" indent="0" algn="ctr">
                         <a:buNone/>
                       </a:pPr>
                       <a:r>
@@ -12276,7 +12075,7 @@
                       </a:endParaRPr>
                     </a:p>
                   </a:txBody>
-                  <a:tcPr marL="91440" marR="91440" marT="45720" marB="45720" anchor="ctr">
+                  <a:tcPr anchor="ctr">
                     <a:lnL w="12700" cap="flat" cmpd="sng" algn="ctr">
                       <a:solidFill>
                         <a:srgbClr val="D8D8E6"/>
@@ -12318,6 +12117,11 @@
                     </a:solidFill>
                   </a:tcPr>
                 </a:tc>
+                <a:extLst>
+                  <a:ext uri="{0D108BD9-81ED-4DB2-BD59-A6C34878D82A}">
+                    <a16:rowId xmlns:a16="http://schemas.microsoft.com/office/drawing/2014/main" val="10006"/>
+                  </a:ext>
+                </a:extLst>
               </a:tr>
               <a:tr h="566928">
                 <a:tc>
@@ -12325,7 +12129,7 @@
                     <a:bodyPr/>
                     <a:lstStyle/>
                     <a:p>
-                      <a:pPr algn="l" indent="0" marL="0">
+                      <a:pPr marL="0" indent="0" algn="l">
                         <a:buNone/>
                       </a:pPr>
                       <a:r>
@@ -12346,7 +12150,7 @@
                       </a:endParaRPr>
                     </a:p>
                   </a:txBody>
-                  <a:tcPr marL="91440" marR="91440" marT="45720" marB="45720" anchor="ctr">
+                  <a:tcPr anchor="ctr">
                     <a:lnL w="12700" cap="flat" cmpd="sng" algn="ctr">
                       <a:solidFill>
                         <a:srgbClr val="D8D8E6"/>
@@ -12393,7 +12197,7 @@
                     <a:bodyPr/>
                     <a:lstStyle/>
                     <a:p>
-                      <a:pPr algn="ctr" indent="0" marL="0">
+                      <a:pPr marL="0" indent="0" algn="ctr">
                         <a:buNone/>
                       </a:pPr>
                       <a:r>
@@ -12414,7 +12218,7 @@
                       </a:endParaRPr>
                     </a:p>
                   </a:txBody>
-                  <a:tcPr marL="91440" marR="91440" marT="45720" marB="45720" anchor="ctr">
+                  <a:tcPr anchor="ctr">
                     <a:lnL w="12700" cap="flat" cmpd="sng" algn="ctr">
                       <a:solidFill>
                         <a:srgbClr val="D8D8E6"/>
@@ -12456,6 +12260,11 @@
                     </a:solidFill>
                   </a:tcPr>
                 </a:tc>
+                <a:extLst>
+                  <a:ext uri="{0D108BD9-81ED-4DB2-BD59-A6C34878D82A}">
+                    <a16:rowId xmlns:a16="http://schemas.microsoft.com/office/drawing/2014/main" val="10007"/>
+                  </a:ext>
+                </a:extLst>
               </a:tr>
             </a:tbl>
           </a:graphicData>
@@ -12482,7 +12291,7 @@
           <a:bodyPr wrap="square" lIns="0" tIns="0" rIns="0" bIns="0" rtlCol="0" anchor="ctr"/>
           <a:lstStyle/>
           <a:p>
-            <a:pPr indent="0" marL="0">
+            <a:pPr marL="0" indent="0">
               <a:buNone/>
             </a:pPr>
             <a:r>
@@ -12517,7 +12326,7 @@
           <a:noFill/>
         </p:spPr>
         <p:txBody>
-          <a:bodyPr wrap="none" lIns="0" rIns="0" tIns="0" bIns="0">
+          <a:bodyPr wrap="none" lIns="0" tIns="0" rIns="0" bIns="0">
             <a:spAutoFit/>
           </a:bodyPr>
           <a:lstStyle/>
@@ -12559,6 +12368,7 @@
         <a:solidFill>
           <a:srgbClr val="FFFFFF"/>
         </a:solidFill>
+        <a:effectLst/>
       </p:bgPr>
     </p:bg>
     <p:spTree>
@@ -12596,11 +12406,11 @@
           <a:bodyPr wrap="square" lIns="0" tIns="0" rIns="0" bIns="0" rtlCol="0" anchor="ctr"/>
           <a:lstStyle/>
           <a:p>
-            <a:pPr algn="l" indent="0" marL="0">
+            <a:pPr marL="0" indent="0" algn="l">
               <a:buNone/>
             </a:pPr>
             <a:r>
-              <a:rPr lang="en-US" sz="1300" b="1" spc="300" kern="0" dirty="0">
+              <a:rPr lang="en-US" sz="1300" b="1" kern="0" spc="300" dirty="0">
                 <a:solidFill>
                   <a:srgbClr val="FF8A3D"/>
                 </a:solidFill>
@@ -12635,7 +12445,7 @@
           <a:bodyPr wrap="square" lIns="0" tIns="0" rIns="0" bIns="0" rtlCol="0" anchor="ctr"/>
           <a:lstStyle/>
           <a:p>
-            <a:pPr algn="l" indent="0" marL="0">
+            <a:pPr marL="0" indent="0" algn="l">
               <a:buNone/>
             </a:pPr>
             <a:r>
@@ -12676,7 +12486,10 @@
         </p:spPr>
         <p:txBody>
           <a:bodyPr/>
-          <a:p/>
+          <a:lstStyle/>
+          <a:p>
+            <a:endParaRPr/>
+          </a:p>
         </p:txBody>
       </p:sp>
       <p:sp>
@@ -12700,7 +12513,7 @@
           <a:bodyPr wrap="square" lIns="0" tIns="0" rIns="0" bIns="0" rtlCol="0" anchor="t"/>
           <a:lstStyle/>
           <a:p>
-            <a:pPr indent="0" marL="0">
+            <a:pPr marL="0" indent="0">
               <a:lnSpc>
                 <a:spcPct val="125000"/>
               </a:lnSpc>
@@ -12720,7 +12533,7 @@
             <a:endParaRPr lang="en-US" sz="1000" dirty="0"/>
           </a:p>
           <a:p>
-            <a:pPr indent="0" marL="0">
+            <a:pPr marL="0" indent="0">
               <a:lnSpc>
                 <a:spcPct val="125000"/>
               </a:lnSpc>
@@ -12740,7 +12553,7 @@
             <a:endParaRPr lang="en-US" sz="1000" dirty="0"/>
           </a:p>
           <a:p>
-            <a:pPr indent="0" marL="0">
+            <a:pPr marL="0" indent="0">
               <a:lnSpc>
                 <a:spcPct val="125000"/>
               </a:lnSpc>
@@ -12760,7 +12573,7 @@
             <a:endParaRPr lang="en-US" sz="1000" dirty="0"/>
           </a:p>
           <a:p>
-            <a:pPr indent="0" marL="0">
+            <a:pPr marL="0" indent="0">
               <a:lnSpc>
                 <a:spcPct val="125000"/>
               </a:lnSpc>
@@ -12780,7 +12593,7 @@
             <a:endParaRPr lang="en-US" sz="1000" dirty="0"/>
           </a:p>
           <a:p>
-            <a:pPr indent="0" marL="0">
+            <a:pPr marL="0" indent="0">
               <a:lnSpc>
                 <a:spcPct val="125000"/>
               </a:lnSpc>
@@ -12800,7 +12613,7 @@
             <a:endParaRPr lang="en-US" sz="1000" dirty="0"/>
           </a:p>
           <a:p>
-            <a:pPr indent="0" marL="0">
+            <a:pPr marL="0" indent="0">
               <a:lnSpc>
                 <a:spcPct val="125000"/>
               </a:lnSpc>
@@ -12809,7 +12622,7 @@
             <a:endParaRPr lang="en-US" sz="1000" dirty="0"/>
           </a:p>
           <a:p>
-            <a:pPr indent="0" marL="0">
+            <a:pPr marL="0" indent="0">
               <a:lnSpc>
                 <a:spcPct val="125000"/>
               </a:lnSpc>
@@ -12829,7 +12642,7 @@
             <a:endParaRPr lang="en-US" sz="1000" dirty="0"/>
           </a:p>
           <a:p>
-            <a:pPr indent="0" marL="0">
+            <a:pPr marL="0" indent="0">
               <a:lnSpc>
                 <a:spcPct val="125000"/>
               </a:lnSpc>
@@ -12849,7 +12662,7 @@
             <a:endParaRPr lang="en-US" sz="1000" dirty="0"/>
           </a:p>
           <a:p>
-            <a:pPr indent="0" marL="0">
+            <a:pPr marL="0" indent="0">
               <a:lnSpc>
                 <a:spcPct val="125000"/>
               </a:lnSpc>
@@ -12869,7 +12682,7 @@
             <a:endParaRPr lang="en-US" sz="1000" dirty="0"/>
           </a:p>
           <a:p>
-            <a:pPr indent="0" marL="0">
+            <a:pPr marL="0" indent="0">
               <a:lnSpc>
                 <a:spcPct val="125000"/>
               </a:lnSpc>
@@ -12889,7 +12702,7 @@
             <a:endParaRPr lang="en-US" sz="1000" dirty="0"/>
           </a:p>
           <a:p>
-            <a:pPr indent="0" marL="0">
+            <a:pPr marL="0" indent="0">
               <a:lnSpc>
                 <a:spcPct val="125000"/>
               </a:lnSpc>
@@ -12909,7 +12722,7 @@
             <a:endParaRPr lang="en-US" sz="1000" dirty="0"/>
           </a:p>
           <a:p>
-            <a:pPr indent="0" marL="0">
+            <a:pPr marL="0" indent="0">
               <a:lnSpc>
                 <a:spcPct val="125000"/>
               </a:lnSpc>
@@ -12929,7 +12742,7 @@
             <a:endParaRPr lang="en-US" sz="1000" dirty="0"/>
           </a:p>
           <a:p>
-            <a:pPr indent="0" marL="0">
+            <a:pPr marL="0" indent="0">
               <a:lnSpc>
                 <a:spcPct val="125000"/>
               </a:lnSpc>
@@ -12949,7 +12762,7 @@
             <a:endParaRPr lang="en-US" sz="1000" dirty="0"/>
           </a:p>
           <a:p>
-            <a:pPr indent="0" marL="0">
+            <a:pPr marL="0" indent="0">
               <a:lnSpc>
                 <a:spcPct val="125000"/>
               </a:lnSpc>
@@ -12969,7 +12782,7 @@
             <a:endParaRPr lang="en-US" sz="1000" dirty="0"/>
           </a:p>
           <a:p>
-            <a:pPr indent="0" marL="0">
+            <a:pPr marL="0" indent="0">
               <a:lnSpc>
                 <a:spcPct val="125000"/>
               </a:lnSpc>
@@ -12989,7 +12802,7 @@
             <a:endParaRPr lang="en-US" sz="1000" dirty="0"/>
           </a:p>
           <a:p>
-            <a:pPr indent="0" marL="0">
+            <a:pPr marL="0" indent="0">
               <a:lnSpc>
                 <a:spcPct val="125000"/>
               </a:lnSpc>
@@ -13036,7 +12849,7 @@
             <a:prstDash val="solid"/>
           </a:ln>
           <a:effectLst>
-            <a:outerShdw sx="100000" sy="100000" kx="0" ky="0" algn="bl" rotWithShape="0" blurRad="101600" dist="38100" dir="5400000">
+            <a:outerShdw blurRad="101600" dist="38100" dir="5400000" algn="bl" rotWithShape="0">
               <a:srgbClr val="000000">
                 <a:alpha val="12000"/>
               </a:srgbClr>
@@ -13045,19 +12858,22 @@
         </p:spPr>
         <p:txBody>
           <a:bodyPr/>
-          <a:p/>
+          <a:lstStyle/>
+          <a:p>
+            <a:endParaRPr/>
+          </a:p>
         </p:txBody>
       </p:sp>
       <p:pic>
         <p:nvPicPr>
-          <p:cNvPr id="7" name="Image 0" descr="D:/GitHub/mern-web-book/docs/assets/img/lecture-10/grid-autolayout-nesting.png">    </p:cNvPr>
+          <p:cNvPr id="7" name="Image 0" descr="D:/GitHub/mern-web-book/docs/assets/img/lecture-10/grid-autolayout-nesting.png"/>
           <p:cNvPicPr>
             <a:picLocks noChangeAspect="1"/>
           </p:cNvPicPr>
           <p:nvPr/>
         </p:nvPicPr>
         <p:blipFill>
-          <a:blip r:embed="rId1"/>
+          <a:blip r:embed="rId3"/>
           <a:stretch>
             <a:fillRect/>
           </a:stretch>
@@ -13089,7 +12905,7 @@
           <a:noFill/>
         </p:spPr>
         <p:txBody>
-          <a:bodyPr wrap="none" lIns="0" rIns="0" tIns="0" bIns="0">
+          <a:bodyPr wrap="none" lIns="0" tIns="0" rIns="0" bIns="0">
             <a:spAutoFit/>
           </a:bodyPr>
           <a:lstStyle/>
@@ -13131,6 +12947,7 @@
         <a:solidFill>
           <a:srgbClr val="FFFFFF"/>
         </a:solidFill>
+        <a:effectLst/>
       </p:bgPr>
     </p:bg>
     <p:spTree>
@@ -13168,11 +12985,11 @@
           <a:bodyPr wrap="square" lIns="0" tIns="0" rIns="0" bIns="0" rtlCol="0" anchor="ctr"/>
           <a:lstStyle/>
           <a:p>
-            <a:pPr algn="l" indent="0" marL="0">
+            <a:pPr marL="0" indent="0" algn="l">
               <a:buNone/>
             </a:pPr>
             <a:r>
-              <a:rPr lang="en-US" sz="1300" b="1" spc="300" kern="0" dirty="0">
+              <a:rPr lang="en-US" sz="1300" b="1" kern="0" spc="300" dirty="0">
                 <a:solidFill>
                   <a:srgbClr val="FF8A3D"/>
                 </a:solidFill>
@@ -13207,7 +13024,7 @@
           <a:bodyPr wrap="square" lIns="0" tIns="0" rIns="0" bIns="0" rtlCol="0" anchor="ctr"/>
           <a:lstStyle/>
           <a:p>
-            <a:pPr algn="l" indent="0" marL="0">
+            <a:pPr marL="0" indent="0" algn="l">
               <a:buNone/>
             </a:pPr>
             <a:r>
@@ -13246,7 +13063,7 @@
           <a:bodyPr wrap="square" lIns="0" tIns="0" rIns="0" bIns="0" rtlCol="0" anchor="ctr"/>
           <a:lstStyle/>
           <a:p>
-            <a:pPr indent="0" marL="0">
+            <a:pPr marL="0" indent="0">
               <a:buNone/>
             </a:pPr>
             <a:r>
@@ -13287,7 +13104,10 @@
         </p:spPr>
         <p:txBody>
           <a:bodyPr/>
-          <a:p/>
+          <a:lstStyle/>
+          <a:p>
+            <a:endParaRPr/>
+          </a:p>
         </p:txBody>
       </p:sp>
       <p:sp>
@@ -13311,7 +13131,7 @@
           <a:bodyPr wrap="square" lIns="0" tIns="0" rIns="0" bIns="0" rtlCol="0" anchor="t"/>
           <a:lstStyle/>
           <a:p>
-            <a:pPr indent="0" marL="0">
+            <a:pPr marL="0" indent="0">
               <a:lnSpc>
                 <a:spcPct val="125000"/>
               </a:lnSpc>
@@ -13331,7 +13151,7 @@
             <a:endParaRPr lang="en-US" sz="1250" dirty="0"/>
           </a:p>
           <a:p>
-            <a:pPr indent="0" marL="0">
+            <a:pPr marL="0" indent="0">
               <a:lnSpc>
                 <a:spcPct val="125000"/>
               </a:lnSpc>
@@ -13340,7 +13160,7 @@
             <a:endParaRPr lang="en-US" sz="1250" dirty="0"/>
           </a:p>
           <a:p>
-            <a:pPr indent="0" marL="0">
+            <a:pPr marL="0" indent="0">
               <a:lnSpc>
                 <a:spcPct val="125000"/>
               </a:lnSpc>
@@ -13360,7 +13180,7 @@
             <a:endParaRPr lang="en-US" sz="1250" dirty="0"/>
           </a:p>
           <a:p>
-            <a:pPr indent="0" marL="0">
+            <a:pPr marL="0" indent="0">
               <a:lnSpc>
                 <a:spcPct val="125000"/>
               </a:lnSpc>
@@ -13380,7 +13200,7 @@
             <a:endParaRPr lang="en-US" sz="1250" dirty="0"/>
           </a:p>
           <a:p>
-            <a:pPr indent="0" marL="0">
+            <a:pPr marL="0" indent="0">
               <a:lnSpc>
                 <a:spcPct val="125000"/>
               </a:lnSpc>
@@ -13427,7 +13247,7 @@
             <a:prstDash val="solid"/>
           </a:ln>
           <a:effectLst>
-            <a:outerShdw sx="100000" sy="100000" kx="0" ky="0" algn="bl" rotWithShape="0" blurRad="101600" dist="38100" dir="5400000">
+            <a:outerShdw blurRad="101600" dist="38100" dir="5400000" algn="bl" rotWithShape="0">
               <a:srgbClr val="000000">
                 <a:alpha val="12000"/>
               </a:srgbClr>
@@ -13436,19 +13256,22 @@
         </p:spPr>
         <p:txBody>
           <a:bodyPr/>
-          <a:p/>
+          <a:lstStyle/>
+          <a:p>
+            <a:endParaRPr/>
+          </a:p>
         </p:txBody>
       </p:sp>
       <p:pic>
         <p:nvPicPr>
-          <p:cNvPr id="8" name="Image 0" descr="D:/GitHub/mern-web-book/docs/assets/img/lecture-10/grid-offset-order.png">    </p:cNvPr>
+          <p:cNvPr id="8" name="Image 0" descr="D:/GitHub/mern-web-book/docs/assets/img/lecture-10/grid-offset-order.png"/>
           <p:cNvPicPr>
             <a:picLocks noChangeAspect="1"/>
           </p:cNvPicPr>
           <p:nvPr/>
         </p:nvPicPr>
         <p:blipFill>
-          <a:blip r:embed="rId1"/>
+          <a:blip r:embed="rId3"/>
           <a:stretch>
             <a:fillRect/>
           </a:stretch>
@@ -13480,7 +13303,7 @@
           <a:noFill/>
         </p:spPr>
         <p:txBody>
-          <a:bodyPr wrap="none" lIns="0" rIns="0" tIns="0" bIns="0">
+          <a:bodyPr wrap="none" lIns="0" tIns="0" rIns="0" bIns="0">
             <a:spAutoFit/>
           </a:bodyPr>
           <a:lstStyle/>
@@ -13522,6 +13345,7 @@
         <a:solidFill>
           <a:srgbClr val="FFFFFF"/>
         </a:solidFill>
+        <a:effectLst/>
       </p:bgPr>
     </p:bg>
     <p:spTree>
@@ -13559,11 +13383,11 @@
           <a:bodyPr wrap="square" lIns="0" tIns="0" rIns="0" bIns="0" rtlCol="0" anchor="ctr"/>
           <a:lstStyle/>
           <a:p>
-            <a:pPr algn="l" indent="0" marL="0">
+            <a:pPr marL="0" indent="0" algn="l">
               <a:buNone/>
             </a:pPr>
             <a:r>
-              <a:rPr lang="en-US" sz="1300" b="1" spc="300" kern="0" dirty="0">
+              <a:rPr lang="en-US" sz="1300" b="1" kern="0" spc="300" dirty="0">
                 <a:solidFill>
                   <a:srgbClr val="FF8A3D"/>
                 </a:solidFill>
@@ -13598,7 +13422,7 @@
           <a:bodyPr wrap="square" lIns="0" tIns="0" rIns="0" bIns="0" rtlCol="0" anchor="ctr"/>
           <a:lstStyle/>
           <a:p>
-            <a:pPr algn="l" indent="0" marL="0">
+            <a:pPr marL="0" indent="0" algn="l">
               <a:buNone/>
             </a:pPr>
             <a:r>
@@ -13637,7 +13461,7 @@
           <a:bodyPr wrap="square" lIns="0" tIns="0" rIns="0" bIns="0" rtlCol="0" anchor="ctr"/>
           <a:lstStyle/>
           <a:p>
-            <a:pPr indent="0" marL="0">
+            <a:pPr marL="0" indent="0">
               <a:buNone/>
             </a:pPr>
             <a:r>
@@ -13678,7 +13502,10 @@
         </p:spPr>
         <p:txBody>
           <a:bodyPr/>
-          <a:p/>
+          <a:lstStyle/>
+          <a:p>
+            <a:endParaRPr/>
+          </a:p>
         </p:txBody>
       </p:sp>
       <p:sp>
@@ -13702,7 +13529,7 @@
           <a:bodyPr wrap="square" lIns="0" tIns="0" rIns="0" bIns="0" rtlCol="0" anchor="t"/>
           <a:lstStyle/>
           <a:p>
-            <a:pPr indent="0" marL="0">
+            <a:pPr marL="0" indent="0">
               <a:lnSpc>
                 <a:spcPct val="125000"/>
               </a:lnSpc>
@@ -13722,7 +13549,7 @@
             <a:endParaRPr lang="en-US" sz="1250" dirty="0"/>
           </a:p>
           <a:p>
-            <a:pPr indent="0" marL="0">
+            <a:pPr marL="0" indent="0">
               <a:lnSpc>
                 <a:spcPct val="125000"/>
               </a:lnSpc>
@@ -13731,7 +13558,7 @@
             <a:endParaRPr lang="en-US" sz="1250" dirty="0"/>
           </a:p>
           <a:p>
-            <a:pPr indent="0" marL="0">
+            <a:pPr marL="0" indent="0">
               <a:lnSpc>
                 <a:spcPct val="125000"/>
               </a:lnSpc>
@@ -13751,7 +13578,7 @@
             <a:endParaRPr lang="en-US" sz="1250" dirty="0"/>
           </a:p>
           <a:p>
-            <a:pPr indent="0" marL="0">
+            <a:pPr marL="0" indent="0">
               <a:lnSpc>
                 <a:spcPct val="125000"/>
               </a:lnSpc>
@@ -13771,7 +13598,7 @@
             <a:endParaRPr lang="en-US" sz="1250" dirty="0"/>
           </a:p>
           <a:p>
-            <a:pPr indent="0" marL="0">
+            <a:pPr marL="0" indent="0">
               <a:lnSpc>
                 <a:spcPct val="125000"/>
               </a:lnSpc>
@@ -13791,7 +13618,7 @@
             <a:endParaRPr lang="en-US" sz="1250" dirty="0"/>
           </a:p>
           <a:p>
-            <a:pPr indent="0" marL="0">
+            <a:pPr marL="0" indent="0">
               <a:lnSpc>
                 <a:spcPct val="125000"/>
               </a:lnSpc>
@@ -13800,7 +13627,7 @@
             <a:endParaRPr lang="en-US" sz="1250" dirty="0"/>
           </a:p>
           <a:p>
-            <a:pPr indent="0" marL="0">
+            <a:pPr marL="0" indent="0">
               <a:lnSpc>
                 <a:spcPct val="125000"/>
               </a:lnSpc>
@@ -13847,7 +13674,7 @@
             <a:prstDash val="solid"/>
           </a:ln>
           <a:effectLst>
-            <a:outerShdw sx="100000" sy="100000" kx="0" ky="0" algn="bl" rotWithShape="0" blurRad="101600" dist="38100" dir="5400000">
+            <a:outerShdw blurRad="101600" dist="38100" dir="5400000" algn="bl" rotWithShape="0">
               <a:srgbClr val="000000">
                 <a:alpha val="12000"/>
               </a:srgbClr>
@@ -13856,19 +13683,22 @@
         </p:spPr>
         <p:txBody>
           <a:bodyPr/>
-          <a:p/>
+          <a:lstStyle/>
+          <a:p>
+            <a:endParaRPr/>
+          </a:p>
         </p:txBody>
       </p:sp>
       <p:pic>
         <p:nvPicPr>
-          <p:cNvPr id="8" name="Image 0" descr="D:/GitHub/mern-web-book/docs/assets/img/lecture-10/bootstrap-components.png">    </p:cNvPr>
+          <p:cNvPr id="8" name="Image 0" descr="D:/GitHub/mern-web-book/docs/assets/img/lecture-10/bootstrap-components.png"/>
           <p:cNvPicPr>
             <a:picLocks noChangeAspect="1"/>
           </p:cNvPicPr>
           <p:nvPr/>
         </p:nvPicPr>
         <p:blipFill>
-          <a:blip r:embed="rId1"/>
+          <a:blip r:embed="rId3"/>
           <a:stretch>
             <a:fillRect/>
           </a:stretch>
@@ -13900,7 +13730,7 @@
           <a:noFill/>
         </p:spPr>
         <p:txBody>
-          <a:bodyPr wrap="none" lIns="0" rIns="0" tIns="0" bIns="0">
+          <a:bodyPr wrap="none" lIns="0" tIns="0" rIns="0" bIns="0">
             <a:spAutoFit/>
           </a:bodyPr>
           <a:lstStyle/>
@@ -13942,6 +13772,7 @@
         <a:solidFill>
           <a:srgbClr val="FFFFFF"/>
         </a:solidFill>
+        <a:effectLst/>
       </p:bgPr>
     </p:bg>
     <p:spTree>
@@ -13979,11 +13810,11 @@
           <a:bodyPr wrap="square" lIns="0" tIns="0" rIns="0" bIns="0" rtlCol="0" anchor="ctr"/>
           <a:lstStyle/>
           <a:p>
-            <a:pPr algn="l" indent="0" marL="0">
+            <a:pPr marL="0" indent="0" algn="l">
               <a:buNone/>
             </a:pPr>
             <a:r>
-              <a:rPr lang="en-US" sz="1300" b="1" spc="300" kern="0" dirty="0">
+              <a:rPr lang="en-US" sz="1300" b="1" kern="0" spc="300" dirty="0">
                 <a:solidFill>
                   <a:srgbClr val="FF8A3D"/>
                 </a:solidFill>
@@ -14018,7 +13849,7 @@
           <a:bodyPr wrap="square" lIns="0" tIns="0" rIns="0" bIns="0" rtlCol="0" anchor="ctr"/>
           <a:lstStyle/>
           <a:p>
-            <a:pPr algn="l" indent="0" marL="0">
+            <a:pPr marL="0" indent="0" algn="l">
               <a:buNone/>
             </a:pPr>
             <a:r>
@@ -14059,7 +13890,10 @@
         </p:spPr>
         <p:txBody>
           <a:bodyPr/>
-          <a:p/>
+          <a:lstStyle/>
+          <a:p>
+            <a:endParaRPr/>
+          </a:p>
         </p:txBody>
       </p:sp>
       <p:sp>
@@ -14083,7 +13917,7 @@
           <a:bodyPr wrap="square" lIns="0" tIns="0" rIns="0" bIns="0" rtlCol="0" anchor="t"/>
           <a:lstStyle/>
           <a:p>
-            <a:pPr indent="0" marL="0">
+            <a:pPr marL="0" indent="0">
               <a:lnSpc>
                 <a:spcPct val="125000"/>
               </a:lnSpc>
@@ -14103,7 +13937,7 @@
             <a:endParaRPr lang="en-US" sz="1250" dirty="0"/>
           </a:p>
           <a:p>
-            <a:pPr indent="0" marL="0">
+            <a:pPr marL="0" indent="0">
               <a:lnSpc>
                 <a:spcPct val="125000"/>
               </a:lnSpc>
@@ -14123,7 +13957,7 @@
             <a:endParaRPr lang="en-US" sz="1250" dirty="0"/>
           </a:p>
           <a:p>
-            <a:pPr indent="0" marL="0">
+            <a:pPr marL="0" indent="0">
               <a:lnSpc>
                 <a:spcPct val="125000"/>
               </a:lnSpc>
@@ -14170,7 +14004,7 @@
             <a:prstDash val="solid"/>
           </a:ln>
           <a:effectLst>
-            <a:outerShdw sx="100000" sy="100000" kx="0" ky="0" algn="bl" rotWithShape="0" blurRad="101600" dist="38100" dir="5400000">
+            <a:outerShdw blurRad="101600" dist="38100" dir="5400000" algn="bl" rotWithShape="0">
               <a:srgbClr val="000000">
                 <a:alpha val="12000"/>
               </a:srgbClr>
@@ -14179,19 +14013,22 @@
         </p:spPr>
         <p:txBody>
           <a:bodyPr/>
-          <a:p/>
+          <a:lstStyle/>
+          <a:p>
+            <a:endParaRPr/>
+          </a:p>
         </p:txBody>
       </p:sp>
       <p:pic>
         <p:nvPicPr>
-          <p:cNvPr id="7" name="Image 0" descr="D:/GitHub/mern-web-book/docs/assets/img/lecture-10/bootstrap-utilities.png">    </p:cNvPr>
+          <p:cNvPr id="7" name="Image 0" descr="D:/GitHub/mern-web-book/docs/assets/img/lecture-10/bootstrap-utilities.png"/>
           <p:cNvPicPr>
             <a:picLocks noChangeAspect="1"/>
           </p:cNvPicPr>
           <p:nvPr/>
         </p:nvPicPr>
         <p:blipFill>
-          <a:blip r:embed="rId1"/>
+          <a:blip r:embed="rId3"/>
           <a:stretch>
             <a:fillRect/>
           </a:stretch>
@@ -14223,7 +14060,7 @@
           <a:noFill/>
         </p:spPr>
         <p:txBody>
-          <a:bodyPr wrap="none" lIns="0" rIns="0" tIns="0" bIns="0">
+          <a:bodyPr wrap="none" lIns="0" tIns="0" rIns="0" bIns="0">
             <a:spAutoFit/>
           </a:bodyPr>
           <a:lstStyle/>
@@ -14258,7 +14095,7 @@
 </file>
 
 <file path=ppt/slides/slide26.xml><?xml version="1.0" encoding="utf-8"?>
-<p:sld xmlns:a="http://schemas.openxmlformats.org/drawingml/2006/main" xmlns:p="http://schemas.openxmlformats.org/presentationml/2006/main" xmlns:r="http://schemas.openxmlformats.org/officeDocument/2006/relationships">
+<p:sld xmlns:a="http://schemas.openxmlformats.org/drawingml/2006/main" xmlns:r="http://schemas.openxmlformats.org/officeDocument/2006/relationships" xmlns:p="http://schemas.openxmlformats.org/presentationml/2006/main">
   <p:cSld>
     <p:spTree>
       <p:nvGrpSpPr>
@@ -14266,7 +14103,14 @@
         <p:cNvGrpSpPr/>
         <p:nvPr/>
       </p:nvGrpSpPr>
-      <p:grpSpPr/>
+      <p:grpSpPr>
+        <a:xfrm>
+          <a:off x="0" y="0"/>
+          <a:ext cx="0" cy="0"/>
+          <a:chOff x="0" y="0"/>
+          <a:chExt cx="0" cy="0"/>
+        </a:xfrm>
+      </p:grpSpPr>
       <p:sp>
         <p:nvSpPr>
           <p:cNvPr id="2" name="Text 0"/>
@@ -14480,6 +14324,7 @@
           <a:lstStyle/>
           <a:p>
             <a:pPr algn="ctr"/>
+            <a:endParaRPr/>
           </a:p>
         </p:txBody>
       </p:sp>
@@ -14527,15 +14372,12 @@
             </a:r>
           </a:p>
           <a:p>
-            <a:r>
-              <a:rPr sz="1200">
-                <a:solidFill>
-                  <a:srgbClr val="C9D3F5"/>
-                </a:solidFill>
-                <a:latin typeface="Courier New"/>
-              </a:rPr>
-              <a:t/>
-            </a:r>
+            <a:endParaRPr sz="1200">
+              <a:solidFill>
+                <a:srgbClr val="C9D3F5"/>
+              </a:solidFill>
+              <a:latin typeface="Courier New"/>
+            </a:endParaRPr>
           </a:p>
           <a:p>
             <a:r>
@@ -14589,7 +14431,7 @@
           <a:noFill/>
         </p:spPr>
         <p:txBody>
-          <a:bodyPr wrap="none" lIns="0" rIns="0" tIns="0" bIns="0">
+          <a:bodyPr wrap="none" lIns="0" tIns="0" rIns="0" bIns="0">
             <a:spAutoFit/>
           </a:bodyPr>
           <a:lstStyle/>
@@ -14631,6 +14473,7 @@
         <a:solidFill>
           <a:srgbClr val="FFFFFF"/>
         </a:solidFill>
+        <a:effectLst/>
       </p:bgPr>
     </p:bg>
     <p:spTree>
@@ -14668,11 +14511,11 @@
           <a:bodyPr wrap="square" lIns="0" tIns="0" rIns="0" bIns="0" rtlCol="0" anchor="ctr"/>
           <a:lstStyle/>
           <a:p>
-            <a:pPr algn="l" indent="0" marL="0">
+            <a:pPr marL="0" indent="0" algn="l">
               <a:buNone/>
             </a:pPr>
             <a:r>
-              <a:rPr lang="en-US" sz="1300" b="1" spc="300" kern="0" dirty="0">
+              <a:rPr lang="en-US" sz="1300" b="1" kern="0" spc="300" dirty="0">
                 <a:solidFill>
                   <a:srgbClr val="FF8A3D"/>
                 </a:solidFill>
@@ -14707,7 +14550,7 @@
           <a:bodyPr wrap="square" lIns="0" tIns="0" rIns="0" bIns="0" rtlCol="0" anchor="ctr"/>
           <a:lstStyle/>
           <a:p>
-            <a:pPr algn="l" indent="0" marL="0">
+            <a:pPr marL="0" indent="0" algn="l">
               <a:buNone/>
             </a:pPr>
             <a:r>
@@ -14748,7 +14591,10 @@
         </p:spPr>
         <p:txBody>
           <a:bodyPr/>
-          <a:p/>
+          <a:lstStyle/>
+          <a:p>
+            <a:endParaRPr/>
+          </a:p>
         </p:txBody>
       </p:sp>
       <p:sp>
@@ -14772,7 +14618,7 @@
           <a:bodyPr wrap="square" lIns="0" tIns="0" rIns="0" bIns="0" rtlCol="0" anchor="t"/>
           <a:lstStyle/>
           <a:p>
-            <a:pPr indent="0" marL="0">
+            <a:pPr marL="0" indent="0">
               <a:lnSpc>
                 <a:spcPct val="125000"/>
               </a:lnSpc>
@@ -14792,7 +14638,7 @@
             <a:endParaRPr lang="en-US" sz="1400" dirty="0"/>
           </a:p>
           <a:p>
-            <a:pPr indent="0" marL="0">
+            <a:pPr marL="0" indent="0">
               <a:lnSpc>
                 <a:spcPct val="125000"/>
               </a:lnSpc>
@@ -14812,7 +14658,7 @@
             <a:endParaRPr lang="en-US" sz="1400" dirty="0"/>
           </a:p>
           <a:p>
-            <a:pPr indent="0" marL="0">
+            <a:pPr marL="0" indent="0">
               <a:lnSpc>
                 <a:spcPct val="125000"/>
               </a:lnSpc>
@@ -14832,7 +14678,7 @@
             <a:endParaRPr lang="en-US" sz="1400" dirty="0"/>
           </a:p>
           <a:p>
-            <a:pPr indent="0" marL="0">
+            <a:pPr marL="0" indent="0">
               <a:lnSpc>
                 <a:spcPct val="125000"/>
               </a:lnSpc>
@@ -14870,7 +14716,7 @@
           <a:noFill/>
         </p:spPr>
         <p:txBody>
-          <a:bodyPr wrap="none" lIns="0" rIns="0" tIns="0" bIns="0">
+          <a:bodyPr wrap="none" lIns="0" tIns="0" rIns="0" bIns="0">
             <a:spAutoFit/>
           </a:bodyPr>
           <a:lstStyle/>
@@ -14912,6 +14758,7 @@
         <a:solidFill>
           <a:srgbClr val="FFFFFF"/>
         </a:solidFill>
+        <a:effectLst/>
       </p:bgPr>
     </p:bg>
     <p:spTree>
@@ -14949,11 +14796,11 @@
           <a:bodyPr wrap="square" lIns="0" tIns="0" rIns="0" bIns="0" rtlCol="0" anchor="ctr"/>
           <a:lstStyle/>
           <a:p>
-            <a:pPr algn="l" indent="0" marL="0">
+            <a:pPr marL="0" indent="0" algn="l">
               <a:buNone/>
             </a:pPr>
             <a:r>
-              <a:rPr lang="en-US" sz="1300" b="1" spc="300" kern="0" dirty="0">
+              <a:rPr lang="en-US" sz="1300" b="1" kern="0" spc="300" dirty="0">
                 <a:solidFill>
                   <a:srgbClr val="FF8A3D"/>
                 </a:solidFill>
@@ -14988,7 +14835,7 @@
           <a:bodyPr wrap="square" lIns="0" tIns="0" rIns="0" bIns="0" rtlCol="0" anchor="ctr"/>
           <a:lstStyle/>
           <a:p>
-            <a:pPr algn="l" indent="0" marL="0">
+            <a:pPr marL="0" indent="0" algn="l">
               <a:buNone/>
             </a:pPr>
             <a:r>
@@ -15032,7 +14879,7 @@
             <a:prstDash val="solid"/>
           </a:ln>
           <a:effectLst>
-            <a:outerShdw sx="100000" sy="100000" kx="0" ky="0" algn="bl" rotWithShape="0" blurRad="101600" dist="38100" dir="5400000">
+            <a:outerShdw blurRad="101600" dist="38100" dir="5400000" algn="bl" rotWithShape="0">
               <a:srgbClr val="000000">
                 <a:alpha val="12000"/>
               </a:srgbClr>
@@ -15041,19 +14888,22 @@
         </p:spPr>
         <p:txBody>
           <a:bodyPr/>
-          <a:p/>
+          <a:lstStyle/>
+          <a:p>
+            <a:endParaRPr/>
+          </a:p>
         </p:txBody>
       </p:sp>
       <p:pic>
         <p:nvPicPr>
-          <p:cNvPr id="5" name="Image 0" descr="D:/GitHub/mern-web-book/docs/assets/img/lecture-10/tailwind-button.png">    </p:cNvPr>
+          <p:cNvPr id="5" name="Image 0" descr="D:/GitHub/mern-web-book/docs/assets/img/lecture-10/tailwind-button.png"/>
           <p:cNvPicPr>
             <a:picLocks noChangeAspect="1"/>
           </p:cNvPicPr>
           <p:nvPr/>
         </p:nvPicPr>
         <p:blipFill>
-          <a:blip r:embed="rId1"/>
+          <a:blip r:embed="rId3"/>
           <a:stretch>
             <a:fillRect/>
           </a:stretch>
@@ -15085,7 +14935,7 @@
           <a:noFill/>
         </p:spPr>
         <p:txBody>
-          <a:bodyPr wrap="none" lIns="0" rIns="0" tIns="0" bIns="0">
+          <a:bodyPr wrap="none" lIns="0" tIns="0" rIns="0" bIns="0">
             <a:spAutoFit/>
           </a:bodyPr>
           <a:lstStyle/>
@@ -15127,6 +14977,7 @@
         <a:solidFill>
           <a:srgbClr val="FFFFFF"/>
         </a:solidFill>
+        <a:effectLst/>
       </p:bgPr>
     </p:bg>
     <p:spTree>
@@ -15164,11 +15015,11 @@
           <a:bodyPr wrap="square" lIns="0" tIns="0" rIns="0" bIns="0" rtlCol="0" anchor="ctr"/>
           <a:lstStyle/>
           <a:p>
-            <a:pPr algn="l" indent="0" marL="0">
+            <a:pPr marL="0" indent="0" algn="l">
               <a:buNone/>
             </a:pPr>
             <a:r>
-              <a:rPr lang="en-US" sz="1300" b="1" spc="300" kern="0" dirty="0">
+              <a:rPr lang="en-US" sz="1300" b="1" kern="0" spc="300" dirty="0">
                 <a:solidFill>
                   <a:srgbClr val="FF8A3D"/>
                 </a:solidFill>
@@ -15203,7 +15054,7 @@
           <a:bodyPr wrap="square" lIns="0" tIns="0" rIns="0" bIns="0" rtlCol="0" anchor="ctr"/>
           <a:lstStyle/>
           <a:p>
-            <a:pPr algn="l" indent="0" marL="0">
+            <a:pPr marL="0" indent="0" algn="l">
               <a:buNone/>
             </a:pPr>
             <a:r>
@@ -15244,7 +15095,10 @@
         </p:spPr>
         <p:txBody>
           <a:bodyPr/>
-          <a:p/>
+          <a:lstStyle/>
+          <a:p>
+            <a:endParaRPr/>
+          </a:p>
         </p:txBody>
       </p:sp>
       <p:sp>
@@ -15268,7 +15122,7 @@
           <a:bodyPr wrap="square" lIns="0" tIns="0" rIns="0" bIns="0" rtlCol="0" anchor="t"/>
           <a:lstStyle/>
           <a:p>
-            <a:pPr indent="0" marL="0">
+            <a:pPr marL="0" indent="0">
               <a:lnSpc>
                 <a:spcPct val="125000"/>
               </a:lnSpc>
@@ -15288,7 +15142,7 @@
             <a:endParaRPr lang="en-US" sz="1400" dirty="0"/>
           </a:p>
           <a:p>
-            <a:pPr indent="0" marL="0">
+            <a:pPr marL="0" indent="0">
               <a:lnSpc>
                 <a:spcPct val="125000"/>
               </a:lnSpc>
@@ -15308,7 +15162,7 @@
             <a:endParaRPr lang="en-US" sz="1400" dirty="0"/>
           </a:p>
           <a:p>
-            <a:pPr indent="0" marL="0">
+            <a:pPr marL="0" indent="0">
               <a:lnSpc>
                 <a:spcPct val="125000"/>
               </a:lnSpc>
@@ -15346,7 +15200,7 @@
           <a:noFill/>
         </p:spPr>
         <p:txBody>
-          <a:bodyPr wrap="none" lIns="0" rIns="0" tIns="0" bIns="0">
+          <a:bodyPr wrap="none" lIns="0" tIns="0" rIns="0" bIns="0">
             <a:spAutoFit/>
           </a:bodyPr>
           <a:lstStyle/>
@@ -15388,6 +15242,7 @@
         <a:solidFill>
           <a:srgbClr val="FFFFFF"/>
         </a:solidFill>
+        <a:effectLst/>
       </p:bgPr>
     </p:bg>
     <p:spTree>
@@ -15425,11 +15280,11 @@
           <a:bodyPr wrap="square" lIns="0" tIns="0" rIns="0" bIns="0" rtlCol="0" anchor="ctr"/>
           <a:lstStyle/>
           <a:p>
-            <a:pPr algn="l" indent="0" marL="0">
+            <a:pPr marL="0" indent="0" algn="l">
               <a:buNone/>
             </a:pPr>
             <a:r>
-              <a:rPr lang="en-US" sz="1300" b="1" spc="300" kern="0" dirty="0">
+              <a:rPr lang="en-US" sz="1300" b="1" kern="0" spc="300" dirty="0">
                 <a:solidFill>
                   <a:srgbClr val="FF8A3D"/>
                 </a:solidFill>
@@ -15464,7 +15319,7 @@
           <a:bodyPr wrap="square" lIns="0" tIns="0" rIns="0" bIns="0" rtlCol="0" anchor="ctr"/>
           <a:lstStyle/>
           <a:p>
-            <a:pPr algn="l" indent="0" marL="0">
+            <a:pPr marL="0" indent="0" algn="l">
               <a:buNone/>
             </a:pPr>
             <a:r>
@@ -15503,7 +15358,10 @@
         </p:spPr>
         <p:txBody>
           <a:bodyPr/>
-          <a:p/>
+          <a:lstStyle/>
+          <a:p>
+            <a:endParaRPr/>
+          </a:p>
         </p:txBody>
       </p:sp>
       <p:sp>
@@ -15527,7 +15385,7 @@
           <a:bodyPr wrap="square" lIns="0" tIns="0" rIns="0" bIns="0" rtlCol="0" anchor="ctr"/>
           <a:lstStyle/>
           <a:p>
-            <a:pPr algn="ctr" indent="0" marL="0">
+            <a:pPr marL="0" indent="0" algn="ctr">
               <a:buNone/>
             </a:pPr>
             <a:r>
@@ -15566,7 +15424,7 @@
           <a:bodyPr wrap="square" lIns="0" tIns="0" rIns="0" bIns="0" rtlCol="0" anchor="ctr"/>
           <a:lstStyle/>
           <a:p>
-            <a:pPr indent="0" marL="0">
+            <a:pPr marL="0" indent="0">
               <a:buNone/>
             </a:pPr>
             <a:r>
@@ -15605,7 +15463,10 @@
         </p:spPr>
         <p:txBody>
           <a:bodyPr/>
-          <a:p/>
+          <a:lstStyle/>
+          <a:p>
+            <a:endParaRPr/>
+          </a:p>
         </p:txBody>
       </p:sp>
       <p:sp>
@@ -15629,7 +15490,7 @@
           <a:bodyPr wrap="square" lIns="0" tIns="0" rIns="0" bIns="0" rtlCol="0" anchor="ctr"/>
           <a:lstStyle/>
           <a:p>
-            <a:pPr algn="ctr" indent="0" marL="0">
+            <a:pPr marL="0" indent="0" algn="ctr">
               <a:buNone/>
             </a:pPr>
             <a:r>
@@ -15668,7 +15529,7 @@
           <a:bodyPr wrap="square" lIns="0" tIns="0" rIns="0" bIns="0" rtlCol="0" anchor="ctr"/>
           <a:lstStyle/>
           <a:p>
-            <a:pPr indent="0" marL="0">
+            <a:pPr marL="0" indent="0">
               <a:buNone/>
             </a:pPr>
             <a:r>
@@ -15707,7 +15568,10 @@
         </p:spPr>
         <p:txBody>
           <a:bodyPr/>
-          <a:p/>
+          <a:lstStyle/>
+          <a:p>
+            <a:endParaRPr/>
+          </a:p>
         </p:txBody>
       </p:sp>
       <p:sp>
@@ -15731,7 +15595,7 @@
           <a:bodyPr wrap="square" lIns="0" tIns="0" rIns="0" bIns="0" rtlCol="0" anchor="ctr"/>
           <a:lstStyle/>
           <a:p>
-            <a:pPr algn="ctr" indent="0" marL="0">
+            <a:pPr marL="0" indent="0" algn="ctr">
               <a:buNone/>
             </a:pPr>
             <a:r>
@@ -15770,7 +15634,7 @@
           <a:bodyPr wrap="square" lIns="0" tIns="0" rIns="0" bIns="0" rtlCol="0" anchor="ctr"/>
           <a:lstStyle/>
           <a:p>
-            <a:pPr indent="0" marL="0">
+            <a:pPr marL="0" indent="0">
               <a:buNone/>
             </a:pPr>
             <a:r>
@@ -15805,7 +15669,7 @@
           <a:noFill/>
         </p:spPr>
         <p:txBody>
-          <a:bodyPr wrap="none" lIns="0" rIns="0" tIns="0" bIns="0">
+          <a:bodyPr wrap="none" lIns="0" tIns="0" rIns="0" bIns="0">
             <a:spAutoFit/>
           </a:bodyPr>
           <a:lstStyle/>
@@ -15847,6 +15711,7 @@
         <a:solidFill>
           <a:srgbClr val="FFFFFF"/>
         </a:solidFill>
+        <a:effectLst/>
       </p:bgPr>
     </p:bg>
     <p:spTree>
@@ -15884,11 +15749,11 @@
           <a:bodyPr wrap="square" lIns="0" tIns="0" rIns="0" bIns="0" rtlCol="0" anchor="ctr"/>
           <a:lstStyle/>
           <a:p>
-            <a:pPr algn="l" indent="0" marL="0">
+            <a:pPr marL="0" indent="0" algn="l">
               <a:buNone/>
             </a:pPr>
             <a:r>
-              <a:rPr lang="en-US" sz="1300" b="1" spc="300" kern="0" dirty="0">
+              <a:rPr lang="en-US" sz="1300" b="1" kern="0" spc="300" dirty="0">
                 <a:solidFill>
                   <a:srgbClr val="FF8A3D"/>
                 </a:solidFill>
@@ -15923,7 +15788,7 @@
           <a:bodyPr wrap="square" lIns="0" tIns="0" rIns="0" bIns="0" rtlCol="0" anchor="ctr"/>
           <a:lstStyle/>
           <a:p>
-            <a:pPr algn="l" indent="0" marL="0">
+            <a:pPr marL="0" indent="0" algn="l">
               <a:buNone/>
             </a:pPr>
             <a:r>
@@ -15962,11 +15827,11 @@
           <a:bodyPr wrap="square" lIns="0" tIns="0" rIns="0" bIns="0" rtlCol="0" anchor="ctr"/>
           <a:lstStyle/>
           <a:p>
-            <a:pPr algn="ctr" indent="0" marL="0">
+            <a:pPr marL="0" indent="0" algn="ctr">
               <a:buNone/>
             </a:pPr>
             <a:r>
-              <a:rPr lang="en-US" sz="1100" b="1" spc="150" kern="0" dirty="0">
+              <a:rPr lang="en-US" sz="1100" b="1" kern="0" spc="150" dirty="0">
                 <a:solidFill>
                   <a:srgbClr val="E67528"/>
                 </a:solidFill>
@@ -16006,7 +15871,7 @@
             <a:prstDash val="solid"/>
           </a:ln>
           <a:effectLst>
-            <a:outerShdw sx="100000" sy="100000" kx="0" ky="0" algn="bl" rotWithShape="0" blurRad="101600" dist="38100" dir="5400000">
+            <a:outerShdw blurRad="101600" dist="38100" dir="5400000" algn="bl" rotWithShape="0">
               <a:srgbClr val="000000">
                 <a:alpha val="12000"/>
               </a:srgbClr>
@@ -16015,19 +15880,22 @@
         </p:spPr>
         <p:txBody>
           <a:bodyPr/>
-          <a:p/>
+          <a:lstStyle/>
+          <a:p>
+            <a:endParaRPr/>
+          </a:p>
         </p:txBody>
       </p:sp>
       <p:pic>
         <p:nvPicPr>
-          <p:cNvPr id="6" name="Image 0" descr="D:/GitHub/mern-web-book/docs/assets/img/lecture-10/tailwind-flex-wide.png">    </p:cNvPr>
+          <p:cNvPr id="6" name="Image 0" descr="D:/GitHub/mern-web-book/docs/assets/img/lecture-10/tailwind-flex-wide.png"/>
           <p:cNvPicPr>
             <a:picLocks noChangeAspect="1"/>
           </p:cNvPicPr>
           <p:nvPr/>
         </p:nvPicPr>
         <p:blipFill>
-          <a:blip r:embed="rId1"/>
+          <a:blip r:embed="rId3"/>
           <a:stretch>
             <a:fillRect/>
           </a:stretch>
@@ -16063,11 +15931,11 @@
           <a:bodyPr wrap="square" lIns="0" tIns="0" rIns="0" bIns="0" rtlCol="0" anchor="ctr"/>
           <a:lstStyle/>
           <a:p>
-            <a:pPr algn="ctr" indent="0" marL="0">
+            <a:pPr marL="0" indent="0" algn="ctr">
               <a:buNone/>
             </a:pPr>
             <a:r>
-              <a:rPr lang="en-US" sz="1100" b="1" spc="150" kern="0" dirty="0">
+              <a:rPr lang="en-US" sz="1100" b="1" kern="0" spc="150" dirty="0">
                 <a:solidFill>
                   <a:srgbClr val="E67528"/>
                 </a:solidFill>
@@ -16107,7 +15975,7 @@
             <a:prstDash val="solid"/>
           </a:ln>
           <a:effectLst>
-            <a:outerShdw sx="100000" sy="100000" kx="0" ky="0" algn="bl" rotWithShape="0" blurRad="101600" dist="38100" dir="5400000">
+            <a:outerShdw blurRad="101600" dist="38100" dir="5400000" algn="bl" rotWithShape="0">
               <a:srgbClr val="000000">
                 <a:alpha val="12000"/>
               </a:srgbClr>
@@ -16116,19 +15984,22 @@
         </p:spPr>
         <p:txBody>
           <a:bodyPr/>
-          <a:p/>
+          <a:lstStyle/>
+          <a:p>
+            <a:endParaRPr/>
+          </a:p>
         </p:txBody>
       </p:sp>
       <p:pic>
         <p:nvPicPr>
-          <p:cNvPr id="9" name="Image 1" descr="D:/GitHub/mern-web-book/docs/assets/img/lecture-10/tailwind-flex-narrow.png">    </p:cNvPr>
+          <p:cNvPr id="9" name="Image 1" descr="D:/GitHub/mern-web-book/docs/assets/img/lecture-10/tailwind-flex-narrow.png"/>
           <p:cNvPicPr>
             <a:picLocks noChangeAspect="1"/>
           </p:cNvPicPr>
           <p:nvPr/>
         </p:nvPicPr>
         <p:blipFill>
-          <a:blip r:embed="rId2"/>
+          <a:blip r:embed="rId4"/>
           <a:stretch>
             <a:fillRect/>
           </a:stretch>
@@ -16160,7 +16031,7 @@
           <a:noFill/>
         </p:spPr>
         <p:txBody>
-          <a:bodyPr wrap="none" lIns="0" rIns="0" tIns="0" bIns="0">
+          <a:bodyPr wrap="none" lIns="0" tIns="0" rIns="0" bIns="0">
             <a:spAutoFit/>
           </a:bodyPr>
           <a:lstStyle/>
@@ -16202,6 +16073,7 @@
         <a:solidFill>
           <a:srgbClr val="FFFFFF"/>
         </a:solidFill>
+        <a:effectLst/>
       </p:bgPr>
     </p:bg>
     <p:spTree>
@@ -16239,11 +16111,11 @@
           <a:bodyPr wrap="square" lIns="0" tIns="0" rIns="0" bIns="0" rtlCol="0" anchor="ctr"/>
           <a:lstStyle/>
           <a:p>
-            <a:pPr algn="l" indent="0" marL="0">
+            <a:pPr marL="0" indent="0" algn="l">
               <a:buNone/>
             </a:pPr>
             <a:r>
-              <a:rPr lang="en-US" sz="1300" b="1" spc="300" kern="0" dirty="0">
+              <a:rPr lang="en-US" sz="1300" b="1" kern="0" spc="300" dirty="0">
                 <a:solidFill>
                   <a:srgbClr val="FF8A3D"/>
                 </a:solidFill>
@@ -16278,7 +16150,7 @@
           <a:bodyPr wrap="square" lIns="0" tIns="0" rIns="0" bIns="0" rtlCol="0" anchor="ctr"/>
           <a:lstStyle/>
           <a:p>
-            <a:pPr algn="l" indent="0" marL="0">
+            <a:pPr marL="0" indent="0" algn="l">
               <a:buNone/>
             </a:pPr>
             <a:r>
@@ -16319,7 +16191,10 @@
         </p:spPr>
         <p:txBody>
           <a:bodyPr/>
-          <a:p/>
+          <a:lstStyle/>
+          <a:p>
+            <a:endParaRPr/>
+          </a:p>
         </p:txBody>
       </p:sp>
       <p:sp>
@@ -16343,7 +16218,7 @@
           <a:bodyPr wrap="square" lIns="0" tIns="0" rIns="0" bIns="0" rtlCol="0" anchor="t"/>
           <a:lstStyle/>
           <a:p>
-            <a:pPr indent="0" marL="0">
+            <a:pPr marL="0" indent="0">
               <a:lnSpc>
                 <a:spcPct val="125000"/>
               </a:lnSpc>
@@ -16363,7 +16238,7 @@
             <a:endParaRPr lang="en-US" sz="1400" dirty="0"/>
           </a:p>
           <a:p>
-            <a:pPr indent="0" marL="0">
+            <a:pPr marL="0" indent="0">
               <a:lnSpc>
                 <a:spcPct val="125000"/>
               </a:lnSpc>
@@ -16383,7 +16258,7 @@
             <a:endParaRPr lang="en-US" sz="1400" dirty="0"/>
           </a:p>
           <a:p>
-            <a:pPr indent="0" marL="0">
+            <a:pPr marL="0" indent="0">
               <a:lnSpc>
                 <a:spcPct val="125000"/>
               </a:lnSpc>
@@ -16421,7 +16296,7 @@
           <a:noFill/>
         </p:spPr>
         <p:txBody>
-          <a:bodyPr wrap="none" lIns="0" rIns="0" tIns="0" bIns="0">
+          <a:bodyPr wrap="none" lIns="0" tIns="0" rIns="0" bIns="0">
             <a:spAutoFit/>
           </a:bodyPr>
           <a:lstStyle/>
@@ -16463,6 +16338,7 @@
         <a:solidFill>
           <a:srgbClr val="FFFFFF"/>
         </a:solidFill>
+        <a:effectLst/>
       </p:bgPr>
     </p:bg>
     <p:spTree>
@@ -16500,11 +16376,11 @@
           <a:bodyPr wrap="square" lIns="0" tIns="0" rIns="0" bIns="0" rtlCol="0" anchor="ctr"/>
           <a:lstStyle/>
           <a:p>
-            <a:pPr algn="l" indent="0" marL="0">
+            <a:pPr marL="0" indent="0" algn="l">
               <a:buNone/>
             </a:pPr>
             <a:r>
-              <a:rPr lang="en-US" sz="1300" b="1" spc="300" kern="0" dirty="0">
+              <a:rPr lang="en-US" sz="1300" b="1" kern="0" spc="300" dirty="0">
                 <a:solidFill>
                   <a:srgbClr val="FF8A3D"/>
                 </a:solidFill>
@@ -16539,7 +16415,7 @@
           <a:bodyPr wrap="square" lIns="0" tIns="0" rIns="0" bIns="0" rtlCol="0" anchor="ctr"/>
           <a:lstStyle/>
           <a:p>
-            <a:pPr algn="l" indent="0" marL="0">
+            <a:pPr marL="0" indent="0" algn="l">
               <a:buNone/>
             </a:pPr>
             <a:r>
@@ -16578,11 +16454,11 @@
           <a:bodyPr wrap="square" lIns="0" tIns="0" rIns="0" bIns="0" rtlCol="0" anchor="ctr"/>
           <a:lstStyle/>
           <a:p>
-            <a:pPr algn="ctr" indent="0" marL="0">
+            <a:pPr marL="0" indent="0" algn="ctr">
               <a:buNone/>
             </a:pPr>
             <a:r>
-              <a:rPr lang="en-US" sz="1100" b="1" spc="150" kern="0" dirty="0">
+              <a:rPr lang="en-US" sz="1100" b="1" kern="0" spc="150" dirty="0">
                 <a:solidFill>
                   <a:srgbClr val="E67528"/>
                 </a:solidFill>
@@ -16622,7 +16498,7 @@
             <a:prstDash val="solid"/>
           </a:ln>
           <a:effectLst>
-            <a:outerShdw sx="100000" sy="100000" kx="0" ky="0" algn="bl" rotWithShape="0" blurRad="101600" dist="38100" dir="5400000">
+            <a:outerShdw blurRad="101600" dist="38100" dir="5400000" algn="bl" rotWithShape="0">
               <a:srgbClr val="000000">
                 <a:alpha val="12000"/>
               </a:srgbClr>
@@ -16631,19 +16507,22 @@
         </p:spPr>
         <p:txBody>
           <a:bodyPr/>
-          <a:p/>
+          <a:lstStyle/>
+          <a:p>
+            <a:endParaRPr/>
+          </a:p>
         </p:txBody>
       </p:sp>
       <p:pic>
         <p:nvPicPr>
-          <p:cNvPr id="6" name="Image 0" descr="D:/GitHub/mern-web-book/docs/assets/img/lecture-10/tailwind-width-wide.png">    </p:cNvPr>
+          <p:cNvPr id="6" name="Image 0" descr="D:/GitHub/mern-web-book/docs/assets/img/lecture-10/tailwind-width-wide.png"/>
           <p:cNvPicPr>
             <a:picLocks noChangeAspect="1"/>
           </p:cNvPicPr>
           <p:nvPr/>
         </p:nvPicPr>
         <p:blipFill>
-          <a:blip r:embed="rId1"/>
+          <a:blip r:embed="rId3"/>
           <a:stretch>
             <a:fillRect/>
           </a:stretch>
@@ -16679,11 +16558,11 @@
           <a:bodyPr wrap="square" lIns="0" tIns="0" rIns="0" bIns="0" rtlCol="0" anchor="ctr"/>
           <a:lstStyle/>
           <a:p>
-            <a:pPr algn="ctr" indent="0" marL="0">
+            <a:pPr marL="0" indent="0" algn="ctr">
               <a:buNone/>
             </a:pPr>
             <a:r>
-              <a:rPr lang="en-US" sz="1100" b="1" spc="150" kern="0" dirty="0">
+              <a:rPr lang="en-US" sz="1100" b="1" kern="0" spc="150" dirty="0">
                 <a:solidFill>
                   <a:srgbClr val="E67528"/>
                 </a:solidFill>
@@ -16723,7 +16602,7 @@
             <a:prstDash val="solid"/>
           </a:ln>
           <a:effectLst>
-            <a:outerShdw sx="100000" sy="100000" kx="0" ky="0" algn="bl" rotWithShape="0" blurRad="101600" dist="38100" dir="5400000">
+            <a:outerShdw blurRad="101600" dist="38100" dir="5400000" algn="bl" rotWithShape="0">
               <a:srgbClr val="000000">
                 <a:alpha val="12000"/>
               </a:srgbClr>
@@ -16732,19 +16611,22 @@
         </p:spPr>
         <p:txBody>
           <a:bodyPr/>
-          <a:p/>
+          <a:lstStyle/>
+          <a:p>
+            <a:endParaRPr/>
+          </a:p>
         </p:txBody>
       </p:sp>
       <p:pic>
         <p:nvPicPr>
-          <p:cNvPr id="9" name="Image 1" descr="D:/GitHub/mern-web-book/docs/assets/img/lecture-10/tailwind-width-narrow.png">    </p:cNvPr>
+          <p:cNvPr id="9" name="Image 1" descr="D:/GitHub/mern-web-book/docs/assets/img/lecture-10/tailwind-width-narrow.png"/>
           <p:cNvPicPr>
             <a:picLocks noChangeAspect="1"/>
           </p:cNvPicPr>
           <p:nvPr/>
         </p:nvPicPr>
         <p:blipFill>
-          <a:blip r:embed="rId2"/>
+          <a:blip r:embed="rId4"/>
           <a:stretch>
             <a:fillRect/>
           </a:stretch>
@@ -16776,7 +16658,7 @@
           <a:noFill/>
         </p:spPr>
         <p:txBody>
-          <a:bodyPr wrap="none" lIns="0" rIns="0" tIns="0" bIns="0">
+          <a:bodyPr wrap="none" lIns="0" tIns="0" rIns="0" bIns="0">
             <a:spAutoFit/>
           </a:bodyPr>
           <a:lstStyle/>
@@ -16818,6 +16700,7 @@
         <a:solidFill>
           <a:srgbClr val="FFFFFF"/>
         </a:solidFill>
+        <a:effectLst/>
       </p:bgPr>
     </p:bg>
     <p:spTree>
@@ -16855,11 +16738,11 @@
           <a:bodyPr wrap="square" lIns="0" tIns="0" rIns="0" bIns="0" rtlCol="0" anchor="ctr"/>
           <a:lstStyle/>
           <a:p>
-            <a:pPr algn="l" indent="0" marL="0">
+            <a:pPr marL="0" indent="0" algn="l">
               <a:buNone/>
             </a:pPr>
             <a:r>
-              <a:rPr lang="en-US" sz="1300" b="1" spc="300" kern="0" dirty="0">
+              <a:rPr lang="en-US" sz="1300" b="1" kern="0" spc="300" dirty="0">
                 <a:solidFill>
                   <a:srgbClr val="FF8A3D"/>
                 </a:solidFill>
@@ -16894,7 +16777,7 @@
           <a:bodyPr wrap="square" lIns="0" tIns="0" rIns="0" bIns="0" rtlCol="0" anchor="ctr"/>
           <a:lstStyle/>
           <a:p>
-            <a:pPr algn="l" indent="0" marL="0">
+            <a:pPr marL="0" indent="0" algn="l">
               <a:buNone/>
             </a:pPr>
             <a:r>
@@ -16935,8 +16818,20 @@
             <a:tbl>
               <a:tblPr/>
               <a:tblGrid>
-                <a:gridCol w="2377440"/>
-                <a:gridCol w="8595360"/>
+                <a:gridCol w="2377440">
+                  <a:extLst>
+                    <a:ext uri="{9D8B030D-6E8A-4147-A177-3AD203B41FA5}">
+                      <a16:colId xmlns:a16="http://schemas.microsoft.com/office/drawing/2014/main" val="20000"/>
+                    </a:ext>
+                  </a:extLst>
+                </a:gridCol>
+                <a:gridCol w="8595360">
+                  <a:extLst>
+                    <a:ext uri="{9D8B030D-6E8A-4147-A177-3AD203B41FA5}">
+                      <a16:colId xmlns:a16="http://schemas.microsoft.com/office/drawing/2014/main" val="20001"/>
+                    </a:ext>
+                  </a:extLst>
+                </a:gridCol>
               </a:tblGrid>
               <a:tr h="566928">
                 <a:tc>
@@ -16944,7 +16839,7 @@
                     <a:bodyPr/>
                     <a:lstStyle/>
                     <a:p>
-                      <a:pPr algn="ctr" indent="0" marL="0">
+                      <a:pPr marL="0" indent="0" algn="ctr">
                         <a:buNone/>
                       </a:pPr>
                       <a:r>
@@ -16965,7 +16860,7 @@
                       </a:endParaRPr>
                     </a:p>
                   </a:txBody>
-                  <a:tcPr marL="91440" marR="91440" marT="45720" marB="45720" anchor="ctr">
+                  <a:tcPr anchor="ctr">
                     <a:lnL w="12700" cap="flat" cmpd="sng" algn="ctr">
                       <a:solidFill>
                         <a:srgbClr val="D8D8E6"/>
@@ -17012,7 +16907,7 @@
                     <a:bodyPr/>
                     <a:lstStyle/>
                     <a:p>
-                      <a:pPr algn="ctr" indent="0" marL="0">
+                      <a:pPr marL="0" indent="0" algn="ctr">
                         <a:buNone/>
                       </a:pPr>
                       <a:r>
@@ -17033,7 +16928,7 @@
                       </a:endParaRPr>
                     </a:p>
                   </a:txBody>
-                  <a:tcPr marL="91440" marR="91440" marT="45720" marB="45720" anchor="ctr">
+                  <a:tcPr anchor="ctr">
                     <a:lnL w="12700" cap="flat" cmpd="sng" algn="ctr">
                       <a:solidFill>
                         <a:srgbClr val="D8D8E6"/>
@@ -17075,6 +16970,11 @@
                     </a:solidFill>
                   </a:tcPr>
                 </a:tc>
+                <a:extLst>
+                  <a:ext uri="{0D108BD9-81ED-4DB2-BD59-A6C34878D82A}">
+                    <a16:rowId xmlns:a16="http://schemas.microsoft.com/office/drawing/2014/main" val="10000"/>
+                  </a:ext>
+                </a:extLst>
               </a:tr>
               <a:tr h="566928">
                 <a:tc>
@@ -17082,7 +16982,7 @@
                     <a:bodyPr/>
                     <a:lstStyle/>
                     <a:p>
-                      <a:pPr algn="l" indent="0" marL="0">
+                      <a:pPr marL="0" indent="0" algn="l">
                         <a:buNone/>
                       </a:pPr>
                       <a:r>
@@ -17103,7 +17003,7 @@
                       </a:endParaRPr>
                     </a:p>
                   </a:txBody>
-                  <a:tcPr marL="91440" marR="91440" marT="45720" marB="45720" anchor="ctr">
+                  <a:tcPr anchor="ctr">
                     <a:lnL w="12700" cap="flat" cmpd="sng" algn="ctr">
                       <a:solidFill>
                         <a:srgbClr val="D8D8E6"/>
@@ -17150,7 +17050,7 @@
                     <a:bodyPr/>
                     <a:lstStyle/>
                     <a:p>
-                      <a:pPr algn="ctr" indent="0" marL="0">
+                      <a:pPr marL="0" indent="0" algn="ctr">
                         <a:buNone/>
                       </a:pPr>
                       <a:r>
@@ -17171,7 +17071,7 @@
                       </a:endParaRPr>
                     </a:p>
                   </a:txBody>
-                  <a:tcPr marL="91440" marR="91440" marT="45720" marB="45720" anchor="ctr">
+                  <a:tcPr anchor="ctr">
                     <a:lnL w="12700" cap="flat" cmpd="sng" algn="ctr">
                       <a:solidFill>
                         <a:srgbClr val="D8D8E6"/>
@@ -17213,6 +17113,11 @@
                     </a:solidFill>
                   </a:tcPr>
                 </a:tc>
+                <a:extLst>
+                  <a:ext uri="{0D108BD9-81ED-4DB2-BD59-A6C34878D82A}">
+                    <a16:rowId xmlns:a16="http://schemas.microsoft.com/office/drawing/2014/main" val="10001"/>
+                  </a:ext>
+                </a:extLst>
               </a:tr>
               <a:tr h="566928">
                 <a:tc>
@@ -17220,7 +17125,7 @@
                     <a:bodyPr/>
                     <a:lstStyle/>
                     <a:p>
-                      <a:pPr algn="l" indent="0" marL="0">
+                      <a:pPr marL="0" indent="0" algn="l">
                         <a:buNone/>
                       </a:pPr>
                       <a:r>
@@ -17241,7 +17146,7 @@
                       </a:endParaRPr>
                     </a:p>
                   </a:txBody>
-                  <a:tcPr marL="91440" marR="91440" marT="45720" marB="45720" anchor="ctr">
+                  <a:tcPr anchor="ctr">
                     <a:lnL w="12700" cap="flat" cmpd="sng" algn="ctr">
                       <a:solidFill>
                         <a:srgbClr val="D8D8E6"/>
@@ -17288,7 +17193,7 @@
                     <a:bodyPr/>
                     <a:lstStyle/>
                     <a:p>
-                      <a:pPr algn="ctr" indent="0" marL="0">
+                      <a:pPr marL="0" indent="0" algn="ctr">
                         <a:buNone/>
                       </a:pPr>
                       <a:r>
@@ -17309,7 +17214,7 @@
                       </a:endParaRPr>
                     </a:p>
                   </a:txBody>
-                  <a:tcPr marL="91440" marR="91440" marT="45720" marB="45720" anchor="ctr">
+                  <a:tcPr anchor="ctr">
                     <a:lnL w="12700" cap="flat" cmpd="sng" algn="ctr">
                       <a:solidFill>
                         <a:srgbClr val="D8D8E6"/>
@@ -17351,6 +17256,11 @@
                     </a:solidFill>
                   </a:tcPr>
                 </a:tc>
+                <a:extLst>
+                  <a:ext uri="{0D108BD9-81ED-4DB2-BD59-A6C34878D82A}">
+                    <a16:rowId xmlns:a16="http://schemas.microsoft.com/office/drawing/2014/main" val="10002"/>
+                  </a:ext>
+                </a:extLst>
               </a:tr>
               <a:tr h="566928">
                 <a:tc>
@@ -17358,7 +17268,7 @@
                     <a:bodyPr/>
                     <a:lstStyle/>
                     <a:p>
-                      <a:pPr algn="l" indent="0" marL="0">
+                      <a:pPr marL="0" indent="0" algn="l">
                         <a:buNone/>
                       </a:pPr>
                       <a:r>
@@ -17379,7 +17289,7 @@
                       </a:endParaRPr>
                     </a:p>
                   </a:txBody>
-                  <a:tcPr marL="91440" marR="91440" marT="45720" marB="45720" anchor="ctr">
+                  <a:tcPr anchor="ctr">
                     <a:lnL w="12700" cap="flat" cmpd="sng" algn="ctr">
                       <a:solidFill>
                         <a:srgbClr val="D8D8E6"/>
@@ -17426,7 +17336,7 @@
                     <a:bodyPr/>
                     <a:lstStyle/>
                     <a:p>
-                      <a:pPr algn="ctr" indent="0" marL="0">
+                      <a:pPr marL="0" indent="0" algn="ctr">
                         <a:buNone/>
                       </a:pPr>
                       <a:r>
@@ -17447,7 +17357,7 @@
                       </a:endParaRPr>
                     </a:p>
                   </a:txBody>
-                  <a:tcPr marL="91440" marR="91440" marT="45720" marB="45720" anchor="ctr">
+                  <a:tcPr anchor="ctr">
                     <a:lnL w="12700" cap="flat" cmpd="sng" algn="ctr">
                       <a:solidFill>
                         <a:srgbClr val="D8D8E6"/>
@@ -17489,6 +17399,11 @@
                     </a:solidFill>
                   </a:tcPr>
                 </a:tc>
+                <a:extLst>
+                  <a:ext uri="{0D108BD9-81ED-4DB2-BD59-A6C34878D82A}">
+                    <a16:rowId xmlns:a16="http://schemas.microsoft.com/office/drawing/2014/main" val="10003"/>
+                  </a:ext>
+                </a:extLst>
               </a:tr>
               <a:tr h="566928">
                 <a:tc>
@@ -17496,7 +17411,7 @@
                     <a:bodyPr/>
                     <a:lstStyle/>
                     <a:p>
-                      <a:pPr algn="l" indent="0" marL="0">
+                      <a:pPr marL="0" indent="0" algn="l">
                         <a:buNone/>
                       </a:pPr>
                       <a:r>
@@ -17517,7 +17432,7 @@
                       </a:endParaRPr>
                     </a:p>
                   </a:txBody>
-                  <a:tcPr marL="91440" marR="91440" marT="45720" marB="45720" anchor="ctr">
+                  <a:tcPr anchor="ctr">
                     <a:lnL w="12700" cap="flat" cmpd="sng" algn="ctr">
                       <a:solidFill>
                         <a:srgbClr val="D8D8E6"/>
@@ -17564,7 +17479,7 @@
                     <a:bodyPr/>
                     <a:lstStyle/>
                     <a:p>
-                      <a:pPr algn="ctr" indent="0" marL="0">
+                      <a:pPr marL="0" indent="0" algn="ctr">
                         <a:buNone/>
                       </a:pPr>
                       <a:r>
@@ -17585,7 +17500,7 @@
                       </a:endParaRPr>
                     </a:p>
                   </a:txBody>
-                  <a:tcPr marL="91440" marR="91440" marT="45720" marB="45720" anchor="ctr">
+                  <a:tcPr anchor="ctr">
                     <a:lnL w="12700" cap="flat" cmpd="sng" algn="ctr">
                       <a:solidFill>
                         <a:srgbClr val="D8D8E6"/>
@@ -17627,6 +17542,11 @@
                     </a:solidFill>
                   </a:tcPr>
                 </a:tc>
+                <a:extLst>
+                  <a:ext uri="{0D108BD9-81ED-4DB2-BD59-A6C34878D82A}">
+                    <a16:rowId xmlns:a16="http://schemas.microsoft.com/office/drawing/2014/main" val="10004"/>
+                  </a:ext>
+                </a:extLst>
               </a:tr>
               <a:tr h="566928">
                 <a:tc>
@@ -17634,7 +17554,7 @@
                     <a:bodyPr/>
                     <a:lstStyle/>
                     <a:p>
-                      <a:pPr algn="l" indent="0" marL="0">
+                      <a:pPr marL="0" indent="0" algn="l">
                         <a:buNone/>
                       </a:pPr>
                       <a:r>
@@ -17655,7 +17575,7 @@
                       </a:endParaRPr>
                     </a:p>
                   </a:txBody>
-                  <a:tcPr marL="91440" marR="91440" marT="45720" marB="45720" anchor="ctr">
+                  <a:tcPr anchor="ctr">
                     <a:lnL w="12700" cap="flat" cmpd="sng" algn="ctr">
                       <a:solidFill>
                         <a:srgbClr val="D8D8E6"/>
@@ -17702,7 +17622,7 @@
                     <a:bodyPr/>
                     <a:lstStyle/>
                     <a:p>
-                      <a:pPr algn="ctr" indent="0" marL="0">
+                      <a:pPr marL="0" indent="0" algn="ctr">
                         <a:buNone/>
                       </a:pPr>
                       <a:r>
@@ -17723,7 +17643,7 @@
                       </a:endParaRPr>
                     </a:p>
                   </a:txBody>
-                  <a:tcPr marL="91440" marR="91440" marT="45720" marB="45720" anchor="ctr">
+                  <a:tcPr anchor="ctr">
                     <a:lnL w="12700" cap="flat" cmpd="sng" algn="ctr">
                       <a:solidFill>
                         <a:srgbClr val="D8D8E6"/>
@@ -17765,6 +17685,11 @@
                     </a:solidFill>
                   </a:tcPr>
                 </a:tc>
+                <a:extLst>
+                  <a:ext uri="{0D108BD9-81ED-4DB2-BD59-A6C34878D82A}">
+                    <a16:rowId xmlns:a16="http://schemas.microsoft.com/office/drawing/2014/main" val="10005"/>
+                  </a:ext>
+                </a:extLst>
               </a:tr>
               <a:tr h="566928">
                 <a:tc>
@@ -17772,7 +17697,7 @@
                     <a:bodyPr/>
                     <a:lstStyle/>
                     <a:p>
-                      <a:pPr algn="l" indent="0" marL="0">
+                      <a:pPr marL="0" indent="0" algn="l">
                         <a:buNone/>
                       </a:pPr>
                       <a:r>
@@ -17793,7 +17718,7 @@
                       </a:endParaRPr>
                     </a:p>
                   </a:txBody>
-                  <a:tcPr marL="91440" marR="91440" marT="45720" marB="45720" anchor="ctr">
+                  <a:tcPr anchor="ctr">
                     <a:lnL w="12700" cap="flat" cmpd="sng" algn="ctr">
                       <a:solidFill>
                         <a:srgbClr val="D8D8E6"/>
@@ -17840,7 +17765,7 @@
                     <a:bodyPr/>
                     <a:lstStyle/>
                     <a:p>
-                      <a:pPr algn="ctr" indent="0" marL="0">
+                      <a:pPr marL="0" indent="0" algn="ctr">
                         <a:buNone/>
                       </a:pPr>
                       <a:r>
@@ -17861,7 +17786,7 @@
                       </a:endParaRPr>
                     </a:p>
                   </a:txBody>
-                  <a:tcPr marL="91440" marR="91440" marT="45720" marB="45720" anchor="ctr">
+                  <a:tcPr anchor="ctr">
                     <a:lnL w="12700" cap="flat" cmpd="sng" algn="ctr">
                       <a:solidFill>
                         <a:srgbClr val="D8D8E6"/>
@@ -17903,6 +17828,11 @@
                     </a:solidFill>
                   </a:tcPr>
                 </a:tc>
+                <a:extLst>
+                  <a:ext uri="{0D108BD9-81ED-4DB2-BD59-A6C34878D82A}">
+                    <a16:rowId xmlns:a16="http://schemas.microsoft.com/office/drawing/2014/main" val="10006"/>
+                  </a:ext>
+                </a:extLst>
               </a:tr>
             </a:tbl>
           </a:graphicData>
@@ -17929,7 +17859,7 @@
           <a:bodyPr wrap="square" lIns="0" tIns="0" rIns="0" bIns="0" rtlCol="0" anchor="ctr"/>
           <a:lstStyle/>
           <a:p>
-            <a:pPr indent="0" marL="0">
+            <a:pPr marL="0" indent="0">
               <a:buNone/>
             </a:pPr>
             <a:r>
@@ -17964,7 +17894,7 @@
           <a:noFill/>
         </p:spPr>
         <p:txBody>
-          <a:bodyPr wrap="none" lIns="0" rIns="0" tIns="0" bIns="0">
+          <a:bodyPr wrap="none" lIns="0" tIns="0" rIns="0" bIns="0">
             <a:spAutoFit/>
           </a:bodyPr>
           <a:lstStyle/>
@@ -18006,6 +17936,7 @@
         <a:solidFill>
           <a:srgbClr val="FFFFFF"/>
         </a:solidFill>
+        <a:effectLst/>
       </p:bgPr>
     </p:bg>
     <p:spTree>
@@ -18043,11 +17974,11 @@
           <a:bodyPr wrap="square" lIns="0" tIns="0" rIns="0" bIns="0" rtlCol="0" anchor="ctr"/>
           <a:lstStyle/>
           <a:p>
-            <a:pPr algn="l" indent="0" marL="0">
+            <a:pPr marL="0" indent="0" algn="l">
               <a:buNone/>
             </a:pPr>
             <a:r>
-              <a:rPr lang="en-US" sz="1300" b="1" spc="300" kern="0" dirty="0">
+              <a:rPr lang="en-US" sz="1300" b="1" kern="0" spc="300" dirty="0">
                 <a:solidFill>
                   <a:srgbClr val="FF8A3D"/>
                 </a:solidFill>
@@ -18082,7 +18013,7 @@
           <a:bodyPr wrap="square" lIns="0" tIns="0" rIns="0" bIns="0" rtlCol="0" anchor="ctr"/>
           <a:lstStyle/>
           <a:p>
-            <a:pPr algn="l" indent="0" marL="0">
+            <a:pPr marL="0" indent="0" algn="l">
               <a:buNone/>
             </a:pPr>
             <a:r>
@@ -18123,7 +18054,10 @@
         </p:spPr>
         <p:txBody>
           <a:bodyPr/>
-          <a:p/>
+          <a:lstStyle/>
+          <a:p>
+            <a:endParaRPr/>
+          </a:p>
         </p:txBody>
       </p:sp>
       <p:sp>
@@ -18147,7 +18081,7 @@
           <a:bodyPr wrap="square" lIns="0" tIns="0" rIns="0" bIns="0" rtlCol="0" anchor="t"/>
           <a:lstStyle/>
           <a:p>
-            <a:pPr indent="0" marL="0">
+            <a:pPr marL="0" indent="0">
               <a:lnSpc>
                 <a:spcPct val="125000"/>
               </a:lnSpc>
@@ -18167,7 +18101,7 @@
             <a:endParaRPr lang="en-US" sz="1400" dirty="0"/>
           </a:p>
           <a:p>
-            <a:pPr indent="0" marL="0">
+            <a:pPr marL="0" indent="0">
               <a:lnSpc>
                 <a:spcPct val="125000"/>
               </a:lnSpc>
@@ -18187,7 +18121,7 @@
             <a:endParaRPr lang="en-US" sz="1400" dirty="0"/>
           </a:p>
           <a:p>
-            <a:pPr indent="0" marL="0">
+            <a:pPr marL="0" indent="0">
               <a:lnSpc>
                 <a:spcPct val="125000"/>
               </a:lnSpc>
@@ -18207,7 +18141,7 @@
             <a:endParaRPr lang="en-US" sz="1400" dirty="0"/>
           </a:p>
           <a:p>
-            <a:pPr indent="0" marL="0">
+            <a:pPr marL="0" indent="0">
               <a:lnSpc>
                 <a:spcPct val="125000"/>
               </a:lnSpc>
@@ -18227,7 +18161,7 @@
             <a:endParaRPr lang="en-US" sz="1400" dirty="0"/>
           </a:p>
           <a:p>
-            <a:pPr indent="0" marL="0">
+            <a:pPr marL="0" indent="0">
               <a:lnSpc>
                 <a:spcPct val="125000"/>
               </a:lnSpc>
@@ -18247,7 +18181,7 @@
             <a:endParaRPr lang="en-US" sz="1400" dirty="0"/>
           </a:p>
           <a:p>
-            <a:pPr indent="0" marL="0">
+            <a:pPr marL="0" indent="0">
               <a:lnSpc>
                 <a:spcPct val="125000"/>
               </a:lnSpc>
@@ -18267,7 +18201,7 @@
             <a:endParaRPr lang="en-US" sz="1400" dirty="0"/>
           </a:p>
           <a:p>
-            <a:pPr indent="0" marL="0">
+            <a:pPr marL="0" indent="0">
               <a:lnSpc>
                 <a:spcPct val="125000"/>
               </a:lnSpc>
@@ -18305,7 +18239,7 @@
           <a:noFill/>
         </p:spPr>
         <p:txBody>
-          <a:bodyPr wrap="none" lIns="0" rIns="0" tIns="0" bIns="0">
+          <a:bodyPr wrap="none" lIns="0" tIns="0" rIns="0" bIns="0">
             <a:spAutoFit/>
           </a:bodyPr>
           <a:lstStyle/>
@@ -18347,6 +18281,7 @@
         <a:solidFill>
           <a:srgbClr val="FFFFFF"/>
         </a:solidFill>
+        <a:effectLst/>
       </p:bgPr>
     </p:bg>
     <p:spTree>
@@ -18384,11 +18319,11 @@
           <a:bodyPr wrap="square" lIns="0" tIns="0" rIns="0" bIns="0" rtlCol="0" anchor="ctr"/>
           <a:lstStyle/>
           <a:p>
-            <a:pPr algn="l" indent="0" marL="0">
+            <a:pPr marL="0" indent="0" algn="l">
               <a:buNone/>
             </a:pPr>
             <a:r>
-              <a:rPr lang="en-US" sz="1300" b="1" spc="300" kern="0" dirty="0">
+              <a:rPr lang="en-US" sz="1300" b="1" kern="0" spc="300" dirty="0">
                 <a:solidFill>
                   <a:srgbClr val="FF8A3D"/>
                 </a:solidFill>
@@ -18423,7 +18358,7 @@
           <a:bodyPr wrap="square" lIns="0" tIns="0" rIns="0" bIns="0" rtlCol="0" anchor="ctr"/>
           <a:lstStyle/>
           <a:p>
-            <a:pPr algn="l" indent="0" marL="0">
+            <a:pPr marL="0" indent="0" algn="l">
               <a:buNone/>
             </a:pPr>
             <a:r>
@@ -18462,7 +18397,7 @@
           <a:bodyPr wrap="square" lIns="0" tIns="0" rIns="0" bIns="0" rtlCol="0" anchor="ctr"/>
           <a:lstStyle/>
           <a:p>
-            <a:pPr indent="0" marL="0">
+            <a:pPr marL="0" indent="0">
               <a:buNone/>
             </a:pPr>
             <a:r>
@@ -18503,7 +18438,10 @@
         </p:spPr>
         <p:txBody>
           <a:bodyPr/>
-          <a:p/>
+          <a:lstStyle/>
+          <a:p>
+            <a:endParaRPr/>
+          </a:p>
         </p:txBody>
       </p:sp>
       <p:sp>
@@ -18527,7 +18465,7 @@
           <a:bodyPr wrap="square" lIns="0" tIns="0" rIns="0" bIns="0" rtlCol="0" anchor="t"/>
           <a:lstStyle/>
           <a:p>
-            <a:pPr indent="0" marL="0">
+            <a:pPr marL="0" indent="0">
               <a:lnSpc>
                 <a:spcPct val="125000"/>
               </a:lnSpc>
@@ -18547,7 +18485,7 @@
             <a:endParaRPr lang="en-US" sz="1250" dirty="0"/>
           </a:p>
           <a:p>
-            <a:pPr indent="0" marL="0">
+            <a:pPr marL="0" indent="0">
               <a:lnSpc>
                 <a:spcPct val="125000"/>
               </a:lnSpc>
@@ -18567,7 +18505,7 @@
             <a:endParaRPr lang="en-US" sz="1250" dirty="0"/>
           </a:p>
           <a:p>
-            <a:pPr indent="0" marL="0">
+            <a:pPr marL="0" indent="0">
               <a:lnSpc>
                 <a:spcPct val="125000"/>
               </a:lnSpc>
@@ -18587,7 +18525,7 @@
             <a:endParaRPr lang="en-US" sz="1250" dirty="0"/>
           </a:p>
           <a:p>
-            <a:pPr indent="0" marL="0">
+            <a:pPr marL="0" indent="0">
               <a:lnSpc>
                 <a:spcPct val="125000"/>
               </a:lnSpc>
@@ -18634,7 +18572,7 @@
             <a:prstDash val="solid"/>
           </a:ln>
           <a:effectLst>
-            <a:outerShdw sx="100000" sy="100000" kx="0" ky="0" algn="bl" rotWithShape="0" blurRad="101600" dist="38100" dir="5400000">
+            <a:outerShdw blurRad="101600" dist="38100" dir="5400000" algn="bl" rotWithShape="0">
               <a:srgbClr val="000000">
                 <a:alpha val="12000"/>
               </a:srgbClr>
@@ -18643,19 +18581,22 @@
         </p:spPr>
         <p:txBody>
           <a:bodyPr/>
-          <a:p/>
+          <a:lstStyle/>
+          <a:p>
+            <a:endParaRPr/>
+          </a:p>
         </p:txBody>
       </p:sp>
       <p:pic>
         <p:nvPicPr>
-          <p:cNvPr id="8" name="Image 0" descr="D:/GitHub/mern-web-book/docs/assets/img/lecture-10/tailwind-custom-color.png">    </p:cNvPr>
+          <p:cNvPr id="8" name="Image 0" descr="D:/GitHub/mern-web-book/docs/assets/img/lecture-10/tailwind-custom-color.png"/>
           <p:cNvPicPr>
             <a:picLocks noChangeAspect="1"/>
           </p:cNvPicPr>
           <p:nvPr/>
         </p:nvPicPr>
         <p:blipFill>
-          <a:blip r:embed="rId1"/>
+          <a:blip r:embed="rId3"/>
           <a:stretch>
             <a:fillRect/>
           </a:stretch>
@@ -18687,7 +18628,7 @@
           <a:noFill/>
         </p:spPr>
         <p:txBody>
-          <a:bodyPr wrap="none" lIns="0" rIns="0" tIns="0" bIns="0">
+          <a:bodyPr wrap="none" lIns="0" tIns="0" rIns="0" bIns="0">
             <a:spAutoFit/>
           </a:bodyPr>
           <a:lstStyle/>
@@ -18729,6 +18670,7 @@
         <a:solidFill>
           <a:srgbClr val="FFFFFF"/>
         </a:solidFill>
+        <a:effectLst/>
       </p:bgPr>
     </p:bg>
     <p:spTree>
@@ -18766,11 +18708,11 @@
           <a:bodyPr wrap="square" lIns="0" tIns="0" rIns="0" bIns="0" rtlCol="0" anchor="ctr"/>
           <a:lstStyle/>
           <a:p>
-            <a:pPr algn="l" indent="0" marL="0">
+            <a:pPr marL="0" indent="0" algn="l">
               <a:buNone/>
             </a:pPr>
             <a:r>
-              <a:rPr lang="en-US" sz="1300" b="1" spc="300" kern="0" dirty="0">
+              <a:rPr lang="en-US" sz="1300" b="1" kern="0" spc="300" dirty="0">
                 <a:solidFill>
                   <a:srgbClr val="FF8A3D"/>
                 </a:solidFill>
@@ -18805,7 +18747,7 @@
           <a:bodyPr wrap="square" lIns="0" tIns="0" rIns="0" bIns="0" rtlCol="0" anchor="ctr"/>
           <a:lstStyle/>
           <a:p>
-            <a:pPr algn="l" indent="0" marL="0">
+            <a:pPr marL="0" indent="0" algn="l">
               <a:buNone/>
             </a:pPr>
             <a:r>
@@ -18844,7 +18786,7 @@
           <a:bodyPr wrap="square" lIns="0" tIns="0" rIns="0" bIns="0" rtlCol="0" anchor="ctr"/>
           <a:lstStyle/>
           <a:p>
-            <a:pPr indent="0" marL="0">
+            <a:pPr marL="0" indent="0">
               <a:buNone/>
             </a:pPr>
             <a:r>
@@ -18885,7 +18827,10 @@
         </p:spPr>
         <p:txBody>
           <a:bodyPr/>
-          <a:p/>
+          <a:lstStyle/>
+          <a:p>
+            <a:endParaRPr/>
+          </a:p>
         </p:txBody>
       </p:sp>
       <p:sp>
@@ -18909,7 +18854,7 @@
           <a:bodyPr wrap="square" lIns="0" tIns="0" rIns="0" bIns="0" rtlCol="0" anchor="t"/>
           <a:lstStyle/>
           <a:p>
-            <a:pPr indent="0" marL="0">
+            <a:pPr marL="0" indent="0">
               <a:lnSpc>
                 <a:spcPct val="125000"/>
               </a:lnSpc>
@@ -18929,7 +18874,7 @@
             <a:endParaRPr lang="en-US" sz="1250" dirty="0"/>
           </a:p>
           <a:p>
-            <a:pPr indent="0" marL="0">
+            <a:pPr marL="0" indent="0">
               <a:lnSpc>
                 <a:spcPct val="125000"/>
               </a:lnSpc>
@@ -18949,7 +18894,7 @@
             <a:endParaRPr lang="en-US" sz="1250" dirty="0"/>
           </a:p>
           <a:p>
-            <a:pPr indent="0" marL="0">
+            <a:pPr marL="0" indent="0">
               <a:lnSpc>
                 <a:spcPct val="125000"/>
               </a:lnSpc>
@@ -18996,7 +18941,7 @@
             <a:prstDash val="solid"/>
           </a:ln>
           <a:effectLst>
-            <a:outerShdw sx="100000" sy="100000" kx="0" ky="0" algn="bl" rotWithShape="0" blurRad="101600" dist="38100" dir="5400000">
+            <a:outerShdw blurRad="101600" dist="38100" dir="5400000" algn="bl" rotWithShape="0">
               <a:srgbClr val="000000">
                 <a:alpha val="12000"/>
               </a:srgbClr>
@@ -19005,19 +18950,22 @@
         </p:spPr>
         <p:txBody>
           <a:bodyPr/>
-          <a:p/>
+          <a:lstStyle/>
+          <a:p>
+            <a:endParaRPr/>
+          </a:p>
         </p:txBody>
       </p:sp>
       <p:pic>
         <p:nvPicPr>
-          <p:cNvPr id="8" name="Image 0" descr="D:/GitHub/mern-web-book/docs/assets/img/lecture-10/tailwind-dark-mode.png">    </p:cNvPr>
+          <p:cNvPr id="8" name="Image 0" descr="D:/GitHub/mern-web-book/docs/assets/img/lecture-10/tailwind-dark-mode.png"/>
           <p:cNvPicPr>
             <a:picLocks noChangeAspect="1"/>
           </p:cNvPicPr>
           <p:nvPr/>
         </p:nvPicPr>
         <p:blipFill>
-          <a:blip r:embed="rId1"/>
+          <a:blip r:embed="rId3"/>
           <a:stretch>
             <a:fillRect/>
           </a:stretch>
@@ -19049,7 +18997,7 @@
           <a:noFill/>
         </p:spPr>
         <p:txBody>
-          <a:bodyPr wrap="none" lIns="0" rIns="0" tIns="0" bIns="0">
+          <a:bodyPr wrap="none" lIns="0" tIns="0" rIns="0" bIns="0">
             <a:spAutoFit/>
           </a:bodyPr>
           <a:lstStyle/>
@@ -19091,6 +19039,7 @@
         <a:solidFill>
           <a:srgbClr val="FFFFFF"/>
         </a:solidFill>
+        <a:effectLst/>
       </p:bgPr>
     </p:bg>
     <p:spTree>
@@ -19128,11 +19077,11 @@
           <a:bodyPr wrap="square" lIns="0" tIns="0" rIns="0" bIns="0" rtlCol="0" anchor="ctr"/>
           <a:lstStyle/>
           <a:p>
-            <a:pPr algn="l" indent="0" marL="0">
+            <a:pPr marL="0" indent="0" algn="l">
               <a:buNone/>
             </a:pPr>
             <a:r>
-              <a:rPr lang="en-US" sz="1300" b="1" spc="300" kern="0" dirty="0">
+              <a:rPr lang="en-US" sz="1300" b="1" kern="0" spc="300" dirty="0">
                 <a:solidFill>
                   <a:srgbClr val="FF8A3D"/>
                 </a:solidFill>
@@ -19167,7 +19116,7 @@
           <a:bodyPr wrap="square" lIns="0" tIns="0" rIns="0" bIns="0" rtlCol="0" anchor="ctr"/>
           <a:lstStyle/>
           <a:p>
-            <a:pPr algn="l" indent="0" marL="0">
+            <a:pPr marL="0" indent="0" algn="l">
               <a:buNone/>
             </a:pPr>
             <a:r>
@@ -19208,7 +19157,10 @@
         </p:spPr>
         <p:txBody>
           <a:bodyPr/>
-          <a:p/>
+          <a:lstStyle/>
+          <a:p>
+            <a:endParaRPr/>
+          </a:p>
         </p:txBody>
       </p:sp>
       <p:sp>
@@ -19232,7 +19184,7 @@
           <a:bodyPr wrap="square" lIns="0" tIns="0" rIns="0" bIns="0" rtlCol="0" anchor="t"/>
           <a:lstStyle/>
           <a:p>
-            <a:pPr indent="0" marL="0">
+            <a:pPr marL="0" indent="0">
               <a:lnSpc>
                 <a:spcPct val="125000"/>
               </a:lnSpc>
@@ -19252,7 +19204,7 @@
             <a:endParaRPr lang="en-US" sz="1400" dirty="0"/>
           </a:p>
           <a:p>
-            <a:pPr indent="0" marL="0">
+            <a:pPr marL="0" indent="0">
               <a:lnSpc>
                 <a:spcPct val="125000"/>
               </a:lnSpc>
@@ -19272,7 +19224,7 @@
             <a:endParaRPr lang="en-US" sz="1400" dirty="0"/>
           </a:p>
           <a:p>
-            <a:pPr indent="0" marL="0">
+            <a:pPr marL="0" indent="0">
               <a:lnSpc>
                 <a:spcPct val="125000"/>
               </a:lnSpc>
@@ -19292,7 +19244,7 @@
             <a:endParaRPr lang="en-US" sz="1400" dirty="0"/>
           </a:p>
           <a:p>
-            <a:pPr indent="0" marL="0">
+            <a:pPr marL="0" indent="0">
               <a:lnSpc>
                 <a:spcPct val="125000"/>
               </a:lnSpc>
@@ -19312,7 +19264,7 @@
             <a:endParaRPr lang="en-US" sz="1400" dirty="0"/>
           </a:p>
           <a:p>
-            <a:pPr indent="0" marL="0">
+            <a:pPr marL="0" indent="0">
               <a:lnSpc>
                 <a:spcPct val="125000"/>
               </a:lnSpc>
@@ -19321,7 +19273,7 @@
             <a:endParaRPr lang="en-US" sz="1400" dirty="0"/>
           </a:p>
           <a:p>
-            <a:pPr indent="0" marL="0">
+            <a:pPr marL="0" indent="0">
               <a:lnSpc>
                 <a:spcPct val="125000"/>
               </a:lnSpc>
@@ -19363,7 +19315,7 @@
           <a:bodyPr wrap="square" lIns="0" tIns="0" rIns="0" bIns="0" rtlCol="0" anchor="t"/>
           <a:lstStyle/>
           <a:p>
-            <a:pPr indent="0" marL="0">
+            <a:pPr marL="0" indent="0">
               <a:buNone/>
             </a:pPr>
             <a:r>
@@ -19398,7 +19350,7 @@
           <a:noFill/>
         </p:spPr>
         <p:txBody>
-          <a:bodyPr wrap="none" lIns="0" rIns="0" tIns="0" bIns="0">
+          <a:bodyPr wrap="none" lIns="0" tIns="0" rIns="0" bIns="0">
             <a:spAutoFit/>
           </a:bodyPr>
           <a:lstStyle/>
@@ -19440,6 +19392,7 @@
         <a:solidFill>
           <a:srgbClr val="FFFFFF"/>
         </a:solidFill>
+        <a:effectLst/>
       </p:bgPr>
     </p:bg>
     <p:spTree>
@@ -19477,11 +19430,11 @@
           <a:bodyPr wrap="square" lIns="0" tIns="0" rIns="0" bIns="0" rtlCol="0" anchor="ctr"/>
           <a:lstStyle/>
           <a:p>
-            <a:pPr algn="l" indent="0" marL="0">
+            <a:pPr marL="0" indent="0" algn="l">
               <a:buNone/>
             </a:pPr>
             <a:r>
-              <a:rPr lang="en-US" sz="1300" b="1" spc="300" kern="0" dirty="0">
+              <a:rPr lang="en-US" sz="1300" b="1" kern="0" spc="300" dirty="0">
                 <a:solidFill>
                   <a:srgbClr val="FF8A3D"/>
                 </a:solidFill>
@@ -19516,7 +19469,7 @@
           <a:bodyPr wrap="square" lIns="0" tIns="0" rIns="0" bIns="0" rtlCol="0" anchor="ctr"/>
           <a:lstStyle/>
           <a:p>
-            <a:pPr algn="l" indent="0" marL="0">
+            <a:pPr marL="0" indent="0" algn="l">
               <a:buNone/>
             </a:pPr>
             <a:r>
@@ -19557,7 +19510,10 @@
         </p:spPr>
         <p:txBody>
           <a:bodyPr/>
-          <a:p/>
+          <a:lstStyle/>
+          <a:p>
+            <a:endParaRPr/>
+          </a:p>
         </p:txBody>
       </p:sp>
       <p:sp>
@@ -19581,7 +19537,7 @@
           <a:bodyPr wrap="square" lIns="0" tIns="0" rIns="0" bIns="0" rtlCol="0" anchor="t"/>
           <a:lstStyle/>
           <a:p>
-            <a:pPr indent="0" marL="0">
+            <a:pPr marL="0" indent="0">
               <a:lnSpc>
                 <a:spcPct val="125000"/>
               </a:lnSpc>
@@ -19601,7 +19557,7 @@
             <a:endParaRPr lang="en-US" sz="1400" dirty="0"/>
           </a:p>
           <a:p>
-            <a:pPr indent="0" marL="0">
+            <a:pPr marL="0" indent="0">
               <a:lnSpc>
                 <a:spcPct val="125000"/>
               </a:lnSpc>
@@ -19610,7 +19566,7 @@
             <a:endParaRPr lang="en-US" sz="1400" dirty="0"/>
           </a:p>
           <a:p>
-            <a:pPr indent="0" marL="0">
+            <a:pPr marL="0" indent="0">
               <a:lnSpc>
                 <a:spcPct val="125000"/>
               </a:lnSpc>
@@ -19648,7 +19604,7 @@
           <a:noFill/>
         </p:spPr>
         <p:txBody>
-          <a:bodyPr wrap="none" lIns="0" rIns="0" tIns="0" bIns="0">
+          <a:bodyPr wrap="none" lIns="0" tIns="0" rIns="0" bIns="0">
             <a:spAutoFit/>
           </a:bodyPr>
           <a:lstStyle/>
@@ -19690,6 +19646,7 @@
         <a:solidFill>
           <a:srgbClr val="FFFFFF"/>
         </a:solidFill>
+        <a:effectLst/>
       </p:bgPr>
     </p:bg>
     <p:spTree>
@@ -19727,11 +19684,11 @@
           <a:bodyPr wrap="square" lIns="0" tIns="0" rIns="0" bIns="0" rtlCol="0" anchor="ctr"/>
           <a:lstStyle/>
           <a:p>
-            <a:pPr algn="l" indent="0" marL="0">
+            <a:pPr marL="0" indent="0" algn="l">
               <a:buNone/>
             </a:pPr>
             <a:r>
-              <a:rPr lang="en-US" sz="1300" b="1" spc="300" kern="0" dirty="0">
+              <a:rPr lang="en-US" sz="1300" b="1" kern="0" spc="300" dirty="0">
                 <a:solidFill>
                   <a:srgbClr val="FF8A3D"/>
                 </a:solidFill>
@@ -19766,7 +19723,7 @@
           <a:bodyPr wrap="square" lIns="0" tIns="0" rIns="0" bIns="0" rtlCol="0" anchor="ctr"/>
           <a:lstStyle/>
           <a:p>
-            <a:pPr algn="l" indent="0" marL="0">
+            <a:pPr marL="0" indent="0" algn="l">
               <a:buNone/>
             </a:pPr>
             <a:r>
@@ -19810,7 +19767,7 @@
             <a:prstDash val="solid"/>
           </a:ln>
           <a:effectLst>
-            <a:outerShdw sx="100000" sy="100000" kx="0" ky="0" algn="bl" rotWithShape="0" blurRad="101600" dist="38100" dir="5400000">
+            <a:outerShdw blurRad="101600" dist="38100" dir="5400000" algn="bl" rotWithShape="0">
               <a:srgbClr val="000000">
                 <a:alpha val="12000"/>
               </a:srgbClr>
@@ -19819,19 +19776,22 @@
         </p:spPr>
         <p:txBody>
           <a:bodyPr/>
-          <a:p/>
+          <a:lstStyle/>
+          <a:p>
+            <a:endParaRPr/>
+          </a:p>
         </p:txBody>
       </p:sp>
       <p:pic>
         <p:nvPicPr>
-          <p:cNvPr id="5" name="Image 0" descr="D:/GitHub/mern-web-book/docs/assets/img/lecture-10/bootstrap-custom-class.png">    </p:cNvPr>
+          <p:cNvPr id="5" name="Image 0" descr="D:/GitHub/mern-web-book/docs/assets/img/lecture-10/bootstrap-custom-class.png"/>
           <p:cNvPicPr>
             <a:picLocks noChangeAspect="1"/>
           </p:cNvPicPr>
           <p:nvPr/>
         </p:nvPicPr>
         <p:blipFill>
-          <a:blip r:embed="rId1"/>
+          <a:blip r:embed="rId3"/>
           <a:stretch>
             <a:fillRect/>
           </a:stretch>
@@ -19863,7 +19823,7 @@
           <a:noFill/>
         </p:spPr>
         <p:txBody>
-          <a:bodyPr wrap="none" lIns="0" rIns="0" tIns="0" bIns="0">
+          <a:bodyPr wrap="none" lIns="0" tIns="0" rIns="0" bIns="0">
             <a:spAutoFit/>
           </a:bodyPr>
           <a:lstStyle/>
@@ -19905,6 +19865,7 @@
         <a:solidFill>
           <a:srgbClr val="FFFFFF"/>
         </a:solidFill>
+        <a:effectLst/>
       </p:bgPr>
     </p:bg>
     <p:spTree>
@@ -19942,11 +19903,11 @@
           <a:bodyPr wrap="square" lIns="0" tIns="0" rIns="0" bIns="0" rtlCol="0" anchor="ctr"/>
           <a:lstStyle/>
           <a:p>
-            <a:pPr algn="l" indent="0" marL="0">
+            <a:pPr marL="0" indent="0" algn="l">
               <a:buNone/>
             </a:pPr>
             <a:r>
-              <a:rPr lang="en-US" sz="1300" b="1" spc="300" kern="0" dirty="0">
+              <a:rPr lang="en-US" sz="1300" b="1" kern="0" spc="300" dirty="0">
                 <a:solidFill>
                   <a:srgbClr val="FF8A3D"/>
                 </a:solidFill>
@@ -19981,7 +19942,7 @@
           <a:bodyPr wrap="square" lIns="0" tIns="0" rIns="0" bIns="0" rtlCol="0" anchor="ctr"/>
           <a:lstStyle/>
           <a:p>
-            <a:pPr algn="l" indent="0" marL="0">
+            <a:pPr marL="0" indent="0" algn="l">
               <a:buNone/>
             </a:pPr>
             <a:r>
@@ -20022,7 +19983,10 @@
         </p:spPr>
         <p:txBody>
           <a:bodyPr/>
-          <a:p/>
+          <a:lstStyle/>
+          <a:p>
+            <a:endParaRPr/>
+          </a:p>
         </p:txBody>
       </p:sp>
       <p:sp>
@@ -20046,7 +20010,7 @@
           <a:bodyPr wrap="square" lIns="0" tIns="0" rIns="0" bIns="0" rtlCol="0" anchor="t"/>
           <a:lstStyle/>
           <a:p>
-            <a:pPr indent="0" marL="0">
+            <a:pPr marL="0" indent="0">
               <a:lnSpc>
                 <a:spcPct val="125000"/>
               </a:lnSpc>
@@ -20088,7 +20052,7 @@
           <a:bodyPr wrap="square" lIns="0" tIns="0" rIns="0" bIns="0" rtlCol="0" anchor="t"/>
           <a:lstStyle/>
           <a:p>
-            <a:pPr indent="0" marL="0">
+            <a:pPr marL="0" indent="0">
               <a:buNone/>
             </a:pPr>
             <a:r>
@@ -20123,7 +20087,7 @@
           <a:noFill/>
         </p:spPr>
         <p:txBody>
-          <a:bodyPr wrap="none" lIns="0" rIns="0" tIns="0" bIns="0">
+          <a:bodyPr wrap="none" lIns="0" tIns="0" rIns="0" bIns="0">
             <a:spAutoFit/>
           </a:bodyPr>
           <a:lstStyle/>
@@ -20165,6 +20129,7 @@
         <a:solidFill>
           <a:srgbClr val="FFFFFF"/>
         </a:solidFill>
+        <a:effectLst/>
       </p:bgPr>
     </p:bg>
     <p:spTree>
@@ -20202,11 +20167,11 @@
           <a:bodyPr wrap="square" lIns="0" tIns="0" rIns="0" bIns="0" rtlCol="0" anchor="ctr"/>
           <a:lstStyle/>
           <a:p>
-            <a:pPr algn="l" indent="0" marL="0">
+            <a:pPr marL="0" indent="0" algn="l">
               <a:buNone/>
             </a:pPr>
             <a:r>
-              <a:rPr lang="en-US" sz="1300" b="1" spc="300" kern="0" dirty="0">
+              <a:rPr lang="en-US" sz="1300" b="1" kern="0" spc="300" dirty="0">
                 <a:solidFill>
                   <a:srgbClr val="FF8A3D"/>
                 </a:solidFill>
@@ -20241,7 +20206,7 @@
           <a:bodyPr wrap="square" lIns="0" tIns="0" rIns="0" bIns="0" rtlCol="0" anchor="ctr"/>
           <a:lstStyle/>
           <a:p>
-            <a:pPr algn="l" indent="0" marL="0">
+            <a:pPr marL="0" indent="0" algn="l">
               <a:buNone/>
             </a:pPr>
             <a:r>
@@ -20282,7 +20247,10 @@
         </p:spPr>
         <p:txBody>
           <a:bodyPr/>
-          <a:p/>
+          <a:lstStyle/>
+          <a:p>
+            <a:endParaRPr/>
+          </a:p>
         </p:txBody>
       </p:sp>
       <p:sp>
@@ -20306,7 +20274,7 @@
           <a:bodyPr wrap="square" lIns="0" tIns="0" rIns="0" bIns="0" rtlCol="0" anchor="t"/>
           <a:lstStyle/>
           <a:p>
-            <a:pPr indent="0" marL="0">
+            <a:pPr marL="0" indent="0">
               <a:lnSpc>
                 <a:spcPct val="125000"/>
               </a:lnSpc>
@@ -20326,7 +20294,7 @@
             <a:endParaRPr lang="en-US" sz="1400" dirty="0"/>
           </a:p>
           <a:p>
-            <a:pPr indent="0" marL="0">
+            <a:pPr marL="0" indent="0">
               <a:lnSpc>
                 <a:spcPct val="125000"/>
               </a:lnSpc>
@@ -20335,7 +20303,7 @@
             <a:endParaRPr lang="en-US" sz="1400" dirty="0"/>
           </a:p>
           <a:p>
-            <a:pPr indent="0" marL="0">
+            <a:pPr marL="0" indent="0">
               <a:lnSpc>
                 <a:spcPct val="125000"/>
               </a:lnSpc>
@@ -20373,7 +20341,7 @@
           <a:noFill/>
         </p:spPr>
         <p:txBody>
-          <a:bodyPr wrap="none" lIns="0" rIns="0" tIns="0" bIns="0">
+          <a:bodyPr wrap="none" lIns="0" tIns="0" rIns="0" bIns="0">
             <a:spAutoFit/>
           </a:bodyPr>
           <a:lstStyle/>
@@ -20415,6 +20383,7 @@
         <a:solidFill>
           <a:srgbClr val="FFFFFF"/>
         </a:solidFill>
+        <a:effectLst/>
       </p:bgPr>
     </p:bg>
     <p:spTree>
@@ -20452,11 +20421,11 @@
           <a:bodyPr wrap="square" lIns="0" tIns="0" rIns="0" bIns="0" rtlCol="0" anchor="ctr"/>
           <a:lstStyle/>
           <a:p>
-            <a:pPr algn="l" indent="0" marL="0">
+            <a:pPr marL="0" indent="0" algn="l">
               <a:buNone/>
             </a:pPr>
             <a:r>
-              <a:rPr lang="en-US" sz="1300" b="1" spc="300" kern="0" dirty="0">
+              <a:rPr lang="en-US" sz="1300" b="1" kern="0" spc="300" dirty="0">
                 <a:solidFill>
                   <a:srgbClr val="FF8A3D"/>
                 </a:solidFill>
@@ -20491,7 +20460,7 @@
           <a:bodyPr wrap="square" lIns="0" tIns="0" rIns="0" bIns="0" rtlCol="0" anchor="ctr"/>
           <a:lstStyle/>
           <a:p>
-            <a:pPr algn="l" indent="0" marL="0">
+            <a:pPr marL="0" indent="0" algn="l">
               <a:buNone/>
             </a:pPr>
             <a:r>
@@ -20535,7 +20504,7 @@
             <a:prstDash val="solid"/>
           </a:ln>
           <a:effectLst>
-            <a:outerShdw sx="100000" sy="100000" kx="0" ky="0" algn="bl" rotWithShape="0" blurRad="101600" dist="38100" dir="5400000">
+            <a:outerShdw blurRad="101600" dist="38100" dir="5400000" algn="bl" rotWithShape="0">
               <a:srgbClr val="000000">
                 <a:alpha val="12000"/>
               </a:srgbClr>
@@ -20544,19 +20513,22 @@
         </p:spPr>
         <p:txBody>
           <a:bodyPr/>
-          <a:p/>
+          <a:lstStyle/>
+          <a:p>
+            <a:endParaRPr/>
+          </a:p>
         </p:txBody>
       </p:sp>
       <p:pic>
         <p:nvPicPr>
-          <p:cNvPr id="5" name="Image 0" descr="D:/GitHub/mern-web-book/docs/assets/img/lecture-10/tailwind-custom-class.png">    </p:cNvPr>
+          <p:cNvPr id="5" name="Image 0" descr="D:/GitHub/mern-web-book/docs/assets/img/lecture-10/tailwind-custom-class.png"/>
           <p:cNvPicPr>
             <a:picLocks noChangeAspect="1"/>
           </p:cNvPicPr>
           <p:nvPr/>
         </p:nvPicPr>
         <p:blipFill>
-          <a:blip r:embed="rId1"/>
+          <a:blip r:embed="rId3"/>
           <a:stretch>
             <a:fillRect/>
           </a:stretch>
@@ -20588,7 +20560,7 @@
           <a:noFill/>
         </p:spPr>
         <p:txBody>
-          <a:bodyPr wrap="none" lIns="0" rIns="0" tIns="0" bIns="0">
+          <a:bodyPr wrap="none" lIns="0" tIns="0" rIns="0" bIns="0">
             <a:spAutoFit/>
           </a:bodyPr>
           <a:lstStyle/>
@@ -20630,6 +20602,7 @@
         <a:solidFill>
           <a:srgbClr val="FFFFFF"/>
         </a:solidFill>
+        <a:effectLst/>
       </p:bgPr>
     </p:bg>
     <p:spTree>
@@ -20667,11 +20640,11 @@
           <a:bodyPr wrap="square" lIns="0" tIns="0" rIns="0" bIns="0" rtlCol="0" anchor="ctr"/>
           <a:lstStyle/>
           <a:p>
-            <a:pPr algn="l" indent="0" marL="0">
+            <a:pPr marL="0" indent="0" algn="l">
               <a:buNone/>
             </a:pPr>
             <a:r>
-              <a:rPr lang="en-US" sz="1300" b="1" spc="300" kern="0" dirty="0">
+              <a:rPr lang="en-US" sz="1300" b="1" kern="0" spc="300" dirty="0">
                 <a:solidFill>
                   <a:srgbClr val="FF8A3D"/>
                 </a:solidFill>
@@ -20706,7 +20679,7 @@
           <a:bodyPr wrap="square" lIns="0" tIns="0" rIns="0" bIns="0" rtlCol="0" anchor="ctr"/>
           <a:lstStyle/>
           <a:p>
-            <a:pPr algn="l" indent="0" marL="0">
+            <a:pPr marL="0" indent="0" algn="l">
               <a:buNone/>
             </a:pPr>
             <a:r>
@@ -20745,7 +20718,10 @@
         </p:spPr>
         <p:txBody>
           <a:bodyPr/>
-          <a:p/>
+          <a:lstStyle/>
+          <a:p>
+            <a:endParaRPr/>
+          </a:p>
         </p:txBody>
       </p:sp>
       <p:sp>
@@ -20769,7 +20745,7 @@
           <a:bodyPr wrap="square" lIns="0" tIns="0" rIns="0" bIns="0" rtlCol="0" anchor="ctr"/>
           <a:lstStyle/>
           <a:p>
-            <a:pPr indent="0" marL="0">
+            <a:pPr marL="0" indent="0">
               <a:buNone/>
             </a:pPr>
             <a:r>
@@ -20808,7 +20784,10 @@
         </p:spPr>
         <p:txBody>
           <a:bodyPr/>
-          <a:p/>
+          <a:lstStyle/>
+          <a:p>
+            <a:endParaRPr/>
+          </a:p>
         </p:txBody>
       </p:sp>
       <p:sp>
@@ -20832,7 +20811,7 @@
           <a:bodyPr wrap="square" lIns="0" tIns="0" rIns="0" bIns="0" rtlCol="0" anchor="ctr"/>
           <a:lstStyle/>
           <a:p>
-            <a:pPr indent="0" marL="0">
+            <a:pPr marL="0" indent="0">
               <a:buNone/>
             </a:pPr>
             <a:r>
@@ -20871,7 +20850,10 @@
         </p:spPr>
         <p:txBody>
           <a:bodyPr/>
-          <a:p/>
+          <a:lstStyle/>
+          <a:p>
+            <a:endParaRPr/>
+          </a:p>
         </p:txBody>
       </p:sp>
       <p:sp>
@@ -20895,7 +20877,7 @@
           <a:bodyPr wrap="square" lIns="0" tIns="0" rIns="0" bIns="0" rtlCol="0" anchor="ctr"/>
           <a:lstStyle/>
           <a:p>
-            <a:pPr indent="0" marL="0">
+            <a:pPr marL="0" indent="0">
               <a:buNone/>
             </a:pPr>
             <a:r>
@@ -20930,7 +20912,7 @@
           <a:noFill/>
         </p:spPr>
         <p:txBody>
-          <a:bodyPr wrap="none" lIns="0" rIns="0" tIns="0" bIns="0">
+          <a:bodyPr wrap="none" lIns="0" tIns="0" rIns="0" bIns="0">
             <a:spAutoFit/>
           </a:bodyPr>
           <a:lstStyle/>
@@ -20965,7 +20947,7 @@
 </file>
 
 <file path=ppt/slides/slide43.xml><?xml version="1.0" encoding="utf-8"?>
-<p:sld xmlns:a="http://schemas.openxmlformats.org/drawingml/2006/main" xmlns:p="http://schemas.openxmlformats.org/presentationml/2006/main" xmlns:r="http://schemas.openxmlformats.org/officeDocument/2006/relationships">
+<p:sld xmlns:a="http://schemas.openxmlformats.org/drawingml/2006/main" xmlns:r="http://schemas.openxmlformats.org/officeDocument/2006/relationships" xmlns:p="http://schemas.openxmlformats.org/presentationml/2006/main">
   <p:cSld>
     <p:spTree>
       <p:nvGrpSpPr>
@@ -20973,7 +20955,14 @@
         <p:cNvGrpSpPr/>
         <p:nvPr/>
       </p:nvGrpSpPr>
-      <p:grpSpPr/>
+      <p:grpSpPr>
+        <a:xfrm>
+          <a:off x="0" y="0"/>
+          <a:ext cx="0" cy="0"/>
+          <a:chOff x="0" y="0"/>
+          <a:chExt cx="0" cy="0"/>
+        </a:xfrm>
+      </p:grpSpPr>
       <p:sp>
         <p:nvSpPr>
           <p:cNvPr id="2" name="Text 0"/>
@@ -21085,6 +21074,7 @@
           <a:lstStyle/>
           <a:p>
             <a:pPr algn="ctr"/>
+            <a:endParaRPr/>
           </a:p>
         </p:txBody>
       </p:sp>
@@ -21143,7 +21133,9 @@
             <a:spAutoFit/>
           </a:bodyPr>
           <a:lstStyle/>
-          <a:p/>
+          <a:p>
+            <a:endParaRPr/>
+          </a:p>
         </p:txBody>
       </p:sp>
       <p:sp>
@@ -21228,6 +21220,7 @@
           <a:lstStyle/>
           <a:p>
             <a:pPr algn="ctr"/>
+            <a:endParaRPr/>
           </a:p>
         </p:txBody>
       </p:sp>
@@ -21330,6 +21323,7 @@
           <a:lstStyle/>
           <a:p>
             <a:pPr algn="ctr"/>
+            <a:endParaRPr/>
           </a:p>
         </p:txBody>
       </p:sp>
@@ -21388,7 +21382,9 @@
             <a:spAutoFit/>
           </a:bodyPr>
           <a:lstStyle/>
-          <a:p/>
+          <a:p>
+            <a:endParaRPr/>
+          </a:p>
         </p:txBody>
       </p:sp>
       <p:sp>
@@ -21473,6 +21469,7 @@
           <a:lstStyle/>
           <a:p>
             <a:pPr algn="ctr"/>
+            <a:endParaRPr/>
           </a:p>
         </p:txBody>
       </p:sp>
@@ -21579,7 +21576,7 @@
           <a:noFill/>
         </p:spPr>
         <p:txBody>
-          <a:bodyPr wrap="none" lIns="0" rIns="0" tIns="0" bIns="0">
+          <a:bodyPr wrap="none" lIns="0" tIns="0" rIns="0" bIns="0">
             <a:spAutoFit/>
           </a:bodyPr>
           <a:lstStyle/>
@@ -21621,6 +21618,7 @@
         <a:solidFill>
           <a:srgbClr val="FFFFFF"/>
         </a:solidFill>
+        <a:effectLst/>
       </p:bgPr>
     </p:bg>
     <p:spTree>
@@ -21658,11 +21656,11 @@
           <a:bodyPr wrap="square" lIns="0" tIns="0" rIns="0" bIns="0" rtlCol="0" anchor="ctr"/>
           <a:lstStyle/>
           <a:p>
-            <a:pPr algn="l" indent="0" marL="0">
+            <a:pPr marL="0" indent="0" algn="l">
               <a:buNone/>
             </a:pPr>
             <a:r>
-              <a:rPr lang="en-US" sz="1300" b="1" spc="300" kern="0" dirty="0">
+              <a:rPr lang="en-US" sz="1300" b="1" kern="0" spc="300" dirty="0">
                 <a:solidFill>
                   <a:srgbClr val="FF8A3D"/>
                 </a:solidFill>
@@ -21697,7 +21695,7 @@
           <a:bodyPr wrap="square" lIns="0" tIns="0" rIns="0" bIns="0" rtlCol="0" anchor="ctr"/>
           <a:lstStyle/>
           <a:p>
-            <a:pPr algn="l" indent="0" marL="0">
+            <a:pPr marL="0" indent="0" algn="l">
               <a:buNone/>
             </a:pPr>
             <a:r>
@@ -21738,7 +21736,10 @@
         </p:spPr>
         <p:txBody>
           <a:bodyPr/>
-          <a:p/>
+          <a:lstStyle/>
+          <a:p>
+            <a:endParaRPr/>
+          </a:p>
         </p:txBody>
       </p:sp>
       <p:sp>
@@ -21762,7 +21763,7 @@
           <a:bodyPr wrap="square" lIns="0" tIns="0" rIns="0" bIns="0" rtlCol="0" anchor="ctr"/>
           <a:lstStyle/>
           <a:p>
-            <a:pPr algn="ctr" indent="0" marL="0">
+            <a:pPr marL="0" indent="0" algn="ctr">
               <a:buNone/>
             </a:pPr>
             <a:r>
@@ -21779,7 +21780,7 @@
             <a:endParaRPr lang="en-US" sz="1250" dirty="0"/>
           </a:p>
           <a:p>
-            <a:pPr algn="ctr" indent="0" marL="0">
+            <a:pPr marL="0" indent="0" algn="ctr">
               <a:buNone/>
             </a:pPr>
             <a:r>
@@ -21796,7 +21797,7 @@
             <a:endParaRPr lang="en-US" sz="1250" dirty="0"/>
           </a:p>
           <a:p>
-            <a:pPr algn="ctr" indent="0" marL="0">
+            <a:pPr marL="0" indent="0" algn="ctr">
               <a:buNone/>
             </a:pPr>
             <a:r>
@@ -21839,7 +21840,10 @@
         </p:spPr>
         <p:txBody>
           <a:bodyPr/>
-          <a:p/>
+          <a:lstStyle/>
+          <a:p>
+            <a:endParaRPr/>
+          </a:p>
         </p:txBody>
       </p:sp>
       <p:sp>
@@ -21865,7 +21869,10 @@
         </p:spPr>
         <p:txBody>
           <a:bodyPr/>
-          <a:p/>
+          <a:lstStyle/>
+          <a:p>
+            <a:endParaRPr/>
+          </a:p>
         </p:txBody>
       </p:sp>
       <p:sp>
@@ -21889,7 +21896,7 @@
           <a:bodyPr wrap="square" lIns="0" tIns="0" rIns="0" bIns="0" rtlCol="0" anchor="ctr"/>
           <a:lstStyle/>
           <a:p>
-            <a:pPr algn="ctr" indent="0" marL="0">
+            <a:pPr marL="0" indent="0" algn="ctr">
               <a:buNone/>
             </a:pPr>
             <a:r>
@@ -21906,7 +21913,7 @@
             <a:endParaRPr lang="en-US" sz="1250" dirty="0"/>
           </a:p>
           <a:p>
-            <a:pPr algn="ctr" indent="0" marL="0">
+            <a:pPr marL="0" indent="0" algn="ctr">
               <a:buNone/>
             </a:pPr>
             <a:r>
@@ -21923,7 +21930,7 @@
             <a:endParaRPr lang="en-US" sz="1250" dirty="0"/>
           </a:p>
           <a:p>
-            <a:pPr algn="ctr" indent="0" marL="0">
+            <a:pPr marL="0" indent="0" algn="ctr">
               <a:buNone/>
             </a:pPr>
             <a:r>
@@ -21966,7 +21973,10 @@
         </p:spPr>
         <p:txBody>
           <a:bodyPr/>
-          <a:p/>
+          <a:lstStyle/>
+          <a:p>
+            <a:endParaRPr/>
+          </a:p>
         </p:txBody>
       </p:sp>
       <p:sp>
@@ -21992,7 +22002,10 @@
         </p:spPr>
         <p:txBody>
           <a:bodyPr/>
-          <a:p/>
+          <a:lstStyle/>
+          <a:p>
+            <a:endParaRPr/>
+          </a:p>
         </p:txBody>
       </p:sp>
       <p:sp>
@@ -22016,7 +22029,7 @@
           <a:bodyPr wrap="square" lIns="0" tIns="0" rIns="0" bIns="0" rtlCol="0" anchor="ctr"/>
           <a:lstStyle/>
           <a:p>
-            <a:pPr algn="ctr" indent="0" marL="0">
+            <a:pPr marL="0" indent="0" algn="ctr">
               <a:buNone/>
             </a:pPr>
             <a:r>
@@ -22033,7 +22046,7 @@
             <a:endParaRPr lang="en-US" sz="1250" dirty="0"/>
           </a:p>
           <a:p>
-            <a:pPr algn="ctr" indent="0" marL="0">
+            <a:pPr marL="0" indent="0" algn="ctr">
               <a:buNone/>
             </a:pPr>
             <a:r>
@@ -22076,7 +22089,10 @@
         </p:spPr>
         <p:txBody>
           <a:bodyPr/>
-          <a:p/>
+          <a:lstStyle/>
+          <a:p>
+            <a:endParaRPr/>
+          </a:p>
         </p:txBody>
       </p:sp>
       <p:sp>
@@ -22102,7 +22118,10 @@
         </p:spPr>
         <p:txBody>
           <a:bodyPr/>
-          <a:p/>
+          <a:lstStyle/>
+          <a:p>
+            <a:endParaRPr/>
+          </a:p>
         </p:txBody>
       </p:sp>
       <p:sp>
@@ -22126,7 +22145,7 @@
           <a:bodyPr wrap="square" lIns="0" tIns="0" rIns="0" bIns="0" rtlCol="0" anchor="ctr"/>
           <a:lstStyle/>
           <a:p>
-            <a:pPr algn="ctr" indent="0" marL="0">
+            <a:pPr marL="0" indent="0" algn="ctr">
               <a:buNone/>
             </a:pPr>
             <a:r>
@@ -22143,7 +22162,7 @@
             <a:endParaRPr lang="en-US" sz="1250" dirty="0"/>
           </a:p>
           <a:p>
-            <a:pPr algn="ctr" indent="0" marL="0">
+            <a:pPr marL="0" indent="0" algn="ctr">
               <a:buNone/>
             </a:pPr>
             <a:r>
@@ -22160,7 +22179,7 @@
             <a:endParaRPr lang="en-US" sz="1250" dirty="0"/>
           </a:p>
           <a:p>
-            <a:pPr algn="ctr" indent="0" marL="0">
+            <a:pPr marL="0" indent="0" algn="ctr">
               <a:buNone/>
             </a:pPr>
             <a:r>
@@ -22199,7 +22218,7 @@
           <a:bodyPr wrap="square" lIns="0" tIns="0" rIns="0" bIns="0" rtlCol="0" anchor="t"/>
           <a:lstStyle/>
           <a:p>
-            <a:pPr indent="0" marL="0">
+            <a:pPr marL="0" indent="0">
               <a:buNone/>
             </a:pPr>
             <a:r>
@@ -22234,7 +22253,7 @@
           <a:noFill/>
         </p:spPr>
         <p:txBody>
-          <a:bodyPr wrap="none" lIns="0" rIns="0" tIns="0" bIns="0">
+          <a:bodyPr wrap="none" lIns="0" tIns="0" rIns="0" bIns="0">
             <a:spAutoFit/>
           </a:bodyPr>
           <a:lstStyle/>
@@ -22276,6 +22295,7 @@
         <a:solidFill>
           <a:srgbClr val="FFFFFF"/>
         </a:solidFill>
+        <a:effectLst/>
       </p:bgPr>
     </p:bg>
     <p:spTree>
@@ -22313,11 +22333,11 @@
           <a:bodyPr wrap="square" lIns="0" tIns="0" rIns="0" bIns="0" rtlCol="0" anchor="ctr"/>
           <a:lstStyle/>
           <a:p>
-            <a:pPr algn="l" indent="0" marL="0">
+            <a:pPr marL="0" indent="0" algn="l">
               <a:buNone/>
             </a:pPr>
             <a:r>
-              <a:rPr lang="en-US" sz="1300" b="1" spc="300" kern="0" dirty="0">
+              <a:rPr lang="en-US" sz="1300" b="1" kern="0" spc="300" dirty="0">
                 <a:solidFill>
                   <a:srgbClr val="FF8A3D"/>
                 </a:solidFill>
@@ -22352,7 +22372,7 @@
           <a:bodyPr wrap="square" lIns="0" tIns="0" rIns="0" bIns="0" rtlCol="0" anchor="ctr"/>
           <a:lstStyle/>
           <a:p>
-            <a:pPr algn="l" indent="0" marL="0">
+            <a:pPr marL="0" indent="0" algn="l">
               <a:buNone/>
             </a:pPr>
             <a:r>
@@ -22393,9 +22413,27 @@
             <a:tbl>
               <a:tblPr/>
               <a:tblGrid>
-                <a:gridCol w="3108960"/>
-                <a:gridCol w="4023360"/>
-                <a:gridCol w="4206240"/>
+                <a:gridCol w="3108960">
+                  <a:extLst>
+                    <a:ext uri="{9D8B030D-6E8A-4147-A177-3AD203B41FA5}">
+                      <a16:colId xmlns:a16="http://schemas.microsoft.com/office/drawing/2014/main" val="20000"/>
+                    </a:ext>
+                  </a:extLst>
+                </a:gridCol>
+                <a:gridCol w="4023360">
+                  <a:extLst>
+                    <a:ext uri="{9D8B030D-6E8A-4147-A177-3AD203B41FA5}">
+                      <a16:colId xmlns:a16="http://schemas.microsoft.com/office/drawing/2014/main" val="20001"/>
+                    </a:ext>
+                  </a:extLst>
+                </a:gridCol>
+                <a:gridCol w="4206240">
+                  <a:extLst>
+                    <a:ext uri="{9D8B030D-6E8A-4147-A177-3AD203B41FA5}">
+                      <a16:colId xmlns:a16="http://schemas.microsoft.com/office/drawing/2014/main" val="20002"/>
+                    </a:ext>
+                  </a:extLst>
+                </a:gridCol>
               </a:tblGrid>
               <a:tr h="777240">
                 <a:tc>
@@ -22403,7 +22441,7 @@
                     <a:bodyPr/>
                     <a:lstStyle/>
                     <a:p>
-                      <a:pPr algn="ctr" indent="0" marL="0">
+                      <a:pPr marL="0" indent="0" algn="ctr">
                         <a:buNone/>
                       </a:pPr>
                       <a:endParaRPr lang="en-US" sz="1200" dirty="0">
@@ -22413,7 +22451,7 @@
                       </a:endParaRPr>
                     </a:p>
                   </a:txBody>
-                  <a:tcPr marL="91440" marR="91440" marT="45720" marB="45720" anchor="ctr">
+                  <a:tcPr anchor="ctr">
                     <a:lnL w="12700" cap="flat" cmpd="sng" algn="ctr">
                       <a:solidFill>
                         <a:srgbClr val="D8D8E6"/>
@@ -22460,7 +22498,7 @@
                     <a:bodyPr/>
                     <a:lstStyle/>
                     <a:p>
-                      <a:pPr algn="ctr" indent="0" marL="0">
+                      <a:pPr marL="0" indent="0" algn="ctr">
                         <a:buNone/>
                       </a:pPr>
                       <a:r>
@@ -22481,7 +22519,7 @@
                       </a:endParaRPr>
                     </a:p>
                   </a:txBody>
-                  <a:tcPr marL="91440" marR="91440" marT="45720" marB="45720" anchor="ctr">
+                  <a:tcPr anchor="ctr">
                     <a:lnL w="12700" cap="flat" cmpd="sng" algn="ctr">
                       <a:solidFill>
                         <a:srgbClr val="D8D8E6"/>
@@ -22528,7 +22566,7 @@
                     <a:bodyPr/>
                     <a:lstStyle/>
                     <a:p>
-                      <a:pPr algn="ctr" indent="0" marL="0">
+                      <a:pPr marL="0" indent="0" algn="ctr">
                         <a:buNone/>
                       </a:pPr>
                       <a:r>
@@ -22549,7 +22587,7 @@
                       </a:endParaRPr>
                     </a:p>
                   </a:txBody>
-                  <a:tcPr marL="91440" marR="91440" marT="45720" marB="45720" anchor="ctr">
+                  <a:tcPr anchor="ctr">
                     <a:lnL w="12700" cap="flat" cmpd="sng" algn="ctr">
                       <a:solidFill>
                         <a:srgbClr val="D8D8E6"/>
@@ -22591,6 +22629,11 @@
                     </a:solidFill>
                   </a:tcPr>
                 </a:tc>
+                <a:extLst>
+                  <a:ext uri="{0D108BD9-81ED-4DB2-BD59-A6C34878D82A}">
+                    <a16:rowId xmlns:a16="http://schemas.microsoft.com/office/drawing/2014/main" val="10000"/>
+                  </a:ext>
+                </a:extLst>
               </a:tr>
               <a:tr h="777240">
                 <a:tc>
@@ -22598,7 +22641,7 @@
                     <a:bodyPr/>
                     <a:lstStyle/>
                     <a:p>
-                      <a:pPr algn="l" indent="0" marL="0">
+                      <a:pPr marL="0" indent="0" algn="l">
                         <a:buNone/>
                       </a:pPr>
                       <a:r>
@@ -22619,7 +22662,7 @@
                       </a:endParaRPr>
                     </a:p>
                   </a:txBody>
-                  <a:tcPr marL="91440" marR="91440" marT="45720" marB="45720" anchor="ctr">
+                  <a:tcPr anchor="ctr">
                     <a:lnL w="12700" cap="flat" cmpd="sng" algn="ctr">
                       <a:solidFill>
                         <a:srgbClr val="D8D8E6"/>
@@ -22666,7 +22709,7 @@
                     <a:bodyPr/>
                     <a:lstStyle/>
                     <a:p>
-                      <a:pPr algn="ctr" indent="0" marL="0">
+                      <a:pPr marL="0" indent="0" algn="ctr">
                         <a:buNone/>
                       </a:pPr>
                       <a:r>
@@ -22687,7 +22730,7 @@
                       </a:endParaRPr>
                     </a:p>
                   </a:txBody>
-                  <a:tcPr marL="91440" marR="91440" marT="45720" marB="45720" anchor="ctr">
+                  <a:tcPr anchor="ctr">
                     <a:lnL w="12700" cap="flat" cmpd="sng" algn="ctr">
                       <a:solidFill>
                         <a:srgbClr val="D8D8E6"/>
@@ -22734,7 +22777,7 @@
                     <a:bodyPr/>
                     <a:lstStyle/>
                     <a:p>
-                      <a:pPr algn="ctr" indent="0" marL="0">
+                      <a:pPr marL="0" indent="0" algn="ctr">
                         <a:buNone/>
                       </a:pPr>
                       <a:r>
@@ -22755,7 +22798,7 @@
                       </a:endParaRPr>
                     </a:p>
                   </a:txBody>
-                  <a:tcPr marL="91440" marR="91440" marT="45720" marB="45720" anchor="ctr">
+                  <a:tcPr anchor="ctr">
                     <a:lnL w="12700" cap="flat" cmpd="sng" algn="ctr">
                       <a:solidFill>
                         <a:srgbClr val="D8D8E6"/>
@@ -22797,6 +22840,11 @@
                     </a:solidFill>
                   </a:tcPr>
                 </a:tc>
+                <a:extLst>
+                  <a:ext uri="{0D108BD9-81ED-4DB2-BD59-A6C34878D82A}">
+                    <a16:rowId xmlns:a16="http://schemas.microsoft.com/office/drawing/2014/main" val="10001"/>
+                  </a:ext>
+                </a:extLst>
               </a:tr>
               <a:tr h="777240">
                 <a:tc>
@@ -22804,7 +22852,7 @@
                     <a:bodyPr/>
                     <a:lstStyle/>
                     <a:p>
-                      <a:pPr algn="l" indent="0" marL="0">
+                      <a:pPr marL="0" indent="0" algn="l">
                         <a:buNone/>
                       </a:pPr>
                       <a:r>
@@ -22825,7 +22873,7 @@
                       </a:endParaRPr>
                     </a:p>
                   </a:txBody>
-                  <a:tcPr marL="91440" marR="91440" marT="45720" marB="45720" anchor="ctr">
+                  <a:tcPr anchor="ctr">
                     <a:lnL w="12700" cap="flat" cmpd="sng" algn="ctr">
                       <a:solidFill>
                         <a:srgbClr val="D8D8E6"/>
@@ -22872,7 +22920,7 @@
                     <a:bodyPr/>
                     <a:lstStyle/>
                     <a:p>
-                      <a:pPr algn="ctr" indent="0" marL="0">
+                      <a:pPr marL="0" indent="0" algn="ctr">
                         <a:buNone/>
                       </a:pPr>
                       <a:r>
@@ -22893,7 +22941,7 @@
                       </a:endParaRPr>
                     </a:p>
                   </a:txBody>
-                  <a:tcPr marL="91440" marR="91440" marT="45720" marB="45720" anchor="ctr">
+                  <a:tcPr anchor="ctr">
                     <a:lnL w="12700" cap="flat" cmpd="sng" algn="ctr">
                       <a:solidFill>
                         <a:srgbClr val="D8D8E6"/>
@@ -22940,7 +22988,7 @@
                     <a:bodyPr/>
                     <a:lstStyle/>
                     <a:p>
-                      <a:pPr algn="ctr" indent="0" marL="0">
+                      <a:pPr marL="0" indent="0" algn="ctr">
                         <a:buNone/>
                       </a:pPr>
                       <a:r>
@@ -22961,7 +23009,7 @@
                       </a:endParaRPr>
                     </a:p>
                   </a:txBody>
-                  <a:tcPr marL="91440" marR="91440" marT="45720" marB="45720" anchor="ctr">
+                  <a:tcPr anchor="ctr">
                     <a:lnL w="12700" cap="flat" cmpd="sng" algn="ctr">
                       <a:solidFill>
                         <a:srgbClr val="D8D8E6"/>
@@ -23003,6 +23051,11 @@
                     </a:solidFill>
                   </a:tcPr>
                 </a:tc>
+                <a:extLst>
+                  <a:ext uri="{0D108BD9-81ED-4DB2-BD59-A6C34878D82A}">
+                    <a16:rowId xmlns:a16="http://schemas.microsoft.com/office/drawing/2014/main" val="10002"/>
+                  </a:ext>
+                </a:extLst>
               </a:tr>
               <a:tr h="777240">
                 <a:tc>
@@ -23010,7 +23063,7 @@
                     <a:bodyPr/>
                     <a:lstStyle/>
                     <a:p>
-                      <a:pPr algn="l" indent="0" marL="0">
+                      <a:pPr marL="0" indent="0" algn="l">
                         <a:buNone/>
                       </a:pPr>
                       <a:r>
@@ -23031,7 +23084,7 @@
                       </a:endParaRPr>
                     </a:p>
                   </a:txBody>
-                  <a:tcPr marL="91440" marR="91440" marT="45720" marB="45720" anchor="ctr">
+                  <a:tcPr anchor="ctr">
                     <a:lnL w="12700" cap="flat" cmpd="sng" algn="ctr">
                       <a:solidFill>
                         <a:srgbClr val="D8D8E6"/>
@@ -23078,7 +23131,7 @@
                     <a:bodyPr/>
                     <a:lstStyle/>
                     <a:p>
-                      <a:pPr algn="ctr" indent="0" marL="0">
+                      <a:pPr marL="0" indent="0" algn="ctr">
                         <a:buNone/>
                       </a:pPr>
                       <a:r>
@@ -23099,7 +23152,7 @@
                       </a:endParaRPr>
                     </a:p>
                   </a:txBody>
-                  <a:tcPr marL="91440" marR="91440" marT="45720" marB="45720" anchor="ctr">
+                  <a:tcPr anchor="ctr">
                     <a:lnL w="12700" cap="flat" cmpd="sng" algn="ctr">
                       <a:solidFill>
                         <a:srgbClr val="D8D8E6"/>
@@ -23146,7 +23199,7 @@
                     <a:bodyPr/>
                     <a:lstStyle/>
                     <a:p>
-                      <a:pPr algn="ctr" indent="0" marL="0">
+                      <a:pPr marL="0" indent="0" algn="ctr">
                         <a:buNone/>
                       </a:pPr>
                       <a:r>
@@ -23167,7 +23220,7 @@
                       </a:endParaRPr>
                     </a:p>
                   </a:txBody>
-                  <a:tcPr marL="91440" marR="91440" marT="45720" marB="45720" anchor="ctr">
+                  <a:tcPr anchor="ctr">
                     <a:lnL w="12700" cap="flat" cmpd="sng" algn="ctr">
                       <a:solidFill>
                         <a:srgbClr val="D8D8E6"/>
@@ -23209,6 +23262,11 @@
                     </a:solidFill>
                   </a:tcPr>
                 </a:tc>
+                <a:extLst>
+                  <a:ext uri="{0D108BD9-81ED-4DB2-BD59-A6C34878D82A}">
+                    <a16:rowId xmlns:a16="http://schemas.microsoft.com/office/drawing/2014/main" val="10003"/>
+                  </a:ext>
+                </a:extLst>
               </a:tr>
             </a:tbl>
           </a:graphicData>
@@ -23231,7 +23289,7 @@
           <a:noFill/>
         </p:spPr>
         <p:txBody>
-          <a:bodyPr wrap="none" lIns="0" rIns="0" tIns="0" bIns="0">
+          <a:bodyPr wrap="none" lIns="0" tIns="0" rIns="0" bIns="0">
             <a:spAutoFit/>
           </a:bodyPr>
           <a:lstStyle/>
@@ -23273,6 +23331,7 @@
         <a:solidFill>
           <a:srgbClr val="FFFFFF"/>
         </a:solidFill>
+        <a:effectLst/>
       </p:bgPr>
     </p:bg>
     <p:spTree>
@@ -23310,11 +23369,11 @@
           <a:bodyPr wrap="square" lIns="0" tIns="0" rIns="0" bIns="0" rtlCol="0" anchor="ctr"/>
           <a:lstStyle/>
           <a:p>
-            <a:pPr algn="l" indent="0" marL="0">
+            <a:pPr marL="0" indent="0" algn="l">
               <a:buNone/>
             </a:pPr>
             <a:r>
-              <a:rPr lang="en-US" sz="1300" b="1" spc="300" kern="0" dirty="0">
+              <a:rPr lang="en-US" sz="1300" b="1" kern="0" spc="300" dirty="0">
                 <a:solidFill>
                   <a:srgbClr val="FF8A3D"/>
                 </a:solidFill>
@@ -23349,7 +23408,7 @@
           <a:bodyPr wrap="square" lIns="0" tIns="0" rIns="0" bIns="0" rtlCol="0" anchor="ctr"/>
           <a:lstStyle/>
           <a:p>
-            <a:pPr algn="l" indent="0" marL="0">
+            <a:pPr marL="0" indent="0" algn="l">
               <a:buNone/>
             </a:pPr>
             <a:r>
@@ -23390,7 +23449,10 @@
         </p:spPr>
         <p:txBody>
           <a:bodyPr/>
-          <a:p/>
+          <a:lstStyle/>
+          <a:p>
+            <a:endParaRPr/>
+          </a:p>
         </p:txBody>
       </p:sp>
       <p:sp>
@@ -23414,7 +23476,7 @@
           <a:bodyPr wrap="square" lIns="0" tIns="0" rIns="0" bIns="0" rtlCol="0" anchor="t"/>
           <a:lstStyle/>
           <a:p>
-            <a:pPr indent="0" marL="0">
+            <a:pPr marL="0" indent="0">
               <a:lnSpc>
                 <a:spcPct val="125000"/>
               </a:lnSpc>
@@ -23434,7 +23496,7 @@
             <a:endParaRPr lang="en-US" sz="1250" dirty="0"/>
           </a:p>
           <a:p>
-            <a:pPr indent="0" marL="0">
+            <a:pPr marL="0" indent="0">
               <a:lnSpc>
                 <a:spcPct val="125000"/>
               </a:lnSpc>
@@ -23443,7 +23505,7 @@
             <a:endParaRPr lang="en-US" sz="1250" dirty="0"/>
           </a:p>
           <a:p>
-            <a:pPr indent="0" marL="0">
+            <a:pPr marL="0" indent="0">
               <a:lnSpc>
                 <a:spcPct val="125000"/>
               </a:lnSpc>
@@ -23463,7 +23525,7 @@
             <a:endParaRPr lang="en-US" sz="1250" dirty="0"/>
           </a:p>
           <a:p>
-            <a:pPr indent="0" marL="0">
+            <a:pPr marL="0" indent="0">
               <a:lnSpc>
                 <a:spcPct val="125000"/>
               </a:lnSpc>
@@ -23483,7 +23545,7 @@
             <a:endParaRPr lang="en-US" sz="1250" dirty="0"/>
           </a:p>
           <a:p>
-            <a:pPr indent="0" marL="0">
+            <a:pPr marL="0" indent="0">
               <a:lnSpc>
                 <a:spcPct val="125000"/>
               </a:lnSpc>
@@ -23503,7 +23565,7 @@
             <a:endParaRPr lang="en-US" sz="1250" dirty="0"/>
           </a:p>
           <a:p>
-            <a:pPr indent="0" marL="0">
+            <a:pPr marL="0" indent="0">
               <a:lnSpc>
                 <a:spcPct val="125000"/>
               </a:lnSpc>
@@ -23523,7 +23585,7 @@
             <a:endParaRPr lang="en-US" sz="1250" dirty="0"/>
           </a:p>
           <a:p>
-            <a:pPr indent="0" marL="0">
+            <a:pPr marL="0" indent="0">
               <a:lnSpc>
                 <a:spcPct val="125000"/>
               </a:lnSpc>
@@ -23543,7 +23605,7 @@
             <a:endParaRPr lang="en-US" sz="1250" dirty="0"/>
           </a:p>
           <a:p>
-            <a:pPr indent="0" marL="0">
+            <a:pPr marL="0" indent="0">
               <a:lnSpc>
                 <a:spcPct val="125000"/>
               </a:lnSpc>
@@ -23552,7 +23614,7 @@
             <a:endParaRPr lang="en-US" sz="1250" dirty="0"/>
           </a:p>
           <a:p>
-            <a:pPr indent="0" marL="0">
+            <a:pPr marL="0" indent="0">
               <a:lnSpc>
                 <a:spcPct val="125000"/>
               </a:lnSpc>
@@ -23572,7 +23634,7 @@
             <a:endParaRPr lang="en-US" sz="1250" dirty="0"/>
           </a:p>
           <a:p>
-            <a:pPr indent="0" marL="0">
+            <a:pPr marL="0" indent="0">
               <a:lnSpc>
                 <a:spcPct val="125000"/>
               </a:lnSpc>
@@ -23619,7 +23681,7 @@
             <a:prstDash val="solid"/>
           </a:ln>
           <a:effectLst>
-            <a:outerShdw sx="100000" sy="100000" kx="0" ky="0" algn="bl" rotWithShape="0" blurRad="101600" dist="38100" dir="5400000">
+            <a:outerShdw blurRad="101600" dist="38100" dir="5400000" algn="bl" rotWithShape="0">
               <a:srgbClr val="000000">
                 <a:alpha val="12000"/>
               </a:srgbClr>
@@ -23628,19 +23690,22 @@
         </p:spPr>
         <p:txBody>
           <a:bodyPr/>
-          <a:p/>
+          <a:lstStyle/>
+          <a:p>
+            <a:endParaRPr/>
+          </a:p>
         </p:txBody>
       </p:sp>
       <p:pic>
         <p:nvPicPr>
-          <p:cNvPr id="7" name="Image 0" descr="D:/GitHub/mern-web-book/docs/assets/img/lecture-10/sass-fundamentals-demo.png">    </p:cNvPr>
+          <p:cNvPr id="7" name="Image 0" descr="D:/GitHub/mern-web-book/docs/assets/img/lecture-10/sass-fundamentals-demo.png"/>
           <p:cNvPicPr>
             <a:picLocks noChangeAspect="1"/>
           </p:cNvPicPr>
           <p:nvPr/>
         </p:nvPicPr>
         <p:blipFill>
-          <a:blip r:embed="rId1"/>
+          <a:blip r:embed="rId3"/>
           <a:stretch>
             <a:fillRect/>
           </a:stretch>
@@ -23672,7 +23737,7 @@
           <a:noFill/>
         </p:spPr>
         <p:txBody>
-          <a:bodyPr wrap="none" lIns="0" rIns="0" tIns="0" bIns="0">
+          <a:bodyPr wrap="none" lIns="0" tIns="0" rIns="0" bIns="0">
             <a:spAutoFit/>
           </a:bodyPr>
           <a:lstStyle/>
@@ -23714,6 +23779,7 @@
         <a:solidFill>
           <a:srgbClr val="FFFFFF"/>
         </a:solidFill>
+        <a:effectLst/>
       </p:bgPr>
     </p:bg>
     <p:spTree>
@@ -23751,11 +23817,11 @@
           <a:bodyPr wrap="square" lIns="0" tIns="0" rIns="0" bIns="0" rtlCol="0" anchor="ctr"/>
           <a:lstStyle/>
           <a:p>
-            <a:pPr algn="l" indent="0" marL="0">
+            <a:pPr marL="0" indent="0" algn="l">
               <a:buNone/>
             </a:pPr>
             <a:r>
-              <a:rPr lang="en-US" sz="1300" b="1" spc="300" kern="0" dirty="0">
+              <a:rPr lang="en-US" sz="1300" b="1" kern="0" spc="300" dirty="0">
                 <a:solidFill>
                   <a:srgbClr val="FF8A3D"/>
                 </a:solidFill>
@@ -23790,7 +23856,7 @@
           <a:bodyPr wrap="square" lIns="0" tIns="0" rIns="0" bIns="0" rtlCol="0" anchor="ctr"/>
           <a:lstStyle/>
           <a:p>
-            <a:pPr algn="l" indent="0" marL="0">
+            <a:pPr marL="0" indent="0" algn="l">
               <a:buNone/>
             </a:pPr>
             <a:r>
@@ -23831,7 +23897,10 @@
         </p:spPr>
         <p:txBody>
           <a:bodyPr/>
-          <a:p/>
+          <a:lstStyle/>
+          <a:p>
+            <a:endParaRPr/>
+          </a:p>
         </p:txBody>
       </p:sp>
       <p:sp>
@@ -23855,7 +23924,7 @@
           <a:bodyPr wrap="square" lIns="0" tIns="0" rIns="0" bIns="0" rtlCol="0" anchor="t"/>
           <a:lstStyle/>
           <a:p>
-            <a:pPr indent="0" marL="0">
+            <a:pPr marL="0" indent="0">
               <a:lnSpc>
                 <a:spcPct val="125000"/>
               </a:lnSpc>
@@ -23875,7 +23944,7 @@
             <a:endParaRPr lang="en-US" sz="1400" dirty="0"/>
           </a:p>
           <a:p>
-            <a:pPr indent="0" marL="0">
+            <a:pPr marL="0" indent="0">
               <a:lnSpc>
                 <a:spcPct val="125000"/>
               </a:lnSpc>
@@ -23895,7 +23964,7 @@
             <a:endParaRPr lang="en-US" sz="1400" dirty="0"/>
           </a:p>
           <a:p>
-            <a:pPr indent="0" marL="0">
+            <a:pPr marL="0" indent="0">
               <a:lnSpc>
                 <a:spcPct val="125000"/>
               </a:lnSpc>
@@ -23904,7 +23973,7 @@
             <a:endParaRPr lang="en-US" sz="1400" dirty="0"/>
           </a:p>
           <a:p>
-            <a:pPr indent="0" marL="0">
+            <a:pPr marL="0" indent="0">
               <a:lnSpc>
                 <a:spcPct val="125000"/>
               </a:lnSpc>
@@ -23924,7 +23993,7 @@
             <a:endParaRPr lang="en-US" sz="1400" dirty="0"/>
           </a:p>
           <a:p>
-            <a:pPr indent="0" marL="0">
+            <a:pPr marL="0" indent="0">
               <a:lnSpc>
                 <a:spcPct val="125000"/>
               </a:lnSpc>
@@ -23944,7 +24013,7 @@
             <a:endParaRPr lang="en-US" sz="1400" dirty="0"/>
           </a:p>
           <a:p>
-            <a:pPr indent="0" marL="0">
+            <a:pPr marL="0" indent="0">
               <a:lnSpc>
                 <a:spcPct val="125000"/>
               </a:lnSpc>
@@ -23986,7 +24055,7 @@
           <a:bodyPr wrap="square" lIns="0" tIns="0" rIns="0" bIns="0" rtlCol="0" anchor="t"/>
           <a:lstStyle/>
           <a:p>
-            <a:pPr indent="0" marL="0">
+            <a:pPr marL="0" indent="0">
               <a:buNone/>
             </a:pPr>
             <a:r>
@@ -24021,7 +24090,7 @@
           <a:noFill/>
         </p:spPr>
         <p:txBody>
-          <a:bodyPr wrap="none" lIns="0" rIns="0" tIns="0" bIns="0">
+          <a:bodyPr wrap="none" lIns="0" tIns="0" rIns="0" bIns="0">
             <a:spAutoFit/>
           </a:bodyPr>
           <a:lstStyle/>
@@ -24063,6 +24132,7 @@
         <a:solidFill>
           <a:srgbClr val="FFFFFF"/>
         </a:solidFill>
+        <a:effectLst/>
       </p:bgPr>
     </p:bg>
     <p:spTree>
@@ -24100,11 +24170,11 @@
           <a:bodyPr wrap="square" lIns="0" tIns="0" rIns="0" bIns="0" rtlCol="0" anchor="ctr"/>
           <a:lstStyle/>
           <a:p>
-            <a:pPr algn="l" indent="0" marL="0">
+            <a:pPr marL="0" indent="0" algn="l">
               <a:buNone/>
             </a:pPr>
             <a:r>
-              <a:rPr lang="en-US" sz="1300" b="1" spc="300" kern="0" dirty="0">
+              <a:rPr lang="en-US" sz="1300" b="1" kern="0" spc="300" dirty="0">
                 <a:solidFill>
                   <a:srgbClr val="FF8A3D"/>
                 </a:solidFill>
@@ -24139,7 +24209,7 @@
           <a:bodyPr wrap="square" lIns="0" tIns="0" rIns="0" bIns="0" rtlCol="0" anchor="ctr"/>
           <a:lstStyle/>
           <a:p>
-            <a:pPr algn="l" indent="0" marL="0">
+            <a:pPr marL="0" indent="0" algn="l">
               <a:buNone/>
             </a:pPr>
             <a:r>
@@ -24180,9 +24250,27 @@
             <a:tbl>
               <a:tblPr/>
               <a:tblGrid>
-                <a:gridCol w="2743200"/>
-                <a:gridCol w="4206240"/>
-                <a:gridCol w="4389120"/>
+                <a:gridCol w="2743200">
+                  <a:extLst>
+                    <a:ext uri="{9D8B030D-6E8A-4147-A177-3AD203B41FA5}">
+                      <a16:colId xmlns:a16="http://schemas.microsoft.com/office/drawing/2014/main" val="20000"/>
+                    </a:ext>
+                  </a:extLst>
+                </a:gridCol>
+                <a:gridCol w="4206240">
+                  <a:extLst>
+                    <a:ext uri="{9D8B030D-6E8A-4147-A177-3AD203B41FA5}">
+                      <a16:colId xmlns:a16="http://schemas.microsoft.com/office/drawing/2014/main" val="20001"/>
+                    </a:ext>
+                  </a:extLst>
+                </a:gridCol>
+                <a:gridCol w="4389120">
+                  <a:extLst>
+                    <a:ext uri="{9D8B030D-6E8A-4147-A177-3AD203B41FA5}">
+                      <a16:colId xmlns:a16="http://schemas.microsoft.com/office/drawing/2014/main" val="20002"/>
+                    </a:ext>
+                  </a:extLst>
+                </a:gridCol>
               </a:tblGrid>
               <a:tr h="640080">
                 <a:tc>
@@ -24190,7 +24278,7 @@
                     <a:bodyPr/>
                     <a:lstStyle/>
                     <a:p>
-                      <a:pPr algn="ctr" indent="0" marL="0">
+                      <a:pPr marL="0" indent="0" algn="ctr">
                         <a:buNone/>
                       </a:pPr>
                       <a:r>
@@ -24211,7 +24299,7 @@
                       </a:endParaRPr>
                     </a:p>
                   </a:txBody>
-                  <a:tcPr marL="91440" marR="91440" marT="45720" marB="45720" anchor="ctr">
+                  <a:tcPr anchor="ctr">
                     <a:lnL w="12700" cap="flat" cmpd="sng" algn="ctr">
                       <a:solidFill>
                         <a:srgbClr val="D8D8E6"/>
@@ -24258,7 +24346,7 @@
                     <a:bodyPr/>
                     <a:lstStyle/>
                     <a:p>
-                      <a:pPr algn="ctr" indent="0" marL="0">
+                      <a:pPr marL="0" indent="0" algn="ctr">
                         <a:buNone/>
                       </a:pPr>
                       <a:r>
@@ -24279,7 +24367,7 @@
                       </a:endParaRPr>
                     </a:p>
                   </a:txBody>
-                  <a:tcPr marL="91440" marR="91440" marT="45720" marB="45720" anchor="ctr">
+                  <a:tcPr anchor="ctr">
                     <a:lnL w="12700" cap="flat" cmpd="sng" algn="ctr">
                       <a:solidFill>
                         <a:srgbClr val="D8D8E6"/>
@@ -24326,7 +24414,7 @@
                     <a:bodyPr/>
                     <a:lstStyle/>
                     <a:p>
-                      <a:pPr algn="ctr" indent="0" marL="0">
+                      <a:pPr marL="0" indent="0" algn="ctr">
                         <a:buNone/>
                       </a:pPr>
                       <a:r>
@@ -24347,7 +24435,7 @@
                       </a:endParaRPr>
                     </a:p>
                   </a:txBody>
-                  <a:tcPr marL="91440" marR="91440" marT="45720" marB="45720" anchor="ctr">
+                  <a:tcPr anchor="ctr">
                     <a:lnL w="12700" cap="flat" cmpd="sng" algn="ctr">
                       <a:solidFill>
                         <a:srgbClr val="D8D8E6"/>
@@ -24389,6 +24477,11 @@
                     </a:solidFill>
                   </a:tcPr>
                 </a:tc>
+                <a:extLst>
+                  <a:ext uri="{0D108BD9-81ED-4DB2-BD59-A6C34878D82A}">
+                    <a16:rowId xmlns:a16="http://schemas.microsoft.com/office/drawing/2014/main" val="10000"/>
+                  </a:ext>
+                </a:extLst>
               </a:tr>
               <a:tr h="640080">
                 <a:tc>
@@ -24396,7 +24489,7 @@
                     <a:bodyPr/>
                     <a:lstStyle/>
                     <a:p>
-                      <a:pPr algn="l" indent="0" marL="0">
+                      <a:pPr marL="0" indent="0" algn="l">
                         <a:buNone/>
                       </a:pPr>
                       <a:r>
@@ -24417,7 +24510,7 @@
                       </a:endParaRPr>
                     </a:p>
                   </a:txBody>
-                  <a:tcPr marL="91440" marR="91440" marT="45720" marB="45720" anchor="ctr">
+                  <a:tcPr anchor="ctr">
                     <a:lnL w="12700" cap="flat" cmpd="sng" algn="ctr">
                       <a:solidFill>
                         <a:srgbClr val="D8D8E6"/>
@@ -24464,7 +24557,7 @@
                     <a:bodyPr/>
                     <a:lstStyle/>
                     <a:p>
-                      <a:pPr algn="ctr" indent="0" marL="0">
+                      <a:pPr marL="0" indent="0" algn="ctr">
                         <a:buNone/>
                       </a:pPr>
                       <a:r>
@@ -24485,7 +24578,7 @@
                       </a:endParaRPr>
                     </a:p>
                   </a:txBody>
-                  <a:tcPr marL="91440" marR="91440" marT="45720" marB="45720" anchor="ctr">
+                  <a:tcPr anchor="ctr">
                     <a:lnL w="12700" cap="flat" cmpd="sng" algn="ctr">
                       <a:solidFill>
                         <a:srgbClr val="D8D8E6"/>
@@ -24532,7 +24625,7 @@
                     <a:bodyPr/>
                     <a:lstStyle/>
                     <a:p>
-                      <a:pPr algn="ctr" indent="0" marL="0">
+                      <a:pPr marL="0" indent="0" algn="ctr">
                         <a:buNone/>
                       </a:pPr>
                       <a:r>
@@ -24553,7 +24646,7 @@
                       </a:endParaRPr>
                     </a:p>
                   </a:txBody>
-                  <a:tcPr marL="91440" marR="91440" marT="45720" marB="45720" anchor="ctr">
+                  <a:tcPr anchor="ctr">
                     <a:lnL w="12700" cap="flat" cmpd="sng" algn="ctr">
                       <a:solidFill>
                         <a:srgbClr val="D8D8E6"/>
@@ -24595,6 +24688,11 @@
                     </a:solidFill>
                   </a:tcPr>
                 </a:tc>
+                <a:extLst>
+                  <a:ext uri="{0D108BD9-81ED-4DB2-BD59-A6C34878D82A}">
+                    <a16:rowId xmlns:a16="http://schemas.microsoft.com/office/drawing/2014/main" val="10001"/>
+                  </a:ext>
+                </a:extLst>
               </a:tr>
               <a:tr h="640080">
                 <a:tc>
@@ -24602,7 +24700,7 @@
                     <a:bodyPr/>
                     <a:lstStyle/>
                     <a:p>
-                      <a:pPr algn="l" indent="0" marL="0">
+                      <a:pPr marL="0" indent="0" algn="l">
                         <a:buNone/>
                       </a:pPr>
                       <a:r>
@@ -24623,7 +24721,7 @@
                       </a:endParaRPr>
                     </a:p>
                   </a:txBody>
-                  <a:tcPr marL="91440" marR="91440" marT="45720" marB="45720" anchor="ctr">
+                  <a:tcPr anchor="ctr">
                     <a:lnL w="12700" cap="flat" cmpd="sng" algn="ctr">
                       <a:solidFill>
                         <a:srgbClr val="D8D8E6"/>
@@ -24670,7 +24768,7 @@
                     <a:bodyPr/>
                     <a:lstStyle/>
                     <a:p>
-                      <a:pPr algn="ctr" indent="0" marL="0">
+                      <a:pPr marL="0" indent="0" algn="ctr">
                         <a:buNone/>
                       </a:pPr>
                       <a:r>
@@ -24691,7 +24789,7 @@
                       </a:endParaRPr>
                     </a:p>
                   </a:txBody>
-                  <a:tcPr marL="91440" marR="91440" marT="45720" marB="45720" anchor="ctr">
+                  <a:tcPr anchor="ctr">
                     <a:lnL w="12700" cap="flat" cmpd="sng" algn="ctr">
                       <a:solidFill>
                         <a:srgbClr val="D8D8E6"/>
@@ -24738,7 +24836,7 @@
                     <a:bodyPr/>
                     <a:lstStyle/>
                     <a:p>
-                      <a:pPr algn="ctr" indent="0" marL="0">
+                      <a:pPr marL="0" indent="0" algn="ctr">
                         <a:buNone/>
                       </a:pPr>
                       <a:r>
@@ -24759,7 +24857,7 @@
                       </a:endParaRPr>
                     </a:p>
                   </a:txBody>
-                  <a:tcPr marL="91440" marR="91440" marT="45720" marB="45720" anchor="ctr">
+                  <a:tcPr anchor="ctr">
                     <a:lnL w="12700" cap="flat" cmpd="sng" algn="ctr">
                       <a:solidFill>
                         <a:srgbClr val="D8D8E6"/>
@@ -24801,6 +24899,11 @@
                     </a:solidFill>
                   </a:tcPr>
                 </a:tc>
+                <a:extLst>
+                  <a:ext uri="{0D108BD9-81ED-4DB2-BD59-A6C34878D82A}">
+                    <a16:rowId xmlns:a16="http://schemas.microsoft.com/office/drawing/2014/main" val="10002"/>
+                  </a:ext>
+                </a:extLst>
               </a:tr>
               <a:tr h="640080">
                 <a:tc>
@@ -24808,7 +24911,7 @@
                     <a:bodyPr/>
                     <a:lstStyle/>
                     <a:p>
-                      <a:pPr algn="l" indent="0" marL="0">
+                      <a:pPr marL="0" indent="0" algn="l">
                         <a:buNone/>
                       </a:pPr>
                       <a:r>
@@ -24829,7 +24932,7 @@
                       </a:endParaRPr>
                     </a:p>
                   </a:txBody>
-                  <a:tcPr marL="91440" marR="91440" marT="45720" marB="45720" anchor="ctr">
+                  <a:tcPr anchor="ctr">
                     <a:lnL w="12700" cap="flat" cmpd="sng" algn="ctr">
                       <a:solidFill>
                         <a:srgbClr val="D8D8E6"/>
@@ -24876,7 +24979,7 @@
                     <a:bodyPr/>
                     <a:lstStyle/>
                     <a:p>
-                      <a:pPr algn="ctr" indent="0" marL="0">
+                      <a:pPr marL="0" indent="0" algn="ctr">
                         <a:buNone/>
                       </a:pPr>
                       <a:r>
@@ -24897,7 +25000,7 @@
                       </a:endParaRPr>
                     </a:p>
                   </a:txBody>
-                  <a:tcPr marL="91440" marR="91440" marT="45720" marB="45720" anchor="ctr">
+                  <a:tcPr anchor="ctr">
                     <a:lnL w="12700" cap="flat" cmpd="sng" algn="ctr">
                       <a:solidFill>
                         <a:srgbClr val="D8D8E6"/>
@@ -24944,7 +25047,7 @@
                     <a:bodyPr/>
                     <a:lstStyle/>
                     <a:p>
-                      <a:pPr algn="ctr" indent="0" marL="0">
+                      <a:pPr marL="0" indent="0" algn="ctr">
                         <a:buNone/>
                       </a:pPr>
                       <a:r>
@@ -24965,7 +25068,7 @@
                       </a:endParaRPr>
                     </a:p>
                   </a:txBody>
-                  <a:tcPr marL="91440" marR="91440" marT="45720" marB="45720" anchor="ctr">
+                  <a:tcPr anchor="ctr">
                     <a:lnL w="12700" cap="flat" cmpd="sng" algn="ctr">
                       <a:solidFill>
                         <a:srgbClr val="D8D8E6"/>
@@ -25007,6 +25110,11 @@
                     </a:solidFill>
                   </a:tcPr>
                 </a:tc>
+                <a:extLst>
+                  <a:ext uri="{0D108BD9-81ED-4DB2-BD59-A6C34878D82A}">
+                    <a16:rowId xmlns:a16="http://schemas.microsoft.com/office/drawing/2014/main" val="10003"/>
+                  </a:ext>
+                </a:extLst>
               </a:tr>
               <a:tr h="640080">
                 <a:tc>
@@ -25014,7 +25122,7 @@
                     <a:bodyPr/>
                     <a:lstStyle/>
                     <a:p>
-                      <a:pPr algn="l" indent="0" marL="0">
+                      <a:pPr marL="0" indent="0" algn="l">
                         <a:buNone/>
                       </a:pPr>
                       <a:r>
@@ -25035,7 +25143,7 @@
                       </a:endParaRPr>
                     </a:p>
                   </a:txBody>
-                  <a:tcPr marL="91440" marR="91440" marT="45720" marB="45720" anchor="ctr">
+                  <a:tcPr anchor="ctr">
                     <a:lnL w="12700" cap="flat" cmpd="sng" algn="ctr">
                       <a:solidFill>
                         <a:srgbClr val="D8D8E6"/>
@@ -25082,7 +25190,7 @@
                     <a:bodyPr/>
                     <a:lstStyle/>
                     <a:p>
-                      <a:pPr algn="ctr" indent="0" marL="0">
+                      <a:pPr marL="0" indent="0" algn="ctr">
                         <a:buNone/>
                       </a:pPr>
                       <a:r>
@@ -25103,7 +25211,7 @@
                       </a:endParaRPr>
                     </a:p>
                   </a:txBody>
-                  <a:tcPr marL="91440" marR="91440" marT="45720" marB="45720" anchor="ctr">
+                  <a:tcPr anchor="ctr">
                     <a:lnL w="12700" cap="flat" cmpd="sng" algn="ctr">
                       <a:solidFill>
                         <a:srgbClr val="D8D8E6"/>
@@ -25150,7 +25258,7 @@
                     <a:bodyPr/>
                     <a:lstStyle/>
                     <a:p>
-                      <a:pPr algn="ctr" indent="0" marL="0">
+                      <a:pPr marL="0" indent="0" algn="ctr">
                         <a:buNone/>
                       </a:pPr>
                       <a:r>
@@ -25171,7 +25279,7 @@
                       </a:endParaRPr>
                     </a:p>
                   </a:txBody>
-                  <a:tcPr marL="91440" marR="91440" marT="45720" marB="45720" anchor="ctr">
+                  <a:tcPr anchor="ctr">
                     <a:lnL w="12700" cap="flat" cmpd="sng" algn="ctr">
                       <a:solidFill>
                         <a:srgbClr val="D8D8E6"/>
@@ -25213,6 +25321,11 @@
                     </a:solidFill>
                   </a:tcPr>
                 </a:tc>
+                <a:extLst>
+                  <a:ext uri="{0D108BD9-81ED-4DB2-BD59-A6C34878D82A}">
+                    <a16:rowId xmlns:a16="http://schemas.microsoft.com/office/drawing/2014/main" val="10004"/>
+                  </a:ext>
+                </a:extLst>
               </a:tr>
             </a:tbl>
           </a:graphicData>
@@ -25235,7 +25348,7 @@
           <a:noFill/>
         </p:spPr>
         <p:txBody>
-          <a:bodyPr wrap="none" lIns="0" rIns="0" tIns="0" bIns="0">
+          <a:bodyPr wrap="none" lIns="0" tIns="0" rIns="0" bIns="0">
             <a:spAutoFit/>
           </a:bodyPr>
           <a:lstStyle/>
@@ -25277,6 +25390,7 @@
         <a:solidFill>
           <a:srgbClr val="FFFFFF"/>
         </a:solidFill>
+        <a:effectLst/>
       </p:bgPr>
     </p:bg>
     <p:spTree>
@@ -25314,11 +25428,11 @@
           <a:bodyPr wrap="square" lIns="0" tIns="0" rIns="0" bIns="0" rtlCol="0" anchor="ctr"/>
           <a:lstStyle/>
           <a:p>
-            <a:pPr algn="l" indent="0" marL="0">
+            <a:pPr marL="0" indent="0" algn="l">
               <a:buNone/>
             </a:pPr>
             <a:r>
-              <a:rPr lang="en-US" sz="1300" b="1" spc="300" kern="0" dirty="0">
+              <a:rPr lang="en-US" sz="1300" b="1" kern="0" spc="300" dirty="0">
                 <a:solidFill>
                   <a:srgbClr val="FF8A3D"/>
                 </a:solidFill>
@@ -25353,7 +25467,7 @@
           <a:bodyPr wrap="square" lIns="0" tIns="0" rIns="0" bIns="0" rtlCol="0" anchor="ctr"/>
           <a:lstStyle/>
           <a:p>
-            <a:pPr algn="l" indent="0" marL="0">
+            <a:pPr marL="0" indent="0" algn="l">
               <a:buNone/>
             </a:pPr>
             <a:r>
@@ -25394,7 +25508,10 @@
         </p:spPr>
         <p:txBody>
           <a:bodyPr/>
-          <a:p/>
+          <a:lstStyle/>
+          <a:p>
+            <a:endParaRPr/>
+          </a:p>
         </p:txBody>
       </p:sp>
       <p:sp>
@@ -25418,7 +25535,7 @@
           <a:bodyPr wrap="square" lIns="0" tIns="0" rIns="0" bIns="0" rtlCol="0" anchor="t"/>
           <a:lstStyle/>
           <a:p>
-            <a:pPr indent="0" marL="0">
+            <a:pPr marL="0" indent="0">
               <a:lnSpc>
                 <a:spcPct val="125000"/>
               </a:lnSpc>
@@ -25438,7 +25555,7 @@
             <a:endParaRPr lang="en-US" sz="1400" dirty="0"/>
           </a:p>
           <a:p>
-            <a:pPr indent="0" marL="0">
+            <a:pPr marL="0" indent="0">
               <a:lnSpc>
                 <a:spcPct val="125000"/>
               </a:lnSpc>
@@ -25458,7 +25575,7 @@
             <a:endParaRPr lang="en-US" sz="1400" dirty="0"/>
           </a:p>
           <a:p>
-            <a:pPr indent="0" marL="0">
+            <a:pPr marL="0" indent="0">
               <a:lnSpc>
                 <a:spcPct val="125000"/>
               </a:lnSpc>
@@ -25478,7 +25595,7 @@
             <a:endParaRPr lang="en-US" sz="1400" dirty="0"/>
           </a:p>
           <a:p>
-            <a:pPr indent="0" marL="0">
+            <a:pPr marL="0" indent="0">
               <a:lnSpc>
                 <a:spcPct val="125000"/>
               </a:lnSpc>
@@ -25498,7 +25615,7 @@
             <a:endParaRPr lang="en-US" sz="1400" dirty="0"/>
           </a:p>
           <a:p>
-            <a:pPr indent="0" marL="0">
+            <a:pPr marL="0" indent="0">
               <a:lnSpc>
                 <a:spcPct val="125000"/>
               </a:lnSpc>
@@ -25507,7 +25624,7 @@
             <a:endParaRPr lang="en-US" sz="1400" dirty="0"/>
           </a:p>
           <a:p>
-            <a:pPr indent="0" marL="0">
+            <a:pPr marL="0" indent="0">
               <a:lnSpc>
                 <a:spcPct val="125000"/>
               </a:lnSpc>
@@ -25527,7 +25644,7 @@
             <a:endParaRPr lang="en-US" sz="1400" dirty="0"/>
           </a:p>
           <a:p>
-            <a:pPr indent="0" marL="0">
+            <a:pPr marL="0" indent="0">
               <a:lnSpc>
                 <a:spcPct val="125000"/>
               </a:lnSpc>
@@ -25536,7 +25653,7 @@
             <a:endParaRPr lang="en-US" sz="1400" dirty="0"/>
           </a:p>
           <a:p>
-            <a:pPr indent="0" marL="0">
+            <a:pPr marL="0" indent="0">
               <a:lnSpc>
                 <a:spcPct val="125000"/>
               </a:lnSpc>
@@ -25578,7 +25695,7 @@
           <a:bodyPr wrap="square" lIns="0" tIns="0" rIns="0" bIns="0" rtlCol="0" anchor="t"/>
           <a:lstStyle/>
           <a:p>
-            <a:pPr indent="0" marL="0">
+            <a:pPr marL="0" indent="0">
               <a:buNone/>
             </a:pPr>
             <a:r>
@@ -25613,7 +25730,7 @@
           <a:noFill/>
         </p:spPr>
         <p:txBody>
-          <a:bodyPr wrap="none" lIns="0" rIns="0" tIns="0" bIns="0">
+          <a:bodyPr wrap="none" lIns="0" tIns="0" rIns="0" bIns="0">
             <a:spAutoFit/>
           </a:bodyPr>
           <a:lstStyle/>
@@ -25655,6 +25772,7 @@
         <a:solidFill>
           <a:srgbClr val="FFFFFF"/>
         </a:solidFill>
+        <a:effectLst/>
       </p:bgPr>
     </p:bg>
     <p:spTree>
@@ -25692,11 +25810,11 @@
           <a:bodyPr wrap="square" lIns="0" tIns="0" rIns="0" bIns="0" rtlCol="0" anchor="ctr"/>
           <a:lstStyle/>
           <a:p>
-            <a:pPr algn="l" indent="0" marL="0">
+            <a:pPr marL="0" indent="0" algn="l">
               <a:buNone/>
             </a:pPr>
             <a:r>
-              <a:rPr lang="en-US" sz="1300" b="1" spc="300" kern="0" dirty="0">
+              <a:rPr lang="en-US" sz="1300" b="1" kern="0" spc="300" dirty="0">
                 <a:solidFill>
                   <a:srgbClr val="FF8A3D"/>
                 </a:solidFill>
@@ -25731,7 +25849,7 @@
           <a:bodyPr wrap="square" lIns="0" tIns="0" rIns="0" bIns="0" rtlCol="0" anchor="ctr"/>
           <a:lstStyle/>
           <a:p>
-            <a:pPr algn="l" indent="0" marL="0">
+            <a:pPr marL="0" indent="0" algn="l">
               <a:buNone/>
             </a:pPr>
             <a:r>
@@ -25777,7 +25895,10 @@
         </p:spPr>
         <p:txBody>
           <a:bodyPr/>
-          <a:p/>
+          <a:lstStyle/>
+          <a:p>
+            <a:endParaRPr/>
+          </a:p>
         </p:txBody>
       </p:sp>
       <p:sp>
@@ -25801,11 +25922,11 @@
           <a:bodyPr wrap="square" lIns="0" tIns="0" rIns="0" bIns="0" rtlCol="0" anchor="ctr"/>
           <a:lstStyle/>
           <a:p>
-            <a:pPr indent="0" marL="0">
+            <a:pPr marL="0" indent="0">
               <a:buNone/>
             </a:pPr>
             <a:r>
-              <a:rPr lang="en-US" sz="1000" b="1" spc="200" kern="0" dirty="0">
+              <a:rPr lang="en-US" sz="1000" b="1" kern="0" spc="200" dirty="0">
                 <a:solidFill>
                   <a:srgbClr val="8A3A12"/>
                 </a:solidFill>
@@ -25840,7 +25961,7 @@
           <a:bodyPr wrap="square" lIns="0" tIns="0" rIns="0" bIns="0" rtlCol="0" anchor="t"/>
           <a:lstStyle/>
           <a:p>
-            <a:pPr indent="0" marL="0">
+            <a:pPr marL="0" indent="0">
               <a:buNone/>
             </a:pPr>
             <a:r>
@@ -25875,7 +25996,7 @@
           <a:noFill/>
         </p:spPr>
         <p:txBody>
-          <a:bodyPr wrap="none" lIns="0" rIns="0" tIns="0" bIns="0">
+          <a:bodyPr wrap="none" lIns="0" tIns="0" rIns="0" bIns="0">
             <a:spAutoFit/>
           </a:bodyPr>
           <a:lstStyle/>
@@ -25917,6 +26038,7 @@
         <a:solidFill>
           <a:srgbClr val="FFFFFF"/>
         </a:solidFill>
+        <a:effectLst/>
       </p:bgPr>
     </p:bg>
     <p:spTree>
@@ -25954,11 +26076,11 @@
           <a:bodyPr wrap="square" lIns="0" tIns="0" rIns="0" bIns="0" rtlCol="0" anchor="ctr"/>
           <a:lstStyle/>
           <a:p>
-            <a:pPr algn="l" indent="0" marL="0">
+            <a:pPr marL="0" indent="0" algn="l">
               <a:buNone/>
             </a:pPr>
             <a:r>
-              <a:rPr lang="en-US" sz="1300" b="1" spc="300" kern="0" dirty="0">
+              <a:rPr lang="en-US" sz="1300" b="1" kern="0" spc="300" dirty="0">
                 <a:solidFill>
                   <a:srgbClr val="FF8A3D"/>
                 </a:solidFill>
@@ -25993,7 +26115,7 @@
           <a:bodyPr wrap="square" lIns="0" tIns="0" rIns="0" bIns="0" rtlCol="0" anchor="ctr"/>
           <a:lstStyle/>
           <a:p>
-            <a:pPr algn="l" indent="0" marL="0">
+            <a:pPr marL="0" indent="0" algn="l">
               <a:buNone/>
             </a:pPr>
             <a:r>
@@ -26032,11 +26154,11 @@
           <a:bodyPr wrap="square" lIns="0" tIns="0" rIns="0" bIns="0" rtlCol="0" anchor="ctr"/>
           <a:lstStyle/>
           <a:p>
-            <a:pPr algn="ctr" indent="0" marL="0">
+            <a:pPr marL="0" indent="0" algn="ctr">
               <a:buNone/>
             </a:pPr>
             <a:r>
-              <a:rPr lang="en-US" sz="1100" b="1" spc="150" kern="0" dirty="0">
+              <a:rPr lang="en-US" sz="1100" b="1" kern="0" spc="150" dirty="0">
                 <a:solidFill>
                   <a:srgbClr val="E67528"/>
                 </a:solidFill>
@@ -26076,7 +26198,7 @@
             <a:prstDash val="solid"/>
           </a:ln>
           <a:effectLst>
-            <a:outerShdw sx="100000" sy="100000" kx="0" ky="0" algn="bl" rotWithShape="0" blurRad="101600" dist="38100" dir="5400000">
+            <a:outerShdw blurRad="101600" dist="38100" dir="5400000" algn="bl" rotWithShape="0">
               <a:srgbClr val="000000">
                 <a:alpha val="12000"/>
               </a:srgbClr>
@@ -26085,19 +26207,22 @@
         </p:spPr>
         <p:txBody>
           <a:bodyPr/>
-          <a:p/>
+          <a:lstStyle/>
+          <a:p>
+            <a:endParaRPr/>
+          </a:p>
         </p:txBody>
       </p:sp>
       <p:pic>
         <p:nvPicPr>
-          <p:cNvPr id="6" name="Image 0" descr="D:/GitHub/mern-web-book/docs/assets/img/lecture-10/bootstrap-sass-before.png">    </p:cNvPr>
+          <p:cNvPr id="6" name="Image 0" descr="D:/GitHub/mern-web-book/docs/assets/img/lecture-10/bootstrap-sass-before.png"/>
           <p:cNvPicPr>
             <a:picLocks noChangeAspect="1"/>
           </p:cNvPicPr>
           <p:nvPr/>
         </p:nvPicPr>
         <p:blipFill>
-          <a:blip r:embed="rId1"/>
+          <a:blip r:embed="rId3"/>
           <a:stretch>
             <a:fillRect/>
           </a:stretch>
@@ -26133,11 +26258,11 @@
           <a:bodyPr wrap="square" lIns="0" tIns="0" rIns="0" bIns="0" rtlCol="0" anchor="ctr"/>
           <a:lstStyle/>
           <a:p>
-            <a:pPr algn="ctr" indent="0" marL="0">
+            <a:pPr marL="0" indent="0" algn="ctr">
               <a:buNone/>
             </a:pPr>
             <a:r>
-              <a:rPr lang="en-US" sz="1100" b="1" spc="150" kern="0" dirty="0">
+              <a:rPr lang="en-US" sz="1100" b="1" kern="0" spc="150" dirty="0">
                 <a:solidFill>
                   <a:srgbClr val="E67528"/>
                 </a:solidFill>
@@ -26177,7 +26302,7 @@
             <a:prstDash val="solid"/>
           </a:ln>
           <a:effectLst>
-            <a:outerShdw sx="100000" sy="100000" kx="0" ky="0" algn="bl" rotWithShape="0" blurRad="101600" dist="38100" dir="5400000">
+            <a:outerShdw blurRad="101600" dist="38100" dir="5400000" algn="bl" rotWithShape="0">
               <a:srgbClr val="000000">
                 <a:alpha val="12000"/>
               </a:srgbClr>
@@ -26186,19 +26311,22 @@
         </p:spPr>
         <p:txBody>
           <a:bodyPr/>
-          <a:p/>
+          <a:lstStyle/>
+          <a:p>
+            <a:endParaRPr/>
+          </a:p>
         </p:txBody>
       </p:sp>
       <p:pic>
         <p:nvPicPr>
-          <p:cNvPr id="9" name="Image 1" descr="D:/GitHub/mern-web-book/docs/assets/img/lecture-10/bootstrap-sass-after.png">    </p:cNvPr>
+          <p:cNvPr id="9" name="Image 1" descr="D:/GitHub/mern-web-book/docs/assets/img/lecture-10/bootstrap-sass-after.png"/>
           <p:cNvPicPr>
             <a:picLocks noChangeAspect="1"/>
           </p:cNvPicPr>
           <p:nvPr/>
         </p:nvPicPr>
         <p:blipFill>
-          <a:blip r:embed="rId2"/>
+          <a:blip r:embed="rId4"/>
           <a:stretch>
             <a:fillRect/>
           </a:stretch>
@@ -26230,7 +26358,7 @@
           <a:noFill/>
         </p:spPr>
         <p:txBody>
-          <a:bodyPr wrap="none" lIns="0" rIns="0" tIns="0" bIns="0">
+          <a:bodyPr wrap="none" lIns="0" tIns="0" rIns="0" bIns="0">
             <a:spAutoFit/>
           </a:bodyPr>
           <a:lstStyle/>
@@ -26272,6 +26400,7 @@
         <a:solidFill>
           <a:srgbClr val="2B2B7A"/>
         </a:solidFill>
+        <a:effectLst/>
       </p:bgPr>
     </p:bg>
     <p:spTree>
@@ -26309,11 +26438,11 @@
           <a:bodyPr wrap="square" lIns="0" tIns="0" rIns="0" bIns="0" rtlCol="0" anchor="ctr"/>
           <a:lstStyle/>
           <a:p>
-            <a:pPr indent="0" marL="0">
+            <a:pPr marL="0" indent="0">
               <a:buNone/>
             </a:pPr>
             <a:r>
-              <a:rPr lang="en-US" sz="1500" b="1" spc="400" kern="0" dirty="0">
+              <a:rPr lang="en-US" sz="1500" b="1" kern="0" spc="400" dirty="0">
                 <a:solidFill>
                   <a:srgbClr val="FF8A3D"/>
                 </a:solidFill>
@@ -26348,7 +26477,7 @@
           <a:bodyPr wrap="square" lIns="0" tIns="0" rIns="0" bIns="0" rtlCol="0" anchor="ctr"/>
           <a:lstStyle/>
           <a:p>
-            <a:pPr indent="0" marL="0">
+            <a:pPr marL="0" indent="0">
               <a:buNone/>
             </a:pPr>
             <a:r>
@@ -26387,7 +26516,10 @@
         </p:spPr>
         <p:txBody>
           <a:bodyPr/>
-          <a:p/>
+          <a:lstStyle/>
+          <a:p>
+            <a:endParaRPr/>
+          </a:p>
         </p:txBody>
       </p:sp>
       <p:sp>
@@ -26411,7 +26543,7 @@
           <a:bodyPr wrap="square" lIns="0" tIns="0" rIns="0" bIns="0" rtlCol="0" anchor="ctr"/>
           <a:lstStyle/>
           <a:p>
-            <a:pPr algn="ctr" indent="0" marL="0">
+            <a:pPr marL="0" indent="0" algn="ctr">
               <a:buNone/>
             </a:pPr>
             <a:r>
@@ -26450,7 +26582,7 @@
           <a:bodyPr wrap="square" lIns="0" tIns="0" rIns="0" bIns="0" rtlCol="0" anchor="ctr"/>
           <a:lstStyle/>
           <a:p>
-            <a:pPr indent="0" marL="0">
+            <a:pPr marL="0" indent="0">
               <a:buNone/>
             </a:pPr>
             <a:r>
@@ -26489,7 +26621,10 @@
         </p:spPr>
         <p:txBody>
           <a:bodyPr/>
-          <a:p/>
+          <a:lstStyle/>
+          <a:p>
+            <a:endParaRPr/>
+          </a:p>
         </p:txBody>
       </p:sp>
       <p:sp>
@@ -26513,7 +26648,7 @@
           <a:bodyPr wrap="square" lIns="0" tIns="0" rIns="0" bIns="0" rtlCol="0" anchor="ctr"/>
           <a:lstStyle/>
           <a:p>
-            <a:pPr algn="ctr" indent="0" marL="0">
+            <a:pPr marL="0" indent="0" algn="ctr">
               <a:buNone/>
             </a:pPr>
             <a:r>
@@ -26552,7 +26687,7 @@
           <a:bodyPr wrap="square" lIns="0" tIns="0" rIns="0" bIns="0" rtlCol="0" anchor="ctr"/>
           <a:lstStyle/>
           <a:p>
-            <a:pPr indent="0" marL="0">
+            <a:pPr marL="0" indent="0">
               <a:buNone/>
             </a:pPr>
             <a:r>
@@ -26591,7 +26726,10 @@
         </p:spPr>
         <p:txBody>
           <a:bodyPr/>
-          <a:p/>
+          <a:lstStyle/>
+          <a:p>
+            <a:endParaRPr/>
+          </a:p>
         </p:txBody>
       </p:sp>
       <p:sp>
@@ -26615,7 +26753,7 @@
           <a:bodyPr wrap="square" lIns="0" tIns="0" rIns="0" bIns="0" rtlCol="0" anchor="ctr"/>
           <a:lstStyle/>
           <a:p>
-            <a:pPr algn="ctr" indent="0" marL="0">
+            <a:pPr marL="0" indent="0" algn="ctr">
               <a:buNone/>
             </a:pPr>
             <a:r>
@@ -26654,7 +26792,7 @@
           <a:bodyPr wrap="square" lIns="0" tIns="0" rIns="0" bIns="0" rtlCol="0" anchor="ctr"/>
           <a:lstStyle/>
           <a:p>
-            <a:pPr indent="0" marL="0">
+            <a:pPr marL="0" indent="0">
               <a:buNone/>
             </a:pPr>
             <a:r>
@@ -26693,7 +26831,10 @@
         </p:spPr>
         <p:txBody>
           <a:bodyPr/>
-          <a:p/>
+          <a:lstStyle/>
+          <a:p>
+            <a:endParaRPr/>
+          </a:p>
         </p:txBody>
       </p:sp>
       <p:sp>
@@ -26717,7 +26858,7 @@
           <a:bodyPr wrap="square" lIns="0" tIns="0" rIns="0" bIns="0" rtlCol="0" anchor="ctr"/>
           <a:lstStyle/>
           <a:p>
-            <a:pPr algn="ctr" indent="0" marL="0">
+            <a:pPr marL="0" indent="0" algn="ctr">
               <a:buNone/>
             </a:pPr>
             <a:r>
@@ -26756,7 +26897,7 @@
           <a:bodyPr wrap="square" lIns="0" tIns="0" rIns="0" bIns="0" rtlCol="0" anchor="ctr"/>
           <a:lstStyle/>
           <a:p>
-            <a:pPr indent="0" marL="0">
+            <a:pPr marL="0" indent="0">
               <a:buNone/>
             </a:pPr>
             <a:r>
@@ -26795,7 +26936,10 @@
         </p:spPr>
         <p:txBody>
           <a:bodyPr/>
-          <a:p/>
+          <a:lstStyle/>
+          <a:p>
+            <a:endParaRPr/>
+          </a:p>
         </p:txBody>
       </p:sp>
       <p:sp>
@@ -26819,7 +26963,7 @@
           <a:bodyPr wrap="square" lIns="0" tIns="0" rIns="0" bIns="0" rtlCol="0" anchor="ctr"/>
           <a:lstStyle/>
           <a:p>
-            <a:pPr algn="ctr" indent="0" marL="0">
+            <a:pPr marL="0" indent="0" algn="ctr">
               <a:buNone/>
             </a:pPr>
             <a:r>
@@ -26858,7 +27002,7 @@
           <a:bodyPr wrap="square" lIns="0" tIns="0" rIns="0" bIns="0" rtlCol="0" anchor="ctr"/>
           <a:lstStyle/>
           <a:p>
-            <a:pPr indent="0" marL="0">
+            <a:pPr marL="0" indent="0">
               <a:buNone/>
             </a:pPr>
             <a:r>
@@ -26897,7 +27041,10 @@
         </p:spPr>
         <p:txBody>
           <a:bodyPr/>
-          <a:p/>
+          <a:lstStyle/>
+          <a:p>
+            <a:endParaRPr/>
+          </a:p>
         </p:txBody>
       </p:sp>
       <p:sp>
@@ -26921,7 +27068,7 @@
           <a:bodyPr wrap="square" lIns="0" tIns="0" rIns="0" bIns="0" rtlCol="0" anchor="ctr"/>
           <a:lstStyle/>
           <a:p>
-            <a:pPr algn="ctr" indent="0" marL="0">
+            <a:pPr marL="0" indent="0" algn="ctr">
               <a:buNone/>
             </a:pPr>
             <a:r>
@@ -26960,7 +27107,7 @@
           <a:bodyPr wrap="square" lIns="0" tIns="0" rIns="0" bIns="0" rtlCol="0" anchor="ctr"/>
           <a:lstStyle/>
           <a:p>
-            <a:pPr indent="0" marL="0">
+            <a:pPr marL="0" indent="0">
               <a:buNone/>
             </a:pPr>
             <a:r>
@@ -26999,7 +27146,10 @@
         </p:spPr>
         <p:txBody>
           <a:bodyPr/>
-          <a:p/>
+          <a:lstStyle/>
+          <a:p>
+            <a:endParaRPr/>
+          </a:p>
         </p:txBody>
       </p:sp>
       <p:sp>
@@ -27023,7 +27173,7 @@
           <a:bodyPr wrap="square" lIns="0" tIns="0" rIns="0" bIns="0" rtlCol="0" anchor="ctr"/>
           <a:lstStyle/>
           <a:p>
-            <a:pPr algn="ctr" indent="0" marL="0">
+            <a:pPr marL="0" indent="0" algn="ctr">
               <a:buNone/>
             </a:pPr>
             <a:r>
@@ -27062,7 +27212,7 @@
           <a:bodyPr wrap="square" lIns="0" tIns="0" rIns="0" bIns="0" rtlCol="0" anchor="ctr"/>
           <a:lstStyle/>
           <a:p>
-            <a:pPr indent="0" marL="0">
+            <a:pPr marL="0" indent="0">
               <a:buNone/>
             </a:pPr>
             <a:r>
@@ -27101,7 +27251,10 @@
         </p:spPr>
         <p:txBody>
           <a:bodyPr/>
-          <a:p/>
+          <a:lstStyle/>
+          <a:p>
+            <a:endParaRPr/>
+          </a:p>
         </p:txBody>
       </p:sp>
       <p:sp>
@@ -27125,7 +27278,7 @@
           <a:bodyPr wrap="square" lIns="0" tIns="0" rIns="0" bIns="0" rtlCol="0" anchor="ctr"/>
           <a:lstStyle/>
           <a:p>
-            <a:pPr algn="ctr" indent="0" marL="0">
+            <a:pPr marL="0" indent="0" algn="ctr">
               <a:buNone/>
             </a:pPr>
             <a:r>
@@ -27164,7 +27317,7 @@
           <a:bodyPr wrap="square" lIns="0" tIns="0" rIns="0" bIns="0" rtlCol="0" anchor="ctr"/>
           <a:lstStyle/>
           <a:p>
-            <a:pPr indent="0" marL="0">
+            <a:pPr marL="0" indent="0">
               <a:buNone/>
             </a:pPr>
             <a:r>
@@ -27199,7 +27352,7 @@
           <a:noFill/>
         </p:spPr>
         <p:txBody>
-          <a:bodyPr wrap="none" lIns="0" rIns="0" tIns="0" bIns="0">
+          <a:bodyPr wrap="none" lIns="0" tIns="0" rIns="0" bIns="0">
             <a:spAutoFit/>
           </a:bodyPr>
           <a:lstStyle/>
@@ -27241,6 +27394,7 @@
         <a:solidFill>
           <a:srgbClr val="FFFFFF"/>
         </a:solidFill>
+        <a:effectLst/>
       </p:bgPr>
     </p:bg>
     <p:spTree>
@@ -27278,11 +27432,11 @@
           <a:bodyPr wrap="square" lIns="0" tIns="0" rIns="0" bIns="0" rtlCol="0" anchor="ctr"/>
           <a:lstStyle/>
           <a:p>
-            <a:pPr algn="l" indent="0" marL="0">
+            <a:pPr marL="0" indent="0" algn="l">
               <a:buNone/>
             </a:pPr>
             <a:r>
-              <a:rPr lang="en-US" sz="1300" b="1" spc="300" kern="0" dirty="0">
+              <a:rPr lang="en-US" sz="1300" b="1" kern="0" spc="300" dirty="0">
                 <a:solidFill>
                   <a:srgbClr val="FF8A3D"/>
                 </a:solidFill>
@@ -27317,7 +27471,7 @@
           <a:bodyPr wrap="square" lIns="0" tIns="0" rIns="0" bIns="0" rtlCol="0" anchor="ctr"/>
           <a:lstStyle/>
           <a:p>
-            <a:pPr algn="l" indent="0" marL="0">
+            <a:pPr marL="0" indent="0" algn="l">
               <a:buNone/>
             </a:pPr>
             <a:r>
@@ -27358,8 +27512,20 @@
             <a:tbl>
               <a:tblPr/>
               <a:tblGrid>
-                <a:gridCol w="2011680"/>
-                <a:gridCol w="8961120"/>
+                <a:gridCol w="2011680">
+                  <a:extLst>
+                    <a:ext uri="{9D8B030D-6E8A-4147-A177-3AD203B41FA5}">
+                      <a16:colId xmlns:a16="http://schemas.microsoft.com/office/drawing/2014/main" val="20000"/>
+                    </a:ext>
+                  </a:extLst>
+                </a:gridCol>
+                <a:gridCol w="8961120">
+                  <a:extLst>
+                    <a:ext uri="{9D8B030D-6E8A-4147-A177-3AD203B41FA5}">
+                      <a16:colId xmlns:a16="http://schemas.microsoft.com/office/drawing/2014/main" val="20001"/>
+                    </a:ext>
+                  </a:extLst>
+                </a:gridCol>
               </a:tblGrid>
               <a:tr h="566928">
                 <a:tc>
@@ -27367,7 +27533,7 @@
                     <a:bodyPr/>
                     <a:lstStyle/>
                     <a:p>
-                      <a:pPr algn="ctr" indent="0" marL="0">
+                      <a:pPr marL="0" indent="0" algn="ctr">
                         <a:buNone/>
                       </a:pPr>
                       <a:r>
@@ -27388,7 +27554,7 @@
                       </a:endParaRPr>
                     </a:p>
                   </a:txBody>
-                  <a:tcPr marL="91440" marR="91440" marT="45720" marB="45720" anchor="ctr">
+                  <a:tcPr anchor="ctr">
                     <a:lnL w="12700" cap="flat" cmpd="sng" algn="ctr">
                       <a:solidFill>
                         <a:srgbClr val="D8D8E6"/>
@@ -27435,7 +27601,7 @@
                     <a:bodyPr/>
                     <a:lstStyle/>
                     <a:p>
-                      <a:pPr algn="ctr" indent="0" marL="0">
+                      <a:pPr marL="0" indent="0" algn="ctr">
                         <a:buNone/>
                       </a:pPr>
                       <a:r>
@@ -27456,7 +27622,7 @@
                       </a:endParaRPr>
                     </a:p>
                   </a:txBody>
-                  <a:tcPr marL="91440" marR="91440" marT="45720" marB="45720" anchor="ctr">
+                  <a:tcPr anchor="ctr">
                     <a:lnL w="12700" cap="flat" cmpd="sng" algn="ctr">
                       <a:solidFill>
                         <a:srgbClr val="D8D8E6"/>
@@ -27498,6 +27664,11 @@
                     </a:solidFill>
                   </a:tcPr>
                 </a:tc>
+                <a:extLst>
+                  <a:ext uri="{0D108BD9-81ED-4DB2-BD59-A6C34878D82A}">
+                    <a16:rowId xmlns:a16="http://schemas.microsoft.com/office/drawing/2014/main" val="10000"/>
+                  </a:ext>
+                </a:extLst>
               </a:tr>
               <a:tr h="566928">
                 <a:tc>
@@ -27505,7 +27676,7 @@
                     <a:bodyPr/>
                     <a:lstStyle/>
                     <a:p>
-                      <a:pPr algn="l" indent="0" marL="0">
+                      <a:pPr marL="0" indent="0" algn="l">
                         <a:buNone/>
                       </a:pPr>
                       <a:r>
@@ -27526,7 +27697,7 @@
                       </a:endParaRPr>
                     </a:p>
                   </a:txBody>
-                  <a:tcPr marL="91440" marR="91440" marT="45720" marB="45720" anchor="ctr">
+                  <a:tcPr anchor="ctr">
                     <a:lnL w="12700" cap="flat" cmpd="sng" algn="ctr">
                       <a:solidFill>
                         <a:srgbClr val="D8D8E6"/>
@@ -27573,7 +27744,7 @@
                     <a:bodyPr/>
                     <a:lstStyle/>
                     <a:p>
-                      <a:pPr algn="ctr" indent="0" marL="0">
+                      <a:pPr marL="0" indent="0" algn="ctr">
                         <a:buNone/>
                       </a:pPr>
                       <a:r>
@@ -27594,7 +27765,7 @@
                       </a:endParaRPr>
                     </a:p>
                   </a:txBody>
-                  <a:tcPr marL="91440" marR="91440" marT="45720" marB="45720" anchor="ctr">
+                  <a:tcPr anchor="ctr">
                     <a:lnL w="12700" cap="flat" cmpd="sng" algn="ctr">
                       <a:solidFill>
                         <a:srgbClr val="D8D8E6"/>
@@ -27636,6 +27807,11 @@
                     </a:solidFill>
                   </a:tcPr>
                 </a:tc>
+                <a:extLst>
+                  <a:ext uri="{0D108BD9-81ED-4DB2-BD59-A6C34878D82A}">
+                    <a16:rowId xmlns:a16="http://schemas.microsoft.com/office/drawing/2014/main" val="10001"/>
+                  </a:ext>
+                </a:extLst>
               </a:tr>
               <a:tr h="566928">
                 <a:tc>
@@ -27643,7 +27819,7 @@
                     <a:bodyPr/>
                     <a:lstStyle/>
                     <a:p>
-                      <a:pPr algn="l" indent="0" marL="0">
+                      <a:pPr marL="0" indent="0" algn="l">
                         <a:buNone/>
                       </a:pPr>
                       <a:r>
@@ -27664,7 +27840,7 @@
                       </a:endParaRPr>
                     </a:p>
                   </a:txBody>
-                  <a:tcPr marL="91440" marR="91440" marT="45720" marB="45720" anchor="ctr">
+                  <a:tcPr anchor="ctr">
                     <a:lnL w="12700" cap="flat" cmpd="sng" algn="ctr">
                       <a:solidFill>
                         <a:srgbClr val="D8D8E6"/>
@@ -27711,7 +27887,7 @@
                     <a:bodyPr/>
                     <a:lstStyle/>
                     <a:p>
-                      <a:pPr algn="ctr" indent="0" marL="0">
+                      <a:pPr marL="0" indent="0" algn="ctr">
                         <a:buNone/>
                       </a:pPr>
                       <a:r>
@@ -27732,7 +27908,7 @@
                       </a:endParaRPr>
                     </a:p>
                   </a:txBody>
-                  <a:tcPr marL="91440" marR="91440" marT="45720" marB="45720" anchor="ctr">
+                  <a:tcPr anchor="ctr">
                     <a:lnL w="12700" cap="flat" cmpd="sng" algn="ctr">
                       <a:solidFill>
                         <a:srgbClr val="D8D8E6"/>
@@ -27774,6 +27950,11 @@
                     </a:solidFill>
                   </a:tcPr>
                 </a:tc>
+                <a:extLst>
+                  <a:ext uri="{0D108BD9-81ED-4DB2-BD59-A6C34878D82A}">
+                    <a16:rowId xmlns:a16="http://schemas.microsoft.com/office/drawing/2014/main" val="10002"/>
+                  </a:ext>
+                </a:extLst>
               </a:tr>
               <a:tr h="566928">
                 <a:tc>
@@ -27781,7 +27962,7 @@
                     <a:bodyPr/>
                     <a:lstStyle/>
                     <a:p>
-                      <a:pPr algn="l" indent="0" marL="0">
+                      <a:pPr marL="0" indent="0" algn="l">
                         <a:buNone/>
                       </a:pPr>
                       <a:r>
@@ -27802,7 +27983,7 @@
                       </a:endParaRPr>
                     </a:p>
                   </a:txBody>
-                  <a:tcPr marL="91440" marR="91440" marT="45720" marB="45720" anchor="ctr">
+                  <a:tcPr anchor="ctr">
                     <a:lnL w="12700" cap="flat" cmpd="sng" algn="ctr">
                       <a:solidFill>
                         <a:srgbClr val="D8D8E6"/>
@@ -27849,7 +28030,7 @@
                     <a:bodyPr/>
                     <a:lstStyle/>
                     <a:p>
-                      <a:pPr algn="ctr" indent="0" marL="0">
+                      <a:pPr marL="0" indent="0" algn="ctr">
                         <a:buNone/>
                       </a:pPr>
                       <a:r>
@@ -27870,7 +28051,7 @@
                       </a:endParaRPr>
                     </a:p>
                   </a:txBody>
-                  <a:tcPr marL="91440" marR="91440" marT="45720" marB="45720" anchor="ctr">
+                  <a:tcPr anchor="ctr">
                     <a:lnL w="12700" cap="flat" cmpd="sng" algn="ctr">
                       <a:solidFill>
                         <a:srgbClr val="D8D8E6"/>
@@ -27912,6 +28093,11 @@
                     </a:solidFill>
                   </a:tcPr>
                 </a:tc>
+                <a:extLst>
+                  <a:ext uri="{0D108BD9-81ED-4DB2-BD59-A6C34878D82A}">
+                    <a16:rowId xmlns:a16="http://schemas.microsoft.com/office/drawing/2014/main" val="10003"/>
+                  </a:ext>
+                </a:extLst>
               </a:tr>
               <a:tr h="566928">
                 <a:tc>
@@ -27919,7 +28105,7 @@
                     <a:bodyPr/>
                     <a:lstStyle/>
                     <a:p>
-                      <a:pPr algn="l" indent="0" marL="0">
+                      <a:pPr marL="0" indent="0" algn="l">
                         <a:buNone/>
                       </a:pPr>
                       <a:r>
@@ -27940,7 +28126,7 @@
                       </a:endParaRPr>
                     </a:p>
                   </a:txBody>
-                  <a:tcPr marL="91440" marR="91440" marT="45720" marB="45720" anchor="ctr">
+                  <a:tcPr anchor="ctr">
                     <a:lnL w="12700" cap="flat" cmpd="sng" algn="ctr">
                       <a:solidFill>
                         <a:srgbClr val="D8D8E6"/>
@@ -27987,7 +28173,7 @@
                     <a:bodyPr/>
                     <a:lstStyle/>
                     <a:p>
-                      <a:pPr algn="ctr" indent="0" marL="0">
+                      <a:pPr marL="0" indent="0" algn="ctr">
                         <a:buNone/>
                       </a:pPr>
                       <a:r>
@@ -28008,7 +28194,7 @@
                       </a:endParaRPr>
                     </a:p>
                   </a:txBody>
-                  <a:tcPr marL="91440" marR="91440" marT="45720" marB="45720" anchor="ctr">
+                  <a:tcPr anchor="ctr">
                     <a:lnL w="12700" cap="flat" cmpd="sng" algn="ctr">
                       <a:solidFill>
                         <a:srgbClr val="D8D8E6"/>
@@ -28050,6 +28236,11 @@
                     </a:solidFill>
                   </a:tcPr>
                 </a:tc>
+                <a:extLst>
+                  <a:ext uri="{0D108BD9-81ED-4DB2-BD59-A6C34878D82A}">
+                    <a16:rowId xmlns:a16="http://schemas.microsoft.com/office/drawing/2014/main" val="10004"/>
+                  </a:ext>
+                </a:extLst>
               </a:tr>
             </a:tbl>
           </a:graphicData>
@@ -28072,7 +28263,7 @@
           <a:noFill/>
         </p:spPr>
         <p:txBody>
-          <a:bodyPr wrap="none" lIns="0" rIns="0" tIns="0" bIns="0">
+          <a:bodyPr wrap="none" lIns="0" tIns="0" rIns="0" bIns="0">
             <a:spAutoFit/>
           </a:bodyPr>
           <a:lstStyle/>
@@ -28114,6 +28305,7 @@
         <a:solidFill>
           <a:srgbClr val="FFFFFF"/>
         </a:solidFill>
+        <a:effectLst/>
       </p:bgPr>
     </p:bg>
     <p:spTree>
@@ -28151,11 +28343,11 @@
           <a:bodyPr wrap="square" lIns="0" tIns="0" rIns="0" bIns="0" rtlCol="0" anchor="ctr"/>
           <a:lstStyle/>
           <a:p>
-            <a:pPr algn="l" indent="0" marL="0">
+            <a:pPr marL="0" indent="0" algn="l">
               <a:buNone/>
             </a:pPr>
             <a:r>
-              <a:rPr lang="en-US" sz="1300" b="1" spc="300" kern="0" dirty="0">
+              <a:rPr lang="en-US" sz="1300" b="1" kern="0" spc="300" dirty="0">
                 <a:solidFill>
                   <a:srgbClr val="FF8A3D"/>
                 </a:solidFill>
@@ -28190,7 +28382,7 @@
           <a:bodyPr wrap="square" lIns="0" tIns="0" rIns="0" bIns="0" rtlCol="0" anchor="ctr"/>
           <a:lstStyle/>
           <a:p>
-            <a:pPr algn="l" indent="0" marL="0">
+            <a:pPr marL="0" indent="0" algn="l">
               <a:buNone/>
             </a:pPr>
             <a:r>
@@ -28231,7 +28423,10 @@
         </p:spPr>
         <p:txBody>
           <a:bodyPr/>
-          <a:p/>
+          <a:lstStyle/>
+          <a:p>
+            <a:endParaRPr/>
+          </a:p>
         </p:txBody>
       </p:sp>
       <p:sp>
@@ -28255,7 +28450,7 @@
           <a:bodyPr wrap="square" lIns="0" tIns="0" rIns="0" bIns="0" rtlCol="0" anchor="t"/>
           <a:lstStyle/>
           <a:p>
-            <a:pPr indent="0" marL="0">
+            <a:pPr marL="0" indent="0">
               <a:lnSpc>
                 <a:spcPct val="125000"/>
               </a:lnSpc>
@@ -28275,7 +28470,7 @@
             <a:endParaRPr lang="en-US" sz="1400" dirty="0"/>
           </a:p>
           <a:p>
-            <a:pPr indent="0" marL="0">
+            <a:pPr marL="0" indent="0">
               <a:lnSpc>
                 <a:spcPct val="125000"/>
               </a:lnSpc>
@@ -28295,7 +28490,7 @@
             <a:endParaRPr lang="en-US" sz="1400" dirty="0"/>
           </a:p>
           <a:p>
-            <a:pPr indent="0" marL="0">
+            <a:pPr marL="0" indent="0">
               <a:lnSpc>
                 <a:spcPct val="125000"/>
               </a:lnSpc>
@@ -28315,7 +28510,7 @@
             <a:endParaRPr lang="en-US" sz="1400" dirty="0"/>
           </a:p>
           <a:p>
-            <a:pPr indent="0" marL="0">
+            <a:pPr marL="0" indent="0">
               <a:lnSpc>
                 <a:spcPct val="125000"/>
               </a:lnSpc>
@@ -28335,7 +28530,7 @@
             <a:endParaRPr lang="en-US" sz="1400" dirty="0"/>
           </a:p>
           <a:p>
-            <a:pPr indent="0" marL="0">
+            <a:pPr marL="0" indent="0">
               <a:lnSpc>
                 <a:spcPct val="125000"/>
               </a:lnSpc>
@@ -28373,7 +28568,7 @@
           <a:noFill/>
         </p:spPr>
         <p:txBody>
-          <a:bodyPr wrap="none" lIns="0" rIns="0" tIns="0" bIns="0">
+          <a:bodyPr wrap="none" lIns="0" tIns="0" rIns="0" bIns="0">
             <a:spAutoFit/>
           </a:bodyPr>
           <a:lstStyle/>
@@ -28415,6 +28610,7 @@
         <a:solidFill>
           <a:srgbClr val="FFFFFF"/>
         </a:solidFill>
+        <a:effectLst/>
       </p:bgPr>
     </p:bg>
     <p:spTree>
@@ -28452,11 +28648,11 @@
           <a:bodyPr wrap="square" lIns="0" tIns="0" rIns="0" bIns="0" rtlCol="0" anchor="ctr"/>
           <a:lstStyle/>
           <a:p>
-            <a:pPr algn="l" indent="0" marL="0">
+            <a:pPr marL="0" indent="0" algn="l">
               <a:buNone/>
             </a:pPr>
             <a:r>
-              <a:rPr lang="en-US" sz="1300" b="1" spc="300" kern="0" dirty="0">
+              <a:rPr lang="en-US" sz="1300" b="1" kern="0" spc="300" dirty="0">
                 <a:solidFill>
                   <a:srgbClr val="FF8A3D"/>
                 </a:solidFill>
@@ -28491,7 +28687,7 @@
           <a:bodyPr wrap="square" lIns="0" tIns="0" rIns="0" bIns="0" rtlCol="0" anchor="ctr"/>
           <a:lstStyle/>
           <a:p>
-            <a:pPr algn="l" indent="0" marL="0">
+            <a:pPr marL="0" indent="0" algn="l">
               <a:buNone/>
             </a:pPr>
             <a:r>
@@ -28530,11 +28726,11 @@
           <a:bodyPr wrap="square" lIns="0" tIns="0" rIns="0" bIns="0" rtlCol="0" anchor="ctr"/>
           <a:lstStyle/>
           <a:p>
-            <a:pPr algn="ctr" indent="0" marL="0">
+            <a:pPr marL="0" indent="0" algn="ctr">
               <a:buNone/>
             </a:pPr>
             <a:r>
-              <a:rPr lang="en-US" sz="1100" b="1" spc="150" kern="0" dirty="0">
+              <a:rPr lang="en-US" sz="1100" b="1" kern="0" spc="150" dirty="0">
                 <a:solidFill>
                   <a:srgbClr val="E67528"/>
                 </a:solidFill>
@@ -28574,7 +28770,7 @@
             <a:prstDash val="solid"/>
           </a:ln>
           <a:effectLst>
-            <a:outerShdw sx="100000" sy="100000" kx="0" ky="0" algn="bl" rotWithShape="0" blurRad="101600" dist="38100" dir="5400000">
+            <a:outerShdw blurRad="101600" dist="38100" dir="5400000" algn="bl" rotWithShape="0">
               <a:srgbClr val="000000">
                 <a:alpha val="12000"/>
               </a:srgbClr>
@@ -28583,19 +28779,22 @@
         </p:spPr>
         <p:txBody>
           <a:bodyPr/>
-          <a:p/>
+          <a:lstStyle/>
+          <a:p>
+            <a:endParaRPr/>
+          </a:p>
         </p:txBody>
       </p:sp>
       <p:pic>
         <p:nvPicPr>
-          <p:cNvPr id="6" name="Image 0" descr="D:/GitHub/mern-web-book/docs/assets/img/lecture-10/fluid-units-wide.png">    </p:cNvPr>
+          <p:cNvPr id="6" name="Image 0" descr="D:/GitHub/mern-web-book/docs/assets/img/lecture-10/fluid-units-wide.png"/>
           <p:cNvPicPr>
             <a:picLocks noChangeAspect="1"/>
           </p:cNvPicPr>
           <p:nvPr/>
         </p:nvPicPr>
         <p:blipFill>
-          <a:blip r:embed="rId1"/>
+          <a:blip r:embed="rId3"/>
           <a:stretch>
             <a:fillRect/>
           </a:stretch>
@@ -28631,11 +28830,11 @@
           <a:bodyPr wrap="square" lIns="0" tIns="0" rIns="0" bIns="0" rtlCol="0" anchor="ctr"/>
           <a:lstStyle/>
           <a:p>
-            <a:pPr algn="ctr" indent="0" marL="0">
+            <a:pPr marL="0" indent="0" algn="ctr">
               <a:buNone/>
             </a:pPr>
             <a:r>
-              <a:rPr lang="en-US" sz="1100" b="1" spc="150" kern="0" dirty="0">
+              <a:rPr lang="en-US" sz="1100" b="1" kern="0" spc="150" dirty="0">
                 <a:solidFill>
                   <a:srgbClr val="E67528"/>
                 </a:solidFill>
@@ -28675,7 +28874,7 @@
             <a:prstDash val="solid"/>
           </a:ln>
           <a:effectLst>
-            <a:outerShdw sx="100000" sy="100000" kx="0" ky="0" algn="bl" rotWithShape="0" blurRad="101600" dist="38100" dir="5400000">
+            <a:outerShdw blurRad="101600" dist="38100" dir="5400000" algn="bl" rotWithShape="0">
               <a:srgbClr val="000000">
                 <a:alpha val="12000"/>
               </a:srgbClr>
@@ -28684,19 +28883,22 @@
         </p:spPr>
         <p:txBody>
           <a:bodyPr/>
-          <a:p/>
+          <a:lstStyle/>
+          <a:p>
+            <a:endParaRPr/>
+          </a:p>
         </p:txBody>
       </p:sp>
       <p:pic>
         <p:nvPicPr>
-          <p:cNvPr id="9" name="Image 1" descr="D:/GitHub/mern-web-book/docs/assets/img/lecture-10/fluid-units-narrow.png">    </p:cNvPr>
+          <p:cNvPr id="9" name="Image 1" descr="D:/GitHub/mern-web-book/docs/assets/img/lecture-10/fluid-units-narrow.png"/>
           <p:cNvPicPr>
             <a:picLocks noChangeAspect="1"/>
           </p:cNvPicPr>
           <p:nvPr/>
         </p:nvPicPr>
         <p:blipFill>
-          <a:blip r:embed="rId2"/>
+          <a:blip r:embed="rId4"/>
           <a:stretch>
             <a:fillRect/>
           </a:stretch>
@@ -28728,7 +28930,7 @@
           <a:noFill/>
         </p:spPr>
         <p:txBody>
-          <a:bodyPr wrap="none" lIns="0" rIns="0" tIns="0" bIns="0">
+          <a:bodyPr wrap="none" lIns="0" tIns="0" rIns="0" bIns="0">
             <a:spAutoFit/>
           </a:bodyPr>
           <a:lstStyle/>
@@ -28770,6 +28972,7 @@
         <a:solidFill>
           <a:srgbClr val="FFFFFF"/>
         </a:solidFill>
+        <a:effectLst/>
       </p:bgPr>
     </p:bg>
     <p:spTree>
@@ -28807,11 +29010,11 @@
           <a:bodyPr wrap="square" lIns="0" tIns="0" rIns="0" bIns="0" rtlCol="0" anchor="ctr"/>
           <a:lstStyle/>
           <a:p>
-            <a:pPr algn="l" indent="0" marL="0">
+            <a:pPr marL="0" indent="0" algn="l">
               <a:buNone/>
             </a:pPr>
             <a:r>
-              <a:rPr lang="en-US" sz="1300" b="1" spc="300" kern="0" dirty="0">
+              <a:rPr lang="en-US" sz="1300" b="1" kern="0" spc="300" dirty="0">
                 <a:solidFill>
                   <a:srgbClr val="FF8A3D"/>
                 </a:solidFill>
@@ -28846,7 +29049,7 @@
           <a:bodyPr wrap="square" lIns="0" tIns="0" rIns="0" bIns="0" rtlCol="0" anchor="ctr"/>
           <a:lstStyle/>
           <a:p>
-            <a:pPr algn="l" indent="0" marL="0">
+            <a:pPr marL="0" indent="0" algn="l">
               <a:buNone/>
             </a:pPr>
             <a:r>
@@ -28887,7 +29090,10 @@
         </p:spPr>
         <p:txBody>
           <a:bodyPr/>
-          <a:p/>
+          <a:lstStyle/>
+          <a:p>
+            <a:endParaRPr/>
+          </a:p>
         </p:txBody>
       </p:sp>
       <p:sp>
@@ -28911,7 +29117,7 @@
           <a:bodyPr wrap="square" lIns="0" tIns="0" rIns="0" bIns="0" rtlCol="0" anchor="t"/>
           <a:lstStyle/>
           <a:p>
-            <a:pPr indent="0" marL="0">
+            <a:pPr marL="0" indent="0">
               <a:lnSpc>
                 <a:spcPct val="125000"/>
               </a:lnSpc>
@@ -28931,7 +29137,7 @@
             <a:endParaRPr lang="en-US" sz="1400" dirty="0"/>
           </a:p>
           <a:p>
-            <a:pPr indent="0" marL="0">
+            <a:pPr marL="0" indent="0">
               <a:lnSpc>
                 <a:spcPct val="125000"/>
               </a:lnSpc>
@@ -28940,7 +29146,7 @@
             <a:endParaRPr lang="en-US" sz="1400" dirty="0"/>
           </a:p>
           <a:p>
-            <a:pPr indent="0" marL="0">
+            <a:pPr marL="0" indent="0">
               <a:lnSpc>
                 <a:spcPct val="125000"/>
               </a:lnSpc>
@@ -28960,7 +29166,7 @@
             <a:endParaRPr lang="en-US" sz="1400" dirty="0"/>
           </a:p>
           <a:p>
-            <a:pPr indent="0" marL="0">
+            <a:pPr marL="0" indent="0">
               <a:lnSpc>
                 <a:spcPct val="125000"/>
               </a:lnSpc>
@@ -28980,7 +29186,7 @@
             <a:endParaRPr lang="en-US" sz="1400" dirty="0"/>
           </a:p>
           <a:p>
-            <a:pPr indent="0" marL="0">
+            <a:pPr marL="0" indent="0">
               <a:lnSpc>
                 <a:spcPct val="125000"/>
               </a:lnSpc>
@@ -29018,7 +29224,7 @@
           <a:noFill/>
         </p:spPr>
         <p:txBody>
-          <a:bodyPr wrap="none" lIns="0" rIns="0" tIns="0" bIns="0">
+          <a:bodyPr wrap="none" lIns="0" tIns="0" rIns="0" bIns="0">
             <a:spAutoFit/>
           </a:bodyPr>
           <a:lstStyle/>
@@ -29345,4 +29551,299 @@
     </a:ext>
   </a:extLst>
 </a:theme>
+</file>
+
+<file path=ppt/theme/theme2.xml><?xml version="1.0" encoding="utf-8"?>
+<a:theme xmlns:a="http://schemas.openxmlformats.org/drawingml/2006/main" name="Office Theme">
+  <a:themeElements>
+    <a:clrScheme name="Office">
+      <a:dk1>
+        <a:sysClr val="windowText" lastClr="000000"/>
+      </a:dk1>
+      <a:lt1>
+        <a:sysClr val="window" lastClr="FFFFFF"/>
+      </a:lt1>
+      <a:dk2>
+        <a:srgbClr val="44546A"/>
+      </a:dk2>
+      <a:lt2>
+        <a:srgbClr val="E7E6E6"/>
+      </a:lt2>
+      <a:accent1>
+        <a:srgbClr val="4472C4"/>
+      </a:accent1>
+      <a:accent2>
+        <a:srgbClr val="ED7D31"/>
+      </a:accent2>
+      <a:accent3>
+        <a:srgbClr val="A5A5A5"/>
+      </a:accent3>
+      <a:accent4>
+        <a:srgbClr val="FFC000"/>
+      </a:accent4>
+      <a:accent5>
+        <a:srgbClr val="5B9BD5"/>
+      </a:accent5>
+      <a:accent6>
+        <a:srgbClr val="70AD47"/>
+      </a:accent6>
+      <a:hlink>
+        <a:srgbClr val="0563C1"/>
+      </a:hlink>
+      <a:folHlink>
+        <a:srgbClr val="954F72"/>
+      </a:folHlink>
+    </a:clrScheme>
+    <a:fontScheme name="Office">
+      <a:majorFont>
+        <a:latin typeface="Calibri Light" panose="020F0302020204030204"/>
+        <a:ea typeface=""/>
+        <a:cs typeface=""/>
+        <a:font script="Jpan" typeface="游ゴシック Light"/>
+        <a:font script="Hang" typeface="맑은 고딕"/>
+        <a:font script="Hans" typeface="等线 Light"/>
+        <a:font script="Hant" typeface="新細明體"/>
+        <a:font script="Arab" typeface="Times New Roman"/>
+        <a:font script="Hebr" typeface="Times New Roman"/>
+        <a:font script="Thai" typeface="Angsana New"/>
+        <a:font script="Ethi" typeface="Nyala"/>
+        <a:font script="Beng" typeface="Vrinda"/>
+        <a:font script="Gujr" typeface="Shruti"/>
+        <a:font script="Khmr" typeface="MoolBoran"/>
+        <a:font script="Knda" typeface="Tunga"/>
+        <a:font script="Guru" typeface="Raavi"/>
+        <a:font script="Cans" typeface="Euphemia"/>
+        <a:font script="Cher" typeface="Plantagenet Cherokee"/>
+        <a:font script="Yiii" typeface="Microsoft Yi Baiti"/>
+        <a:font script="Tibt" typeface="Microsoft Himalaya"/>
+        <a:font script="Thaa" typeface="MV Boli"/>
+        <a:font script="Deva" typeface="Mangal"/>
+        <a:font script="Telu" typeface="Gautami"/>
+        <a:font script="Taml" typeface="Latha"/>
+        <a:font script="Syrc" typeface="Estrangelo Edessa"/>
+        <a:font script="Orya" typeface="Kalinga"/>
+        <a:font script="Mlym" typeface="Kartika"/>
+        <a:font script="Laoo" typeface="DokChampa"/>
+        <a:font script="Sinh" typeface="Iskoola Pota"/>
+        <a:font script="Mong" typeface="Mongolian Baiti"/>
+        <a:font script="Viet" typeface="Times New Roman"/>
+        <a:font script="Uigh" typeface="Microsoft Uighur"/>
+        <a:font script="Geor" typeface="Sylfaen"/>
+        <a:font script="Armn" typeface="Arial"/>
+        <a:font script="Bugi" typeface="Leelawadee UI"/>
+        <a:font script="Bopo" typeface="Microsoft JhengHei"/>
+        <a:font script="Java" typeface="Javanese Text"/>
+        <a:font script="Lisu" typeface="Segoe UI"/>
+        <a:font script="Mymr" typeface="Myanmar Text"/>
+        <a:font script="Nkoo" typeface="Ebrima"/>
+        <a:font script="Olck" typeface="Nirmala UI"/>
+        <a:font script="Osma" typeface="Ebrima"/>
+        <a:font script="Phag" typeface="Phagspa"/>
+        <a:font script="Syrn" typeface="Estrangelo Edessa"/>
+        <a:font script="Syrj" typeface="Estrangelo Edessa"/>
+        <a:font script="Syre" typeface="Estrangelo Edessa"/>
+        <a:font script="Sora" typeface="Nirmala UI"/>
+        <a:font script="Tale" typeface="Microsoft Tai Le"/>
+        <a:font script="Talu" typeface="Microsoft New Tai Lue"/>
+        <a:font script="Tfng" typeface="Ebrima"/>
+      </a:majorFont>
+      <a:minorFont>
+        <a:latin typeface="Calibri" panose="020F0502020204030204"/>
+        <a:ea typeface=""/>
+        <a:cs typeface=""/>
+        <a:font script="Jpan" typeface="游ゴシック"/>
+        <a:font script="Hang" typeface="맑은 고딕"/>
+        <a:font script="Hans" typeface="等线"/>
+        <a:font script="Hant" typeface="新細明體"/>
+        <a:font script="Arab" typeface="Arial"/>
+        <a:font script="Hebr" typeface="Arial"/>
+        <a:font script="Thai" typeface="Cordia New"/>
+        <a:font script="Ethi" typeface="Nyala"/>
+        <a:font script="Beng" typeface="Vrinda"/>
+        <a:font script="Gujr" typeface="Shruti"/>
+        <a:font script="Khmr" typeface="DaunPenh"/>
+        <a:font script="Knda" typeface="Tunga"/>
+        <a:font script="Guru" typeface="Raavi"/>
+        <a:font script="Cans" typeface="Euphemia"/>
+        <a:font script="Cher" typeface="Plantagenet Cherokee"/>
+        <a:font script="Yiii" typeface="Microsoft Yi Baiti"/>
+        <a:font script="Tibt" typeface="Microsoft Himalaya"/>
+        <a:font script="Thaa" typeface="MV Boli"/>
+        <a:font script="Deva" typeface="Mangal"/>
+        <a:font script="Telu" typeface="Gautami"/>
+        <a:font script="Taml" typeface="Latha"/>
+        <a:font script="Syrc" typeface="Estrangelo Edessa"/>
+        <a:font script="Orya" typeface="Kalinga"/>
+        <a:font script="Mlym" typeface="Kartika"/>
+        <a:font script="Laoo" typeface="DokChampa"/>
+        <a:font script="Sinh" typeface="Iskoola Pota"/>
+        <a:font script="Mong" typeface="Mongolian Baiti"/>
+        <a:font script="Viet" typeface="Arial"/>
+        <a:font script="Uigh" typeface="Microsoft Uighur"/>
+        <a:font script="Geor" typeface="Sylfaen"/>
+        <a:font script="Armn" typeface="Arial"/>
+        <a:font script="Bugi" typeface="Leelawadee UI"/>
+        <a:font script="Bopo" typeface="Microsoft JhengHei"/>
+        <a:font script="Java" typeface="Javanese Text"/>
+        <a:font script="Lisu" typeface="Segoe UI"/>
+        <a:font script="Mymr" typeface="Myanmar Text"/>
+        <a:font script="Nkoo" typeface="Ebrima"/>
+        <a:font script="Olck" typeface="Nirmala UI"/>
+        <a:font script="Osma" typeface="Ebrima"/>
+        <a:font script="Phag" typeface="Phagspa"/>
+        <a:font script="Syrn" typeface="Estrangelo Edessa"/>
+        <a:font script="Syrj" typeface="Estrangelo Edessa"/>
+        <a:font script="Syre" typeface="Estrangelo Edessa"/>
+        <a:font script="Sora" typeface="Nirmala UI"/>
+        <a:font script="Tale" typeface="Microsoft Tai Le"/>
+        <a:font script="Talu" typeface="Microsoft New Tai Lue"/>
+        <a:font script="Tfng" typeface="Ebrima"/>
+      </a:minorFont>
+    </a:fontScheme>
+    <a:fmtScheme name="Office">
+      <a:fillStyleLst>
+        <a:solidFill>
+          <a:schemeClr val="phClr"/>
+        </a:solidFill>
+        <a:gradFill rotWithShape="1">
+          <a:gsLst>
+            <a:gs pos="0">
+              <a:schemeClr val="phClr">
+                <a:lumMod val="110000"/>
+                <a:satMod val="105000"/>
+                <a:tint val="67000"/>
+              </a:schemeClr>
+            </a:gs>
+            <a:gs pos="50000">
+              <a:schemeClr val="phClr">
+                <a:lumMod val="105000"/>
+                <a:satMod val="103000"/>
+                <a:tint val="73000"/>
+              </a:schemeClr>
+            </a:gs>
+            <a:gs pos="100000">
+              <a:schemeClr val="phClr">
+                <a:lumMod val="105000"/>
+                <a:satMod val="109000"/>
+                <a:tint val="81000"/>
+              </a:schemeClr>
+            </a:gs>
+          </a:gsLst>
+          <a:lin ang="5400000" scaled="0"/>
+        </a:gradFill>
+        <a:gradFill rotWithShape="1">
+          <a:gsLst>
+            <a:gs pos="0">
+              <a:schemeClr val="phClr">
+                <a:satMod val="103000"/>
+                <a:lumMod val="102000"/>
+                <a:tint val="94000"/>
+              </a:schemeClr>
+            </a:gs>
+            <a:gs pos="50000">
+              <a:schemeClr val="phClr">
+                <a:satMod val="110000"/>
+                <a:lumMod val="100000"/>
+                <a:shade val="100000"/>
+              </a:schemeClr>
+            </a:gs>
+            <a:gs pos="100000">
+              <a:schemeClr val="phClr">
+                <a:lumMod val="99000"/>
+                <a:satMod val="120000"/>
+                <a:shade val="78000"/>
+              </a:schemeClr>
+            </a:gs>
+          </a:gsLst>
+          <a:lin ang="5400000" scaled="0"/>
+        </a:gradFill>
+      </a:fillStyleLst>
+      <a:lnStyleLst>
+        <a:ln w="6350" cap="flat" cmpd="sng" algn="ctr">
+          <a:solidFill>
+            <a:schemeClr val="phClr"/>
+          </a:solidFill>
+          <a:prstDash val="solid"/>
+          <a:miter lim="800000"/>
+        </a:ln>
+        <a:ln w="12700" cap="flat" cmpd="sng" algn="ctr">
+          <a:solidFill>
+            <a:schemeClr val="phClr"/>
+          </a:solidFill>
+          <a:prstDash val="solid"/>
+          <a:miter lim="800000"/>
+        </a:ln>
+        <a:ln w="19050" cap="flat" cmpd="sng" algn="ctr">
+          <a:solidFill>
+            <a:schemeClr val="phClr"/>
+          </a:solidFill>
+          <a:prstDash val="solid"/>
+          <a:miter lim="800000"/>
+        </a:ln>
+      </a:lnStyleLst>
+      <a:effectStyleLst>
+        <a:effectStyle>
+          <a:effectLst/>
+        </a:effectStyle>
+        <a:effectStyle>
+          <a:effectLst/>
+        </a:effectStyle>
+        <a:effectStyle>
+          <a:effectLst>
+            <a:outerShdw blurRad="57150" dist="19050" dir="5400000" algn="ctr" rotWithShape="0">
+              <a:srgbClr val="000000">
+                <a:alpha val="63000"/>
+              </a:srgbClr>
+            </a:outerShdw>
+          </a:effectLst>
+        </a:effectStyle>
+      </a:effectStyleLst>
+      <a:bgFillStyleLst>
+        <a:solidFill>
+          <a:schemeClr val="phClr"/>
+        </a:solidFill>
+        <a:solidFill>
+          <a:schemeClr val="phClr">
+            <a:tint val="95000"/>
+            <a:satMod val="170000"/>
+          </a:schemeClr>
+        </a:solidFill>
+        <a:gradFill rotWithShape="1">
+          <a:gsLst>
+            <a:gs pos="0">
+              <a:schemeClr val="phClr">
+                <a:tint val="93000"/>
+                <a:satMod val="150000"/>
+                <a:shade val="98000"/>
+                <a:lumMod val="102000"/>
+              </a:schemeClr>
+            </a:gs>
+            <a:gs pos="50000">
+              <a:schemeClr val="phClr">
+                <a:tint val="98000"/>
+                <a:satMod val="130000"/>
+                <a:shade val="90000"/>
+                <a:lumMod val="103000"/>
+              </a:schemeClr>
+            </a:gs>
+            <a:gs pos="100000">
+              <a:schemeClr val="phClr">
+                <a:shade val="63000"/>
+                <a:satMod val="120000"/>
+              </a:schemeClr>
+            </a:gs>
+          </a:gsLst>
+          <a:lin ang="5400000" scaled="0"/>
+        </a:gradFill>
+      </a:bgFillStyleLst>
+    </a:fmtScheme>
+  </a:themeElements>
+  <a:objectDefaults/>
+  <a:extraClrSchemeLst/>
+  <a:extLst>
+    <a:ext uri="{05A4C25C-085E-4340-85A3-A5531E510DB2}">
+      <thm15:themeFamily xmlns:thm15="http://schemas.microsoft.com/office/thememl/2012/main" name="Office Theme" id="{62F939B6-93AF-4DB8-9C6B-D6C7DFDC589F}" vid="{4A3C46E8-61CC-4603-A589-7422A47A8E4A}"/>
+    </a:ext>
+  </a:extLst>
+</a:theme>
 </file>
--- a/slides/CSC336-Lecture-10-Responsive-Design-and-Frameworks.pptx
+++ b/slides/CSC336-Lecture-10-Responsive-Design-and-Frameworks.pptx
@@ -6927,10 +6927,12 @@
             <a:avLst/>
           </a:prstGeom>
           <a:solidFill>
-            <a:srgbClr val="1E1E4C"/>
+            <a:srgbClr val="F7F8F9"/>
           </a:solidFill>
-          <a:ln>
-            <a:noFill/>
+          <a:ln w="9525">
+            <a:solidFill>
+              <a:srgbClr val="D0D5DD"/>
+            </a:solidFill>
           </a:ln>
           <a:effectLst/>
         </p:spPr>
@@ -6982,7 +6984,7 @@
             <a:r>
               <a:rPr sz="1200">
                 <a:solidFill>
-                  <a:srgbClr val="C9D3F5"/>
+                  <a:srgbClr val="1F2429"/>
                 </a:solidFill>
                 <a:latin typeface="Courier New"/>
               </a:rPr>
@@ -6992,7 +6994,7 @@
           <a:p>
             <a:endParaRPr sz="1200">
               <a:solidFill>
-                <a:srgbClr val="C9D3F5"/>
+                <a:srgbClr val="1F2429"/>
               </a:solidFill>
               <a:latin typeface="Courier New"/>
             </a:endParaRPr>
@@ -7001,7 +7003,7 @@
             <a:r>
               <a:rPr sz="1200">
                 <a:solidFill>
-                  <a:srgbClr val="C9D3F5"/>
+                  <a:srgbClr val="1F2429"/>
                 </a:solidFill>
                 <a:latin typeface="Courier New"/>
               </a:rPr>
@@ -7401,9 +7403,13 @@
             </a:avLst>
           </a:prstGeom>
           <a:solidFill>
-            <a:srgbClr val="1E1E4C"/>
+            <a:srgbClr val="F7F8F9"/>
           </a:solidFill>
-          <a:ln/>
+          <a:ln w="9525">
+            <a:solidFill>
+              <a:srgbClr val="D0D5DD"/>
+            </a:solidFill>
+          </a:ln>
         </p:spPr>
         <p:txBody>
           <a:bodyPr/>
@@ -7443,7 +7449,7 @@
             <a:r>
               <a:rPr lang="en-US" sz="1400" dirty="0">
                 <a:solidFill>
-                  <a:srgbClr val="C9D3F5"/>
+                  <a:srgbClr val="1F2429"/>
                 </a:solidFill>
                 <a:latin typeface="Courier New" pitchFamily="34" charset="0"/>
                 <a:ea typeface="Courier New" pitchFamily="34" charset="-122"/>
@@ -7463,7 +7469,7 @@
             <a:r>
               <a:rPr lang="en-US" sz="1400" dirty="0">
                 <a:solidFill>
-                  <a:srgbClr val="C9D3F5"/>
+                  <a:srgbClr val="1F2429"/>
                 </a:solidFill>
                 <a:latin typeface="Courier New" pitchFamily="34" charset="0"/>
                 <a:ea typeface="Courier New" pitchFamily="34" charset="-122"/>
@@ -7483,7 +7489,7 @@
             <a:r>
               <a:rPr lang="en-US" sz="1400" dirty="0">
                 <a:solidFill>
-                  <a:srgbClr val="C9D3F5"/>
+                  <a:srgbClr val="1F2429"/>
                 </a:solidFill>
                 <a:latin typeface="Courier New" pitchFamily="34" charset="0"/>
                 <a:ea typeface="Courier New" pitchFamily="34" charset="-122"/>
@@ -7503,7 +7509,7 @@
             <a:r>
               <a:rPr lang="en-US" sz="1400" dirty="0">
                 <a:solidFill>
-                  <a:srgbClr val="C9D3F5"/>
+                  <a:srgbClr val="1F2429"/>
                 </a:solidFill>
                 <a:latin typeface="Courier New" pitchFamily="34" charset="0"/>
                 <a:ea typeface="Courier New" pitchFamily="34" charset="-122"/>
@@ -8938,10 +8944,12 @@
             <a:avLst/>
           </a:prstGeom>
           <a:solidFill>
-            <a:srgbClr val="1E1E4C"/>
+            <a:srgbClr val="F7F8F9"/>
           </a:solidFill>
-          <a:ln>
-            <a:noFill/>
+          <a:ln w="9525">
+            <a:solidFill>
+              <a:srgbClr val="D0D5DD"/>
+            </a:solidFill>
           </a:ln>
           <a:effectLst/>
         </p:spPr>
@@ -8993,7 +9001,7 @@
             <a:r>
               <a:rPr sz="1050">
                 <a:solidFill>
-                  <a:srgbClr val="C9D3F5"/>
+                  <a:srgbClr val="1F2429"/>
                 </a:solidFill>
                 <a:latin typeface="Courier New"/>
               </a:rPr>
@@ -9004,7 +9012,7 @@
             <a:r>
               <a:rPr sz="1050">
                 <a:solidFill>
-                  <a:srgbClr val="C9D3F5"/>
+                  <a:srgbClr val="1F2429"/>
                 </a:solidFill>
                 <a:latin typeface="Courier New"/>
               </a:rPr>
@@ -9015,7 +9023,7 @@
             <a:r>
               <a:rPr sz="1050">
                 <a:solidFill>
-                  <a:srgbClr val="C9D3F5"/>
+                  <a:srgbClr val="1F2429"/>
                 </a:solidFill>
                 <a:latin typeface="Courier New"/>
               </a:rPr>
@@ -9026,7 +9034,7 @@
             <a:r>
               <a:rPr sz="1050">
                 <a:solidFill>
-                  <a:srgbClr val="C9D3F5"/>
+                  <a:srgbClr val="1F2429"/>
                 </a:solidFill>
                 <a:latin typeface="Courier New"/>
               </a:rPr>
@@ -9037,7 +9045,7 @@
             <a:r>
               <a:rPr sz="1050">
                 <a:solidFill>
-                  <a:srgbClr val="C9D3F5"/>
+                  <a:srgbClr val="1F2429"/>
                 </a:solidFill>
                 <a:latin typeface="Courier New"/>
               </a:rPr>
@@ -9048,7 +9056,7 @@
             <a:r>
               <a:rPr sz="1050">
                 <a:solidFill>
-                  <a:srgbClr val="C9D3F5"/>
+                  <a:srgbClr val="1F2429"/>
                 </a:solidFill>
                 <a:latin typeface="Courier New"/>
               </a:rPr>
@@ -9220,10 +9228,12 @@
             <a:avLst/>
           </a:prstGeom>
           <a:solidFill>
-            <a:srgbClr val="1E1E4C"/>
+            <a:srgbClr val="F7F8F9"/>
           </a:solidFill>
-          <a:ln>
-            <a:noFill/>
+          <a:ln w="9525">
+            <a:solidFill>
+              <a:srgbClr val="D0D5DD"/>
+            </a:solidFill>
           </a:ln>
           <a:effectLst/>
         </p:spPr>
@@ -9275,7 +9285,7 @@
             <a:r>
               <a:rPr sz="1100">
                 <a:solidFill>
-                  <a:srgbClr val="C9D3F5"/>
+                  <a:srgbClr val="1F2429"/>
                 </a:solidFill>
                 <a:latin typeface="Courier New"/>
               </a:rPr>
@@ -9286,7 +9296,7 @@
             <a:r>
               <a:rPr sz="1100">
                 <a:solidFill>
-                  <a:srgbClr val="C9D3F5"/>
+                  <a:srgbClr val="1F2429"/>
                 </a:solidFill>
                 <a:latin typeface="Courier New"/>
               </a:rPr>
@@ -9525,9 +9535,13 @@
             </a:avLst>
           </a:prstGeom>
           <a:solidFill>
-            <a:srgbClr val="1E1E4C"/>
+            <a:srgbClr val="F7F8F9"/>
           </a:solidFill>
-          <a:ln/>
+          <a:ln w="9525">
+            <a:solidFill>
+              <a:srgbClr val="D0D5DD"/>
+            </a:solidFill>
+          </a:ln>
         </p:spPr>
         <p:txBody>
           <a:bodyPr/>
@@ -9567,7 +9581,7 @@
             <a:r>
               <a:rPr lang="en-US" sz="1400" dirty="0">
                 <a:solidFill>
-                  <a:srgbClr val="C9D3F5"/>
+                  <a:srgbClr val="1F2429"/>
                 </a:solidFill>
                 <a:latin typeface="Courier New" pitchFamily="34" charset="0"/>
                 <a:ea typeface="Courier New" pitchFamily="34" charset="-122"/>
@@ -9587,7 +9601,7 @@
             <a:r>
               <a:rPr lang="en-US" sz="1400" dirty="0">
                 <a:solidFill>
-                  <a:srgbClr val="C9D3F5"/>
+                  <a:srgbClr val="1F2429"/>
                 </a:solidFill>
                 <a:latin typeface="Courier New" pitchFamily="34" charset="0"/>
                 <a:ea typeface="Courier New" pitchFamily="34" charset="-122"/>
@@ -9607,7 +9621,7 @@
             <a:r>
               <a:rPr lang="en-US" sz="1400" dirty="0">
                 <a:solidFill>
-                  <a:srgbClr val="C9D3F5"/>
+                  <a:srgbClr val="1F2429"/>
                 </a:solidFill>
                 <a:latin typeface="Courier New" pitchFamily="34" charset="0"/>
                 <a:ea typeface="Courier New" pitchFamily="34" charset="-122"/>
@@ -9627,7 +9641,7 @@
             <a:r>
               <a:rPr lang="en-US" sz="1400" dirty="0">
                 <a:solidFill>
-                  <a:srgbClr val="C9D3F5"/>
+                  <a:srgbClr val="1F2429"/>
                 </a:solidFill>
                 <a:latin typeface="Courier New" pitchFamily="34" charset="0"/>
                 <a:ea typeface="Courier New" pitchFamily="34" charset="-122"/>
@@ -9647,7 +9661,7 @@
             <a:r>
               <a:rPr lang="en-US" sz="1400" dirty="0">
                 <a:solidFill>
-                  <a:srgbClr val="C9D3F5"/>
+                  <a:srgbClr val="1F2429"/>
                 </a:solidFill>
                 <a:latin typeface="Courier New" pitchFamily="34" charset="0"/>
                 <a:ea typeface="Courier New" pitchFamily="34" charset="-122"/>
@@ -9667,7 +9681,7 @@
             <a:r>
               <a:rPr lang="en-US" sz="1400" dirty="0">
                 <a:solidFill>
-                  <a:srgbClr val="C9D3F5"/>
+                  <a:srgbClr val="1F2429"/>
                 </a:solidFill>
                 <a:latin typeface="Courier New" pitchFamily="34" charset="0"/>
                 <a:ea typeface="Courier New" pitchFamily="34" charset="-122"/>
@@ -12480,9 +12494,13 @@
             </a:avLst>
           </a:prstGeom>
           <a:solidFill>
-            <a:srgbClr val="1E1E4C"/>
+            <a:srgbClr val="F7F8F9"/>
           </a:solidFill>
-          <a:ln/>
+          <a:ln w="9525">
+            <a:solidFill>
+              <a:srgbClr val="D0D5DD"/>
+            </a:solidFill>
+          </a:ln>
         </p:spPr>
         <p:txBody>
           <a:bodyPr/>
@@ -12522,7 +12540,7 @@
             <a:r>
               <a:rPr lang="en-US" sz="1000" dirty="0">
                 <a:solidFill>
-                  <a:srgbClr val="C9D3F5"/>
+                  <a:srgbClr val="1F2429"/>
                 </a:solidFill>
                 <a:latin typeface="Courier New" pitchFamily="34" charset="0"/>
                 <a:ea typeface="Courier New" pitchFamily="34" charset="-122"/>
@@ -12542,7 +12560,7 @@
             <a:r>
               <a:rPr lang="en-US" sz="1000" dirty="0">
                 <a:solidFill>
-                  <a:srgbClr val="C9D3F5"/>
+                  <a:srgbClr val="1F2429"/>
                 </a:solidFill>
                 <a:latin typeface="Courier New" pitchFamily="34" charset="0"/>
                 <a:ea typeface="Courier New" pitchFamily="34" charset="-122"/>
@@ -12562,7 +12580,7 @@
             <a:r>
               <a:rPr lang="en-US" sz="1000" dirty="0">
                 <a:solidFill>
-                  <a:srgbClr val="C9D3F5"/>
+                  <a:srgbClr val="1F2429"/>
                 </a:solidFill>
                 <a:latin typeface="Courier New" pitchFamily="34" charset="0"/>
                 <a:ea typeface="Courier New" pitchFamily="34" charset="-122"/>
@@ -12582,7 +12600,7 @@
             <a:r>
               <a:rPr lang="en-US" sz="1000" dirty="0">
                 <a:solidFill>
-                  <a:srgbClr val="C9D3F5"/>
+                  <a:srgbClr val="1F2429"/>
                 </a:solidFill>
                 <a:latin typeface="Courier New" pitchFamily="34" charset="0"/>
                 <a:ea typeface="Courier New" pitchFamily="34" charset="-122"/>
@@ -12602,7 +12620,7 @@
             <a:r>
               <a:rPr lang="en-US" sz="1000" dirty="0">
                 <a:solidFill>
-                  <a:srgbClr val="C9D3F5"/>
+                  <a:srgbClr val="1F2429"/>
                 </a:solidFill>
                 <a:latin typeface="Courier New" pitchFamily="34" charset="0"/>
                 <a:ea typeface="Courier New" pitchFamily="34" charset="-122"/>
@@ -12631,7 +12649,7 @@
             <a:r>
               <a:rPr lang="en-US" sz="1000" dirty="0">
                 <a:solidFill>
-                  <a:srgbClr val="C9D3F5"/>
+                  <a:srgbClr val="1F2429"/>
                 </a:solidFill>
                 <a:latin typeface="Courier New" pitchFamily="34" charset="0"/>
                 <a:ea typeface="Courier New" pitchFamily="34" charset="-122"/>
@@ -12651,7 +12669,7 @@
             <a:r>
               <a:rPr lang="en-US" sz="1000" dirty="0">
                 <a:solidFill>
-                  <a:srgbClr val="C9D3F5"/>
+                  <a:srgbClr val="1F2429"/>
                 </a:solidFill>
                 <a:latin typeface="Courier New" pitchFamily="34" charset="0"/>
                 <a:ea typeface="Courier New" pitchFamily="34" charset="-122"/>
@@ -12671,7 +12689,7 @@
             <a:r>
               <a:rPr lang="en-US" sz="1000" dirty="0">
                 <a:solidFill>
-                  <a:srgbClr val="C9D3F5"/>
+                  <a:srgbClr val="1F2429"/>
                 </a:solidFill>
                 <a:latin typeface="Courier New" pitchFamily="34" charset="0"/>
                 <a:ea typeface="Courier New" pitchFamily="34" charset="-122"/>
@@ -12691,7 +12709,7 @@
             <a:r>
               <a:rPr lang="en-US" sz="1000" dirty="0">
                 <a:solidFill>
-                  <a:srgbClr val="C9D3F5"/>
+                  <a:srgbClr val="1F2429"/>
                 </a:solidFill>
                 <a:latin typeface="Courier New" pitchFamily="34" charset="0"/>
                 <a:ea typeface="Courier New" pitchFamily="34" charset="-122"/>
@@ -12711,7 +12729,7 @@
             <a:r>
               <a:rPr lang="en-US" sz="1000" dirty="0">
                 <a:solidFill>
-                  <a:srgbClr val="C9D3F5"/>
+                  <a:srgbClr val="1F2429"/>
                 </a:solidFill>
                 <a:latin typeface="Courier New" pitchFamily="34" charset="0"/>
                 <a:ea typeface="Courier New" pitchFamily="34" charset="-122"/>
@@ -12731,7 +12749,7 @@
             <a:r>
               <a:rPr lang="en-US" sz="1000" dirty="0">
                 <a:solidFill>
-                  <a:srgbClr val="C9D3F5"/>
+                  <a:srgbClr val="1F2429"/>
                 </a:solidFill>
                 <a:latin typeface="Courier New" pitchFamily="34" charset="0"/>
                 <a:ea typeface="Courier New" pitchFamily="34" charset="-122"/>
@@ -12751,7 +12769,7 @@
             <a:r>
               <a:rPr lang="en-US" sz="1000" dirty="0">
                 <a:solidFill>
-                  <a:srgbClr val="C9D3F5"/>
+                  <a:srgbClr val="1F2429"/>
                 </a:solidFill>
                 <a:latin typeface="Courier New" pitchFamily="34" charset="0"/>
                 <a:ea typeface="Courier New" pitchFamily="34" charset="-122"/>
@@ -12771,7 +12789,7 @@
             <a:r>
               <a:rPr lang="en-US" sz="1000" dirty="0">
                 <a:solidFill>
-                  <a:srgbClr val="C9D3F5"/>
+                  <a:srgbClr val="1F2429"/>
                 </a:solidFill>
                 <a:latin typeface="Courier New" pitchFamily="34" charset="0"/>
                 <a:ea typeface="Courier New" pitchFamily="34" charset="-122"/>
@@ -12791,7 +12809,7 @@
             <a:r>
               <a:rPr lang="en-US" sz="1000" dirty="0">
                 <a:solidFill>
-                  <a:srgbClr val="C9D3F5"/>
+                  <a:srgbClr val="1F2429"/>
                 </a:solidFill>
                 <a:latin typeface="Courier New" pitchFamily="34" charset="0"/>
                 <a:ea typeface="Courier New" pitchFamily="34" charset="-122"/>
@@ -12811,7 +12829,7 @@
             <a:r>
               <a:rPr lang="en-US" sz="1000" dirty="0">
                 <a:solidFill>
-                  <a:srgbClr val="C9D3F5"/>
+                  <a:srgbClr val="1F2429"/>
                 </a:solidFill>
                 <a:latin typeface="Courier New" pitchFamily="34" charset="0"/>
                 <a:ea typeface="Courier New" pitchFamily="34" charset="-122"/>
@@ -13098,9 +13116,13 @@
             </a:avLst>
           </a:prstGeom>
           <a:solidFill>
-            <a:srgbClr val="1E1E4C"/>
+            <a:srgbClr val="F7F8F9"/>
           </a:solidFill>
-          <a:ln/>
+          <a:ln w="9525">
+            <a:solidFill>
+              <a:srgbClr val="D0D5DD"/>
+            </a:solidFill>
+          </a:ln>
         </p:spPr>
         <p:txBody>
           <a:bodyPr/>
@@ -13140,7 +13162,7 @@
             <a:r>
               <a:rPr lang="en-US" sz="1250" dirty="0">
                 <a:solidFill>
-                  <a:srgbClr val="C9D3F5"/>
+                  <a:srgbClr val="1F2429"/>
                 </a:solidFill>
                 <a:latin typeface="Courier New" pitchFamily="34" charset="0"/>
                 <a:ea typeface="Courier New" pitchFamily="34" charset="-122"/>
@@ -13169,7 +13191,7 @@
             <a:r>
               <a:rPr lang="en-US" sz="1250" dirty="0">
                 <a:solidFill>
-                  <a:srgbClr val="C9D3F5"/>
+                  <a:srgbClr val="1F2429"/>
                 </a:solidFill>
                 <a:latin typeface="Courier New" pitchFamily="34" charset="0"/>
                 <a:ea typeface="Courier New" pitchFamily="34" charset="-122"/>
@@ -13189,7 +13211,7 @@
             <a:r>
               <a:rPr lang="en-US" sz="1250" dirty="0">
                 <a:solidFill>
-                  <a:srgbClr val="C9D3F5"/>
+                  <a:srgbClr val="1F2429"/>
                 </a:solidFill>
                 <a:latin typeface="Courier New" pitchFamily="34" charset="0"/>
                 <a:ea typeface="Courier New" pitchFamily="34" charset="-122"/>
@@ -13209,7 +13231,7 @@
             <a:r>
               <a:rPr lang="en-US" sz="1250" dirty="0">
                 <a:solidFill>
-                  <a:srgbClr val="C9D3F5"/>
+                  <a:srgbClr val="1F2429"/>
                 </a:solidFill>
                 <a:latin typeface="Courier New" pitchFamily="34" charset="0"/>
                 <a:ea typeface="Courier New" pitchFamily="34" charset="-122"/>
@@ -13496,9 +13518,13 @@
             </a:avLst>
           </a:prstGeom>
           <a:solidFill>
-            <a:srgbClr val="1E1E4C"/>
+            <a:srgbClr val="F7F8F9"/>
           </a:solidFill>
-          <a:ln/>
+          <a:ln w="9525">
+            <a:solidFill>
+              <a:srgbClr val="D0D5DD"/>
+            </a:solidFill>
+          </a:ln>
         </p:spPr>
         <p:txBody>
           <a:bodyPr/>
@@ -13538,7 +13564,7 @@
             <a:r>
               <a:rPr lang="en-US" sz="1250" dirty="0">
                 <a:solidFill>
-                  <a:srgbClr val="C9D3F5"/>
+                  <a:srgbClr val="1F2429"/>
                 </a:solidFill>
                 <a:latin typeface="Courier New" pitchFamily="34" charset="0"/>
                 <a:ea typeface="Courier New" pitchFamily="34" charset="-122"/>
@@ -13567,7 +13593,7 @@
             <a:r>
               <a:rPr lang="en-US" sz="1250" dirty="0">
                 <a:solidFill>
-                  <a:srgbClr val="C9D3F5"/>
+                  <a:srgbClr val="1F2429"/>
                 </a:solidFill>
                 <a:latin typeface="Courier New" pitchFamily="34" charset="0"/>
                 <a:ea typeface="Courier New" pitchFamily="34" charset="-122"/>
@@ -13587,7 +13613,7 @@
             <a:r>
               <a:rPr lang="en-US" sz="1250" dirty="0">
                 <a:solidFill>
-                  <a:srgbClr val="C9D3F5"/>
+                  <a:srgbClr val="1F2429"/>
                 </a:solidFill>
                 <a:latin typeface="Courier New" pitchFamily="34" charset="0"/>
                 <a:ea typeface="Courier New" pitchFamily="34" charset="-122"/>
@@ -13607,7 +13633,7 @@
             <a:r>
               <a:rPr lang="en-US" sz="1250" dirty="0">
                 <a:solidFill>
-                  <a:srgbClr val="C9D3F5"/>
+                  <a:srgbClr val="1F2429"/>
                 </a:solidFill>
                 <a:latin typeface="Courier New" pitchFamily="34" charset="0"/>
                 <a:ea typeface="Courier New" pitchFamily="34" charset="-122"/>
@@ -13636,7 +13662,7 @@
             <a:r>
               <a:rPr lang="en-US" sz="1250" dirty="0">
                 <a:solidFill>
-                  <a:srgbClr val="C9D3F5"/>
+                  <a:srgbClr val="1F2429"/>
                 </a:solidFill>
                 <a:latin typeface="Courier New" pitchFamily="34" charset="0"/>
                 <a:ea typeface="Courier New" pitchFamily="34" charset="-122"/>
@@ -13884,9 +13910,13 @@
             </a:avLst>
           </a:prstGeom>
           <a:solidFill>
-            <a:srgbClr val="1E1E4C"/>
+            <a:srgbClr val="F7F8F9"/>
           </a:solidFill>
-          <a:ln/>
+          <a:ln w="9525">
+            <a:solidFill>
+              <a:srgbClr val="D0D5DD"/>
+            </a:solidFill>
+          </a:ln>
         </p:spPr>
         <p:txBody>
           <a:bodyPr/>
@@ -13926,7 +13956,7 @@
             <a:r>
               <a:rPr lang="en-US" sz="1250" dirty="0">
                 <a:solidFill>
-                  <a:srgbClr val="C9D3F5"/>
+                  <a:srgbClr val="1F2429"/>
                 </a:solidFill>
                 <a:latin typeface="Courier New" pitchFamily="34" charset="0"/>
                 <a:ea typeface="Courier New" pitchFamily="34" charset="-122"/>
@@ -13946,7 +13976,7 @@
             <a:r>
               <a:rPr lang="en-US" sz="1250" dirty="0">
                 <a:solidFill>
-                  <a:srgbClr val="C9D3F5"/>
+                  <a:srgbClr val="1F2429"/>
                 </a:solidFill>
                 <a:latin typeface="Courier New" pitchFamily="34" charset="0"/>
                 <a:ea typeface="Courier New" pitchFamily="34" charset="-122"/>
@@ -13966,7 +13996,7 @@
             <a:r>
               <a:rPr lang="en-US" sz="1250" dirty="0">
                 <a:solidFill>
-                  <a:srgbClr val="C9D3F5"/>
+                  <a:srgbClr val="1F2429"/>
                 </a:solidFill>
                 <a:latin typeface="Courier New" pitchFamily="34" charset="0"/>
                 <a:ea typeface="Courier New" pitchFamily="34" charset="-122"/>
@@ -14298,10 +14328,12 @@
             <a:avLst/>
           </a:prstGeom>
           <a:solidFill>
-            <a:srgbClr val="1E1E4C"/>
+            <a:srgbClr val="F7F8F9"/>
           </a:solidFill>
-          <a:ln>
-            <a:noFill/>
+          <a:ln w="9525">
+            <a:solidFill>
+              <a:srgbClr val="D0D5DD"/>
+            </a:solidFill>
           </a:ln>
           <a:effectLst/>
         </p:spPr>
@@ -14353,7 +14385,7 @@
             <a:r>
               <a:rPr sz="1200">
                 <a:solidFill>
-                  <a:srgbClr val="C9D3F5"/>
+                  <a:srgbClr val="1F2429"/>
                 </a:solidFill>
                 <a:latin typeface="Courier New"/>
               </a:rPr>
@@ -14364,7 +14396,7 @@
             <a:r>
               <a:rPr sz="1200">
                 <a:solidFill>
-                  <a:srgbClr val="C9D3F5"/>
+                  <a:srgbClr val="1F2429"/>
                 </a:solidFill>
                 <a:latin typeface="Courier New"/>
               </a:rPr>
@@ -14374,7 +14406,7 @@
           <a:p>
             <a:endParaRPr sz="1200">
               <a:solidFill>
-                <a:srgbClr val="C9D3F5"/>
+                <a:srgbClr val="1F2429"/>
               </a:solidFill>
               <a:latin typeface="Courier New"/>
             </a:endParaRPr>
@@ -14383,7 +14415,7 @@
             <a:r>
               <a:rPr sz="1200">
                 <a:solidFill>
-                  <a:srgbClr val="C9D3F5"/>
+                  <a:srgbClr val="1F2429"/>
                 </a:solidFill>
                 <a:latin typeface="Courier New"/>
               </a:rPr>
@@ -14394,7 +14426,7 @@
             <a:r>
               <a:rPr sz="1200">
                 <a:solidFill>
-                  <a:srgbClr val="C9D3F5"/>
+                  <a:srgbClr val="1F2429"/>
                 </a:solidFill>
                 <a:latin typeface="Courier New"/>
               </a:rPr>
@@ -14405,7 +14437,7 @@
             <a:r>
               <a:rPr sz="1200">
                 <a:solidFill>
-                  <a:srgbClr val="C9D3F5"/>
+                  <a:srgbClr val="1F2429"/>
                 </a:solidFill>
                 <a:latin typeface="Courier New"/>
               </a:rPr>
@@ -14585,9 +14617,13 @@
             </a:avLst>
           </a:prstGeom>
           <a:solidFill>
-            <a:srgbClr val="1E1E4C"/>
+            <a:srgbClr val="F7F8F9"/>
           </a:solidFill>
-          <a:ln/>
+          <a:ln w="9525">
+            <a:solidFill>
+              <a:srgbClr val="D0D5DD"/>
+            </a:solidFill>
+          </a:ln>
         </p:spPr>
         <p:txBody>
           <a:bodyPr/>
@@ -14627,7 +14663,7 @@
             <a:r>
               <a:rPr lang="en-US" sz="1400" dirty="0">
                 <a:solidFill>
-                  <a:srgbClr val="C9D3F5"/>
+                  <a:srgbClr val="1F2429"/>
                 </a:solidFill>
                 <a:latin typeface="Courier New" pitchFamily="34" charset="0"/>
                 <a:ea typeface="Courier New" pitchFamily="34" charset="-122"/>
@@ -14647,7 +14683,7 @@
             <a:r>
               <a:rPr lang="en-US" sz="1400" dirty="0">
                 <a:solidFill>
-                  <a:srgbClr val="C9D3F5"/>
+                  <a:srgbClr val="1F2429"/>
                 </a:solidFill>
                 <a:latin typeface="Courier New" pitchFamily="34" charset="0"/>
                 <a:ea typeface="Courier New" pitchFamily="34" charset="-122"/>
@@ -14667,7 +14703,7 @@
             <a:r>
               <a:rPr lang="en-US" sz="1400" dirty="0">
                 <a:solidFill>
-                  <a:srgbClr val="C9D3F5"/>
+                  <a:srgbClr val="1F2429"/>
                 </a:solidFill>
                 <a:latin typeface="Courier New" pitchFamily="34" charset="0"/>
                 <a:ea typeface="Courier New" pitchFamily="34" charset="-122"/>
@@ -14687,7 +14723,7 @@
             <a:r>
               <a:rPr lang="en-US" sz="1400" dirty="0">
                 <a:solidFill>
-                  <a:srgbClr val="C9D3F5"/>
+                  <a:srgbClr val="1F2429"/>
                 </a:solidFill>
                 <a:latin typeface="Courier New" pitchFamily="34" charset="0"/>
                 <a:ea typeface="Courier New" pitchFamily="34" charset="-122"/>
@@ -15089,9 +15125,13 @@
             </a:avLst>
           </a:prstGeom>
           <a:solidFill>
-            <a:srgbClr val="1E1E4C"/>
+            <a:srgbClr val="F7F8F9"/>
           </a:solidFill>
-          <a:ln/>
+          <a:ln w="9525">
+            <a:solidFill>
+              <a:srgbClr val="D0D5DD"/>
+            </a:solidFill>
+          </a:ln>
         </p:spPr>
         <p:txBody>
           <a:bodyPr/>
@@ -15131,7 +15171,7 @@
             <a:r>
               <a:rPr lang="en-US" sz="1400" dirty="0">
                 <a:solidFill>
-                  <a:srgbClr val="C9D3F5"/>
+                  <a:srgbClr val="1F2429"/>
                 </a:solidFill>
                 <a:latin typeface="Courier New" pitchFamily="34" charset="0"/>
                 <a:ea typeface="Courier New" pitchFamily="34" charset="-122"/>
@@ -15151,7 +15191,7 @@
             <a:r>
               <a:rPr lang="en-US" sz="1400" dirty="0">
                 <a:solidFill>
-                  <a:srgbClr val="C9D3F5"/>
+                  <a:srgbClr val="1F2429"/>
                 </a:solidFill>
                 <a:latin typeface="Courier New" pitchFamily="34" charset="0"/>
                 <a:ea typeface="Courier New" pitchFamily="34" charset="-122"/>
@@ -15171,7 +15211,7 @@
             <a:r>
               <a:rPr lang="en-US" sz="1400" dirty="0">
                 <a:solidFill>
-                  <a:srgbClr val="C9D3F5"/>
+                  <a:srgbClr val="1F2429"/>
                 </a:solidFill>
                 <a:latin typeface="Courier New" pitchFamily="34" charset="0"/>
                 <a:ea typeface="Courier New" pitchFamily="34" charset="-122"/>
@@ -16185,9 +16225,13 @@
             </a:avLst>
           </a:prstGeom>
           <a:solidFill>
-            <a:srgbClr val="1E1E4C"/>
+            <a:srgbClr val="F7F8F9"/>
           </a:solidFill>
-          <a:ln/>
+          <a:ln w="9525">
+            <a:solidFill>
+              <a:srgbClr val="D0D5DD"/>
+            </a:solidFill>
+          </a:ln>
         </p:spPr>
         <p:txBody>
           <a:bodyPr/>
@@ -16227,7 +16271,7 @@
             <a:r>
               <a:rPr lang="en-US" sz="1400" dirty="0">
                 <a:solidFill>
-                  <a:srgbClr val="C9D3F5"/>
+                  <a:srgbClr val="1F2429"/>
                 </a:solidFill>
                 <a:latin typeface="Courier New" pitchFamily="34" charset="0"/>
                 <a:ea typeface="Courier New" pitchFamily="34" charset="-122"/>
@@ -16247,7 +16291,7 @@
             <a:r>
               <a:rPr lang="en-US" sz="1400" dirty="0">
                 <a:solidFill>
-                  <a:srgbClr val="C9D3F5"/>
+                  <a:srgbClr val="1F2429"/>
                 </a:solidFill>
                 <a:latin typeface="Courier New" pitchFamily="34" charset="0"/>
                 <a:ea typeface="Courier New" pitchFamily="34" charset="-122"/>
@@ -16267,7 +16311,7 @@
             <a:r>
               <a:rPr lang="en-US" sz="1400" dirty="0">
                 <a:solidFill>
-                  <a:srgbClr val="C9D3F5"/>
+                  <a:srgbClr val="1F2429"/>
                 </a:solidFill>
                 <a:latin typeface="Courier New" pitchFamily="34" charset="0"/>
                 <a:ea typeface="Courier New" pitchFamily="34" charset="-122"/>
@@ -18048,9 +18092,13 @@
             </a:avLst>
           </a:prstGeom>
           <a:solidFill>
-            <a:srgbClr val="1E1E4C"/>
+            <a:srgbClr val="F7F8F9"/>
           </a:solidFill>
-          <a:ln/>
+          <a:ln w="9525">
+            <a:solidFill>
+              <a:srgbClr val="D0D5DD"/>
+            </a:solidFill>
+          </a:ln>
         </p:spPr>
         <p:txBody>
           <a:bodyPr/>
@@ -18090,7 +18138,7 @@
             <a:r>
               <a:rPr lang="en-US" sz="1400" dirty="0">
                 <a:solidFill>
-                  <a:srgbClr val="C9D3F5"/>
+                  <a:srgbClr val="1F2429"/>
                 </a:solidFill>
                 <a:latin typeface="Courier New" pitchFamily="34" charset="0"/>
                 <a:ea typeface="Courier New" pitchFamily="34" charset="-122"/>
@@ -18110,7 +18158,7 @@
             <a:r>
               <a:rPr lang="en-US" sz="1400" dirty="0">
                 <a:solidFill>
-                  <a:srgbClr val="C9D3F5"/>
+                  <a:srgbClr val="1F2429"/>
                 </a:solidFill>
                 <a:latin typeface="Courier New" pitchFamily="34" charset="0"/>
                 <a:ea typeface="Courier New" pitchFamily="34" charset="-122"/>
@@ -18130,7 +18178,7 @@
             <a:r>
               <a:rPr lang="en-US" sz="1400" dirty="0">
                 <a:solidFill>
-                  <a:srgbClr val="C9D3F5"/>
+                  <a:srgbClr val="1F2429"/>
                 </a:solidFill>
                 <a:latin typeface="Courier New" pitchFamily="34" charset="0"/>
                 <a:ea typeface="Courier New" pitchFamily="34" charset="-122"/>
@@ -18150,7 +18198,7 @@
             <a:r>
               <a:rPr lang="en-US" sz="1400" dirty="0">
                 <a:solidFill>
-                  <a:srgbClr val="C9D3F5"/>
+                  <a:srgbClr val="1F2429"/>
                 </a:solidFill>
                 <a:latin typeface="Courier New" pitchFamily="34" charset="0"/>
                 <a:ea typeface="Courier New" pitchFamily="34" charset="-122"/>
@@ -18170,7 +18218,7 @@
             <a:r>
               <a:rPr lang="en-US" sz="1400" dirty="0">
                 <a:solidFill>
-                  <a:srgbClr val="C9D3F5"/>
+                  <a:srgbClr val="1F2429"/>
                 </a:solidFill>
                 <a:latin typeface="Courier New" pitchFamily="34" charset="0"/>
                 <a:ea typeface="Courier New" pitchFamily="34" charset="-122"/>
@@ -18190,7 +18238,7 @@
             <a:r>
               <a:rPr lang="en-US" sz="1400" dirty="0">
                 <a:solidFill>
-                  <a:srgbClr val="C9D3F5"/>
+                  <a:srgbClr val="1F2429"/>
                 </a:solidFill>
                 <a:latin typeface="Courier New" pitchFamily="34" charset="0"/>
                 <a:ea typeface="Courier New" pitchFamily="34" charset="-122"/>
@@ -18210,7 +18258,7 @@
             <a:r>
               <a:rPr lang="en-US" sz="1400" dirty="0">
                 <a:solidFill>
-                  <a:srgbClr val="C9D3F5"/>
+                  <a:srgbClr val="1F2429"/>
                 </a:solidFill>
                 <a:latin typeface="Courier New" pitchFamily="34" charset="0"/>
                 <a:ea typeface="Courier New" pitchFamily="34" charset="-122"/>
@@ -18432,9 +18480,13 @@
             </a:avLst>
           </a:prstGeom>
           <a:solidFill>
-            <a:srgbClr val="1E1E4C"/>
+            <a:srgbClr val="F7F8F9"/>
           </a:solidFill>
-          <a:ln/>
+          <a:ln w="9525">
+            <a:solidFill>
+              <a:srgbClr val="D0D5DD"/>
+            </a:solidFill>
+          </a:ln>
         </p:spPr>
         <p:txBody>
           <a:bodyPr/>
@@ -18474,7 +18526,7 @@
             <a:r>
               <a:rPr lang="en-US" sz="1250" dirty="0">
                 <a:solidFill>
-                  <a:srgbClr val="C9D3F5"/>
+                  <a:srgbClr val="1F2429"/>
                 </a:solidFill>
                 <a:latin typeface="Courier New" pitchFamily="34" charset="0"/>
                 <a:ea typeface="Courier New" pitchFamily="34" charset="-122"/>
@@ -18494,7 +18546,7 @@
             <a:r>
               <a:rPr lang="en-US" sz="1250" dirty="0">
                 <a:solidFill>
-                  <a:srgbClr val="C9D3F5"/>
+                  <a:srgbClr val="1F2429"/>
                 </a:solidFill>
                 <a:latin typeface="Courier New" pitchFamily="34" charset="0"/>
                 <a:ea typeface="Courier New" pitchFamily="34" charset="-122"/>
@@ -18514,7 +18566,7 @@
             <a:r>
               <a:rPr lang="en-US" sz="1250" dirty="0">
                 <a:solidFill>
-                  <a:srgbClr val="C9D3F5"/>
+                  <a:srgbClr val="1F2429"/>
                 </a:solidFill>
                 <a:latin typeface="Courier New" pitchFamily="34" charset="0"/>
                 <a:ea typeface="Courier New" pitchFamily="34" charset="-122"/>
@@ -18534,7 +18586,7 @@
             <a:r>
               <a:rPr lang="en-US" sz="1250" dirty="0">
                 <a:solidFill>
-                  <a:srgbClr val="C9D3F5"/>
+                  <a:srgbClr val="1F2429"/>
                 </a:solidFill>
                 <a:latin typeface="Courier New" pitchFamily="34" charset="0"/>
                 <a:ea typeface="Courier New" pitchFamily="34" charset="-122"/>
@@ -18821,9 +18873,13 @@
             </a:avLst>
           </a:prstGeom>
           <a:solidFill>
-            <a:srgbClr val="1E1E4C"/>
+            <a:srgbClr val="F7F8F9"/>
           </a:solidFill>
-          <a:ln/>
+          <a:ln w="9525">
+            <a:solidFill>
+              <a:srgbClr val="D0D5DD"/>
+            </a:solidFill>
+          </a:ln>
         </p:spPr>
         <p:txBody>
           <a:bodyPr/>
@@ -18863,7 +18919,7 @@
             <a:r>
               <a:rPr lang="en-US" sz="1250" dirty="0">
                 <a:solidFill>
-                  <a:srgbClr val="C9D3F5"/>
+                  <a:srgbClr val="1F2429"/>
                 </a:solidFill>
                 <a:latin typeface="Courier New" pitchFamily="34" charset="0"/>
                 <a:ea typeface="Courier New" pitchFamily="34" charset="-122"/>
@@ -18883,7 +18939,7 @@
             <a:r>
               <a:rPr lang="en-US" sz="1250" dirty="0">
                 <a:solidFill>
-                  <a:srgbClr val="C9D3F5"/>
+                  <a:srgbClr val="1F2429"/>
                 </a:solidFill>
                 <a:latin typeface="Courier New" pitchFamily="34" charset="0"/>
                 <a:ea typeface="Courier New" pitchFamily="34" charset="-122"/>
@@ -18903,7 +18959,7 @@
             <a:r>
               <a:rPr lang="en-US" sz="1250" dirty="0">
                 <a:solidFill>
-                  <a:srgbClr val="C9D3F5"/>
+                  <a:srgbClr val="1F2429"/>
                 </a:solidFill>
                 <a:latin typeface="Courier New" pitchFamily="34" charset="0"/>
                 <a:ea typeface="Courier New" pitchFamily="34" charset="-122"/>
@@ -19151,9 +19207,13 @@
             </a:avLst>
           </a:prstGeom>
           <a:solidFill>
-            <a:srgbClr val="1E1E4C"/>
+            <a:srgbClr val="F7F8F9"/>
           </a:solidFill>
-          <a:ln/>
+          <a:ln w="9525">
+            <a:solidFill>
+              <a:srgbClr val="D0D5DD"/>
+            </a:solidFill>
+          </a:ln>
         </p:spPr>
         <p:txBody>
           <a:bodyPr/>
@@ -19193,7 +19253,7 @@
             <a:r>
               <a:rPr lang="en-US" sz="1400" dirty="0">
                 <a:solidFill>
-                  <a:srgbClr val="C9D3F5"/>
+                  <a:srgbClr val="1F2429"/>
                 </a:solidFill>
                 <a:latin typeface="Courier New" pitchFamily="34" charset="0"/>
                 <a:ea typeface="Courier New" pitchFamily="34" charset="-122"/>
@@ -19213,7 +19273,7 @@
             <a:r>
               <a:rPr lang="en-US" sz="1400" dirty="0">
                 <a:solidFill>
-                  <a:srgbClr val="C9D3F5"/>
+                  <a:srgbClr val="1F2429"/>
                 </a:solidFill>
                 <a:latin typeface="Courier New" pitchFamily="34" charset="0"/>
                 <a:ea typeface="Courier New" pitchFamily="34" charset="-122"/>
@@ -19233,7 +19293,7 @@
             <a:r>
               <a:rPr lang="en-US" sz="1400" dirty="0">
                 <a:solidFill>
-                  <a:srgbClr val="C9D3F5"/>
+                  <a:srgbClr val="1F2429"/>
                 </a:solidFill>
                 <a:latin typeface="Courier New" pitchFamily="34" charset="0"/>
                 <a:ea typeface="Courier New" pitchFamily="34" charset="-122"/>
@@ -19253,7 +19313,7 @@
             <a:r>
               <a:rPr lang="en-US" sz="1400" dirty="0">
                 <a:solidFill>
-                  <a:srgbClr val="C9D3F5"/>
+                  <a:srgbClr val="1F2429"/>
                 </a:solidFill>
                 <a:latin typeface="Courier New" pitchFamily="34" charset="0"/>
                 <a:ea typeface="Courier New" pitchFamily="34" charset="-122"/>
@@ -19282,7 +19342,7 @@
             <a:r>
               <a:rPr lang="en-US" sz="1400" dirty="0">
                 <a:solidFill>
-                  <a:srgbClr val="C9D3F5"/>
+                  <a:srgbClr val="1F2429"/>
                 </a:solidFill>
                 <a:latin typeface="Courier New" pitchFamily="34" charset="0"/>
                 <a:ea typeface="Courier New" pitchFamily="34" charset="-122"/>
@@ -19504,9 +19564,13 @@
             </a:avLst>
           </a:prstGeom>
           <a:solidFill>
-            <a:srgbClr val="1E1E4C"/>
+            <a:srgbClr val="F7F8F9"/>
           </a:solidFill>
-          <a:ln/>
+          <a:ln w="9525">
+            <a:solidFill>
+              <a:srgbClr val="D0D5DD"/>
+            </a:solidFill>
+          </a:ln>
         </p:spPr>
         <p:txBody>
           <a:bodyPr/>
@@ -19546,7 +19610,7 @@
             <a:r>
               <a:rPr lang="en-US" sz="1400" dirty="0">
                 <a:solidFill>
-                  <a:srgbClr val="C9D3F5"/>
+                  <a:srgbClr val="1F2429"/>
                 </a:solidFill>
                 <a:latin typeface="Courier New" pitchFamily="34" charset="0"/>
                 <a:ea typeface="Courier New" pitchFamily="34" charset="-122"/>
@@ -19575,7 +19639,7 @@
             <a:r>
               <a:rPr lang="en-US" sz="1400" dirty="0">
                 <a:solidFill>
-                  <a:srgbClr val="C9D3F5"/>
+                  <a:srgbClr val="1F2429"/>
                 </a:solidFill>
                 <a:latin typeface="Courier New" pitchFamily="34" charset="0"/>
                 <a:ea typeface="Courier New" pitchFamily="34" charset="-122"/>
@@ -19977,9 +20041,13 @@
             </a:avLst>
           </a:prstGeom>
           <a:solidFill>
-            <a:srgbClr val="1E1E4C"/>
+            <a:srgbClr val="F7F8F9"/>
           </a:solidFill>
-          <a:ln/>
+          <a:ln w="9525">
+            <a:solidFill>
+              <a:srgbClr val="D0D5DD"/>
+            </a:solidFill>
+          </a:ln>
         </p:spPr>
         <p:txBody>
           <a:bodyPr/>
@@ -20019,7 +20087,7 @@
             <a:r>
               <a:rPr lang="en-US" sz="1400" dirty="0">
                 <a:solidFill>
-                  <a:srgbClr val="C9D3F5"/>
+                  <a:srgbClr val="1F2429"/>
                 </a:solidFill>
                 <a:latin typeface="Courier New" pitchFamily="34" charset="0"/>
                 <a:ea typeface="Courier New" pitchFamily="34" charset="-122"/>
@@ -20241,9 +20309,13 @@
             </a:avLst>
           </a:prstGeom>
           <a:solidFill>
-            <a:srgbClr val="1E1E4C"/>
+            <a:srgbClr val="F7F8F9"/>
           </a:solidFill>
-          <a:ln/>
+          <a:ln w="9525">
+            <a:solidFill>
+              <a:srgbClr val="D0D5DD"/>
+            </a:solidFill>
+          </a:ln>
         </p:spPr>
         <p:txBody>
           <a:bodyPr/>
@@ -20283,7 +20355,7 @@
             <a:r>
               <a:rPr lang="en-US" sz="1400" dirty="0">
                 <a:solidFill>
-                  <a:srgbClr val="C9D3F5"/>
+                  <a:srgbClr val="1F2429"/>
                 </a:solidFill>
                 <a:latin typeface="Courier New" pitchFamily="34" charset="0"/>
                 <a:ea typeface="Courier New" pitchFamily="34" charset="-122"/>
@@ -20312,7 +20384,7 @@
             <a:r>
               <a:rPr lang="en-US" sz="1400" dirty="0">
                 <a:solidFill>
-                  <a:srgbClr val="C9D3F5"/>
+                  <a:srgbClr val="1F2429"/>
                 </a:solidFill>
                 <a:latin typeface="Courier New" pitchFamily="34" charset="0"/>
                 <a:ea typeface="Courier New" pitchFamily="34" charset="-122"/>
@@ -21194,10 +21266,12 @@
             <a:avLst/>
           </a:prstGeom>
           <a:solidFill>
-            <a:srgbClr val="1E1E4C"/>
+            <a:srgbClr val="F7F8F9"/>
           </a:solidFill>
-          <a:ln>
-            <a:noFill/>
+          <a:ln w="9525">
+            <a:solidFill>
+              <a:srgbClr val="D0D5DD"/>
+            </a:solidFill>
           </a:ln>
           <a:effectLst/>
         </p:spPr>
@@ -21249,7 +21323,7 @@
             <a:r>
               <a:rPr sz="1150">
                 <a:solidFill>
-                  <a:srgbClr val="C9D3F5"/>
+                  <a:srgbClr val="1F2429"/>
                 </a:solidFill>
                 <a:latin typeface="Courier New"/>
               </a:rPr>
@@ -21260,7 +21334,7 @@
             <a:r>
               <a:rPr sz="1150">
                 <a:solidFill>
-                  <a:srgbClr val="C9D3F5"/>
+                  <a:srgbClr val="1F2429"/>
                 </a:solidFill>
                 <a:latin typeface="Courier New"/>
               </a:rPr>
@@ -21271,7 +21345,7 @@
             <a:r>
               <a:rPr sz="1150">
                 <a:solidFill>
-                  <a:srgbClr val="C9D3F5"/>
+                  <a:srgbClr val="1F2429"/>
                 </a:solidFill>
                 <a:latin typeface="Courier New"/>
               </a:rPr>
@@ -21443,10 +21517,12 @@
             <a:avLst/>
           </a:prstGeom>
           <a:solidFill>
-            <a:srgbClr val="1E1E4C"/>
+            <a:srgbClr val="F7F8F9"/>
           </a:solidFill>
-          <a:ln>
-            <a:noFill/>
+          <a:ln w="9525">
+            <a:solidFill>
+              <a:srgbClr val="D0D5DD"/>
+            </a:solidFill>
           </a:ln>
           <a:effectLst/>
         </p:spPr>
@@ -21498,7 +21574,7 @@
             <a:r>
               <a:rPr sz="1150">
                 <a:solidFill>
-                  <a:srgbClr val="C9D3F5"/>
+                  <a:srgbClr val="1F2429"/>
                 </a:solidFill>
                 <a:latin typeface="Courier New"/>
               </a:rPr>
@@ -21509,7 +21585,7 @@
             <a:r>
               <a:rPr sz="1150">
                 <a:solidFill>
-                  <a:srgbClr val="C9D3F5"/>
+                  <a:srgbClr val="1F2429"/>
                 </a:solidFill>
                 <a:latin typeface="Courier New"/>
               </a:rPr>
@@ -23443,9 +23519,13 @@
             </a:avLst>
           </a:prstGeom>
           <a:solidFill>
-            <a:srgbClr val="1E1E4C"/>
+            <a:srgbClr val="F7F8F9"/>
           </a:solidFill>
-          <a:ln/>
+          <a:ln w="9525">
+            <a:solidFill>
+              <a:srgbClr val="D0D5DD"/>
+            </a:solidFill>
+          </a:ln>
         </p:spPr>
         <p:txBody>
           <a:bodyPr/>
@@ -23485,7 +23565,7 @@
             <a:r>
               <a:rPr lang="en-US" sz="1250" dirty="0">
                 <a:solidFill>
-                  <a:srgbClr val="C9D3F5"/>
+                  <a:srgbClr val="1F2429"/>
                 </a:solidFill>
                 <a:latin typeface="Courier New" pitchFamily="34" charset="0"/>
                 <a:ea typeface="Courier New" pitchFamily="34" charset="-122"/>
@@ -23514,7 +23594,7 @@
             <a:r>
               <a:rPr lang="en-US" sz="1250" dirty="0">
                 <a:solidFill>
-                  <a:srgbClr val="C9D3F5"/>
+                  <a:srgbClr val="1F2429"/>
                 </a:solidFill>
                 <a:latin typeface="Courier New" pitchFamily="34" charset="0"/>
                 <a:ea typeface="Courier New" pitchFamily="34" charset="-122"/>
@@ -23534,7 +23614,7 @@
             <a:r>
               <a:rPr lang="en-US" sz="1250" dirty="0">
                 <a:solidFill>
-                  <a:srgbClr val="C9D3F5"/>
+                  <a:srgbClr val="1F2429"/>
                 </a:solidFill>
                 <a:latin typeface="Courier New" pitchFamily="34" charset="0"/>
                 <a:ea typeface="Courier New" pitchFamily="34" charset="-122"/>
@@ -23554,7 +23634,7 @@
             <a:r>
               <a:rPr lang="en-US" sz="1250" dirty="0">
                 <a:solidFill>
-                  <a:srgbClr val="C9D3F5"/>
+                  <a:srgbClr val="1F2429"/>
                 </a:solidFill>
                 <a:latin typeface="Courier New" pitchFamily="34" charset="0"/>
                 <a:ea typeface="Courier New" pitchFamily="34" charset="-122"/>
@@ -23574,7 +23654,7 @@
             <a:r>
               <a:rPr lang="en-US" sz="1250" dirty="0">
                 <a:solidFill>
-                  <a:srgbClr val="C9D3F5"/>
+                  <a:srgbClr val="1F2429"/>
                 </a:solidFill>
                 <a:latin typeface="Courier New" pitchFamily="34" charset="0"/>
                 <a:ea typeface="Courier New" pitchFamily="34" charset="-122"/>
@@ -23594,7 +23674,7 @@
             <a:r>
               <a:rPr lang="en-US" sz="1250" dirty="0">
                 <a:solidFill>
-                  <a:srgbClr val="C9D3F5"/>
+                  <a:srgbClr val="1F2429"/>
                 </a:solidFill>
                 <a:latin typeface="Courier New" pitchFamily="34" charset="0"/>
                 <a:ea typeface="Courier New" pitchFamily="34" charset="-122"/>
@@ -23623,7 +23703,7 @@
             <a:r>
               <a:rPr lang="en-US" sz="1250" dirty="0">
                 <a:solidFill>
-                  <a:srgbClr val="C9D3F5"/>
+                  <a:srgbClr val="1F2429"/>
                 </a:solidFill>
                 <a:latin typeface="Courier New" pitchFamily="34" charset="0"/>
                 <a:ea typeface="Courier New" pitchFamily="34" charset="-122"/>
@@ -23643,7 +23723,7 @@
             <a:r>
               <a:rPr lang="en-US" sz="1250" dirty="0">
                 <a:solidFill>
-                  <a:srgbClr val="C9D3F5"/>
+                  <a:srgbClr val="1F2429"/>
                 </a:solidFill>
                 <a:latin typeface="Courier New" pitchFamily="34" charset="0"/>
                 <a:ea typeface="Courier New" pitchFamily="34" charset="-122"/>
@@ -23891,9 +23971,13 @@
             </a:avLst>
           </a:prstGeom>
           <a:solidFill>
-            <a:srgbClr val="1E1E4C"/>
+            <a:srgbClr val="F7F8F9"/>
           </a:solidFill>
-          <a:ln/>
+          <a:ln w="9525">
+            <a:solidFill>
+              <a:srgbClr val="D0D5DD"/>
+            </a:solidFill>
+          </a:ln>
         </p:spPr>
         <p:txBody>
           <a:bodyPr/>
@@ -23933,7 +24017,7 @@
             <a:r>
               <a:rPr lang="en-US" sz="1400" dirty="0">
                 <a:solidFill>
-                  <a:srgbClr val="C9D3F5"/>
+                  <a:srgbClr val="1F2429"/>
                 </a:solidFill>
                 <a:latin typeface="Courier New" pitchFamily="34" charset="0"/>
                 <a:ea typeface="Courier New" pitchFamily="34" charset="-122"/>
@@ -23953,7 +24037,7 @@
             <a:r>
               <a:rPr lang="en-US" sz="1400" dirty="0">
                 <a:solidFill>
-                  <a:srgbClr val="C9D3F5"/>
+                  <a:srgbClr val="1F2429"/>
                 </a:solidFill>
                 <a:latin typeface="Courier New" pitchFamily="34" charset="0"/>
                 <a:ea typeface="Courier New" pitchFamily="34" charset="-122"/>
@@ -23982,7 +24066,7 @@
             <a:r>
               <a:rPr lang="en-US" sz="1400" dirty="0">
                 <a:solidFill>
-                  <a:srgbClr val="C9D3F5"/>
+                  <a:srgbClr val="1F2429"/>
                 </a:solidFill>
                 <a:latin typeface="Courier New" pitchFamily="34" charset="0"/>
                 <a:ea typeface="Courier New" pitchFamily="34" charset="-122"/>
@@ -24002,7 +24086,7 @@
             <a:r>
               <a:rPr lang="en-US" sz="1400" dirty="0">
                 <a:solidFill>
-                  <a:srgbClr val="C9D3F5"/>
+                  <a:srgbClr val="1F2429"/>
                 </a:solidFill>
                 <a:latin typeface="Courier New" pitchFamily="34" charset="0"/>
                 <a:ea typeface="Courier New" pitchFamily="34" charset="-122"/>
@@ -24022,7 +24106,7 @@
             <a:r>
               <a:rPr lang="en-US" sz="1400" dirty="0">
                 <a:solidFill>
-                  <a:srgbClr val="C9D3F5"/>
+                  <a:srgbClr val="1F2429"/>
                 </a:solidFill>
                 <a:latin typeface="Courier New" pitchFamily="34" charset="0"/>
                 <a:ea typeface="Courier New" pitchFamily="34" charset="-122"/>
@@ -25502,9 +25586,13 @@
             </a:avLst>
           </a:prstGeom>
           <a:solidFill>
-            <a:srgbClr val="1E1E4C"/>
+            <a:srgbClr val="F7F8F9"/>
           </a:solidFill>
-          <a:ln/>
+          <a:ln w="9525">
+            <a:solidFill>
+              <a:srgbClr val="D0D5DD"/>
+            </a:solidFill>
+          </a:ln>
         </p:spPr>
         <p:txBody>
           <a:bodyPr/>
@@ -25544,7 +25632,7 @@
             <a:r>
               <a:rPr lang="en-US" sz="1400" dirty="0">
                 <a:solidFill>
-                  <a:srgbClr val="C9D3F5"/>
+                  <a:srgbClr val="1F2429"/>
                 </a:solidFill>
                 <a:latin typeface="Courier New" pitchFamily="34" charset="0"/>
                 <a:ea typeface="Courier New" pitchFamily="34" charset="-122"/>
@@ -25564,7 +25652,7 @@
             <a:r>
               <a:rPr lang="en-US" sz="1400" dirty="0">
                 <a:solidFill>
-                  <a:srgbClr val="C9D3F5"/>
+                  <a:srgbClr val="1F2429"/>
                 </a:solidFill>
                 <a:latin typeface="Courier New" pitchFamily="34" charset="0"/>
                 <a:ea typeface="Courier New" pitchFamily="34" charset="-122"/>
@@ -25584,7 +25672,7 @@
             <a:r>
               <a:rPr lang="en-US" sz="1400" dirty="0">
                 <a:solidFill>
-                  <a:srgbClr val="C9D3F5"/>
+                  <a:srgbClr val="1F2429"/>
                 </a:solidFill>
                 <a:latin typeface="Courier New" pitchFamily="34" charset="0"/>
                 <a:ea typeface="Courier New" pitchFamily="34" charset="-122"/>
@@ -25604,7 +25692,7 @@
             <a:r>
               <a:rPr lang="en-US" sz="1400" dirty="0">
                 <a:solidFill>
-                  <a:srgbClr val="C9D3F5"/>
+                  <a:srgbClr val="1F2429"/>
                 </a:solidFill>
                 <a:latin typeface="Courier New" pitchFamily="34" charset="0"/>
                 <a:ea typeface="Courier New" pitchFamily="34" charset="-122"/>
@@ -25633,7 +25721,7 @@
             <a:r>
               <a:rPr lang="en-US" sz="1400" dirty="0">
                 <a:solidFill>
-                  <a:srgbClr val="C9D3F5"/>
+                  <a:srgbClr val="1F2429"/>
                 </a:solidFill>
                 <a:latin typeface="Courier New" pitchFamily="34" charset="0"/>
                 <a:ea typeface="Courier New" pitchFamily="34" charset="-122"/>
@@ -25662,7 +25750,7 @@
             <a:r>
               <a:rPr lang="en-US" sz="1400" dirty="0">
                 <a:solidFill>
-                  <a:srgbClr val="C9D3F5"/>
+                  <a:srgbClr val="1F2429"/>
                 </a:solidFill>
                 <a:latin typeface="Courier New" pitchFamily="34" charset="0"/>
                 <a:ea typeface="Courier New" pitchFamily="34" charset="-122"/>
@@ -25876,7 +25964,7 @@
         <p:spPr>
           <a:xfrm>
             <a:off x="640080" y="1965960"/>
-            <a:ext cx="10911535" cy="1554480"/>
+            <a:ext cx="10911535" cy="3657600"/>
           </a:xfrm>
           <a:prstGeom prst="roundRect">
             <a:avLst>
@@ -25910,7 +25998,7 @@
         <p:spPr>
           <a:xfrm>
             <a:off x="868680" y="2103120"/>
-            <a:ext cx="10454335" cy="274320"/>
+            <a:ext cx="10454335" cy="400000"/>
           </a:xfrm>
           <a:prstGeom prst="rect">
             <a:avLst/>
@@ -25926,7 +26014,7 @@
               <a:buNone/>
             </a:pPr>
             <a:r>
-              <a:rPr lang="en-US" sz="1000" b="1" kern="0" spc="200" dirty="0">
+              <a:rPr lang="en-US" sz="1800" b="1" kern="0" spc="200" dirty="0">
                 <a:solidFill>
                   <a:srgbClr val="8A3A12"/>
                 </a:solidFill>
@@ -25936,7 +26024,7 @@
               </a:rPr>
               <a:t>WARNING</a:t>
             </a:r>
-            <a:endParaRPr lang="en-US" sz="1000" dirty="0"/>
+            <a:endParaRPr lang="en-US" sz="1800" dirty="0"/>
           </a:p>
         </p:txBody>
       </p:sp>
@@ -25948,8 +26036,8 @@
         </p:nvSpPr>
         <p:spPr>
           <a:xfrm>
-            <a:off x="868680" y="2404872"/>
-            <a:ext cx="10454335" cy="960120"/>
+            <a:off x="868680" y="2795960"/>
+            <a:ext cx="10454335" cy="2500000"/>
           </a:xfrm>
           <a:prstGeom prst="rect">
             <a:avLst/>
@@ -25958,14 +26046,14 @@
           <a:ln/>
         </p:spPr>
         <p:txBody>
-          <a:bodyPr wrap="square" lIns="0" tIns="0" rIns="0" bIns="0" rtlCol="0" anchor="t"/>
+          <a:bodyPr wrap="square" lIns="0" tIns="0" rIns="0" bIns="0" rtlCol="0" anchor="ctr"/>
           <a:lstStyle/>
           <a:p>
             <a:pPr marL="0" indent="0">
               <a:buNone/>
             </a:pPr>
             <a:r>
-              <a:rPr lang="en-US" sz="1250" dirty="0">
+              <a:rPr lang="en-US" sz="2800" dirty="0">
                 <a:solidFill>
                   <a:srgbClr val="26262F"/>
                 </a:solidFill>
@@ -25975,7 +26063,7 @@
               </a:rPr>
               <a:t>Without the viewport meta tag, none of your media queries will work correctly on a real phone — the browser will still pretend it has a much wider screen.</a:t>
             </a:r>
-            <a:endParaRPr lang="en-US" sz="1250" dirty="0"/>
+            <a:endParaRPr lang="en-US" sz="2800" dirty="0"/>
           </a:p>
         </p:txBody>
       </p:sp>
@@ -28417,9 +28505,13 @@
             </a:avLst>
           </a:prstGeom>
           <a:solidFill>
-            <a:srgbClr val="1E1E4C"/>
+            <a:srgbClr val="F7F8F9"/>
           </a:solidFill>
-          <a:ln/>
+          <a:ln w="9525">
+            <a:solidFill>
+              <a:srgbClr val="D0D5DD"/>
+            </a:solidFill>
+          </a:ln>
         </p:spPr>
         <p:txBody>
           <a:bodyPr/>
@@ -28459,7 +28551,7 @@
             <a:r>
               <a:rPr lang="en-US" sz="1400" dirty="0">
                 <a:solidFill>
-                  <a:srgbClr val="C9D3F5"/>
+                  <a:srgbClr val="1F2429"/>
                 </a:solidFill>
                 <a:latin typeface="Courier New" pitchFamily="34" charset="0"/>
                 <a:ea typeface="Courier New" pitchFamily="34" charset="-122"/>
@@ -28479,7 +28571,7 @@
             <a:r>
               <a:rPr lang="en-US" sz="1400" dirty="0">
                 <a:solidFill>
-                  <a:srgbClr val="C9D3F5"/>
+                  <a:srgbClr val="1F2429"/>
                 </a:solidFill>
                 <a:latin typeface="Courier New" pitchFamily="34" charset="0"/>
                 <a:ea typeface="Courier New" pitchFamily="34" charset="-122"/>
@@ -28499,7 +28591,7 @@
             <a:r>
               <a:rPr lang="en-US" sz="1400" dirty="0">
                 <a:solidFill>
-                  <a:srgbClr val="C9D3F5"/>
+                  <a:srgbClr val="1F2429"/>
                 </a:solidFill>
                 <a:latin typeface="Courier New" pitchFamily="34" charset="0"/>
                 <a:ea typeface="Courier New" pitchFamily="34" charset="-122"/>
@@ -28519,7 +28611,7 @@
             <a:r>
               <a:rPr lang="en-US" sz="1400" dirty="0">
                 <a:solidFill>
-                  <a:srgbClr val="C9D3F5"/>
+                  <a:srgbClr val="1F2429"/>
                 </a:solidFill>
                 <a:latin typeface="Courier New" pitchFamily="34" charset="0"/>
                 <a:ea typeface="Courier New" pitchFamily="34" charset="-122"/>
@@ -28539,7 +28631,7 @@
             <a:r>
               <a:rPr lang="en-US" sz="1400" dirty="0">
                 <a:solidFill>
-                  <a:srgbClr val="C9D3F5"/>
+                  <a:srgbClr val="1F2429"/>
                 </a:solidFill>
                 <a:latin typeface="Courier New" pitchFamily="34" charset="0"/>
                 <a:ea typeface="Courier New" pitchFamily="34" charset="-122"/>
@@ -29084,9 +29176,13 @@
             </a:avLst>
           </a:prstGeom>
           <a:solidFill>
-            <a:srgbClr val="1E1E4C"/>
+            <a:srgbClr val="F7F8F9"/>
           </a:solidFill>
-          <a:ln/>
+          <a:ln w="9525">
+            <a:solidFill>
+              <a:srgbClr val="D0D5DD"/>
+            </a:solidFill>
+          </a:ln>
         </p:spPr>
         <p:txBody>
           <a:bodyPr/>
@@ -29126,7 +29222,7 @@
             <a:r>
               <a:rPr lang="en-US" sz="1400" dirty="0">
                 <a:solidFill>
-                  <a:srgbClr val="C9D3F5"/>
+                  <a:srgbClr val="1F2429"/>
                 </a:solidFill>
                 <a:latin typeface="Courier New" pitchFamily="34" charset="0"/>
                 <a:ea typeface="Courier New" pitchFamily="34" charset="-122"/>
@@ -29155,7 +29251,7 @@
             <a:r>
               <a:rPr lang="en-US" sz="1400" dirty="0">
                 <a:solidFill>
-                  <a:srgbClr val="C9D3F5"/>
+                  <a:srgbClr val="1F2429"/>
                 </a:solidFill>
                 <a:latin typeface="Courier New" pitchFamily="34" charset="0"/>
                 <a:ea typeface="Courier New" pitchFamily="34" charset="-122"/>
@@ -29175,7 +29271,7 @@
             <a:r>
               <a:rPr lang="en-US" sz="1400" dirty="0">
                 <a:solidFill>
-                  <a:srgbClr val="C9D3F5"/>
+                  <a:srgbClr val="1F2429"/>
                 </a:solidFill>
                 <a:latin typeface="Courier New" pitchFamily="34" charset="0"/>
                 <a:ea typeface="Courier New" pitchFamily="34" charset="-122"/>
@@ -29195,7 +29291,7 @@
             <a:r>
               <a:rPr lang="en-US" sz="1400" dirty="0">
                 <a:solidFill>
-                  <a:srgbClr val="C9D3F5"/>
+                  <a:srgbClr val="1F2429"/>
                 </a:solidFill>
                 <a:latin typeface="Courier New" pitchFamily="34" charset="0"/>
                 <a:ea typeface="Courier New" pitchFamily="34" charset="-122"/>
